--- a/PPT/入职以来AI工作复盘/入职以来AI工作复盘.pptx
+++ b/PPT/入职以来AI工作复盘/入职以来AI工作复盘.pptx
@@ -5,7 +5,7 @@
     <p:sldMasterId id="2147483648" r:id="rId0"/>
   </p:sldMasterIdLst>
   <p:notesMasterIdLst>
-    <p:notesMasterId r:id="rId9"/>
+    <p:notesMasterId r:id="rId14"/>
   </p:notesMasterIdLst>
   <p:sldIdLst>
     <p:sldId id="256" r:id="rId1"/>
@@ -16,6 +16,11 @@
     <p:sldId id="261" r:id="rId6"/>
     <p:sldId id="262" r:id="rId7"/>
     <p:sldId id="263" r:id="rId8"/>
+    <p:sldId id="264" r:id="rId9"/>
+    <p:sldId id="265" r:id="rId10"/>
+    <p:sldId id="266" r:id="rId11"/>
+    <p:sldId id="267" r:id="rId12"/>
+    <p:sldId id="268" r:id="rId13"/>
   </p:sldIdLst>
   <p:sldSz cx="12192000" cy="6858000"/>
   <p:notesSz cx="6858000" cy="12192000"/>
@@ -1005,12 +1010,12 @@
 </p:sld>
 </file>
 
-<file path=ppt/slides/slide2.xml><?xml version="1.0" encoding="utf-8"?>
-<p:sld xmlns:p="http://schemas.openxmlformats.org/presentationml/2006/main" xmlns:a="http://schemas.openxmlformats.org/drawingml/2006/main">
+<file path=ppt/slides/slide10.xml><?xml version="1.0" encoding="utf-8"?>
+<p:sld xmlns:p="http://schemas.openxmlformats.org/presentationml/2006/main" xmlns:a="http://schemas.openxmlformats.org/drawingml/2006/main" xmlns:a16="http://schemas.microsoft.com/office/drawing/2014/main" xmlns:mc="http://schemas.openxmlformats.org/markup-compatibility/2006" mc:Ignorable="a16">
   <p:cSld>
     <p:spTree>
       <p:nvGrpSpPr>
-        <p:cNvPr id="12" name="" descr="&lt;Slide style={{ width:'1280px', height:'720px', position:'relative', background:'#FFFFFF', fontFamily:'微软雅黑' }}&gt;&#10;  &lt;Box style={{ position:'absolute', left:56, top:80, right:56, flexDirection:'row', gap:48, height:520, alignItems:'center' }}&gt;&#10;    &lt;Box style={{ width:300, justifyContent:'center' }}&gt;&#10;      &lt;Text style={{ fontSize:54, fontWeight:'bold', color:'#2F5597' }}&gt;目录&lt;/Text&gt;&#10;      &lt;Text style={{ fontSize:24, color:'#2F5597', marginTop:8, letterSpacing:4 }}&gt;CONTENTS&lt;/Text&gt;&#10;    &lt;/Box&gt;&#10;    &lt;Box style={{ width:2, height:300, background:'#4472C4' }} /&gt;&#10;    &lt;Box style={{ flex:1, flexDirection:'column', gap:20, justifyContent:'center' }}&gt;&#10;      {['一、工作概览与量化总览','二、内部工作：自研应用交付','三、内部工作：Skill 抽象与复用','四、内部工作：培训与推广','五、外部工作：宏昊AI助手平台','六、下阶段计划与需支持事项'].map((t, i) =&gt; (&#10;        &lt;Text key={i} style={{ fontSize:24, fontWeight:'bold', color:'#1A1A1A' }}&gt;{t}&lt;/Text&gt;&#10;      ))}&#10;    &lt;/Box&gt;&#10;  &lt;/Box&gt;&#10;  &lt;Box style={{ position:'absolute', left:56, top:668, right:56, flexDirection:'row', justifyContent:'space-between' }}&gt;&#10;    &lt;Text style={{ fontSize:14, color:'#888' }}&gt;入职以来 AI 工作复盘&lt;/Text&gt;&#10;    &lt;Text style={{ fontSize:14, color:'#888' }}&gt;02 / 13&lt;/Text&gt;&#10;  &lt;/Box&gt;&#10;&lt;/Slide&gt;"/>
+        <p:cNvPr id="12" name="" descr="&lt;Slide style={{ width:'1280px', height:'720px', position:'relative', background:'#FFFFFF', fontFamily:'微软雅黑' }}&gt;&#10;  &lt;Box style={{ position:'absolute', left:56, top:36, flexDirection:'row', alignItems:'center', gap:12 }}&gt;&#10;    &lt;Box style={{ width:8, height:34, background:'#4472C4' }} /&gt;&#10;    &lt;Text style={{ fontSize:30, fontWeight:'bold', color:'#052B7C' }}&gt;五、宏昊AI助手 · 验收运营&lt;/Text&gt;&#10;  &lt;/Box&gt;&#10;&#10;  &lt;Box style={{ position:'absolute', left:56, top:130, right:56, flexDirection:'row', gap:22 }}&gt;&#10;    {[['37','平台验收项'],['19','问题反馈闭环'],['93.3%','6 月单月通过率']].map((c, i) =&gt; (&#10;      &lt;Box key={i} style={{ flex:1, background:'#F4F7FC', borderRadius:10, padding:'22px 18px', alignItems:'center' }}&gt;&#10;        &lt;Text style={{ fontSize:56, fontWeight:'bold', color:'#4472C4' }}&gt;{c[0]}&lt;/Text&gt;&#10;        &lt;Text style={{ fontSize:18, color:'#1A1A1A', marginTop:6 }}&gt;{c[1]}&lt;/Text&gt;&#10;      &lt;/Box&gt;&#10;    ))}&#10;  &lt;/Box&gt;&#10;&#10;  &lt;Box style={{ position:'absolute', left:56, top:300, right:56, background:'#052B7C', borderRadius:10, padding:'16px 22px' }}&gt;&#10;    &lt;Text style={{ fontSize:18, color:'#FFFFFF', lineHeight:1.5 }}&gt;入职以来 &lt;span style={{ fontWeight:'bold' }}&gt;37 项验收 + 19 项问题反馈闭环&lt;/span&gt;，6 月单月通过率 93.3% → 把「供应商交付」变「可度量、可追溯、有退回机制」的质量门槛。&lt;/Text&gt;&#10;  &lt;/Box&gt;&#10;&#10;  &lt;Box style={{ position:'absolute', left:56, top:400, right:56 }}&gt;&#10;    &lt;Table&#10;      style={{ width:'100%', height:230 }}&#10;      defaultTextStyle={{ fontSize:15, textAlign:'center', color:'#1A1A1A' }}&#10;      defaultCellStyle={{ border:{ left:{width:1,color:'#CCCCCC'}, right:{width:1,color:'#CCCCCC'}, top:{width:1,color:'#CCCCCC'}, bottom:{width:1,color:'#CCCCCC'} } }}&#10;      cells={[&#10;        [ {text:'周期', textStyle:{bold:true,color:'#1A1A1A'}, cellStyle:{background:{color:'#DAE3F3'}}},&#10;          {text:'验收产出', textStyle:{bold:true,color:'#1A1A1A'}, cellStyle:{background:{color:'#DAE3F3'}}},&#10;          {text:'问题反馈', textStyle:{bold:true,color:'#1A1A1A'}, cellStyle:{background:{color:'#DAE3F3'}}},&#10;          {text:'通过情况', textStyle:{bold:true,color:'#1A1A1A'}, cellStyle:{background:{color:'#DAE3F3'}}} ],&#10;        [ '4 月', '3 测试 + 2 验收（5 项）', '4', '—' ],&#10;        [ '5 月', '9 项测试验收', '3', '—' ],&#10;        [ '6 月', '15 用例（5 批次）', '8', {text:'14/15 通过（93.3%）', textStyle:{bold:true,color:'#4472C4'}} ],&#10;        [ '7 月（2607）', '5 轮验收（8 项）', '4', '—' ],&#10;      ]}&#10;    /&gt;&#10;  &lt;/Box&gt;&#10;&#10;  &lt;Box style={{ position:'absolute', left:56, top:668, right:56, flexDirection:'row', justifyContent:'space-between' }}&gt;&#10;    &lt;Text style={{ fontSize:14, color:'#888' }}&gt;入职以来 AI 工作复盘&lt;/Text&gt;&#10;    &lt;Text style={{ fontSize:14, color:'#888' }}&gt;10 / 13&lt;/Text&gt;&#10;  &lt;/Box&gt;&#10;&lt;/Slide&gt;"/>
         <p:cNvGrpSpPr/>
         <p:nvPr/>
       </p:nvGrpSpPr>
@@ -1048,14 +1053,38 @@
       </p:sp>
       <p:sp>
         <p:nvSpPr>
-          <p:cNvPr id="14" name="" descr="{&quot;isTemplate&quot;:true,&quot;type&quot;:&quot;text&quot;}"/>
+          <p:cNvPr id="14" name=""/>
+          <p:cNvSpPr/>
+          <p:nvPr/>
+        </p:nvSpPr>
+        <p:spPr>
+          <a:xfrm rot="0" flipH="0" flipV="0">
+            <a:off x="533400" y="352425"/>
+            <a:ext cx="76200" cy="323850"/>
+          </a:xfrm>
+          <a:prstGeom prst="rect">
+            <a:avLst/>
+          </a:prstGeom>
+          <a:solidFill>
+            <a:srgbClr val="4472C4"/>
+          </a:solidFill>
+          <a:ln/>
+        </p:spPr>
+        <p:txBody>
+          <a:bodyPr/>
+          <a:p/>
+        </p:txBody>
+      </p:sp>
+      <p:sp>
+        <p:nvSpPr>
+          <p:cNvPr id="15" name="" descr="{&quot;isTemplate&quot;:true,&quot;type&quot;:&quot;text&quot;}"/>
           <p:cNvSpPr txBox="1"/>
           <p:nvPr/>
         </p:nvSpPr>
         <p:spPr>
           <a:xfrm rot="0" flipH="0" flipV="0">
-            <a:off x="533400" y="2752725"/>
-            <a:ext cx="2857500" cy="619125"/>
+            <a:off x="723900" y="342900"/>
+            <a:ext cx="3467100" cy="342900"/>
           </a:xfrm>
           <a:prstGeom prst="rect"/>
         </p:spPr>
@@ -1068,14 +1097,54 @@
               </a:lnSpc>
             </a:pPr>
             <a:r>
-              <a:rPr lang="zh-CN" sz="4050" b="1">
-                <a:solidFill>
-                  <a:srgbClr val="2F5597"/>
-                </a:solidFill>
-                <a:latin typeface="微软雅黑"/>
-                <a:ea typeface="微软雅黑"/>
-              </a:rPr>
-              <a:t>目录</a:t>
+              <a:rPr lang="zh-CN" sz="2250" b="1">
+                <a:solidFill>
+                  <a:srgbClr val="052B7C"/>
+                </a:solidFill>
+                <a:latin typeface="微软雅黑"/>
+                <a:ea typeface="微软雅黑"/>
+              </a:rPr>
+              <a:t>五、宏昊</a:t>
+            </a:r>
+            <a:r>
+              <a:rPr lang="en-US" sz="2250" b="1">
+                <a:solidFill>
+                  <a:srgbClr val="052B7C"/>
+                </a:solidFill>
+                <a:latin typeface="微软雅黑"/>
+                <a:ea typeface="微软雅黑"/>
+              </a:rPr>
+              <a:t>AI</a:t>
+            </a:r>
+            <a:r>
+              <a:rPr lang="zh-CN" sz="2250" b="1">
+                <a:solidFill>
+                  <a:srgbClr val="052B7C"/>
+                </a:solidFill>
+                <a:latin typeface="微软雅黑"/>
+                <a:ea typeface="微软雅黑"/>
+              </a:rPr>
+              <a:t>助手</a:t>
+            </a:r>
+            <a:r>
+              <a:rPr lang="en-US" sz="2250" b="1">
+                <a:solidFill>
+                  <a:srgbClr val="052B7C"/>
+                </a:solidFill>
+                <a:latin typeface="微软雅黑"/>
+                <a:ea typeface="微软雅黑"/>
+              </a:rPr>
+              <a:t> · </a:t>
+            </a:r>
+            <a:r>
+              <a:rPr lang="zh-CN" sz="2250" b="1">
+                <a:solidFill>
+                  <a:srgbClr val="052B7C"/>
+                </a:solidFill>
+                <a:latin typeface="微软雅黑"/>
+                <a:ea typeface="微软雅黑"/>
+              </a:rPr>
+              <a:t>验收运营</a:t>
             </a:r>
             <a:endParaRPr/>
           </a:p>
@@ -1083,14 +1152,40 @@
       </p:sp>
       <p:sp>
         <p:nvSpPr>
-          <p:cNvPr id="15" name="" descr="{&quot;isTemplate&quot;:true,&quot;type&quot;:&quot;text&quot;}"/>
+          <p:cNvPr id="16" name=""/>
+          <p:cNvSpPr/>
+          <p:nvPr/>
+        </p:nvSpPr>
+        <p:spPr>
+          <a:xfrm rot="0" flipH="0" flipV="0">
+            <a:off x="533400" y="1238250"/>
+            <a:ext cx="3571875" cy="1333500"/>
+          </a:xfrm>
+          <a:prstGeom prst="roundRect">
+            <a:avLst>
+              <a:gd name="adj" fmla="val 7143"/>
+            </a:avLst>
+          </a:prstGeom>
+          <a:solidFill>
+            <a:srgbClr val="F4F7FC"/>
+          </a:solidFill>
+          <a:ln/>
+        </p:spPr>
+        <p:txBody>
+          <a:bodyPr/>
+          <a:p/>
+        </p:txBody>
+      </p:sp>
+      <p:sp>
+        <p:nvSpPr>
+          <p:cNvPr id="17" name="" descr="{&quot;isTemplate&quot;:true,&quot;type&quot;:&quot;text&quot;}"/>
           <p:cNvSpPr txBox="1"/>
           <p:nvPr/>
         </p:nvSpPr>
         <p:spPr>
           <a:xfrm rot="0" flipH="0" flipV="0">
-            <a:off x="533400" y="3448050"/>
-            <a:ext cx="2857500" cy="276225"/>
+            <a:off x="1981200" y="1447800"/>
+            <a:ext cx="685800" cy="647700"/>
           </a:xfrm>
           <a:prstGeom prst="rect"/>
         </p:spPr>
@@ -1103,14 +1198,14 @@
               </a:lnSpc>
             </a:pPr>
             <a:r>
-              <a:rPr lang="en-US" sz="1800" spc="300">
-                <a:solidFill>
-                  <a:srgbClr val="2F5597"/>
-                </a:solidFill>
-                <a:latin typeface="微软雅黑"/>
-                <a:ea typeface="微软雅黑"/>
-              </a:rPr>
-              <a:t>CONTENTS</a:t>
+              <a:rPr lang="en-US" sz="4200" b="1">
+                <a:solidFill>
+                  <a:srgbClr val="4472C4"/>
+                </a:solidFill>
+                <a:latin typeface="微软雅黑"/>
+                <a:ea typeface="微软雅黑"/>
+              </a:rPr>
+              <a:t>37</a:t>
             </a:r>
             <a:endParaRPr/>
           </a:p>
@@ -1118,38 +1213,14 @@
       </p:sp>
       <p:sp>
         <p:nvSpPr>
-          <p:cNvPr id="16" name=""/>
-          <p:cNvSpPr/>
-          <p:nvPr/>
-        </p:nvSpPr>
-        <p:spPr>
-          <a:xfrm rot="0" flipH="0" flipV="0">
-            <a:off x="3848100" y="1809750"/>
-            <a:ext cx="19050" cy="2857500"/>
-          </a:xfrm>
-          <a:prstGeom prst="rect">
-            <a:avLst/>
-          </a:prstGeom>
-          <a:solidFill>
-            <a:srgbClr val="4472C4"/>
-          </a:solidFill>
-          <a:ln/>
-        </p:spPr>
-        <p:txBody>
-          <a:bodyPr/>
-          <a:p/>
-        </p:txBody>
-      </p:sp>
-      <p:sp>
-        <p:nvSpPr>
-          <p:cNvPr id="17" name="" descr="{&quot;isTemplate&quot;:true,&quot;type&quot;:&quot;text&quot;}"/>
+          <p:cNvPr id="18" name="" descr="{&quot;isTemplate&quot;:true,&quot;type&quot;:&quot;text&quot;}"/>
           <p:cNvSpPr txBox="1"/>
           <p:nvPr/>
         </p:nvSpPr>
         <p:spPr>
           <a:xfrm rot="0" flipH="0" flipV="0">
-            <a:off x="4324350" y="1933575"/>
-            <a:ext cx="7334250" cy="276225"/>
+            <a:off x="1895475" y="2152650"/>
+            <a:ext cx="857250" cy="209550"/>
           </a:xfrm>
           <a:prstGeom prst="rect"/>
         </p:spPr>
@@ -1162,14 +1233,14 @@
               </a:lnSpc>
             </a:pPr>
             <a:r>
-              <a:rPr lang="zh-CN" sz="1800" b="1">
-                <a:solidFill>
-                  <a:srgbClr val="1A1A1A"/>
-                </a:solidFill>
-                <a:latin typeface="微软雅黑"/>
-                <a:ea typeface="微软雅黑"/>
-              </a:rPr>
-              <a:t>一、工作概览与量化总览</a:t>
+              <a:rPr lang="zh-CN" sz="1350">
+                <a:solidFill>
+                  <a:srgbClr val="1A1A1A"/>
+                </a:solidFill>
+                <a:latin typeface="微软雅黑"/>
+                <a:ea typeface="微软雅黑"/>
+              </a:rPr>
+              <a:t>平台验收项</a:t>
             </a:r>
             <a:endParaRPr/>
           </a:p>
@@ -1177,14 +1248,40 @@
       </p:sp>
       <p:sp>
         <p:nvSpPr>
-          <p:cNvPr id="18" name="" descr="{&quot;isTemplate&quot;:true,&quot;type&quot;:&quot;text&quot;}"/>
+          <p:cNvPr id="19" name=""/>
+          <p:cNvSpPr/>
+          <p:nvPr/>
+        </p:nvSpPr>
+        <p:spPr>
+          <a:xfrm rot="0" flipH="0" flipV="0">
+            <a:off x="4314825" y="1238250"/>
+            <a:ext cx="3562350" cy="1333500"/>
+          </a:xfrm>
+          <a:prstGeom prst="roundRect">
+            <a:avLst>
+              <a:gd name="adj" fmla="val 7143"/>
+            </a:avLst>
+          </a:prstGeom>
+          <a:solidFill>
+            <a:srgbClr val="F4F7FC"/>
+          </a:solidFill>
+          <a:ln/>
+        </p:spPr>
+        <p:txBody>
+          <a:bodyPr/>
+          <a:p/>
+        </p:txBody>
+      </p:sp>
+      <p:sp>
+        <p:nvSpPr>
+          <p:cNvPr id="20" name="" descr="{&quot;isTemplate&quot;:true,&quot;type&quot;:&quot;text&quot;}"/>
           <p:cNvSpPr txBox="1"/>
           <p:nvPr/>
         </p:nvSpPr>
         <p:spPr>
           <a:xfrm rot="0" flipH="0" flipV="0">
-            <a:off x="4324350" y="2400300"/>
-            <a:ext cx="7334250" cy="276225"/>
+            <a:off x="5753100" y="1447800"/>
+            <a:ext cx="685800" cy="647700"/>
           </a:xfrm>
           <a:prstGeom prst="rect"/>
         </p:spPr>
@@ -1197,14 +1294,14 @@
               </a:lnSpc>
             </a:pPr>
             <a:r>
-              <a:rPr lang="zh-CN" sz="1800" b="1">
-                <a:solidFill>
-                  <a:srgbClr val="1A1A1A"/>
-                </a:solidFill>
-                <a:latin typeface="微软雅黑"/>
-                <a:ea typeface="微软雅黑"/>
-              </a:rPr>
-              <a:t>二、内部工作：自研应用交付</a:t>
+              <a:rPr lang="en-US" sz="4200" b="1">
+                <a:solidFill>
+                  <a:srgbClr val="4472C4"/>
+                </a:solidFill>
+                <a:latin typeface="微软雅黑"/>
+                <a:ea typeface="微软雅黑"/>
+              </a:rPr>
+              <a:t>19</a:t>
             </a:r>
             <a:endParaRPr/>
           </a:p>
@@ -1212,14 +1309,14 @@
       </p:sp>
       <p:sp>
         <p:nvSpPr>
-          <p:cNvPr id="19" name="" descr="{&quot;isTemplate&quot;:true,&quot;type&quot;:&quot;text&quot;}"/>
+          <p:cNvPr id="21" name="" descr="{&quot;isTemplate&quot;:true,&quot;type&quot;:&quot;text&quot;}"/>
           <p:cNvSpPr txBox="1"/>
           <p:nvPr/>
         </p:nvSpPr>
         <p:spPr>
           <a:xfrm rot="0" flipH="0" flipV="0">
-            <a:off x="4324350" y="2867025"/>
-            <a:ext cx="7334250" cy="276225"/>
+            <a:off x="5581650" y="2152650"/>
+            <a:ext cx="1028700" cy="209550"/>
           </a:xfrm>
           <a:prstGeom prst="rect"/>
         </p:spPr>
@@ -1232,34 +1329,14 @@
               </a:lnSpc>
             </a:pPr>
             <a:r>
-              <a:rPr lang="zh-CN" sz="1800" b="1">
-                <a:solidFill>
-                  <a:srgbClr val="1A1A1A"/>
-                </a:solidFill>
-                <a:latin typeface="微软雅黑"/>
-                <a:ea typeface="微软雅黑"/>
-              </a:rPr>
-              <a:t>三、内部工作：</a:t>
-            </a:r>
-            <a:r>
-              <a:rPr lang="en-US" sz="1800" b="1">
-                <a:solidFill>
-                  <a:srgbClr val="1A1A1A"/>
-                </a:solidFill>
-                <a:latin typeface="微软雅黑"/>
-                <a:ea typeface="微软雅黑"/>
-              </a:rPr>
-              <a:t>Skill </a:t>
-            </a:r>
-            <a:r>
-              <a:rPr lang="zh-CN" sz="1800" b="1">
-                <a:solidFill>
-                  <a:srgbClr val="1A1A1A"/>
-                </a:solidFill>
-                <a:latin typeface="微软雅黑"/>
-                <a:ea typeface="微软雅黑"/>
-              </a:rPr>
-              <a:t>抽象与复用</a:t>
+              <a:rPr lang="zh-CN" sz="1350">
+                <a:solidFill>
+                  <a:srgbClr val="1A1A1A"/>
+                </a:solidFill>
+                <a:latin typeface="微软雅黑"/>
+                <a:ea typeface="微软雅黑"/>
+              </a:rPr>
+              <a:t>问题反馈闭环</a:t>
             </a:r>
             <a:endParaRPr/>
           </a:p>
@@ -1267,14 +1344,40 @@
       </p:sp>
       <p:sp>
         <p:nvSpPr>
-          <p:cNvPr id="20" name="" descr="{&quot;isTemplate&quot;:true,&quot;type&quot;:&quot;text&quot;}"/>
+          <p:cNvPr id="22" name=""/>
+          <p:cNvSpPr/>
+          <p:nvPr/>
+        </p:nvSpPr>
+        <p:spPr>
+          <a:xfrm rot="0" flipH="0" flipV="0">
+            <a:off x="8086725" y="1238250"/>
+            <a:ext cx="3571875" cy="1333500"/>
+          </a:xfrm>
+          <a:prstGeom prst="roundRect">
+            <a:avLst>
+              <a:gd name="adj" fmla="val 7143"/>
+            </a:avLst>
+          </a:prstGeom>
+          <a:solidFill>
+            <a:srgbClr val="F4F7FC"/>
+          </a:solidFill>
+          <a:ln/>
+        </p:spPr>
+        <p:txBody>
+          <a:bodyPr/>
+          <a:p/>
+        </p:txBody>
+      </p:sp>
+      <p:sp>
+        <p:nvSpPr>
+          <p:cNvPr id="23" name="" descr="{&quot;isTemplate&quot;:true,&quot;type&quot;:&quot;text&quot;}"/>
           <p:cNvSpPr txBox="1"/>
           <p:nvPr/>
         </p:nvSpPr>
         <p:spPr>
           <a:xfrm rot="0" flipH="0" flipV="0">
-            <a:off x="4324350" y="3333750"/>
-            <a:ext cx="7334250" cy="276225"/>
+            <a:off x="8963025" y="1447800"/>
+            <a:ext cx="1828800" cy="647700"/>
           </a:xfrm>
           <a:prstGeom prst="rect"/>
         </p:spPr>
@@ -1287,14 +1390,14 @@
               </a:lnSpc>
             </a:pPr>
             <a:r>
-              <a:rPr lang="zh-CN" sz="1800" b="1">
-                <a:solidFill>
-                  <a:srgbClr val="1A1A1A"/>
-                </a:solidFill>
-                <a:latin typeface="微软雅黑"/>
-                <a:ea typeface="微软雅黑"/>
-              </a:rPr>
-              <a:t>四、内部工作：培训与推广</a:t>
+              <a:rPr lang="en-US" sz="4200" b="1">
+                <a:solidFill>
+                  <a:srgbClr val="4472C4"/>
+                </a:solidFill>
+                <a:latin typeface="微软雅黑"/>
+                <a:ea typeface="微软雅黑"/>
+              </a:rPr>
+              <a:t>93.3%</a:t>
             </a:r>
             <a:endParaRPr/>
           </a:p>
@@ -1302,14 +1405,14 @@
       </p:sp>
       <p:sp>
         <p:nvSpPr>
-          <p:cNvPr id="21" name="" descr="{&quot;isTemplate&quot;:true,&quot;type&quot;:&quot;text&quot;}"/>
+          <p:cNvPr id="24" name="" descr="{&quot;isTemplate&quot;:true,&quot;type&quot;:&quot;text&quot;}"/>
           <p:cNvSpPr txBox="1"/>
           <p:nvPr/>
         </p:nvSpPr>
         <p:spPr>
           <a:xfrm rot="0" flipH="0" flipV="0">
-            <a:off x="4324350" y="3800475"/>
-            <a:ext cx="7334250" cy="276225"/>
+            <a:off x="9286875" y="2152650"/>
+            <a:ext cx="1181100" cy="209550"/>
           </a:xfrm>
           <a:prstGeom prst="rect"/>
         </p:spPr>
@@ -1322,34 +1425,24 @@
               </a:lnSpc>
             </a:pPr>
             <a:r>
-              <a:rPr lang="zh-CN" sz="1800" b="1">
-                <a:solidFill>
-                  <a:srgbClr val="1A1A1A"/>
-                </a:solidFill>
-                <a:latin typeface="微软雅黑"/>
-                <a:ea typeface="微软雅黑"/>
-              </a:rPr>
-              <a:t>五、外部工作：宏昊</a:t>
-            </a:r>
-            <a:r>
-              <a:rPr lang="en-US" sz="1800" b="1">
-                <a:solidFill>
-                  <a:srgbClr val="1A1A1A"/>
-                </a:solidFill>
-                <a:latin typeface="微软雅黑"/>
-                <a:ea typeface="微软雅黑"/>
-              </a:rPr>
-              <a:t>AI</a:t>
-            </a:r>
-            <a:r>
-              <a:rPr lang="zh-CN" sz="1800" b="1">
-                <a:solidFill>
-                  <a:srgbClr val="1A1A1A"/>
-                </a:solidFill>
-                <a:latin typeface="微软雅黑"/>
-                <a:ea typeface="微软雅黑"/>
-              </a:rPr>
-              <a:t>助手平台</a:t>
+              <a:rPr lang="en-US" sz="1350">
+                <a:solidFill>
+                  <a:srgbClr val="1A1A1A"/>
+                </a:solidFill>
+                <a:latin typeface="微软雅黑"/>
+                <a:ea typeface="微软雅黑"/>
+              </a:rPr>
+              <a:t>6 </a:t>
+            </a:r>
+            <a:r>
+              <a:rPr lang="zh-CN" sz="1350">
+                <a:solidFill>
+                  <a:srgbClr val="1A1A1A"/>
+                </a:solidFill>
+                <a:latin typeface="微软雅黑"/>
+                <a:ea typeface="微软雅黑"/>
+              </a:rPr>
+              <a:t>月单月通过率</a:t>
             </a:r>
             <a:endParaRPr/>
           </a:p>
@@ -1357,14 +1450,1049 @@
       </p:sp>
       <p:sp>
         <p:nvSpPr>
-          <p:cNvPr id="22" name="" descr="{&quot;isTemplate&quot;:true,&quot;type&quot;:&quot;text&quot;}"/>
+          <p:cNvPr id="25" name=""/>
+          <p:cNvSpPr/>
+          <p:nvPr/>
+        </p:nvSpPr>
+        <p:spPr>
+          <a:xfrm rot="0" flipH="0" flipV="0">
+            <a:off x="533400" y="2857500"/>
+            <a:ext cx="11125200" cy="619125"/>
+          </a:xfrm>
+          <a:prstGeom prst="roundRect">
+            <a:avLst>
+              <a:gd name="adj" fmla="val 15385"/>
+            </a:avLst>
+          </a:prstGeom>
+          <a:solidFill>
+            <a:srgbClr val="052B7C"/>
+          </a:solidFill>
+          <a:ln/>
+        </p:spPr>
+        <p:txBody>
+          <a:bodyPr/>
+          <a:p/>
+        </p:txBody>
+      </p:sp>
+      <p:sp>
+        <p:nvSpPr>
+          <p:cNvPr id="26" name="" descr="{&quot;isTemplate&quot;:true,&quot;type&quot;:&quot;text&quot;}"/>
           <p:cNvSpPr txBox="1"/>
           <p:nvPr/>
         </p:nvSpPr>
         <p:spPr>
           <a:xfrm rot="0" flipH="0" flipV="0">
-            <a:off x="4324350" y="4267200"/>
-            <a:ext cx="7334250" cy="276225"/>
+            <a:off x="742950" y="3009900"/>
+            <a:ext cx="10706100" cy="314325"/>
+          </a:xfrm>
+          <a:prstGeom prst="rect"/>
+        </p:spPr>
+        <p:txBody>
+          <a:bodyPr wrap="none" lIns="0" tIns="0" rIns="0" bIns="0"/>
+          <a:p>
+            <a:pPr>
+              <a:lnSpc>
+                <a:spcPct val="150000"/>
+              </a:lnSpc>
+            </a:pPr>
+            <a:r>
+              <a:rPr lang="zh-CN" sz="1350">
+                <a:solidFill>
+                  <a:srgbClr val="FFFFFF"/>
+                </a:solidFill>
+                <a:latin typeface="微软雅黑"/>
+                <a:ea typeface="微软雅黑"/>
+              </a:rPr>
+              <a:t>入职以来</a:t>
+            </a:r>
+            <a:r>
+              <a:rPr lang="en-US" sz="1350">
+                <a:solidFill>
+                  <a:srgbClr val="FFFFFF"/>
+                </a:solidFill>
+                <a:latin typeface="微软雅黑"/>
+                <a:ea typeface="微软雅黑"/>
+              </a:rPr>
+              <a:t> </a:t>
+            </a:r>
+            <a:r>
+              <a:rPr lang="en-US" sz="1350" b="1">
+                <a:solidFill>
+                  <a:srgbClr val="FFFFFF"/>
+                </a:solidFill>
+                <a:latin typeface="微软雅黑"/>
+                <a:ea typeface="微软雅黑"/>
+              </a:rPr>
+              <a:t>37 </a:t>
+            </a:r>
+            <a:r>
+              <a:rPr lang="zh-CN" sz="1350" b="1">
+                <a:solidFill>
+                  <a:srgbClr val="FFFFFF"/>
+                </a:solidFill>
+                <a:latin typeface="微软雅黑"/>
+                <a:ea typeface="微软雅黑"/>
+              </a:rPr>
+              <a:t>项验收</a:t>
+            </a:r>
+            <a:r>
+              <a:rPr lang="en-US" sz="1350" b="1">
+                <a:solidFill>
+                  <a:srgbClr val="FFFFFF"/>
+                </a:solidFill>
+                <a:latin typeface="微软雅黑"/>
+                <a:ea typeface="微软雅黑"/>
+              </a:rPr>
+              <a:t> + 19 </a:t>
+            </a:r>
+            <a:r>
+              <a:rPr lang="zh-CN" sz="1350" b="1">
+                <a:solidFill>
+                  <a:srgbClr val="FFFFFF"/>
+                </a:solidFill>
+                <a:latin typeface="微软雅黑"/>
+                <a:ea typeface="微软雅黑"/>
+              </a:rPr>
+              <a:t>项问题反馈闭环</a:t>
+            </a:r>
+            <a:r>
+              <a:rPr lang="zh-CN" sz="1350">
+                <a:solidFill>
+                  <a:srgbClr val="FFFFFF"/>
+                </a:solidFill>
+                <a:latin typeface="微软雅黑"/>
+                <a:ea typeface="微软雅黑"/>
+              </a:rPr>
+              <a:t>，</a:t>
+            </a:r>
+            <a:r>
+              <a:rPr lang="en-US" sz="1350">
+                <a:solidFill>
+                  <a:srgbClr val="FFFFFF"/>
+                </a:solidFill>
+                <a:latin typeface="微软雅黑"/>
+                <a:ea typeface="微软雅黑"/>
+              </a:rPr>
+              <a:t>6 </a:t>
+            </a:r>
+            <a:r>
+              <a:rPr lang="zh-CN" sz="1350">
+                <a:solidFill>
+                  <a:srgbClr val="FFFFFF"/>
+                </a:solidFill>
+                <a:latin typeface="微软雅黑"/>
+                <a:ea typeface="微软雅黑"/>
+              </a:rPr>
+              <a:t>月单月通过率</a:t>
+            </a:r>
+            <a:r>
+              <a:rPr lang="en-US" sz="1350">
+                <a:solidFill>
+                  <a:srgbClr val="FFFFFF"/>
+                </a:solidFill>
+                <a:latin typeface="微软雅黑"/>
+                <a:ea typeface="微软雅黑"/>
+              </a:rPr>
+              <a:t> 93.3% → </a:t>
+            </a:r>
+            <a:r>
+              <a:rPr lang="zh-CN" sz="1350">
+                <a:solidFill>
+                  <a:srgbClr val="FFFFFF"/>
+                </a:solidFill>
+                <a:latin typeface="微软雅黑"/>
+                <a:ea typeface="微软雅黑"/>
+              </a:rPr>
+              <a:t>把「供应商交付」变「可度量、可追溯、有退回机制」的质量门槛。</a:t>
+            </a:r>
+            <a:endParaRPr/>
+          </a:p>
+        </p:txBody>
+      </p:sp>
+      <p:graphicFrame>
+        <p:nvGraphicFramePr>
+          <p:cNvPr id="27" name=""/>
+          <p:cNvGraphicFramePr/>
+          <p:nvPr/>
+        </p:nvGraphicFramePr>
+        <p:xfrm rot="0" flipH="0" flipV="0">
+          <a:off x="533400" y="3810000"/>
+          <a:ext cx="11125200" cy="2190750"/>
+        </p:xfrm>
+        <a:graphic>
+          <a:graphicData uri="http://schemas.openxmlformats.org/drawingml/2006/table">
+            <a:tbl>
+              <a:tblGrid>
+                <a:gridCol w="2249357">
+                  <a:extLst>
+                    <a:ext uri="{9D8B030D-6E8A-4147-A177-3AD203B41FA5}">
+                      <a16:colId val="1"/>
+                    </a:ext>
+                  </a:extLst>
+                </a:gridCol>
+                <a:gridCol w="3790905">
+                  <a:extLst>
+                    <a:ext uri="{9D8B030D-6E8A-4147-A177-3AD203B41FA5}">
+                      <a16:colId val="2"/>
+                    </a:ext>
+                  </a:extLst>
+                </a:gridCol>
+                <a:gridCol w="1511151">
+                  <a:extLst>
+                    <a:ext uri="{9D8B030D-6E8A-4147-A177-3AD203B41FA5}">
+                      <a16:colId val="3"/>
+                    </a:ext>
+                  </a:extLst>
+                </a:gridCol>
+                <a:gridCol w="3573786">
+                  <a:extLst>
+                    <a:ext uri="{9D8B030D-6E8A-4147-A177-3AD203B41FA5}">
+                      <a16:colId val="4"/>
+                    </a:ext>
+                  </a:extLst>
+                </a:gridCol>
+              </a:tblGrid>
+              <a:tr h="438150">
+                <a:tc>
+                  <a:txBody>
+                    <a:bodyPr wrap="square" lIns="0" tIns="0" rIns="0" bIns="0" anchor="ctr">
+                      <a:normAutofit/>
+                    </a:bodyPr>
+                    <a:p>
+                      <a:pPr marL="114300" marR="114300" algn="l">
+                        <a:lnSpc>
+                          <a:spcPct val="120000"/>
+                        </a:lnSpc>
+                      </a:pPr>
+                      <a:r>
+                        <a:rPr sz="1125" b="1">
+                          <a:solidFill>
+                            <a:srgbClr val="1A1A1A"/>
+                          </a:solidFill>
+                          <a:latin typeface="Microsoft YaHei"/>
+                          <a:ea typeface="Microsoft YaHei"/>
+                        </a:rPr>
+                        <a:t>周期</a:t>
+                      </a:r>
+                      <a:endParaRPr/>
+                    </a:p>
+                  </a:txBody>
+                  <a:tcPr marL="45720" marR="45720" marT="45720" marB="45720" anchor="ctr">
+                    <a:lnL>
+                      <a:noFill/>
+                    </a:lnL>
+                    <a:lnR>
+                      <a:noFill/>
+                    </a:lnR>
+                    <a:lnT>
+                      <a:noFill/>
+                    </a:lnT>
+                    <a:lnB>
+                      <a:noFill/>
+                    </a:lnB>
+                    <a:solidFill>
+                      <a:srgbClr val="DAE3F3"/>
+                    </a:solidFill>
+                  </a:tcPr>
+                </a:tc>
+                <a:tc>
+                  <a:txBody>
+                    <a:bodyPr wrap="square" lIns="0" tIns="0" rIns="0" bIns="0" anchor="ctr">
+                      <a:normAutofit/>
+                    </a:bodyPr>
+                    <a:p>
+                      <a:pPr marL="114300" marR="114300" algn="l">
+                        <a:lnSpc>
+                          <a:spcPct val="120000"/>
+                        </a:lnSpc>
+                      </a:pPr>
+                      <a:r>
+                        <a:rPr sz="1125" b="1">
+                          <a:solidFill>
+                            <a:srgbClr val="1A1A1A"/>
+                          </a:solidFill>
+                          <a:latin typeface="Microsoft YaHei"/>
+                          <a:ea typeface="Microsoft YaHei"/>
+                        </a:rPr>
+                        <a:t>验收产出</a:t>
+                      </a:r>
+                      <a:endParaRPr/>
+                    </a:p>
+                  </a:txBody>
+                  <a:tcPr marL="45720" marR="45720" marT="45720" marB="45720" anchor="ctr">
+                    <a:lnL>
+                      <a:noFill/>
+                    </a:lnL>
+                    <a:lnR>
+                      <a:noFill/>
+                    </a:lnR>
+                    <a:lnT>
+                      <a:noFill/>
+                    </a:lnT>
+                    <a:lnB>
+                      <a:noFill/>
+                    </a:lnB>
+                    <a:solidFill>
+                      <a:srgbClr val="DAE3F3"/>
+                    </a:solidFill>
+                  </a:tcPr>
+                </a:tc>
+                <a:tc>
+                  <a:txBody>
+                    <a:bodyPr wrap="square" lIns="0" tIns="0" rIns="0" bIns="0" anchor="ctr">
+                      <a:normAutofit/>
+                    </a:bodyPr>
+                    <a:p>
+                      <a:pPr marL="114300" marR="114300" algn="l">
+                        <a:lnSpc>
+                          <a:spcPct val="120000"/>
+                        </a:lnSpc>
+                      </a:pPr>
+                      <a:r>
+                        <a:rPr sz="1125" b="1">
+                          <a:solidFill>
+                            <a:srgbClr val="1A1A1A"/>
+                          </a:solidFill>
+                          <a:latin typeface="Microsoft YaHei"/>
+                          <a:ea typeface="Microsoft YaHei"/>
+                        </a:rPr>
+                        <a:t>问题反馈</a:t>
+                      </a:r>
+                      <a:endParaRPr/>
+                    </a:p>
+                  </a:txBody>
+                  <a:tcPr marL="45720" marR="45720" marT="45720" marB="45720" anchor="ctr">
+                    <a:lnL>
+                      <a:noFill/>
+                    </a:lnL>
+                    <a:lnR>
+                      <a:noFill/>
+                    </a:lnR>
+                    <a:lnT>
+                      <a:noFill/>
+                    </a:lnT>
+                    <a:lnB>
+                      <a:noFill/>
+                    </a:lnB>
+                    <a:solidFill>
+                      <a:srgbClr val="DAE3F3"/>
+                    </a:solidFill>
+                  </a:tcPr>
+                </a:tc>
+                <a:tc>
+                  <a:txBody>
+                    <a:bodyPr wrap="square" lIns="0" tIns="0" rIns="0" bIns="0" anchor="ctr">
+                      <a:normAutofit/>
+                    </a:bodyPr>
+                    <a:p>
+                      <a:pPr marL="114300" marR="114300" algn="l">
+                        <a:lnSpc>
+                          <a:spcPct val="120000"/>
+                        </a:lnSpc>
+                      </a:pPr>
+                      <a:r>
+                        <a:rPr sz="1125" b="1">
+                          <a:solidFill>
+                            <a:srgbClr val="1A1A1A"/>
+                          </a:solidFill>
+                          <a:latin typeface="Microsoft YaHei"/>
+                          <a:ea typeface="Microsoft YaHei"/>
+                        </a:rPr>
+                        <a:t>通过情况</a:t>
+                      </a:r>
+                      <a:endParaRPr/>
+                    </a:p>
+                  </a:txBody>
+                  <a:tcPr marL="45720" marR="45720" marT="45720" marB="45720" anchor="ctr">
+                    <a:lnL>
+                      <a:noFill/>
+                    </a:lnL>
+                    <a:lnR>
+                      <a:noFill/>
+                    </a:lnR>
+                    <a:lnT>
+                      <a:noFill/>
+                    </a:lnT>
+                    <a:lnB>
+                      <a:noFill/>
+                    </a:lnB>
+                    <a:solidFill>
+                      <a:srgbClr val="DAE3F3"/>
+                    </a:solidFill>
+                  </a:tcPr>
+                </a:tc>
+                <a:extLst>
+                  <a:ext uri="{0D108BD9-81ED-4DB2-BD59-A6C34878D82A}">
+                    <a16:rowId val="1"/>
+                  </a:ext>
+                </a:extLst>
+              </a:tr>
+              <a:tr h="438150">
+                <a:tc>
+                  <a:txBody>
+                    <a:bodyPr wrap="square" lIns="0" tIns="0" rIns="0" bIns="0" anchor="ctr">
+                      <a:normAutofit/>
+                    </a:bodyPr>
+                    <a:p>
+                      <a:pPr marL="114300" marR="114300" algn="l">
+                        <a:lnSpc>
+                          <a:spcPct val="120000"/>
+                        </a:lnSpc>
+                      </a:pPr>
+                      <a:r>
+                        <a:rPr sz="1125">
+                          <a:solidFill>
+                            <a:srgbClr val="1A1A1A"/>
+                          </a:solidFill>
+                          <a:latin typeface="Microsoft YaHei"/>
+                          <a:ea typeface="Microsoft YaHei"/>
+                        </a:rPr>
+                        <a:t>4 月</a:t>
+                      </a:r>
+                      <a:endParaRPr/>
+                    </a:p>
+                  </a:txBody>
+                  <a:tcPr marL="45720" marR="45720" marT="45720" marB="45720" anchor="ctr">
+                    <a:lnL>
+                      <a:noFill/>
+                    </a:lnL>
+                    <a:lnR>
+                      <a:noFill/>
+                    </a:lnR>
+                    <a:lnT>
+                      <a:noFill/>
+                    </a:lnT>
+                    <a:lnB>
+                      <a:noFill/>
+                    </a:lnB>
+                  </a:tcPr>
+                </a:tc>
+                <a:tc>
+                  <a:txBody>
+                    <a:bodyPr wrap="square" lIns="0" tIns="0" rIns="0" bIns="0" anchor="ctr">
+                      <a:normAutofit/>
+                    </a:bodyPr>
+                    <a:p>
+                      <a:pPr marL="114300" marR="114300" algn="l">
+                        <a:lnSpc>
+                          <a:spcPct val="120000"/>
+                        </a:lnSpc>
+                      </a:pPr>
+                      <a:r>
+                        <a:rPr sz="1125">
+                          <a:solidFill>
+                            <a:srgbClr val="1A1A1A"/>
+                          </a:solidFill>
+                          <a:latin typeface="Microsoft YaHei"/>
+                          <a:ea typeface="Microsoft YaHei"/>
+                        </a:rPr>
+                        <a:t>3 测试 + 2 验收（5 项）</a:t>
+                      </a:r>
+                      <a:endParaRPr/>
+                    </a:p>
+                  </a:txBody>
+                  <a:tcPr marL="45720" marR="45720" marT="45720" marB="45720" anchor="ctr">
+                    <a:lnL>
+                      <a:noFill/>
+                    </a:lnL>
+                    <a:lnR>
+                      <a:noFill/>
+                    </a:lnR>
+                    <a:lnT>
+                      <a:noFill/>
+                    </a:lnT>
+                    <a:lnB>
+                      <a:noFill/>
+                    </a:lnB>
+                  </a:tcPr>
+                </a:tc>
+                <a:tc>
+                  <a:txBody>
+                    <a:bodyPr wrap="square" lIns="0" tIns="0" rIns="0" bIns="0" anchor="ctr">
+                      <a:normAutofit/>
+                    </a:bodyPr>
+                    <a:p>
+                      <a:pPr marL="114300" marR="114300" algn="l">
+                        <a:lnSpc>
+                          <a:spcPct val="120000"/>
+                        </a:lnSpc>
+                      </a:pPr>
+                      <a:r>
+                        <a:rPr sz="1125">
+                          <a:solidFill>
+                            <a:srgbClr val="1A1A1A"/>
+                          </a:solidFill>
+                          <a:latin typeface="Microsoft YaHei"/>
+                          <a:ea typeface="Microsoft YaHei"/>
+                        </a:rPr>
+                        <a:t>4</a:t>
+                      </a:r>
+                      <a:endParaRPr/>
+                    </a:p>
+                  </a:txBody>
+                  <a:tcPr marL="45720" marR="45720" marT="45720" marB="45720" anchor="ctr">
+                    <a:lnL>
+                      <a:noFill/>
+                    </a:lnL>
+                    <a:lnR>
+                      <a:noFill/>
+                    </a:lnR>
+                    <a:lnT>
+                      <a:noFill/>
+                    </a:lnT>
+                    <a:lnB>
+                      <a:noFill/>
+                    </a:lnB>
+                  </a:tcPr>
+                </a:tc>
+                <a:tc>
+                  <a:txBody>
+                    <a:bodyPr wrap="square" lIns="0" tIns="0" rIns="0" bIns="0" anchor="ctr">
+                      <a:normAutofit/>
+                    </a:bodyPr>
+                    <a:p>
+                      <a:pPr marL="114300" marR="114300" algn="l">
+                        <a:lnSpc>
+                          <a:spcPct val="120000"/>
+                        </a:lnSpc>
+                      </a:pPr>
+                      <a:r>
+                        <a:rPr sz="1125">
+                          <a:solidFill>
+                            <a:srgbClr val="1A1A1A"/>
+                          </a:solidFill>
+                          <a:latin typeface="Microsoft YaHei"/>
+                          <a:ea typeface="Microsoft YaHei"/>
+                        </a:rPr>
+                        <a:t>—</a:t>
+                      </a:r>
+                      <a:endParaRPr/>
+                    </a:p>
+                  </a:txBody>
+                  <a:tcPr marL="45720" marR="45720" marT="45720" marB="45720" anchor="ctr">
+                    <a:lnL>
+                      <a:noFill/>
+                    </a:lnL>
+                    <a:lnR>
+                      <a:noFill/>
+                    </a:lnR>
+                    <a:lnT>
+                      <a:noFill/>
+                    </a:lnT>
+                    <a:lnB>
+                      <a:noFill/>
+                    </a:lnB>
+                  </a:tcPr>
+                </a:tc>
+                <a:extLst>
+                  <a:ext uri="{0D108BD9-81ED-4DB2-BD59-A6C34878D82A}">
+                    <a16:rowId val="2"/>
+                  </a:ext>
+                </a:extLst>
+              </a:tr>
+              <a:tr h="438150">
+                <a:tc>
+                  <a:txBody>
+                    <a:bodyPr wrap="square" lIns="0" tIns="0" rIns="0" bIns="0" anchor="ctr">
+                      <a:normAutofit/>
+                    </a:bodyPr>
+                    <a:p>
+                      <a:pPr marL="114300" marR="114300" algn="l">
+                        <a:lnSpc>
+                          <a:spcPct val="120000"/>
+                        </a:lnSpc>
+                      </a:pPr>
+                      <a:r>
+                        <a:rPr sz="1125">
+                          <a:solidFill>
+                            <a:srgbClr val="1A1A1A"/>
+                          </a:solidFill>
+                          <a:latin typeface="Microsoft YaHei"/>
+                          <a:ea typeface="Microsoft YaHei"/>
+                        </a:rPr>
+                        <a:t>5 月</a:t>
+                      </a:r>
+                      <a:endParaRPr/>
+                    </a:p>
+                  </a:txBody>
+                  <a:tcPr marL="45720" marR="45720" marT="45720" marB="45720" anchor="ctr">
+                    <a:lnL>
+                      <a:noFill/>
+                    </a:lnL>
+                    <a:lnR>
+                      <a:noFill/>
+                    </a:lnR>
+                    <a:lnT>
+                      <a:noFill/>
+                    </a:lnT>
+                    <a:lnB>
+                      <a:noFill/>
+                    </a:lnB>
+                  </a:tcPr>
+                </a:tc>
+                <a:tc>
+                  <a:txBody>
+                    <a:bodyPr wrap="square" lIns="0" tIns="0" rIns="0" bIns="0" anchor="ctr">
+                      <a:normAutofit/>
+                    </a:bodyPr>
+                    <a:p>
+                      <a:pPr marL="114300" marR="114300" algn="l">
+                        <a:lnSpc>
+                          <a:spcPct val="120000"/>
+                        </a:lnSpc>
+                      </a:pPr>
+                      <a:r>
+                        <a:rPr sz="1125">
+                          <a:solidFill>
+                            <a:srgbClr val="1A1A1A"/>
+                          </a:solidFill>
+                          <a:latin typeface="Microsoft YaHei"/>
+                          <a:ea typeface="Microsoft YaHei"/>
+                        </a:rPr>
+                        <a:t>9 项测试验收</a:t>
+                      </a:r>
+                      <a:endParaRPr/>
+                    </a:p>
+                  </a:txBody>
+                  <a:tcPr marL="45720" marR="45720" marT="45720" marB="45720" anchor="ctr">
+                    <a:lnL>
+                      <a:noFill/>
+                    </a:lnL>
+                    <a:lnR>
+                      <a:noFill/>
+                    </a:lnR>
+                    <a:lnT>
+                      <a:noFill/>
+                    </a:lnT>
+                    <a:lnB>
+                      <a:noFill/>
+                    </a:lnB>
+                  </a:tcPr>
+                </a:tc>
+                <a:tc>
+                  <a:txBody>
+                    <a:bodyPr wrap="square" lIns="0" tIns="0" rIns="0" bIns="0" anchor="ctr">
+                      <a:normAutofit/>
+                    </a:bodyPr>
+                    <a:p>
+                      <a:pPr marL="114300" marR="114300" algn="l">
+                        <a:lnSpc>
+                          <a:spcPct val="120000"/>
+                        </a:lnSpc>
+                      </a:pPr>
+                      <a:r>
+                        <a:rPr sz="1125">
+                          <a:solidFill>
+                            <a:srgbClr val="1A1A1A"/>
+                          </a:solidFill>
+                          <a:latin typeface="Microsoft YaHei"/>
+                          <a:ea typeface="Microsoft YaHei"/>
+                        </a:rPr>
+                        <a:t>3</a:t>
+                      </a:r>
+                      <a:endParaRPr/>
+                    </a:p>
+                  </a:txBody>
+                  <a:tcPr marL="45720" marR="45720" marT="45720" marB="45720" anchor="ctr">
+                    <a:lnL>
+                      <a:noFill/>
+                    </a:lnL>
+                    <a:lnR>
+                      <a:noFill/>
+                    </a:lnR>
+                    <a:lnT>
+                      <a:noFill/>
+                    </a:lnT>
+                    <a:lnB>
+                      <a:noFill/>
+                    </a:lnB>
+                  </a:tcPr>
+                </a:tc>
+                <a:tc>
+                  <a:txBody>
+                    <a:bodyPr wrap="square" lIns="0" tIns="0" rIns="0" bIns="0" anchor="ctr">
+                      <a:normAutofit/>
+                    </a:bodyPr>
+                    <a:p>
+                      <a:pPr marL="114300" marR="114300" algn="l">
+                        <a:lnSpc>
+                          <a:spcPct val="120000"/>
+                        </a:lnSpc>
+                      </a:pPr>
+                      <a:r>
+                        <a:rPr sz="1125">
+                          <a:solidFill>
+                            <a:srgbClr val="1A1A1A"/>
+                          </a:solidFill>
+                          <a:latin typeface="Microsoft YaHei"/>
+                          <a:ea typeface="Microsoft YaHei"/>
+                        </a:rPr>
+                        <a:t>—</a:t>
+                      </a:r>
+                      <a:endParaRPr/>
+                    </a:p>
+                  </a:txBody>
+                  <a:tcPr marL="45720" marR="45720" marT="45720" marB="45720" anchor="ctr">
+                    <a:lnL>
+                      <a:noFill/>
+                    </a:lnL>
+                    <a:lnR>
+                      <a:noFill/>
+                    </a:lnR>
+                    <a:lnT>
+                      <a:noFill/>
+                    </a:lnT>
+                    <a:lnB>
+                      <a:noFill/>
+                    </a:lnB>
+                  </a:tcPr>
+                </a:tc>
+                <a:extLst>
+                  <a:ext uri="{0D108BD9-81ED-4DB2-BD59-A6C34878D82A}">
+                    <a16:rowId val="3"/>
+                  </a:ext>
+                </a:extLst>
+              </a:tr>
+              <a:tr h="438150">
+                <a:tc>
+                  <a:txBody>
+                    <a:bodyPr wrap="square" lIns="0" tIns="0" rIns="0" bIns="0" anchor="ctr">
+                      <a:normAutofit/>
+                    </a:bodyPr>
+                    <a:p>
+                      <a:pPr marL="114300" marR="114300" algn="l">
+                        <a:lnSpc>
+                          <a:spcPct val="120000"/>
+                        </a:lnSpc>
+                      </a:pPr>
+                      <a:r>
+                        <a:rPr sz="1125">
+                          <a:solidFill>
+                            <a:srgbClr val="1A1A1A"/>
+                          </a:solidFill>
+                          <a:latin typeface="Microsoft YaHei"/>
+                          <a:ea typeface="Microsoft YaHei"/>
+                        </a:rPr>
+                        <a:t>6 月</a:t>
+                      </a:r>
+                      <a:endParaRPr/>
+                    </a:p>
+                  </a:txBody>
+                  <a:tcPr marL="45720" marR="45720" marT="45720" marB="45720" anchor="ctr">
+                    <a:lnL>
+                      <a:noFill/>
+                    </a:lnL>
+                    <a:lnR>
+                      <a:noFill/>
+                    </a:lnR>
+                    <a:lnT>
+                      <a:noFill/>
+                    </a:lnT>
+                    <a:lnB>
+                      <a:noFill/>
+                    </a:lnB>
+                  </a:tcPr>
+                </a:tc>
+                <a:tc>
+                  <a:txBody>
+                    <a:bodyPr wrap="square" lIns="0" tIns="0" rIns="0" bIns="0" anchor="ctr">
+                      <a:normAutofit/>
+                    </a:bodyPr>
+                    <a:p>
+                      <a:pPr marL="114300" marR="114300" algn="l">
+                        <a:lnSpc>
+                          <a:spcPct val="120000"/>
+                        </a:lnSpc>
+                      </a:pPr>
+                      <a:r>
+                        <a:rPr sz="1125">
+                          <a:solidFill>
+                            <a:srgbClr val="1A1A1A"/>
+                          </a:solidFill>
+                          <a:latin typeface="Microsoft YaHei"/>
+                          <a:ea typeface="Microsoft YaHei"/>
+                        </a:rPr>
+                        <a:t>15 用例（5 批次）</a:t>
+                      </a:r>
+                      <a:endParaRPr/>
+                    </a:p>
+                  </a:txBody>
+                  <a:tcPr marL="45720" marR="45720" marT="45720" marB="45720" anchor="ctr">
+                    <a:lnL>
+                      <a:noFill/>
+                    </a:lnL>
+                    <a:lnR>
+                      <a:noFill/>
+                    </a:lnR>
+                    <a:lnT>
+                      <a:noFill/>
+                    </a:lnT>
+                    <a:lnB>
+                      <a:noFill/>
+                    </a:lnB>
+                  </a:tcPr>
+                </a:tc>
+                <a:tc>
+                  <a:txBody>
+                    <a:bodyPr wrap="square" lIns="0" tIns="0" rIns="0" bIns="0" anchor="ctr">
+                      <a:normAutofit/>
+                    </a:bodyPr>
+                    <a:p>
+                      <a:pPr marL="114300" marR="114300" algn="l">
+                        <a:lnSpc>
+                          <a:spcPct val="120000"/>
+                        </a:lnSpc>
+                      </a:pPr>
+                      <a:r>
+                        <a:rPr sz="1125">
+                          <a:solidFill>
+                            <a:srgbClr val="1A1A1A"/>
+                          </a:solidFill>
+                          <a:latin typeface="Microsoft YaHei"/>
+                          <a:ea typeface="Microsoft YaHei"/>
+                        </a:rPr>
+                        <a:t>8</a:t>
+                      </a:r>
+                      <a:endParaRPr/>
+                    </a:p>
+                  </a:txBody>
+                  <a:tcPr marL="45720" marR="45720" marT="45720" marB="45720" anchor="ctr">
+                    <a:lnL>
+                      <a:noFill/>
+                    </a:lnL>
+                    <a:lnR>
+                      <a:noFill/>
+                    </a:lnR>
+                    <a:lnT>
+                      <a:noFill/>
+                    </a:lnT>
+                    <a:lnB>
+                      <a:noFill/>
+                    </a:lnB>
+                  </a:tcPr>
+                </a:tc>
+                <a:tc>
+                  <a:txBody>
+                    <a:bodyPr wrap="square" lIns="0" tIns="0" rIns="0" bIns="0" anchor="ctr">
+                      <a:normAutofit/>
+                    </a:bodyPr>
+                    <a:p>
+                      <a:pPr marL="114300" marR="114300" algn="l">
+                        <a:lnSpc>
+                          <a:spcPct val="120000"/>
+                        </a:lnSpc>
+                      </a:pPr>
+                      <a:r>
+                        <a:rPr sz="1125" b="1">
+                          <a:solidFill>
+                            <a:srgbClr val="4472C4"/>
+                          </a:solidFill>
+                          <a:latin typeface="Microsoft YaHei"/>
+                          <a:ea typeface="Microsoft YaHei"/>
+                        </a:rPr>
+                        <a:t>14/15 通过（93.3%）</a:t>
+                      </a:r>
+                      <a:endParaRPr/>
+                    </a:p>
+                  </a:txBody>
+                  <a:tcPr marL="45720" marR="45720" marT="45720" marB="45720" anchor="ctr">
+                    <a:lnL>
+                      <a:noFill/>
+                    </a:lnL>
+                    <a:lnR>
+                      <a:noFill/>
+                    </a:lnR>
+                    <a:lnT>
+                      <a:noFill/>
+                    </a:lnT>
+                    <a:lnB>
+                      <a:noFill/>
+                    </a:lnB>
+                  </a:tcPr>
+                </a:tc>
+                <a:extLst>
+                  <a:ext uri="{0D108BD9-81ED-4DB2-BD59-A6C34878D82A}">
+                    <a16:rowId val="4"/>
+                  </a:ext>
+                </a:extLst>
+              </a:tr>
+              <a:tr h="438150">
+                <a:tc>
+                  <a:txBody>
+                    <a:bodyPr wrap="square" lIns="0" tIns="0" rIns="0" bIns="0" anchor="ctr">
+                      <a:normAutofit/>
+                    </a:bodyPr>
+                    <a:p>
+                      <a:pPr marL="114300" marR="114300" algn="l">
+                        <a:lnSpc>
+                          <a:spcPct val="120000"/>
+                        </a:lnSpc>
+                      </a:pPr>
+                      <a:r>
+                        <a:rPr sz="1125">
+                          <a:solidFill>
+                            <a:srgbClr val="1A1A1A"/>
+                          </a:solidFill>
+                          <a:latin typeface="Microsoft YaHei"/>
+                          <a:ea typeface="Microsoft YaHei"/>
+                        </a:rPr>
+                        <a:t>7 月（2607）</a:t>
+                      </a:r>
+                      <a:endParaRPr/>
+                    </a:p>
+                  </a:txBody>
+                  <a:tcPr marL="45720" marR="45720" marT="45720" marB="45720" anchor="ctr">
+                    <a:lnL>
+                      <a:noFill/>
+                    </a:lnL>
+                    <a:lnR>
+                      <a:noFill/>
+                    </a:lnR>
+                    <a:lnT>
+                      <a:noFill/>
+                    </a:lnT>
+                    <a:lnB>
+                      <a:noFill/>
+                    </a:lnB>
+                  </a:tcPr>
+                </a:tc>
+                <a:tc>
+                  <a:txBody>
+                    <a:bodyPr wrap="square" lIns="0" tIns="0" rIns="0" bIns="0" anchor="ctr">
+                      <a:normAutofit/>
+                    </a:bodyPr>
+                    <a:p>
+                      <a:pPr marL="114300" marR="114300" algn="l">
+                        <a:lnSpc>
+                          <a:spcPct val="120000"/>
+                        </a:lnSpc>
+                      </a:pPr>
+                      <a:r>
+                        <a:rPr sz="1125">
+                          <a:solidFill>
+                            <a:srgbClr val="1A1A1A"/>
+                          </a:solidFill>
+                          <a:latin typeface="Microsoft YaHei"/>
+                          <a:ea typeface="Microsoft YaHei"/>
+                        </a:rPr>
+                        <a:t>5 轮验收（8 项）</a:t>
+                      </a:r>
+                      <a:endParaRPr/>
+                    </a:p>
+                  </a:txBody>
+                  <a:tcPr marL="45720" marR="45720" marT="45720" marB="45720" anchor="ctr">
+                    <a:lnL>
+                      <a:noFill/>
+                    </a:lnL>
+                    <a:lnR>
+                      <a:noFill/>
+                    </a:lnR>
+                    <a:lnT>
+                      <a:noFill/>
+                    </a:lnT>
+                    <a:lnB>
+                      <a:noFill/>
+                    </a:lnB>
+                  </a:tcPr>
+                </a:tc>
+                <a:tc>
+                  <a:txBody>
+                    <a:bodyPr wrap="square" lIns="0" tIns="0" rIns="0" bIns="0" anchor="ctr">
+                      <a:normAutofit/>
+                    </a:bodyPr>
+                    <a:p>
+                      <a:pPr marL="114300" marR="114300" algn="l">
+                        <a:lnSpc>
+                          <a:spcPct val="120000"/>
+                        </a:lnSpc>
+                      </a:pPr>
+                      <a:r>
+                        <a:rPr sz="1125">
+                          <a:solidFill>
+                            <a:srgbClr val="1A1A1A"/>
+                          </a:solidFill>
+                          <a:latin typeface="Microsoft YaHei"/>
+                          <a:ea typeface="Microsoft YaHei"/>
+                        </a:rPr>
+                        <a:t>4</a:t>
+                      </a:r>
+                      <a:endParaRPr/>
+                    </a:p>
+                  </a:txBody>
+                  <a:tcPr marL="45720" marR="45720" marT="45720" marB="45720" anchor="ctr">
+                    <a:lnL>
+                      <a:noFill/>
+                    </a:lnL>
+                    <a:lnR>
+                      <a:noFill/>
+                    </a:lnR>
+                    <a:lnT>
+                      <a:noFill/>
+                    </a:lnT>
+                    <a:lnB>
+                      <a:noFill/>
+                    </a:lnB>
+                  </a:tcPr>
+                </a:tc>
+                <a:tc>
+                  <a:txBody>
+                    <a:bodyPr wrap="square" lIns="0" tIns="0" rIns="0" bIns="0" anchor="ctr">
+                      <a:normAutofit/>
+                    </a:bodyPr>
+                    <a:p>
+                      <a:pPr marL="114300" marR="114300" algn="l">
+                        <a:lnSpc>
+                          <a:spcPct val="120000"/>
+                        </a:lnSpc>
+                      </a:pPr>
+                      <a:r>
+                        <a:rPr sz="1125">
+                          <a:solidFill>
+                            <a:srgbClr val="1A1A1A"/>
+                          </a:solidFill>
+                          <a:latin typeface="Microsoft YaHei"/>
+                          <a:ea typeface="Microsoft YaHei"/>
+                        </a:rPr>
+                        <a:t>—</a:t>
+                      </a:r>
+                      <a:endParaRPr/>
+                    </a:p>
+                  </a:txBody>
+                  <a:tcPr marL="45720" marR="45720" marT="45720" marB="45720" anchor="ctr">
+                    <a:lnL>
+                      <a:noFill/>
+                    </a:lnL>
+                    <a:lnR>
+                      <a:noFill/>
+                    </a:lnR>
+                    <a:lnT>
+                      <a:noFill/>
+                    </a:lnT>
+                    <a:lnB>
+                      <a:noFill/>
+                    </a:lnB>
+                  </a:tcPr>
+                </a:tc>
+                <a:extLst>
+                  <a:ext uri="{0D108BD9-81ED-4DB2-BD59-A6C34878D82A}">
+                    <a16:rowId val="5"/>
+                  </a:ext>
+                </a:extLst>
+              </a:tr>
+            </a:tbl>
+          </a:graphicData>
+        </a:graphic>
+      </p:graphicFrame>
+      <p:sp>
+        <p:nvSpPr>
+          <p:cNvPr id="28" name="" descr="{&quot;isTemplate&quot;:true,&quot;type&quot;:&quot;text&quot;}"/>
+          <p:cNvSpPr txBox="1"/>
+          <p:nvPr/>
+        </p:nvSpPr>
+        <p:spPr>
+          <a:xfrm rot="0" flipH="0" flipV="0">
+            <a:off x="533400" y="6362700"/>
+            <a:ext cx="1285875" cy="161925"/>
           </a:xfrm>
           <a:prstGeom prst="rect"/>
         </p:spPr>
@@ -1377,14 +2505,34 @@
               </a:lnSpc>
             </a:pPr>
             <a:r>
-              <a:rPr lang="zh-CN" sz="1800" b="1">
-                <a:solidFill>
-                  <a:srgbClr val="1A1A1A"/>
-                </a:solidFill>
-                <a:latin typeface="微软雅黑"/>
-                <a:ea typeface="微软雅黑"/>
-              </a:rPr>
-              <a:t>六、下阶段计划与需支持事项</a:t>
+              <a:rPr lang="zh-CN" sz="1050">
+                <a:solidFill>
+                  <a:srgbClr val="888888"/>
+                </a:solidFill>
+                <a:latin typeface="微软雅黑"/>
+                <a:ea typeface="微软雅黑"/>
+              </a:rPr>
+              <a:t>入职以来</a:t>
+            </a:r>
+            <a:r>
+              <a:rPr lang="en-US" sz="1050">
+                <a:solidFill>
+                  <a:srgbClr val="888888"/>
+                </a:solidFill>
+                <a:latin typeface="微软雅黑"/>
+                <a:ea typeface="微软雅黑"/>
+              </a:rPr>
+              <a:t> AI </a:t>
+            </a:r>
+            <a:r>
+              <a:rPr lang="zh-CN" sz="1050">
+                <a:solidFill>
+                  <a:srgbClr val="888888"/>
+                </a:solidFill>
+                <a:latin typeface="微软雅黑"/>
+                <a:ea typeface="微软雅黑"/>
+              </a:rPr>
+              <a:t>工作复盘</a:t>
             </a:r>
             <a:endParaRPr/>
           </a:p>
@@ -1392,14 +2540,14 @@
       </p:sp>
       <p:sp>
         <p:nvSpPr>
-          <p:cNvPr id="23" name="" descr="{&quot;isTemplate&quot;:true,&quot;type&quot;:&quot;text&quot;}"/>
+          <p:cNvPr id="29" name="" descr="{&quot;isTemplate&quot;:true,&quot;type&quot;:&quot;text&quot;}"/>
           <p:cNvSpPr txBox="1"/>
           <p:nvPr/>
         </p:nvSpPr>
         <p:spPr>
           <a:xfrm rot="0" flipH="0" flipV="0">
-            <a:off x="533400" y="6362700"/>
-            <a:ext cx="1285875" cy="161925"/>
+            <a:off x="11229975" y="6362700"/>
+            <a:ext cx="428625" cy="161925"/>
           </a:xfrm>
           <a:prstGeom prst="rect"/>
         </p:spPr>
@@ -1412,69 +2560,14 @@
               </a:lnSpc>
             </a:pPr>
             <a:r>
-              <a:rPr lang="zh-CN" sz="1050">
+              <a:rPr lang="en-US" sz="1050">
                 <a:solidFill>
                   <a:srgbClr val="888888"/>
                 </a:solidFill>
                 <a:latin typeface="微软雅黑"/>
                 <a:ea typeface="微软雅黑"/>
               </a:rPr>
-              <a:t>入职以来</a:t>
-            </a:r>
-            <a:r>
-              <a:rPr lang="en-US" sz="1050">
-                <a:solidFill>
-                  <a:srgbClr val="888888"/>
-                </a:solidFill>
-                <a:latin typeface="微软雅黑"/>
-                <a:ea typeface="微软雅黑"/>
-              </a:rPr>
-              <a:t> AI </a:t>
-            </a:r>
-            <a:r>
-              <a:rPr lang="zh-CN" sz="1050">
-                <a:solidFill>
-                  <a:srgbClr val="888888"/>
-                </a:solidFill>
-                <a:latin typeface="微软雅黑"/>
-                <a:ea typeface="微软雅黑"/>
-              </a:rPr>
-              <a:t>工作复盘</a:t>
-            </a:r>
-            <a:endParaRPr/>
-          </a:p>
-        </p:txBody>
-      </p:sp>
-      <p:sp>
-        <p:nvSpPr>
-          <p:cNvPr id="24" name="" descr="{&quot;isTemplate&quot;:true,&quot;type&quot;:&quot;text&quot;}"/>
-          <p:cNvSpPr txBox="1"/>
-          <p:nvPr/>
-        </p:nvSpPr>
-        <p:spPr>
-          <a:xfrm rot="0" flipH="0" flipV="0">
-            <a:off x="11229975" y="6362700"/>
-            <a:ext cx="428625" cy="161925"/>
-          </a:xfrm>
-          <a:prstGeom prst="rect"/>
-        </p:spPr>
-        <p:txBody>
-          <a:bodyPr wrap="none" lIns="0" tIns="0" rIns="0" bIns="0"/>
-          <a:p>
-            <a:pPr>
-              <a:lnSpc>
-                <a:spcPct val="100000"/>
-              </a:lnSpc>
-            </a:pPr>
-            <a:r>
-              <a:rPr lang="en-US" sz="1050">
-                <a:solidFill>
-                  <a:srgbClr val="888888"/>
-                </a:solidFill>
-                <a:latin typeface="微软雅黑"/>
-                <a:ea typeface="微软雅黑"/>
-              </a:rPr>
-              <a:t>02 / 13</a:t>
+              <a:t>10 / 13</a:t>
             </a:r>
             <a:endParaRPr/>
           </a:p>
@@ -1485,12 +2578,12 @@
 </p:sld>
 </file>
 
-<file path=ppt/slides/slide3.xml><?xml version="1.0" encoding="utf-8"?>
-<p:sld xmlns:p="http://schemas.openxmlformats.org/presentationml/2006/main" xmlns:a="http://schemas.openxmlformats.org/drawingml/2006/main">
+<file path=ppt/slides/slide11.xml><?xml version="1.0" encoding="utf-8"?>
+<p:sld xmlns:p="http://schemas.openxmlformats.org/presentationml/2006/main" xmlns:a="http://schemas.openxmlformats.org/drawingml/2006/main" xmlns:a16="http://schemas.microsoft.com/office/drawing/2014/main" xmlns:mc="http://schemas.openxmlformats.org/markup-compatibility/2006" mc:Ignorable="a16">
   <p:cSld>
     <p:spTree>
       <p:nvGrpSpPr>
-        <p:cNvPr id="25" name="" descr="&lt;Slide style={{ width:'1280px', height:'720px', position:'relative', background:'#FFFFFF', fontFamily:'微软雅黑' }}&gt;&#10;  &lt;Box style={{ position:'absolute', left:56, top:36, flexDirection:'row', alignItems:'center', gap:12 }}&gt;&#10;    &lt;Box style={{ width:8, height:34, background:'#4472C4' }} /&gt;&#10;    &lt;Text style={{ fontSize:30, fontWeight:'bold', color:'#052B7C' }}&gt;一、工作概览与量化总览&lt;/Text&gt;&#10;  &lt;/Box&gt;&#10;&#10;  &lt;Box style={{ position:'absolute', left:56, top:130, right:56, flexDirection:'column', gap:22 }}&gt;&#10;    &lt;Box style={{ flexDirection:'row', gap:22 }}&gt;&#10;      {[['5','自研应用 / 工具'],['2','复用 Skill'],['4','业务智能体']].map((c, i) =&gt; (&#10;        &lt;Box key={i} style={{ flex:1, background:'#F4F7FC', borderRadius:10, padding:'22px 18px', alignItems:'center' }}&gt;&#10;          &lt;Text style={{ fontSize:56, fontWeight:'bold', color:'#4472C4' }}&gt;{c[0]}&lt;/Text&gt;&#10;          &lt;Text style={{ fontSize:18, color:'#1A1A1A', marginTop:6 }}&gt;{c[1]}&lt;/Text&gt;&#10;        &lt;/Box&gt;&#10;      ))}&#10;    &lt;/Box&gt;&#10;    &lt;Box style={{ flexDirection:'row', gap:22 }}&gt;&#10;      {[['37','平台验收项'],['12','培训场次'],['7','覆盖部门']].map((c, i) =&gt; (&#10;        &lt;Box key={i} style={{ flex:1, background:'#F4F7FC', borderRadius:10, padding:'22px 18px', alignItems:'center' }}&gt;&#10;          &lt;Text style={{ fontSize:56, fontWeight:'bold', color:'#4472C4' }}&gt;{c[0]}&lt;/Text&gt;&#10;          &lt;Text style={{ fontSize:18, color:'#1A1A1A', marginTop:6 }}&gt;{c[1]}&lt;/Text&gt;&#10;        &lt;/Box&gt;&#10;      ))}&#10;    &lt;/Box&gt;&#10;  &lt;/Box&gt;&#10;&#10;  &lt;Box style={{ position:'absolute', left:56, top:560, right:56, background:'#052B7C', borderRadius:10, padding:'16px 22px' }}&gt;&#10;    &lt;Text style={{ fontSize:18, color:'#FFFFFF', lineHeight:1.5 }}&gt;入职 3.5 个月，从 0 搭起「自研工具 + 复用 Skill + 平台验收运营 + 培训推广」完整交付体系，覆盖采购 / 船务 / 财务 / 销售 / 研发 / 营销 6 类业务方；交付快（自研平均 ~25 天）、持续迭代（110+ 条代码）。&lt;/Text&gt;&#10;  &lt;/Box&gt;&#10;&#10;  &lt;Box style={{ position:'absolute', left:56, top:668, right:56, flexDirection:'row', justifyContent:'space-between' }}&gt;&#10;    &lt;Text style={{ fontSize:14, color:'#888' }}&gt;入职以来 AI 工作复盘&lt;/Text&gt;&#10;    &lt;Text style={{ fontSize:14, color:'#888' }}&gt;03 / 13&lt;/Text&gt;&#10;  &lt;/Box&gt;&#10;&lt;/Slide&gt;"/>
+        <p:cNvPr id="30" name="" descr="&lt;Slide style={{ width:'1280px', height:'720px', position:'relative', background:'#FFFFFF', fontFamily:'微软雅黑' }}&gt;&#10;  &lt;Box style={{ position:'absolute', left:56, top:36, flexDirection:'row', alignItems:'center', gap:12 }}&gt;&#10;    &lt;Box style={{ width:8, height:34, background:'#4472C4' }} /&gt;&#10;    &lt;Text style={{ fontSize:30, fontWeight:'bold', color:'#052B7C' }}&gt;五、智能体矩阵与内容生成&lt;/Text&gt;&#10;  &lt;/Box&gt;&#10;&#10;  &lt;Box style={{ position:'absolute', left:56, top:120, right:56 }}&gt;&#10;    &lt;Table&#10;      style={{ width:'100%', height:440 }}&#10;      defaultTextStyle={{ fontSize:15, textAlign:'center', color:'#1A1A1A' }}&#10;      defaultCellStyle={{ border:{ left:{width:1,color:'#CCCCCC'}, right:{width:1,color:'#CCCCCC'}, top:{width:1,color:'#CCCCCC'}, bottom:{width:1,color:'#CCCCCC'} } }}&#10;      cells={[&#10;        [ {text:'智能体', textStyle:{bold:true,color:'#1A1A1A'}, cellStyle:{background:{color:'#DAE3F3'}}},&#10;          {text:'面向', textStyle:{bold:true,color:'#1A1A1A'}, cellStyle:{background:{color:'#DAE3F3'}}},&#10;          {text:'知识规模', textStyle:{bold:true,color:'#1A1A1A'}, cellStyle:{background:{color:'#DAE3F3'}}},&#10;          {text:'结构规模', textStyle:{bold:true,color:'#1A1A1A'}, cellStyle:{background:{color:'#DAE3F3'}}},&#10;          {text:'状态', textStyle:{bold:true,color:'#1A1A1A'}, cellStyle:{background:{color:'#DAE3F3'}}},&#10;          {text:'核心价值', textStyle:{bold:true,color:'#1A1A1A',textAlign:'left'}, cellStyle:{background:{color:'#DAE3F3'}}} ],&#10;        [ '说明书助手', '销售 / 业务', 'TDS 产品库', '6 模式 / 16 节提示词', '已上线', {text:'TDS 咨询秒级应答、选型有据不误导客户', textStyle:{textAlign:'left'}} ],&#10;        [ '销售 SOP / 全能助手', '销售', '7 份 SOP 源文件', '6 场景触发', '已上线', {text:'销售动作标准化、话术统一、新人即上手', textStyle:{textAlign:'left'}} ],&#10;        [ '业务智能助理', '营销中心 / 业务', 'SKILL.md + templates + role', '3 阶段 / 4 岗位自适应', {text:'迭代中 v5', textStyle:{color:'#C0504D',bold:true}}, {text:'客户问题全流程 AI 化 + 合规红线校验', textStyle:{textAlign:'left'}} ],&#10;        [ '应用工艺助手', '研发为主 + 业务', '工艺手册 + 研发培训', '20+ 疵病排查', '已上线', {text:'染整专业问答、客户质疑标准答案', textStyle:{textAlign:'left'}} ],&#10;      ]}&#10;    /&gt;&#10;  &lt;/Box&gt;&#10;&#10;  &lt;Box style={{ position:'absolute', left:56, top:568, right:56 }}&gt;&#10;    &lt;Text style={{ fontSize:16, color:'#1A1A1A', lineHeight:1.5 }}&gt;另有「培训助手」「视频 / 图片生成助手」等能力，构成平台智能体矩阵；06-12 提出 seedance/seedream 独立化诉求，07-14 图片 · 视频生成独立应用落地（营销 / 销售自助生产素材）。&lt;/Text&gt;&#10;  &lt;/Box&gt;&#10;&#10;  &lt;Box style={{ position:'absolute', left:56, top:668, right:56, flexDirection:'row', justifyContent:'space-between' }}&gt;&#10;    &lt;Text style={{ fontSize:14, color:'#888' }}&gt;入职以来 AI 工作复盘&lt;/Text&gt;&#10;    &lt;Text style={{ fontSize:14, color:'#888' }}&gt;11 / 13&lt;/Text&gt;&#10;  &lt;/Box&gt;&#10;&lt;/Slide&gt;"/>
         <p:cNvGrpSpPr/>
         <p:nvPr/>
       </p:nvGrpSpPr>
@@ -1504,7 +2597,7 @@
       </p:grpSpPr>
       <p:sp>
         <p:nvSpPr>
-          <p:cNvPr id="26" name=""/>
+          <p:cNvPr id="31" name=""/>
           <p:cNvSpPr/>
           <p:nvPr/>
         </p:nvSpPr>
@@ -1528,7 +2621,7 @@
       </p:sp>
       <p:sp>
         <p:nvSpPr>
-          <p:cNvPr id="27" name=""/>
+          <p:cNvPr id="32" name=""/>
           <p:cNvSpPr/>
           <p:nvPr/>
         </p:nvSpPr>
@@ -1552,14 +2645,14 @@
       </p:sp>
       <p:sp>
         <p:nvSpPr>
-          <p:cNvPr id="28" name="" descr="{&quot;isTemplate&quot;:true,&quot;type&quot;:&quot;text&quot;}"/>
+          <p:cNvPr id="33" name="" descr="{&quot;isTemplate&quot;:true,&quot;type&quot;:&quot;text&quot;}"/>
           <p:cNvSpPr txBox="1"/>
           <p:nvPr/>
         </p:nvSpPr>
         <p:spPr>
           <a:xfrm rot="0" flipH="0" flipV="0">
             <a:off x="723900" y="342900"/>
-            <a:ext cx="3143250" cy="342900"/>
+            <a:ext cx="3429000" cy="342900"/>
           </a:xfrm>
           <a:prstGeom prst="rect"/>
         </p:spPr>
@@ -1579,654 +2672,1306 @@
                 <a:latin typeface="微软雅黑"/>
                 <a:ea typeface="微软雅黑"/>
               </a:rPr>
-              <a:t>一、工作概览与量化总览</a:t>
+              <a:t>五、智能体矩阵与内容生成</a:t>
             </a:r>
             <a:endParaRPr/>
           </a:p>
         </p:txBody>
       </p:sp>
-      <p:sp>
-        <p:nvSpPr>
-          <p:cNvPr id="29" name=""/>
-          <p:cNvSpPr/>
-          <p:nvPr/>
-        </p:nvSpPr>
-        <p:spPr>
-          <a:xfrm rot="0" flipH="0" flipV="0">
-            <a:off x="533400" y="1238250"/>
-            <a:ext cx="3571875" cy="1333500"/>
-          </a:xfrm>
-          <a:prstGeom prst="roundRect">
-            <a:avLst>
-              <a:gd name="adj" fmla="val 7143"/>
-            </a:avLst>
-          </a:prstGeom>
-          <a:solidFill>
-            <a:srgbClr val="F4F7FC"/>
-          </a:solidFill>
-          <a:ln/>
-        </p:spPr>
-        <p:txBody>
-          <a:bodyPr/>
-          <a:p/>
-        </p:txBody>
-      </p:sp>
-      <p:sp>
-        <p:nvSpPr>
-          <p:cNvPr id="30" name="" descr="{&quot;isTemplate&quot;:true,&quot;type&quot;:&quot;text&quot;}"/>
+      <p:graphicFrame>
+        <p:nvGraphicFramePr>
+          <p:cNvPr id="34" name=""/>
+          <p:cNvGraphicFramePr/>
+          <p:nvPr/>
+        </p:nvGraphicFramePr>
+        <p:xfrm rot="0" flipH="0" flipV="0">
+          <a:off x="533400" y="1143000"/>
+          <a:ext cx="11125200" cy="4191000"/>
+        </p:xfrm>
+        <a:graphic>
+          <a:graphicData uri="http://schemas.openxmlformats.org/drawingml/2006/table">
+            <a:tbl>
+              <a:tblGrid>
+                <a:gridCol w="1661671">
+                  <a:extLst>
+                    <a:ext uri="{9D8B030D-6E8A-4147-A177-3AD203B41FA5}">
+                      <a16:colId val="1"/>
+                    </a:ext>
+                  </a:extLst>
+                </a:gridCol>
+                <a:gridCol w="1339556">
+                  <a:extLst>
+                    <a:ext uri="{9D8B030D-6E8A-4147-A177-3AD203B41FA5}">
+                      <a16:colId val="2"/>
+                    </a:ext>
+                  </a:extLst>
+                </a:gridCol>
+                <a:gridCol w="2372547">
+                  <a:extLst>
+                    <a:ext uri="{9D8B030D-6E8A-4147-A177-3AD203B41FA5}">
+                      <a16:colId val="3"/>
+                    </a:ext>
+                  </a:extLst>
+                </a:gridCol>
+                <a:gridCol w="1739423">
+                  <a:extLst>
+                    <a:ext uri="{9D8B030D-6E8A-4147-A177-3AD203B41FA5}">
+                      <a16:colId val="4"/>
+                    </a:ext>
+                  </a:extLst>
+                </a:gridCol>
+                <a:gridCol w="861936">
+                  <a:extLst>
+                    <a:ext uri="{9D8B030D-6E8A-4147-A177-3AD203B41FA5}">
+                      <a16:colId val="5"/>
+                    </a:ext>
+                  </a:extLst>
+                </a:gridCol>
+                <a:gridCol w="3150067">
+                  <a:extLst>
+                    <a:ext uri="{9D8B030D-6E8A-4147-A177-3AD203B41FA5}">
+                      <a16:colId val="6"/>
+                    </a:ext>
+                  </a:extLst>
+                </a:gridCol>
+              </a:tblGrid>
+              <a:tr h="838200">
+                <a:tc>
+                  <a:txBody>
+                    <a:bodyPr wrap="square" lIns="0" tIns="0" rIns="0" bIns="0" anchor="ctr">
+                      <a:normAutofit/>
+                    </a:bodyPr>
+                    <a:p>
+                      <a:pPr marL="114300" marR="114300" algn="l">
+                        <a:lnSpc>
+                          <a:spcPct val="120000"/>
+                        </a:lnSpc>
+                      </a:pPr>
+                      <a:r>
+                        <a:rPr sz="1125" b="1">
+                          <a:solidFill>
+                            <a:srgbClr val="1A1A1A"/>
+                          </a:solidFill>
+                          <a:latin typeface="Microsoft YaHei"/>
+                          <a:ea typeface="Microsoft YaHei"/>
+                        </a:rPr>
+                        <a:t>智能体</a:t>
+                      </a:r>
+                      <a:endParaRPr/>
+                    </a:p>
+                  </a:txBody>
+                  <a:tcPr marL="45720" marR="45720" marT="45720" marB="45720" anchor="ctr">
+                    <a:lnL>
+                      <a:noFill/>
+                    </a:lnL>
+                    <a:lnR>
+                      <a:noFill/>
+                    </a:lnR>
+                    <a:lnT>
+                      <a:noFill/>
+                    </a:lnT>
+                    <a:lnB>
+                      <a:noFill/>
+                    </a:lnB>
+                    <a:solidFill>
+                      <a:srgbClr val="DAE3F3"/>
+                    </a:solidFill>
+                  </a:tcPr>
+                </a:tc>
+                <a:tc>
+                  <a:txBody>
+                    <a:bodyPr wrap="square" lIns="0" tIns="0" rIns="0" bIns="0" anchor="ctr">
+                      <a:normAutofit/>
+                    </a:bodyPr>
+                    <a:p>
+                      <a:pPr marL="114300" marR="114300" algn="l">
+                        <a:lnSpc>
+                          <a:spcPct val="120000"/>
+                        </a:lnSpc>
+                      </a:pPr>
+                      <a:r>
+                        <a:rPr sz="1125" b="1">
+                          <a:solidFill>
+                            <a:srgbClr val="1A1A1A"/>
+                          </a:solidFill>
+                          <a:latin typeface="Microsoft YaHei"/>
+                          <a:ea typeface="Microsoft YaHei"/>
+                        </a:rPr>
+                        <a:t>面向</a:t>
+                      </a:r>
+                      <a:endParaRPr/>
+                    </a:p>
+                  </a:txBody>
+                  <a:tcPr marL="45720" marR="45720" marT="45720" marB="45720" anchor="ctr">
+                    <a:lnL>
+                      <a:noFill/>
+                    </a:lnL>
+                    <a:lnR>
+                      <a:noFill/>
+                    </a:lnR>
+                    <a:lnT>
+                      <a:noFill/>
+                    </a:lnT>
+                    <a:lnB>
+                      <a:noFill/>
+                    </a:lnB>
+                    <a:solidFill>
+                      <a:srgbClr val="DAE3F3"/>
+                    </a:solidFill>
+                  </a:tcPr>
+                </a:tc>
+                <a:tc>
+                  <a:txBody>
+                    <a:bodyPr wrap="square" lIns="0" tIns="0" rIns="0" bIns="0" anchor="ctr">
+                      <a:normAutofit/>
+                    </a:bodyPr>
+                    <a:p>
+                      <a:pPr marL="114300" marR="114300" algn="l">
+                        <a:lnSpc>
+                          <a:spcPct val="120000"/>
+                        </a:lnSpc>
+                      </a:pPr>
+                      <a:r>
+                        <a:rPr sz="1125" b="1">
+                          <a:solidFill>
+                            <a:srgbClr val="1A1A1A"/>
+                          </a:solidFill>
+                          <a:latin typeface="Microsoft YaHei"/>
+                          <a:ea typeface="Microsoft YaHei"/>
+                        </a:rPr>
+                        <a:t>知识规模</a:t>
+                      </a:r>
+                      <a:endParaRPr/>
+                    </a:p>
+                  </a:txBody>
+                  <a:tcPr marL="45720" marR="45720" marT="45720" marB="45720" anchor="ctr">
+                    <a:lnL>
+                      <a:noFill/>
+                    </a:lnL>
+                    <a:lnR>
+                      <a:noFill/>
+                    </a:lnR>
+                    <a:lnT>
+                      <a:noFill/>
+                    </a:lnT>
+                    <a:lnB>
+                      <a:noFill/>
+                    </a:lnB>
+                    <a:solidFill>
+                      <a:srgbClr val="DAE3F3"/>
+                    </a:solidFill>
+                  </a:tcPr>
+                </a:tc>
+                <a:tc>
+                  <a:txBody>
+                    <a:bodyPr wrap="square" lIns="0" tIns="0" rIns="0" bIns="0" anchor="ctr">
+                      <a:normAutofit/>
+                    </a:bodyPr>
+                    <a:p>
+                      <a:pPr marL="114300" marR="114300" algn="l">
+                        <a:lnSpc>
+                          <a:spcPct val="120000"/>
+                        </a:lnSpc>
+                      </a:pPr>
+                      <a:r>
+                        <a:rPr sz="1125" b="1">
+                          <a:solidFill>
+                            <a:srgbClr val="1A1A1A"/>
+                          </a:solidFill>
+                          <a:latin typeface="Microsoft YaHei"/>
+                          <a:ea typeface="Microsoft YaHei"/>
+                        </a:rPr>
+                        <a:t>结构规模</a:t>
+                      </a:r>
+                      <a:endParaRPr/>
+                    </a:p>
+                  </a:txBody>
+                  <a:tcPr marL="45720" marR="45720" marT="45720" marB="45720" anchor="ctr">
+                    <a:lnL>
+                      <a:noFill/>
+                    </a:lnL>
+                    <a:lnR>
+                      <a:noFill/>
+                    </a:lnR>
+                    <a:lnT>
+                      <a:noFill/>
+                    </a:lnT>
+                    <a:lnB>
+                      <a:noFill/>
+                    </a:lnB>
+                    <a:solidFill>
+                      <a:srgbClr val="DAE3F3"/>
+                    </a:solidFill>
+                  </a:tcPr>
+                </a:tc>
+                <a:tc>
+                  <a:txBody>
+                    <a:bodyPr wrap="square" lIns="0" tIns="0" rIns="0" bIns="0" anchor="ctr">
+                      <a:normAutofit/>
+                    </a:bodyPr>
+                    <a:p>
+                      <a:pPr marL="114300" marR="114300" algn="l">
+                        <a:lnSpc>
+                          <a:spcPct val="120000"/>
+                        </a:lnSpc>
+                      </a:pPr>
+                      <a:r>
+                        <a:rPr sz="1125" b="1">
+                          <a:solidFill>
+                            <a:srgbClr val="1A1A1A"/>
+                          </a:solidFill>
+                          <a:latin typeface="Microsoft YaHei"/>
+                          <a:ea typeface="Microsoft YaHei"/>
+                        </a:rPr>
+                        <a:t>状态</a:t>
+                      </a:r>
+                      <a:endParaRPr/>
+                    </a:p>
+                  </a:txBody>
+                  <a:tcPr marL="45720" marR="45720" marT="45720" marB="45720" anchor="ctr">
+                    <a:lnL>
+                      <a:noFill/>
+                    </a:lnL>
+                    <a:lnR>
+                      <a:noFill/>
+                    </a:lnR>
+                    <a:lnT>
+                      <a:noFill/>
+                    </a:lnT>
+                    <a:lnB>
+                      <a:noFill/>
+                    </a:lnB>
+                    <a:solidFill>
+                      <a:srgbClr val="DAE3F3"/>
+                    </a:solidFill>
+                  </a:tcPr>
+                </a:tc>
+                <a:tc>
+                  <a:txBody>
+                    <a:bodyPr wrap="square" lIns="0" tIns="0" rIns="0" bIns="0" anchor="ctr">
+                      <a:normAutofit/>
+                    </a:bodyPr>
+                    <a:p>
+                      <a:pPr marL="114300" marR="114300" algn="l">
+                        <a:lnSpc>
+                          <a:spcPct val="120000"/>
+                        </a:lnSpc>
+                      </a:pPr>
+                      <a:r>
+                        <a:rPr sz="1125" b="1">
+                          <a:solidFill>
+                            <a:srgbClr val="1A1A1A"/>
+                          </a:solidFill>
+                          <a:latin typeface="Microsoft YaHei"/>
+                          <a:ea typeface="Microsoft YaHei"/>
+                        </a:rPr>
+                        <a:t>核心价值</a:t>
+                      </a:r>
+                      <a:endParaRPr/>
+                    </a:p>
+                  </a:txBody>
+                  <a:tcPr marL="45720" marR="45720" marT="45720" marB="45720" anchor="ctr">
+                    <a:lnL>
+                      <a:noFill/>
+                    </a:lnL>
+                    <a:lnR>
+                      <a:noFill/>
+                    </a:lnR>
+                    <a:lnT>
+                      <a:noFill/>
+                    </a:lnT>
+                    <a:lnB>
+                      <a:noFill/>
+                    </a:lnB>
+                    <a:solidFill>
+                      <a:srgbClr val="DAE3F3"/>
+                    </a:solidFill>
+                  </a:tcPr>
+                </a:tc>
+                <a:extLst>
+                  <a:ext uri="{0D108BD9-81ED-4DB2-BD59-A6C34878D82A}">
+                    <a16:rowId val="1"/>
+                  </a:ext>
+                </a:extLst>
+              </a:tr>
+              <a:tr h="838200">
+                <a:tc>
+                  <a:txBody>
+                    <a:bodyPr wrap="square" lIns="0" tIns="0" rIns="0" bIns="0" anchor="ctr">
+                      <a:normAutofit/>
+                    </a:bodyPr>
+                    <a:p>
+                      <a:pPr marL="114300" marR="114300" algn="l">
+                        <a:lnSpc>
+                          <a:spcPct val="120000"/>
+                        </a:lnSpc>
+                      </a:pPr>
+                      <a:r>
+                        <a:rPr sz="1125">
+                          <a:solidFill>
+                            <a:srgbClr val="1A1A1A"/>
+                          </a:solidFill>
+                          <a:latin typeface="Microsoft YaHei"/>
+                          <a:ea typeface="Microsoft YaHei"/>
+                        </a:rPr>
+                        <a:t>说明书助手</a:t>
+                      </a:r>
+                      <a:endParaRPr/>
+                    </a:p>
+                  </a:txBody>
+                  <a:tcPr marL="45720" marR="45720" marT="45720" marB="45720" anchor="ctr">
+                    <a:lnL>
+                      <a:noFill/>
+                    </a:lnL>
+                    <a:lnR>
+                      <a:noFill/>
+                    </a:lnR>
+                    <a:lnT>
+                      <a:noFill/>
+                    </a:lnT>
+                    <a:lnB>
+                      <a:noFill/>
+                    </a:lnB>
+                  </a:tcPr>
+                </a:tc>
+                <a:tc>
+                  <a:txBody>
+                    <a:bodyPr wrap="square" lIns="0" tIns="0" rIns="0" bIns="0" anchor="ctr">
+                      <a:normAutofit/>
+                    </a:bodyPr>
+                    <a:p>
+                      <a:pPr marL="114300" marR="114300" algn="l">
+                        <a:lnSpc>
+                          <a:spcPct val="120000"/>
+                        </a:lnSpc>
+                      </a:pPr>
+                      <a:r>
+                        <a:rPr sz="1125">
+                          <a:solidFill>
+                            <a:srgbClr val="1A1A1A"/>
+                          </a:solidFill>
+                          <a:latin typeface="Microsoft YaHei"/>
+                          <a:ea typeface="Microsoft YaHei"/>
+                        </a:rPr>
+                        <a:t>销售 / 业务</a:t>
+                      </a:r>
+                      <a:endParaRPr/>
+                    </a:p>
+                  </a:txBody>
+                  <a:tcPr marL="45720" marR="45720" marT="45720" marB="45720" anchor="ctr">
+                    <a:lnL>
+                      <a:noFill/>
+                    </a:lnL>
+                    <a:lnR>
+                      <a:noFill/>
+                    </a:lnR>
+                    <a:lnT>
+                      <a:noFill/>
+                    </a:lnT>
+                    <a:lnB>
+                      <a:noFill/>
+                    </a:lnB>
+                  </a:tcPr>
+                </a:tc>
+                <a:tc>
+                  <a:txBody>
+                    <a:bodyPr wrap="square" lIns="0" tIns="0" rIns="0" bIns="0" anchor="ctr">
+                      <a:normAutofit/>
+                    </a:bodyPr>
+                    <a:p>
+                      <a:pPr marL="114300" marR="114300" algn="l">
+                        <a:lnSpc>
+                          <a:spcPct val="120000"/>
+                        </a:lnSpc>
+                      </a:pPr>
+                      <a:r>
+                        <a:rPr sz="1125">
+                          <a:solidFill>
+                            <a:srgbClr val="1A1A1A"/>
+                          </a:solidFill>
+                          <a:latin typeface="Microsoft YaHei"/>
+                          <a:ea typeface="Microsoft YaHei"/>
+                        </a:rPr>
+                        <a:t>TDS 产品库</a:t>
+                      </a:r>
+                      <a:endParaRPr/>
+                    </a:p>
+                  </a:txBody>
+                  <a:tcPr marL="45720" marR="45720" marT="45720" marB="45720" anchor="ctr">
+                    <a:lnL>
+                      <a:noFill/>
+                    </a:lnL>
+                    <a:lnR>
+                      <a:noFill/>
+                    </a:lnR>
+                    <a:lnT>
+                      <a:noFill/>
+                    </a:lnT>
+                    <a:lnB>
+                      <a:noFill/>
+                    </a:lnB>
+                  </a:tcPr>
+                </a:tc>
+                <a:tc>
+                  <a:txBody>
+                    <a:bodyPr wrap="square" lIns="0" tIns="0" rIns="0" bIns="0" anchor="ctr">
+                      <a:normAutofit/>
+                    </a:bodyPr>
+                    <a:p>
+                      <a:pPr marL="114300" marR="114300" algn="l">
+                        <a:lnSpc>
+                          <a:spcPct val="120000"/>
+                        </a:lnSpc>
+                      </a:pPr>
+                      <a:r>
+                        <a:rPr sz="1125">
+                          <a:solidFill>
+                            <a:srgbClr val="1A1A1A"/>
+                          </a:solidFill>
+                          <a:latin typeface="Microsoft YaHei"/>
+                          <a:ea typeface="Microsoft YaHei"/>
+                        </a:rPr>
+                        <a:t>6 模式 / 16 节提示词</a:t>
+                      </a:r>
+                      <a:endParaRPr/>
+                    </a:p>
+                  </a:txBody>
+                  <a:tcPr marL="45720" marR="45720" marT="45720" marB="45720" anchor="ctr">
+                    <a:lnL>
+                      <a:noFill/>
+                    </a:lnL>
+                    <a:lnR>
+                      <a:noFill/>
+                    </a:lnR>
+                    <a:lnT>
+                      <a:noFill/>
+                    </a:lnT>
+                    <a:lnB>
+                      <a:noFill/>
+                    </a:lnB>
+                  </a:tcPr>
+                </a:tc>
+                <a:tc>
+                  <a:txBody>
+                    <a:bodyPr wrap="square" lIns="0" tIns="0" rIns="0" bIns="0" anchor="ctr">
+                      <a:normAutofit/>
+                    </a:bodyPr>
+                    <a:p>
+                      <a:pPr marL="114300" marR="114300" algn="l">
+                        <a:lnSpc>
+                          <a:spcPct val="120000"/>
+                        </a:lnSpc>
+                      </a:pPr>
+                      <a:r>
+                        <a:rPr sz="1125">
+                          <a:solidFill>
+                            <a:srgbClr val="1A1A1A"/>
+                          </a:solidFill>
+                          <a:latin typeface="Microsoft YaHei"/>
+                          <a:ea typeface="Microsoft YaHei"/>
+                        </a:rPr>
+                        <a:t>已上线</a:t>
+                      </a:r>
+                      <a:endParaRPr/>
+                    </a:p>
+                  </a:txBody>
+                  <a:tcPr marL="45720" marR="45720" marT="45720" marB="45720" anchor="ctr">
+                    <a:lnL>
+                      <a:noFill/>
+                    </a:lnL>
+                    <a:lnR>
+                      <a:noFill/>
+                    </a:lnR>
+                    <a:lnT>
+                      <a:noFill/>
+                    </a:lnT>
+                    <a:lnB>
+                      <a:noFill/>
+                    </a:lnB>
+                  </a:tcPr>
+                </a:tc>
+                <a:tc>
+                  <a:txBody>
+                    <a:bodyPr wrap="square" lIns="0" tIns="0" rIns="0" bIns="0" anchor="ctr">
+                      <a:normAutofit/>
+                    </a:bodyPr>
+                    <a:p>
+                      <a:pPr marL="114300" marR="114300" algn="l">
+                        <a:lnSpc>
+                          <a:spcPct val="120000"/>
+                        </a:lnSpc>
+                      </a:pPr>
+                      <a:r>
+                        <a:rPr sz="1125">
+                          <a:solidFill>
+                            <a:srgbClr val="1A1A1A"/>
+                          </a:solidFill>
+                          <a:latin typeface="Microsoft YaHei"/>
+                          <a:ea typeface="Microsoft YaHei"/>
+                        </a:rPr>
+                        <a:t>TDS 咨询秒级应答、选型有据不误导客户</a:t>
+                      </a:r>
+                      <a:endParaRPr/>
+                    </a:p>
+                  </a:txBody>
+                  <a:tcPr marL="45720" marR="45720" marT="45720" marB="45720" anchor="ctr">
+                    <a:lnL>
+                      <a:noFill/>
+                    </a:lnL>
+                    <a:lnR>
+                      <a:noFill/>
+                    </a:lnR>
+                    <a:lnT>
+                      <a:noFill/>
+                    </a:lnT>
+                    <a:lnB>
+                      <a:noFill/>
+                    </a:lnB>
+                  </a:tcPr>
+                </a:tc>
+                <a:extLst>
+                  <a:ext uri="{0D108BD9-81ED-4DB2-BD59-A6C34878D82A}">
+                    <a16:rowId val="2"/>
+                  </a:ext>
+                </a:extLst>
+              </a:tr>
+              <a:tr h="838200">
+                <a:tc>
+                  <a:txBody>
+                    <a:bodyPr wrap="square" lIns="0" tIns="0" rIns="0" bIns="0" anchor="ctr">
+                      <a:normAutofit/>
+                    </a:bodyPr>
+                    <a:p>
+                      <a:pPr marL="114300" marR="114300" algn="l">
+                        <a:lnSpc>
+                          <a:spcPct val="120000"/>
+                        </a:lnSpc>
+                      </a:pPr>
+                      <a:r>
+                        <a:rPr sz="1125">
+                          <a:solidFill>
+                            <a:srgbClr val="1A1A1A"/>
+                          </a:solidFill>
+                          <a:latin typeface="Microsoft YaHei"/>
+                          <a:ea typeface="Microsoft YaHei"/>
+                        </a:rPr>
+                        <a:t>销售 SOP / 全能助手</a:t>
+                      </a:r>
+                      <a:endParaRPr/>
+                    </a:p>
+                  </a:txBody>
+                  <a:tcPr marL="45720" marR="45720" marT="45720" marB="45720" anchor="ctr">
+                    <a:lnL>
+                      <a:noFill/>
+                    </a:lnL>
+                    <a:lnR>
+                      <a:noFill/>
+                    </a:lnR>
+                    <a:lnT>
+                      <a:noFill/>
+                    </a:lnT>
+                    <a:lnB>
+                      <a:noFill/>
+                    </a:lnB>
+                  </a:tcPr>
+                </a:tc>
+                <a:tc>
+                  <a:txBody>
+                    <a:bodyPr wrap="square" lIns="0" tIns="0" rIns="0" bIns="0" anchor="ctr">
+                      <a:normAutofit/>
+                    </a:bodyPr>
+                    <a:p>
+                      <a:pPr marL="114300" marR="114300" algn="l">
+                        <a:lnSpc>
+                          <a:spcPct val="120000"/>
+                        </a:lnSpc>
+                      </a:pPr>
+                      <a:r>
+                        <a:rPr sz="1125">
+                          <a:solidFill>
+                            <a:srgbClr val="1A1A1A"/>
+                          </a:solidFill>
+                          <a:latin typeface="Microsoft YaHei"/>
+                          <a:ea typeface="Microsoft YaHei"/>
+                        </a:rPr>
+                        <a:t>销售</a:t>
+                      </a:r>
+                      <a:endParaRPr/>
+                    </a:p>
+                  </a:txBody>
+                  <a:tcPr marL="45720" marR="45720" marT="45720" marB="45720" anchor="ctr">
+                    <a:lnL>
+                      <a:noFill/>
+                    </a:lnL>
+                    <a:lnR>
+                      <a:noFill/>
+                    </a:lnR>
+                    <a:lnT>
+                      <a:noFill/>
+                    </a:lnT>
+                    <a:lnB>
+                      <a:noFill/>
+                    </a:lnB>
+                  </a:tcPr>
+                </a:tc>
+                <a:tc>
+                  <a:txBody>
+                    <a:bodyPr wrap="square" lIns="0" tIns="0" rIns="0" bIns="0" anchor="ctr">
+                      <a:normAutofit/>
+                    </a:bodyPr>
+                    <a:p>
+                      <a:pPr marL="114300" marR="114300" algn="l">
+                        <a:lnSpc>
+                          <a:spcPct val="120000"/>
+                        </a:lnSpc>
+                      </a:pPr>
+                      <a:r>
+                        <a:rPr sz="1125">
+                          <a:solidFill>
+                            <a:srgbClr val="1A1A1A"/>
+                          </a:solidFill>
+                          <a:latin typeface="Microsoft YaHei"/>
+                          <a:ea typeface="Microsoft YaHei"/>
+                        </a:rPr>
+                        <a:t>7 份 SOP 源文件</a:t>
+                      </a:r>
+                      <a:endParaRPr/>
+                    </a:p>
+                  </a:txBody>
+                  <a:tcPr marL="45720" marR="45720" marT="45720" marB="45720" anchor="ctr">
+                    <a:lnL>
+                      <a:noFill/>
+                    </a:lnL>
+                    <a:lnR>
+                      <a:noFill/>
+                    </a:lnR>
+                    <a:lnT>
+                      <a:noFill/>
+                    </a:lnT>
+                    <a:lnB>
+                      <a:noFill/>
+                    </a:lnB>
+                  </a:tcPr>
+                </a:tc>
+                <a:tc>
+                  <a:txBody>
+                    <a:bodyPr wrap="square" lIns="0" tIns="0" rIns="0" bIns="0" anchor="ctr">
+                      <a:normAutofit/>
+                    </a:bodyPr>
+                    <a:p>
+                      <a:pPr marL="114300" marR="114300" algn="l">
+                        <a:lnSpc>
+                          <a:spcPct val="120000"/>
+                        </a:lnSpc>
+                      </a:pPr>
+                      <a:r>
+                        <a:rPr sz="1125">
+                          <a:solidFill>
+                            <a:srgbClr val="1A1A1A"/>
+                          </a:solidFill>
+                          <a:latin typeface="Microsoft YaHei"/>
+                          <a:ea typeface="Microsoft YaHei"/>
+                        </a:rPr>
+                        <a:t>6 场景触发</a:t>
+                      </a:r>
+                      <a:endParaRPr/>
+                    </a:p>
+                  </a:txBody>
+                  <a:tcPr marL="45720" marR="45720" marT="45720" marB="45720" anchor="ctr">
+                    <a:lnL>
+                      <a:noFill/>
+                    </a:lnL>
+                    <a:lnR>
+                      <a:noFill/>
+                    </a:lnR>
+                    <a:lnT>
+                      <a:noFill/>
+                    </a:lnT>
+                    <a:lnB>
+                      <a:noFill/>
+                    </a:lnB>
+                  </a:tcPr>
+                </a:tc>
+                <a:tc>
+                  <a:txBody>
+                    <a:bodyPr wrap="square" lIns="0" tIns="0" rIns="0" bIns="0" anchor="ctr">
+                      <a:normAutofit/>
+                    </a:bodyPr>
+                    <a:p>
+                      <a:pPr marL="114300" marR="114300" algn="l">
+                        <a:lnSpc>
+                          <a:spcPct val="120000"/>
+                        </a:lnSpc>
+                      </a:pPr>
+                      <a:r>
+                        <a:rPr sz="1125">
+                          <a:solidFill>
+                            <a:srgbClr val="1A1A1A"/>
+                          </a:solidFill>
+                          <a:latin typeface="Microsoft YaHei"/>
+                          <a:ea typeface="Microsoft YaHei"/>
+                        </a:rPr>
+                        <a:t>已上线</a:t>
+                      </a:r>
+                      <a:endParaRPr/>
+                    </a:p>
+                  </a:txBody>
+                  <a:tcPr marL="45720" marR="45720" marT="45720" marB="45720" anchor="ctr">
+                    <a:lnL>
+                      <a:noFill/>
+                    </a:lnL>
+                    <a:lnR>
+                      <a:noFill/>
+                    </a:lnR>
+                    <a:lnT>
+                      <a:noFill/>
+                    </a:lnT>
+                    <a:lnB>
+                      <a:noFill/>
+                    </a:lnB>
+                  </a:tcPr>
+                </a:tc>
+                <a:tc>
+                  <a:txBody>
+                    <a:bodyPr wrap="square" lIns="0" tIns="0" rIns="0" bIns="0" anchor="ctr">
+                      <a:normAutofit/>
+                    </a:bodyPr>
+                    <a:p>
+                      <a:pPr marL="114300" marR="114300" algn="l">
+                        <a:lnSpc>
+                          <a:spcPct val="120000"/>
+                        </a:lnSpc>
+                      </a:pPr>
+                      <a:r>
+                        <a:rPr sz="1125">
+                          <a:solidFill>
+                            <a:srgbClr val="1A1A1A"/>
+                          </a:solidFill>
+                          <a:latin typeface="Microsoft YaHei"/>
+                          <a:ea typeface="Microsoft YaHei"/>
+                        </a:rPr>
+                        <a:t>销售动作标准化、话术统一、新人即上手</a:t>
+                      </a:r>
+                      <a:endParaRPr/>
+                    </a:p>
+                  </a:txBody>
+                  <a:tcPr marL="45720" marR="45720" marT="45720" marB="45720" anchor="ctr">
+                    <a:lnL>
+                      <a:noFill/>
+                    </a:lnL>
+                    <a:lnR>
+                      <a:noFill/>
+                    </a:lnR>
+                    <a:lnT>
+                      <a:noFill/>
+                    </a:lnT>
+                    <a:lnB>
+                      <a:noFill/>
+                    </a:lnB>
+                  </a:tcPr>
+                </a:tc>
+                <a:extLst>
+                  <a:ext uri="{0D108BD9-81ED-4DB2-BD59-A6C34878D82A}">
+                    <a16:rowId val="3"/>
+                  </a:ext>
+                </a:extLst>
+              </a:tr>
+              <a:tr h="838200">
+                <a:tc>
+                  <a:txBody>
+                    <a:bodyPr wrap="square" lIns="0" tIns="0" rIns="0" bIns="0" anchor="ctr">
+                      <a:normAutofit/>
+                    </a:bodyPr>
+                    <a:p>
+                      <a:pPr marL="114300" marR="114300" algn="l">
+                        <a:lnSpc>
+                          <a:spcPct val="120000"/>
+                        </a:lnSpc>
+                      </a:pPr>
+                      <a:r>
+                        <a:rPr sz="1125">
+                          <a:solidFill>
+                            <a:srgbClr val="1A1A1A"/>
+                          </a:solidFill>
+                          <a:latin typeface="Microsoft YaHei"/>
+                          <a:ea typeface="Microsoft YaHei"/>
+                        </a:rPr>
+                        <a:t>业务智能助理</a:t>
+                      </a:r>
+                      <a:endParaRPr/>
+                    </a:p>
+                  </a:txBody>
+                  <a:tcPr marL="45720" marR="45720" marT="45720" marB="45720" anchor="ctr">
+                    <a:lnL>
+                      <a:noFill/>
+                    </a:lnL>
+                    <a:lnR>
+                      <a:noFill/>
+                    </a:lnR>
+                    <a:lnT>
+                      <a:noFill/>
+                    </a:lnT>
+                    <a:lnB>
+                      <a:noFill/>
+                    </a:lnB>
+                  </a:tcPr>
+                </a:tc>
+                <a:tc>
+                  <a:txBody>
+                    <a:bodyPr wrap="square" lIns="0" tIns="0" rIns="0" bIns="0" anchor="ctr">
+                      <a:normAutofit/>
+                    </a:bodyPr>
+                    <a:p>
+                      <a:pPr marL="114300" marR="114300" algn="l">
+                        <a:lnSpc>
+                          <a:spcPct val="120000"/>
+                        </a:lnSpc>
+                      </a:pPr>
+                      <a:r>
+                        <a:rPr sz="1125">
+                          <a:solidFill>
+                            <a:srgbClr val="1A1A1A"/>
+                          </a:solidFill>
+                          <a:latin typeface="Microsoft YaHei"/>
+                          <a:ea typeface="Microsoft YaHei"/>
+                        </a:rPr>
+                        <a:t>营销中心 / 业务</a:t>
+                      </a:r>
+                      <a:endParaRPr/>
+                    </a:p>
+                  </a:txBody>
+                  <a:tcPr marL="45720" marR="45720" marT="45720" marB="45720" anchor="ctr">
+                    <a:lnL>
+                      <a:noFill/>
+                    </a:lnL>
+                    <a:lnR>
+                      <a:noFill/>
+                    </a:lnR>
+                    <a:lnT>
+                      <a:noFill/>
+                    </a:lnT>
+                    <a:lnB>
+                      <a:noFill/>
+                    </a:lnB>
+                  </a:tcPr>
+                </a:tc>
+                <a:tc>
+                  <a:txBody>
+                    <a:bodyPr wrap="square" lIns="0" tIns="0" rIns="0" bIns="0" anchor="ctr">
+                      <a:normAutofit/>
+                    </a:bodyPr>
+                    <a:p>
+                      <a:pPr marL="114300" marR="114300" algn="l">
+                        <a:lnSpc>
+                          <a:spcPct val="120000"/>
+                        </a:lnSpc>
+                      </a:pPr>
+                      <a:r>
+                        <a:rPr sz="1125">
+                          <a:solidFill>
+                            <a:srgbClr val="1A1A1A"/>
+                          </a:solidFill>
+                          <a:latin typeface="Microsoft YaHei"/>
+                          <a:ea typeface="Microsoft YaHei"/>
+                        </a:rPr>
+                        <a:t>SKILL.md + templates + role</a:t>
+                      </a:r>
+                      <a:endParaRPr/>
+                    </a:p>
+                  </a:txBody>
+                  <a:tcPr marL="45720" marR="45720" marT="45720" marB="45720" anchor="ctr">
+                    <a:lnL>
+                      <a:noFill/>
+                    </a:lnL>
+                    <a:lnR>
+                      <a:noFill/>
+                    </a:lnR>
+                    <a:lnT>
+                      <a:noFill/>
+                    </a:lnT>
+                    <a:lnB>
+                      <a:noFill/>
+                    </a:lnB>
+                  </a:tcPr>
+                </a:tc>
+                <a:tc>
+                  <a:txBody>
+                    <a:bodyPr wrap="square" lIns="0" tIns="0" rIns="0" bIns="0" anchor="ctr">
+                      <a:normAutofit/>
+                    </a:bodyPr>
+                    <a:p>
+                      <a:pPr marL="114300" marR="114300" algn="l">
+                        <a:lnSpc>
+                          <a:spcPct val="120000"/>
+                        </a:lnSpc>
+                      </a:pPr>
+                      <a:r>
+                        <a:rPr sz="1125">
+                          <a:solidFill>
+                            <a:srgbClr val="1A1A1A"/>
+                          </a:solidFill>
+                          <a:latin typeface="Microsoft YaHei"/>
+                          <a:ea typeface="Microsoft YaHei"/>
+                        </a:rPr>
+                        <a:t>3 阶段 / 4 岗位自适应</a:t>
+                      </a:r>
+                      <a:endParaRPr/>
+                    </a:p>
+                  </a:txBody>
+                  <a:tcPr marL="45720" marR="45720" marT="45720" marB="45720" anchor="ctr">
+                    <a:lnL>
+                      <a:noFill/>
+                    </a:lnL>
+                    <a:lnR>
+                      <a:noFill/>
+                    </a:lnR>
+                    <a:lnT>
+                      <a:noFill/>
+                    </a:lnT>
+                    <a:lnB>
+                      <a:noFill/>
+                    </a:lnB>
+                  </a:tcPr>
+                </a:tc>
+                <a:tc>
+                  <a:txBody>
+                    <a:bodyPr wrap="square" lIns="0" tIns="0" rIns="0" bIns="0" anchor="ctr">
+                      <a:normAutofit/>
+                    </a:bodyPr>
+                    <a:p>
+                      <a:pPr marL="114300" marR="114300" algn="l">
+                        <a:lnSpc>
+                          <a:spcPct val="120000"/>
+                        </a:lnSpc>
+                      </a:pPr>
+                      <a:r>
+                        <a:rPr sz="1125" b="1">
+                          <a:solidFill>
+                            <a:srgbClr val="C0504D"/>
+                          </a:solidFill>
+                          <a:latin typeface="Microsoft YaHei"/>
+                          <a:ea typeface="Microsoft YaHei"/>
+                        </a:rPr>
+                        <a:t>迭代中 v5</a:t>
+                      </a:r>
+                      <a:endParaRPr/>
+                    </a:p>
+                  </a:txBody>
+                  <a:tcPr marL="45720" marR="45720" marT="45720" marB="45720" anchor="ctr">
+                    <a:lnL>
+                      <a:noFill/>
+                    </a:lnL>
+                    <a:lnR>
+                      <a:noFill/>
+                    </a:lnR>
+                    <a:lnT>
+                      <a:noFill/>
+                    </a:lnT>
+                    <a:lnB>
+                      <a:noFill/>
+                    </a:lnB>
+                  </a:tcPr>
+                </a:tc>
+                <a:tc>
+                  <a:txBody>
+                    <a:bodyPr wrap="square" lIns="0" tIns="0" rIns="0" bIns="0" anchor="ctr">
+                      <a:normAutofit/>
+                    </a:bodyPr>
+                    <a:p>
+                      <a:pPr marL="114300" marR="114300" algn="l">
+                        <a:lnSpc>
+                          <a:spcPct val="120000"/>
+                        </a:lnSpc>
+                      </a:pPr>
+                      <a:r>
+                        <a:rPr sz="1125">
+                          <a:solidFill>
+                            <a:srgbClr val="1A1A1A"/>
+                          </a:solidFill>
+                          <a:latin typeface="Microsoft YaHei"/>
+                          <a:ea typeface="Microsoft YaHei"/>
+                        </a:rPr>
+                        <a:t>客户问题全流程 AI 化 + 合规红线校验</a:t>
+                      </a:r>
+                      <a:endParaRPr/>
+                    </a:p>
+                  </a:txBody>
+                  <a:tcPr marL="45720" marR="45720" marT="45720" marB="45720" anchor="ctr">
+                    <a:lnL>
+                      <a:noFill/>
+                    </a:lnL>
+                    <a:lnR>
+                      <a:noFill/>
+                    </a:lnR>
+                    <a:lnT>
+                      <a:noFill/>
+                    </a:lnT>
+                    <a:lnB>
+                      <a:noFill/>
+                    </a:lnB>
+                  </a:tcPr>
+                </a:tc>
+                <a:extLst>
+                  <a:ext uri="{0D108BD9-81ED-4DB2-BD59-A6C34878D82A}">
+                    <a16:rowId val="4"/>
+                  </a:ext>
+                </a:extLst>
+              </a:tr>
+              <a:tr h="838200">
+                <a:tc>
+                  <a:txBody>
+                    <a:bodyPr wrap="square" lIns="0" tIns="0" rIns="0" bIns="0" anchor="ctr">
+                      <a:normAutofit/>
+                    </a:bodyPr>
+                    <a:p>
+                      <a:pPr marL="114300" marR="114300" algn="l">
+                        <a:lnSpc>
+                          <a:spcPct val="120000"/>
+                        </a:lnSpc>
+                      </a:pPr>
+                      <a:r>
+                        <a:rPr sz="1125">
+                          <a:solidFill>
+                            <a:srgbClr val="1A1A1A"/>
+                          </a:solidFill>
+                          <a:latin typeface="Microsoft YaHei"/>
+                          <a:ea typeface="Microsoft YaHei"/>
+                        </a:rPr>
+                        <a:t>应用工艺助手</a:t>
+                      </a:r>
+                      <a:endParaRPr/>
+                    </a:p>
+                  </a:txBody>
+                  <a:tcPr marL="45720" marR="45720" marT="45720" marB="45720" anchor="ctr">
+                    <a:lnL>
+                      <a:noFill/>
+                    </a:lnL>
+                    <a:lnR>
+                      <a:noFill/>
+                    </a:lnR>
+                    <a:lnT>
+                      <a:noFill/>
+                    </a:lnT>
+                    <a:lnB>
+                      <a:noFill/>
+                    </a:lnB>
+                  </a:tcPr>
+                </a:tc>
+                <a:tc>
+                  <a:txBody>
+                    <a:bodyPr wrap="square" lIns="0" tIns="0" rIns="0" bIns="0" anchor="ctr">
+                      <a:normAutofit/>
+                    </a:bodyPr>
+                    <a:p>
+                      <a:pPr marL="114300" marR="114300" algn="l">
+                        <a:lnSpc>
+                          <a:spcPct val="120000"/>
+                        </a:lnSpc>
+                      </a:pPr>
+                      <a:r>
+                        <a:rPr sz="1125">
+                          <a:solidFill>
+                            <a:srgbClr val="1A1A1A"/>
+                          </a:solidFill>
+                          <a:latin typeface="Microsoft YaHei"/>
+                          <a:ea typeface="Microsoft YaHei"/>
+                        </a:rPr>
+                        <a:t>研发为主 + 业务</a:t>
+                      </a:r>
+                      <a:endParaRPr/>
+                    </a:p>
+                  </a:txBody>
+                  <a:tcPr marL="45720" marR="45720" marT="45720" marB="45720" anchor="ctr">
+                    <a:lnL>
+                      <a:noFill/>
+                    </a:lnL>
+                    <a:lnR>
+                      <a:noFill/>
+                    </a:lnR>
+                    <a:lnT>
+                      <a:noFill/>
+                    </a:lnT>
+                    <a:lnB>
+                      <a:noFill/>
+                    </a:lnB>
+                  </a:tcPr>
+                </a:tc>
+                <a:tc>
+                  <a:txBody>
+                    <a:bodyPr wrap="square" lIns="0" tIns="0" rIns="0" bIns="0" anchor="ctr">
+                      <a:normAutofit/>
+                    </a:bodyPr>
+                    <a:p>
+                      <a:pPr marL="114300" marR="114300" algn="l">
+                        <a:lnSpc>
+                          <a:spcPct val="120000"/>
+                        </a:lnSpc>
+                      </a:pPr>
+                      <a:r>
+                        <a:rPr sz="1125">
+                          <a:solidFill>
+                            <a:srgbClr val="1A1A1A"/>
+                          </a:solidFill>
+                          <a:latin typeface="Microsoft YaHei"/>
+                          <a:ea typeface="Microsoft YaHei"/>
+                        </a:rPr>
+                        <a:t>工艺手册 + 研发培训</a:t>
+                      </a:r>
+                      <a:endParaRPr/>
+                    </a:p>
+                  </a:txBody>
+                  <a:tcPr marL="45720" marR="45720" marT="45720" marB="45720" anchor="ctr">
+                    <a:lnL>
+                      <a:noFill/>
+                    </a:lnL>
+                    <a:lnR>
+                      <a:noFill/>
+                    </a:lnR>
+                    <a:lnT>
+                      <a:noFill/>
+                    </a:lnT>
+                    <a:lnB>
+                      <a:noFill/>
+                    </a:lnB>
+                  </a:tcPr>
+                </a:tc>
+                <a:tc>
+                  <a:txBody>
+                    <a:bodyPr wrap="square" lIns="0" tIns="0" rIns="0" bIns="0" anchor="ctr">
+                      <a:normAutofit/>
+                    </a:bodyPr>
+                    <a:p>
+                      <a:pPr marL="114300" marR="114300" algn="l">
+                        <a:lnSpc>
+                          <a:spcPct val="120000"/>
+                        </a:lnSpc>
+                      </a:pPr>
+                      <a:r>
+                        <a:rPr sz="1125">
+                          <a:solidFill>
+                            <a:srgbClr val="1A1A1A"/>
+                          </a:solidFill>
+                          <a:latin typeface="Microsoft YaHei"/>
+                          <a:ea typeface="Microsoft YaHei"/>
+                        </a:rPr>
+                        <a:t>20+ 疵病排查</a:t>
+                      </a:r>
+                      <a:endParaRPr/>
+                    </a:p>
+                  </a:txBody>
+                  <a:tcPr marL="45720" marR="45720" marT="45720" marB="45720" anchor="ctr">
+                    <a:lnL>
+                      <a:noFill/>
+                    </a:lnL>
+                    <a:lnR>
+                      <a:noFill/>
+                    </a:lnR>
+                    <a:lnT>
+                      <a:noFill/>
+                    </a:lnT>
+                    <a:lnB>
+                      <a:noFill/>
+                    </a:lnB>
+                  </a:tcPr>
+                </a:tc>
+                <a:tc>
+                  <a:txBody>
+                    <a:bodyPr wrap="square" lIns="0" tIns="0" rIns="0" bIns="0" anchor="ctr">
+                      <a:normAutofit/>
+                    </a:bodyPr>
+                    <a:p>
+                      <a:pPr marL="114300" marR="114300" algn="l">
+                        <a:lnSpc>
+                          <a:spcPct val="120000"/>
+                        </a:lnSpc>
+                      </a:pPr>
+                      <a:r>
+                        <a:rPr sz="1125">
+                          <a:solidFill>
+                            <a:srgbClr val="1A1A1A"/>
+                          </a:solidFill>
+                          <a:latin typeface="Microsoft YaHei"/>
+                          <a:ea typeface="Microsoft YaHei"/>
+                        </a:rPr>
+                        <a:t>已上线</a:t>
+                      </a:r>
+                      <a:endParaRPr/>
+                    </a:p>
+                  </a:txBody>
+                  <a:tcPr marL="45720" marR="45720" marT="45720" marB="45720" anchor="ctr">
+                    <a:lnL>
+                      <a:noFill/>
+                    </a:lnL>
+                    <a:lnR>
+                      <a:noFill/>
+                    </a:lnR>
+                    <a:lnT>
+                      <a:noFill/>
+                    </a:lnT>
+                    <a:lnB>
+                      <a:noFill/>
+                    </a:lnB>
+                  </a:tcPr>
+                </a:tc>
+                <a:tc>
+                  <a:txBody>
+                    <a:bodyPr wrap="square" lIns="0" tIns="0" rIns="0" bIns="0" anchor="ctr">
+                      <a:normAutofit/>
+                    </a:bodyPr>
+                    <a:p>
+                      <a:pPr marL="114300" marR="114300" algn="l">
+                        <a:lnSpc>
+                          <a:spcPct val="120000"/>
+                        </a:lnSpc>
+                      </a:pPr>
+                      <a:r>
+                        <a:rPr sz="1125">
+                          <a:solidFill>
+                            <a:srgbClr val="1A1A1A"/>
+                          </a:solidFill>
+                          <a:latin typeface="Microsoft YaHei"/>
+                          <a:ea typeface="Microsoft YaHei"/>
+                        </a:rPr>
+                        <a:t>染整专业问答、客户质疑标准答案</a:t>
+                      </a:r>
+                      <a:endParaRPr/>
+                    </a:p>
+                  </a:txBody>
+                  <a:tcPr marL="45720" marR="45720" marT="45720" marB="45720" anchor="ctr">
+                    <a:lnL>
+                      <a:noFill/>
+                    </a:lnL>
+                    <a:lnR>
+                      <a:noFill/>
+                    </a:lnR>
+                    <a:lnT>
+                      <a:noFill/>
+                    </a:lnT>
+                    <a:lnB>
+                      <a:noFill/>
+                    </a:lnB>
+                  </a:tcPr>
+                </a:tc>
+                <a:extLst>
+                  <a:ext uri="{0D108BD9-81ED-4DB2-BD59-A6C34878D82A}">
+                    <a16:rowId val="5"/>
+                  </a:ext>
+                </a:extLst>
+              </a:tr>
+            </a:tbl>
+          </a:graphicData>
+        </a:graphic>
+      </p:graphicFrame>
+      <p:sp>
+        <p:nvSpPr>
+          <p:cNvPr id="35" name="" descr="{&quot;isTemplate&quot;:true,&quot;type&quot;:&quot;text&quot;}"/>
           <p:cNvSpPr txBox="1"/>
           <p:nvPr/>
         </p:nvSpPr>
         <p:spPr>
           <a:xfrm rot="0" flipH="0" flipV="0">
-            <a:off x="2152650" y="1447800"/>
-            <a:ext cx="342900" cy="647700"/>
-          </a:xfrm>
-          <a:prstGeom prst="rect"/>
-        </p:spPr>
-        <p:txBody>
-          <a:bodyPr wrap="none" lIns="0" tIns="0" rIns="0" bIns="0"/>
-          <a:p>
-            <a:pPr>
-              <a:lnSpc>
-                <a:spcPct val="100000"/>
-              </a:lnSpc>
-            </a:pPr>
-            <a:r>
-              <a:rPr lang="en-US" sz="4200" b="1">
-                <a:solidFill>
-                  <a:srgbClr val="4472C4"/>
-                </a:solidFill>
-                <a:latin typeface="微软雅黑"/>
-                <a:ea typeface="微软雅黑"/>
-              </a:rPr>
-              <a:t>5</a:t>
-            </a:r>
-            <a:endParaRPr/>
-          </a:p>
-        </p:txBody>
-      </p:sp>
-      <p:sp>
-        <p:nvSpPr>
-          <p:cNvPr id="31" name="" descr="{&quot;isTemplate&quot;:true,&quot;type&quot;:&quot;text&quot;}"/>
-          <p:cNvSpPr txBox="1"/>
-          <p:nvPr/>
-        </p:nvSpPr>
-        <p:spPr>
-          <a:xfrm rot="0" flipH="0" flipV="0">
-            <a:off x="1714500" y="2152650"/>
-            <a:ext cx="1209675" cy="209550"/>
-          </a:xfrm>
-          <a:prstGeom prst="rect"/>
-        </p:spPr>
-        <p:txBody>
-          <a:bodyPr wrap="none" lIns="0" tIns="0" rIns="0" bIns="0"/>
-          <a:p>
-            <a:pPr>
-              <a:lnSpc>
-                <a:spcPct val="100000"/>
-              </a:lnSpc>
-            </a:pPr>
-            <a:r>
-              <a:rPr lang="zh-CN" sz="1350">
-                <a:solidFill>
-                  <a:srgbClr val="1A1A1A"/>
-                </a:solidFill>
-                <a:latin typeface="微软雅黑"/>
-                <a:ea typeface="微软雅黑"/>
-              </a:rPr>
-              <a:t>自研应用</a:t>
-            </a:r>
-            <a:r>
-              <a:rPr lang="en-US" sz="1350">
-                <a:solidFill>
-                  <a:srgbClr val="1A1A1A"/>
-                </a:solidFill>
-                <a:latin typeface="微软雅黑"/>
-                <a:ea typeface="微软雅黑"/>
-              </a:rPr>
-              <a:t> / </a:t>
-            </a:r>
-            <a:r>
-              <a:rPr lang="zh-CN" sz="1350">
-                <a:solidFill>
-                  <a:srgbClr val="1A1A1A"/>
-                </a:solidFill>
-                <a:latin typeface="微软雅黑"/>
-                <a:ea typeface="微软雅黑"/>
-              </a:rPr>
-              <a:t>工具</a:t>
-            </a:r>
-            <a:endParaRPr/>
-          </a:p>
-        </p:txBody>
-      </p:sp>
-      <p:sp>
-        <p:nvSpPr>
-          <p:cNvPr id="32" name=""/>
-          <p:cNvSpPr/>
-          <p:nvPr/>
-        </p:nvSpPr>
-        <p:spPr>
-          <a:xfrm rot="0" flipH="0" flipV="0">
-            <a:off x="4314825" y="1238250"/>
-            <a:ext cx="3562350" cy="1333500"/>
-          </a:xfrm>
-          <a:prstGeom prst="roundRect">
-            <a:avLst>
-              <a:gd name="adj" fmla="val 7143"/>
-            </a:avLst>
-          </a:prstGeom>
-          <a:solidFill>
-            <a:srgbClr val="F4F7FC"/>
-          </a:solidFill>
-          <a:ln/>
-        </p:spPr>
-        <p:txBody>
-          <a:bodyPr/>
-          <a:p/>
-        </p:txBody>
-      </p:sp>
-      <p:sp>
-        <p:nvSpPr>
-          <p:cNvPr id="33" name="" descr="{&quot;isTemplate&quot;:true,&quot;type&quot;:&quot;text&quot;}"/>
-          <p:cNvSpPr txBox="1"/>
-          <p:nvPr/>
-        </p:nvSpPr>
-        <p:spPr>
-          <a:xfrm rot="0" flipH="0" flipV="0">
-            <a:off x="5924550" y="1447800"/>
-            <a:ext cx="342900" cy="647700"/>
-          </a:xfrm>
-          <a:prstGeom prst="rect"/>
-        </p:spPr>
-        <p:txBody>
-          <a:bodyPr wrap="none" lIns="0" tIns="0" rIns="0" bIns="0"/>
-          <a:p>
-            <a:pPr>
-              <a:lnSpc>
-                <a:spcPct val="100000"/>
-              </a:lnSpc>
-            </a:pPr>
-            <a:r>
-              <a:rPr lang="en-US" sz="4200" b="1">
-                <a:solidFill>
-                  <a:srgbClr val="4472C4"/>
-                </a:solidFill>
-                <a:latin typeface="微软雅黑"/>
-                <a:ea typeface="微软雅黑"/>
-              </a:rPr>
-              <a:t>2</a:t>
-            </a:r>
-            <a:endParaRPr/>
-          </a:p>
-        </p:txBody>
-      </p:sp>
-      <p:sp>
-        <p:nvSpPr>
-          <p:cNvPr id="34" name="" descr="{&quot;isTemplate&quot;:true,&quot;type&quot;:&quot;text&quot;}"/>
-          <p:cNvSpPr txBox="1"/>
-          <p:nvPr/>
-        </p:nvSpPr>
-        <p:spPr>
-          <a:xfrm rot="0" flipH="0" flipV="0">
-            <a:off x="5743575" y="2152650"/>
-            <a:ext cx="704850" cy="209550"/>
-          </a:xfrm>
-          <a:prstGeom prst="rect"/>
-        </p:spPr>
-        <p:txBody>
-          <a:bodyPr wrap="none" lIns="0" tIns="0" rIns="0" bIns="0"/>
-          <a:p>
-            <a:pPr>
-              <a:lnSpc>
-                <a:spcPct val="100000"/>
-              </a:lnSpc>
-            </a:pPr>
-            <a:r>
-              <a:rPr lang="zh-CN" sz="1350">
-                <a:solidFill>
-                  <a:srgbClr val="1A1A1A"/>
-                </a:solidFill>
-                <a:latin typeface="微软雅黑"/>
-                <a:ea typeface="微软雅黑"/>
-              </a:rPr>
-              <a:t>复用</a:t>
-            </a:r>
-            <a:r>
-              <a:rPr lang="en-US" sz="1350">
-                <a:solidFill>
-                  <a:srgbClr val="1A1A1A"/>
-                </a:solidFill>
-                <a:latin typeface="微软雅黑"/>
-                <a:ea typeface="微软雅黑"/>
-              </a:rPr>
-              <a:t> Skill</a:t>
-            </a:r>
-            <a:endParaRPr/>
-          </a:p>
-        </p:txBody>
-      </p:sp>
-      <p:sp>
-        <p:nvSpPr>
-          <p:cNvPr id="35" name=""/>
-          <p:cNvSpPr/>
-          <p:nvPr/>
-        </p:nvSpPr>
-        <p:spPr>
-          <a:xfrm rot="0" flipH="0" flipV="0">
-            <a:off x="8086725" y="1238250"/>
-            <a:ext cx="3571875" cy="1333500"/>
-          </a:xfrm>
-          <a:prstGeom prst="roundRect">
-            <a:avLst>
-              <a:gd name="adj" fmla="val 7143"/>
-            </a:avLst>
-          </a:prstGeom>
-          <a:solidFill>
-            <a:srgbClr val="F4F7FC"/>
-          </a:solidFill>
-          <a:ln/>
-        </p:spPr>
-        <p:txBody>
-          <a:bodyPr/>
-          <a:p/>
-        </p:txBody>
-      </p:sp>
-      <p:sp>
-        <p:nvSpPr>
-          <p:cNvPr id="36" name="" descr="{&quot;isTemplate&quot;:true,&quot;type&quot;:&quot;text&quot;}"/>
-          <p:cNvSpPr txBox="1"/>
-          <p:nvPr/>
-        </p:nvSpPr>
-        <p:spPr>
-          <a:xfrm rot="0" flipH="0" flipV="0">
-            <a:off x="9705975" y="1447800"/>
-            <a:ext cx="342900" cy="647700"/>
-          </a:xfrm>
-          <a:prstGeom prst="rect"/>
-        </p:spPr>
-        <p:txBody>
-          <a:bodyPr wrap="none" lIns="0" tIns="0" rIns="0" bIns="0"/>
-          <a:p>
-            <a:pPr>
-              <a:lnSpc>
-                <a:spcPct val="100000"/>
-              </a:lnSpc>
-            </a:pPr>
-            <a:r>
-              <a:rPr lang="en-US" sz="4200" b="1">
-                <a:solidFill>
-                  <a:srgbClr val="4472C4"/>
-                </a:solidFill>
-                <a:latin typeface="微软雅黑"/>
-                <a:ea typeface="微软雅黑"/>
-              </a:rPr>
-              <a:t>4</a:t>
-            </a:r>
-            <a:endParaRPr/>
-          </a:p>
-        </p:txBody>
-      </p:sp>
-      <p:sp>
-        <p:nvSpPr>
-          <p:cNvPr id="37" name="" descr="{&quot;isTemplate&quot;:true,&quot;type&quot;:&quot;text&quot;}"/>
-          <p:cNvSpPr txBox="1"/>
-          <p:nvPr/>
-        </p:nvSpPr>
-        <p:spPr>
-          <a:xfrm rot="0" flipH="0" flipV="0">
-            <a:off x="9448800" y="2152650"/>
-            <a:ext cx="857250" cy="209550"/>
-          </a:xfrm>
-          <a:prstGeom prst="rect"/>
-        </p:spPr>
-        <p:txBody>
-          <a:bodyPr wrap="none" lIns="0" tIns="0" rIns="0" bIns="0"/>
-          <a:p>
-            <a:pPr>
-              <a:lnSpc>
-                <a:spcPct val="100000"/>
-              </a:lnSpc>
-            </a:pPr>
-            <a:r>
-              <a:rPr lang="zh-CN" sz="1350">
-                <a:solidFill>
-                  <a:srgbClr val="1A1A1A"/>
-                </a:solidFill>
-                <a:latin typeface="微软雅黑"/>
-                <a:ea typeface="微软雅黑"/>
-              </a:rPr>
-              <a:t>业务智能体</a:t>
-            </a:r>
-            <a:endParaRPr/>
-          </a:p>
-        </p:txBody>
-      </p:sp>
-      <p:sp>
-        <p:nvSpPr>
-          <p:cNvPr id="38" name=""/>
-          <p:cNvSpPr/>
-          <p:nvPr/>
-        </p:nvSpPr>
-        <p:spPr>
-          <a:xfrm rot="0" flipH="0" flipV="0">
-            <a:off x="533400" y="2781300"/>
-            <a:ext cx="3571875" cy="1333500"/>
-          </a:xfrm>
-          <a:prstGeom prst="roundRect">
-            <a:avLst>
-              <a:gd name="adj" fmla="val 7143"/>
-            </a:avLst>
-          </a:prstGeom>
-          <a:solidFill>
-            <a:srgbClr val="F4F7FC"/>
-          </a:solidFill>
-          <a:ln/>
-        </p:spPr>
-        <p:txBody>
-          <a:bodyPr/>
-          <a:p/>
-        </p:txBody>
-      </p:sp>
-      <p:sp>
-        <p:nvSpPr>
-          <p:cNvPr id="39" name="" descr="{&quot;isTemplate&quot;:true,&quot;type&quot;:&quot;text&quot;}"/>
-          <p:cNvSpPr txBox="1"/>
-          <p:nvPr/>
-        </p:nvSpPr>
-        <p:spPr>
-          <a:xfrm rot="0" flipH="0" flipV="0">
-            <a:off x="1981200" y="2990850"/>
-            <a:ext cx="685800" cy="647700"/>
-          </a:xfrm>
-          <a:prstGeom prst="rect"/>
-        </p:spPr>
-        <p:txBody>
-          <a:bodyPr wrap="none" lIns="0" tIns="0" rIns="0" bIns="0"/>
-          <a:p>
-            <a:pPr>
-              <a:lnSpc>
-                <a:spcPct val="100000"/>
-              </a:lnSpc>
-            </a:pPr>
-            <a:r>
-              <a:rPr lang="en-US" sz="4200" b="1">
-                <a:solidFill>
-                  <a:srgbClr val="4472C4"/>
-                </a:solidFill>
-                <a:latin typeface="微软雅黑"/>
-                <a:ea typeface="微软雅黑"/>
-              </a:rPr>
-              <a:t>37</a:t>
-            </a:r>
-            <a:endParaRPr/>
-          </a:p>
-        </p:txBody>
-      </p:sp>
-      <p:sp>
-        <p:nvSpPr>
-          <p:cNvPr id="40" name="" descr="{&quot;isTemplate&quot;:true,&quot;type&quot;:&quot;text&quot;}"/>
-          <p:cNvSpPr txBox="1"/>
-          <p:nvPr/>
-        </p:nvSpPr>
-        <p:spPr>
-          <a:xfrm rot="0" flipH="0" flipV="0">
-            <a:off x="1895475" y="3695700"/>
-            <a:ext cx="857250" cy="209550"/>
-          </a:xfrm>
-          <a:prstGeom prst="rect"/>
-        </p:spPr>
-        <p:txBody>
-          <a:bodyPr wrap="none" lIns="0" tIns="0" rIns="0" bIns="0"/>
-          <a:p>
-            <a:pPr>
-              <a:lnSpc>
-                <a:spcPct val="100000"/>
-              </a:lnSpc>
-            </a:pPr>
-            <a:r>
-              <a:rPr lang="zh-CN" sz="1350">
-                <a:solidFill>
-                  <a:srgbClr val="1A1A1A"/>
-                </a:solidFill>
-                <a:latin typeface="微软雅黑"/>
-                <a:ea typeface="微软雅黑"/>
-              </a:rPr>
-              <a:t>平台验收项</a:t>
-            </a:r>
-            <a:endParaRPr/>
-          </a:p>
-        </p:txBody>
-      </p:sp>
-      <p:sp>
-        <p:nvSpPr>
-          <p:cNvPr id="41" name=""/>
-          <p:cNvSpPr/>
-          <p:nvPr/>
-        </p:nvSpPr>
-        <p:spPr>
-          <a:xfrm rot="0" flipH="0" flipV="0">
-            <a:off x="4314825" y="2781300"/>
-            <a:ext cx="3562350" cy="1333500"/>
-          </a:xfrm>
-          <a:prstGeom prst="roundRect">
-            <a:avLst>
-              <a:gd name="adj" fmla="val 7143"/>
-            </a:avLst>
-          </a:prstGeom>
-          <a:solidFill>
-            <a:srgbClr val="F4F7FC"/>
-          </a:solidFill>
-          <a:ln/>
-        </p:spPr>
-        <p:txBody>
-          <a:bodyPr/>
-          <a:p/>
-        </p:txBody>
-      </p:sp>
-      <p:sp>
-        <p:nvSpPr>
-          <p:cNvPr id="42" name="" descr="{&quot;isTemplate&quot;:true,&quot;type&quot;:&quot;text&quot;}"/>
-          <p:cNvSpPr txBox="1"/>
-          <p:nvPr/>
-        </p:nvSpPr>
-        <p:spPr>
-          <a:xfrm rot="0" flipH="0" flipV="0">
-            <a:off x="5753100" y="2990850"/>
-            <a:ext cx="685800" cy="647700"/>
-          </a:xfrm>
-          <a:prstGeom prst="rect"/>
-        </p:spPr>
-        <p:txBody>
-          <a:bodyPr wrap="none" lIns="0" tIns="0" rIns="0" bIns="0"/>
-          <a:p>
-            <a:pPr>
-              <a:lnSpc>
-                <a:spcPct val="100000"/>
-              </a:lnSpc>
-            </a:pPr>
-            <a:r>
-              <a:rPr lang="en-US" sz="4200" b="1">
-                <a:solidFill>
-                  <a:srgbClr val="4472C4"/>
-                </a:solidFill>
-                <a:latin typeface="微软雅黑"/>
-                <a:ea typeface="微软雅黑"/>
-              </a:rPr>
-              <a:t>12</a:t>
-            </a:r>
-            <a:endParaRPr/>
-          </a:p>
-        </p:txBody>
-      </p:sp>
-      <p:sp>
-        <p:nvSpPr>
-          <p:cNvPr id="43" name="" descr="{&quot;isTemplate&quot;:true,&quot;type&quot;:&quot;text&quot;}"/>
-          <p:cNvSpPr txBox="1"/>
-          <p:nvPr/>
-        </p:nvSpPr>
-        <p:spPr>
-          <a:xfrm rot="0" flipH="0" flipV="0">
-            <a:off x="5753100" y="3695700"/>
-            <a:ext cx="685800" cy="209550"/>
-          </a:xfrm>
-          <a:prstGeom prst="rect"/>
-        </p:spPr>
-        <p:txBody>
-          <a:bodyPr wrap="none" lIns="0" tIns="0" rIns="0" bIns="0"/>
-          <a:p>
-            <a:pPr>
-              <a:lnSpc>
-                <a:spcPct val="100000"/>
-              </a:lnSpc>
-            </a:pPr>
-            <a:r>
-              <a:rPr lang="zh-CN" sz="1350">
-                <a:solidFill>
-                  <a:srgbClr val="1A1A1A"/>
-                </a:solidFill>
-                <a:latin typeface="微软雅黑"/>
-                <a:ea typeface="微软雅黑"/>
-              </a:rPr>
-              <a:t>培训场次</a:t>
-            </a:r>
-            <a:endParaRPr/>
-          </a:p>
-        </p:txBody>
-      </p:sp>
-      <p:sp>
-        <p:nvSpPr>
-          <p:cNvPr id="44" name=""/>
-          <p:cNvSpPr/>
-          <p:nvPr/>
-        </p:nvSpPr>
-        <p:spPr>
-          <a:xfrm rot="0" flipH="0" flipV="0">
-            <a:off x="8086725" y="2781300"/>
-            <a:ext cx="3571875" cy="1333500"/>
-          </a:xfrm>
-          <a:prstGeom prst="roundRect">
-            <a:avLst>
-              <a:gd name="adj" fmla="val 7143"/>
-            </a:avLst>
-          </a:prstGeom>
-          <a:solidFill>
-            <a:srgbClr val="F4F7FC"/>
-          </a:solidFill>
-          <a:ln/>
-        </p:spPr>
-        <p:txBody>
-          <a:bodyPr/>
-          <a:p/>
-        </p:txBody>
-      </p:sp>
-      <p:sp>
-        <p:nvSpPr>
-          <p:cNvPr id="45" name="" descr="{&quot;isTemplate&quot;:true,&quot;type&quot;:&quot;text&quot;}"/>
-          <p:cNvSpPr txBox="1"/>
-          <p:nvPr/>
-        </p:nvSpPr>
-        <p:spPr>
-          <a:xfrm rot="0" flipH="0" flipV="0">
-            <a:off x="9705975" y="2990850"/>
-            <a:ext cx="342900" cy="647700"/>
-          </a:xfrm>
-          <a:prstGeom prst="rect"/>
-        </p:spPr>
-        <p:txBody>
-          <a:bodyPr wrap="none" lIns="0" tIns="0" rIns="0" bIns="0"/>
-          <a:p>
-            <a:pPr>
-              <a:lnSpc>
-                <a:spcPct val="100000"/>
-              </a:lnSpc>
-            </a:pPr>
-            <a:r>
-              <a:rPr lang="en-US" sz="4200" b="1">
-                <a:solidFill>
-                  <a:srgbClr val="4472C4"/>
-                </a:solidFill>
-                <a:latin typeface="微软雅黑"/>
-                <a:ea typeface="微软雅黑"/>
-              </a:rPr>
-              <a:t>7</a:t>
-            </a:r>
-            <a:endParaRPr/>
-          </a:p>
-        </p:txBody>
-      </p:sp>
-      <p:sp>
-        <p:nvSpPr>
-          <p:cNvPr id="46" name="" descr="{&quot;isTemplate&quot;:true,&quot;type&quot;:&quot;text&quot;}"/>
-          <p:cNvSpPr txBox="1"/>
-          <p:nvPr/>
-        </p:nvSpPr>
-        <p:spPr>
-          <a:xfrm rot="0" flipH="0" flipV="0">
-            <a:off x="9534525" y="3695700"/>
-            <a:ext cx="685800" cy="209550"/>
-          </a:xfrm>
-          <a:prstGeom prst="rect"/>
-        </p:spPr>
-        <p:txBody>
-          <a:bodyPr wrap="none" lIns="0" tIns="0" rIns="0" bIns="0"/>
-          <a:p>
-            <a:pPr>
-              <a:lnSpc>
-                <a:spcPct val="100000"/>
-              </a:lnSpc>
-            </a:pPr>
-            <a:r>
-              <a:rPr lang="zh-CN" sz="1350">
-                <a:solidFill>
-                  <a:srgbClr val="1A1A1A"/>
-                </a:solidFill>
-                <a:latin typeface="微软雅黑"/>
-                <a:ea typeface="微软雅黑"/>
-              </a:rPr>
-              <a:t>覆盖部门</a:t>
-            </a:r>
-            <a:endParaRPr/>
-          </a:p>
-        </p:txBody>
-      </p:sp>
-      <p:sp>
-        <p:nvSpPr>
-          <p:cNvPr id="47" name=""/>
-          <p:cNvSpPr/>
-          <p:nvPr/>
-        </p:nvSpPr>
-        <p:spPr>
-          <a:xfrm rot="0" flipH="0" flipV="0">
-            <a:off x="533400" y="5334000"/>
-            <a:ext cx="11125200" cy="923925"/>
-          </a:xfrm>
-          <a:prstGeom prst="roundRect">
-            <a:avLst>
-              <a:gd name="adj" fmla="val 10309"/>
-            </a:avLst>
-          </a:prstGeom>
-          <a:solidFill>
-            <a:srgbClr val="052B7C"/>
-          </a:solidFill>
-          <a:ln/>
-        </p:spPr>
-        <p:txBody>
-          <a:bodyPr/>
-          <a:p/>
-        </p:txBody>
-      </p:sp>
-      <p:sp>
-        <p:nvSpPr>
-          <p:cNvPr id="48" name="" descr="{&quot;isTemplate&quot;:true,&quot;type&quot;:&quot;text&quot;}"/>
-          <p:cNvSpPr txBox="1"/>
-          <p:nvPr/>
-        </p:nvSpPr>
-        <p:spPr>
-          <a:xfrm rot="0" flipH="0" flipV="0">
-            <a:off x="742950" y="5486400"/>
-            <a:ext cx="10706100" cy="619125"/>
+            <a:off x="533400" y="5410200"/>
+            <a:ext cx="11125200" cy="552450"/>
           </a:xfrm>
           <a:prstGeom prst="rect"/>
         </p:spPr>
@@ -2241,119 +3986,19 @@
               </a:lnSpc>
             </a:pPr>
             <a:r>
-              <a:rPr lang="zh-CN" sz="1350">
-                <a:solidFill>
-                  <a:srgbClr val="FFFFFF"/>
-                </a:solidFill>
-                <a:latin typeface="微软雅黑"/>
-                <a:ea typeface="微软雅黑"/>
-              </a:rPr>
-              <a:t>入职</a:t>
-            </a:r>
-            <a:r>
-              <a:rPr lang="en-US" sz="1350">
-                <a:solidFill>
-                  <a:srgbClr val="FFFFFF"/>
-                </a:solidFill>
-                <a:latin typeface="微软雅黑"/>
-                <a:ea typeface="微软雅黑"/>
-              </a:rPr>
-              <a:t> 3.5 </a:t>
-            </a:r>
-            <a:r>
-              <a:rPr lang="zh-CN" sz="1350">
-                <a:solidFill>
-                  <a:srgbClr val="FFFFFF"/>
-                </a:solidFill>
-                <a:latin typeface="微软雅黑"/>
-                <a:ea typeface="微软雅黑"/>
-              </a:rPr>
-              <a:t>个月，从</a:t>
-            </a:r>
-            <a:r>
-              <a:rPr lang="en-US" sz="1350">
-                <a:solidFill>
-                  <a:srgbClr val="FFFFFF"/>
-                </a:solidFill>
-                <a:latin typeface="微软雅黑"/>
-                <a:ea typeface="微软雅黑"/>
-              </a:rPr>
-              <a:t> 0 </a:t>
-            </a:r>
-            <a:r>
-              <a:rPr lang="zh-CN" sz="1350">
-                <a:solidFill>
-                  <a:srgbClr val="FFFFFF"/>
-                </a:solidFill>
-                <a:latin typeface="微软雅黑"/>
-                <a:ea typeface="微软雅黑"/>
-              </a:rPr>
-              <a:t>搭起「自研工具</a:t>
-            </a:r>
-            <a:r>
-              <a:rPr lang="en-US" sz="1350">
-                <a:solidFill>
-                  <a:srgbClr val="FFFFFF"/>
-                </a:solidFill>
-                <a:latin typeface="微软雅黑"/>
-                <a:ea typeface="微软雅黑"/>
-              </a:rPr>
-              <a:t> + </a:t>
-            </a:r>
-            <a:r>
-              <a:rPr lang="zh-CN" sz="1350">
-                <a:solidFill>
-                  <a:srgbClr val="FFFFFF"/>
-                </a:solidFill>
-                <a:latin typeface="微软雅黑"/>
-                <a:ea typeface="微软雅黑"/>
-              </a:rPr>
-              <a:t>复用</a:t>
-            </a:r>
-            <a:r>
-              <a:rPr lang="en-US" sz="1350">
-                <a:solidFill>
-                  <a:srgbClr val="FFFFFF"/>
-                </a:solidFill>
-                <a:latin typeface="微软雅黑"/>
-                <a:ea typeface="微软雅黑"/>
-              </a:rPr>
-              <a:t> Skill + </a:t>
-            </a:r>
-            <a:r>
-              <a:rPr lang="zh-CN" sz="1350">
-                <a:solidFill>
-                  <a:srgbClr val="FFFFFF"/>
-                </a:solidFill>
-                <a:latin typeface="微软雅黑"/>
-                <a:ea typeface="微软雅黑"/>
-              </a:rPr>
-              <a:t>平台验收运营</a:t>
-            </a:r>
-            <a:r>
-              <a:rPr lang="en-US" sz="1350">
-                <a:solidFill>
-                  <a:srgbClr val="FFFFFF"/>
-                </a:solidFill>
-                <a:latin typeface="微软雅黑"/>
-                <a:ea typeface="微软雅黑"/>
-              </a:rPr>
-              <a:t> + </a:t>
-            </a:r>
-            <a:r>
-              <a:rPr lang="zh-CN" sz="1350">
-                <a:solidFill>
-                  <a:srgbClr val="FFFFFF"/>
-                </a:solidFill>
-                <a:latin typeface="微软雅黑"/>
-                <a:ea typeface="微软雅黑"/>
-              </a:rPr>
-              <a:t>培训推广」完整交付体系，覆盖采购</a:t>
-            </a:r>
-            <a:r>
-              <a:rPr lang="en-US" sz="1350">
-                <a:solidFill>
-                  <a:srgbClr val="FFFFFF"/>
+              <a:rPr lang="zh-CN" sz="1200">
+                <a:solidFill>
+                  <a:srgbClr val="1A1A1A"/>
+                </a:solidFill>
+                <a:latin typeface="微软雅黑"/>
+                <a:ea typeface="微软雅黑"/>
+              </a:rPr>
+              <a:t>另有「培训助手」「视频</a:t>
+            </a:r>
+            <a:r>
+              <a:rPr lang="en-US" sz="1200">
+                <a:solidFill>
+                  <a:srgbClr val="1A1A1A"/>
                 </a:solidFill>
                 <a:latin typeface="微软雅黑"/>
                 <a:ea typeface="微软雅黑"/>
@@ -2361,19 +4006,99 @@
               <a:t> / </a:t>
             </a:r>
             <a:r>
-              <a:rPr lang="zh-CN" sz="1350">
-                <a:solidFill>
-                  <a:srgbClr val="FFFFFF"/>
-                </a:solidFill>
-                <a:latin typeface="微软雅黑"/>
-                <a:ea typeface="微软雅黑"/>
-              </a:rPr>
-              <a:t>船务</a:t>
-            </a:r>
-            <a:r>
-              <a:rPr lang="en-US" sz="1350">
-                <a:solidFill>
-                  <a:srgbClr val="FFFFFF"/>
+              <a:rPr lang="zh-CN" sz="1200">
+                <a:solidFill>
+                  <a:srgbClr val="1A1A1A"/>
+                </a:solidFill>
+                <a:latin typeface="微软雅黑"/>
+                <a:ea typeface="微软雅黑"/>
+              </a:rPr>
+              <a:t>图片生成助手」等能力，构成平台智能体矩阵；</a:t>
+            </a:r>
+            <a:r>
+              <a:rPr lang="en-US" sz="1200">
+                <a:solidFill>
+                  <a:srgbClr val="1A1A1A"/>
+                </a:solidFill>
+                <a:latin typeface="微软雅黑"/>
+                <a:ea typeface="微软雅黑"/>
+              </a:rPr>
+              <a:t>06-12 </a:t>
+            </a:r>
+            <a:r>
+              <a:rPr lang="zh-CN" sz="1200">
+                <a:solidFill>
+                  <a:srgbClr val="1A1A1A"/>
+                </a:solidFill>
+                <a:latin typeface="微软雅黑"/>
+                <a:ea typeface="微软雅黑"/>
+              </a:rPr>
+              <a:t>提出</a:t>
+            </a:r>
+            <a:r>
+              <a:rPr lang="en-US" sz="1200">
+                <a:solidFill>
+                  <a:srgbClr val="1A1A1A"/>
+                </a:solidFill>
+                <a:latin typeface="微软雅黑"/>
+                <a:ea typeface="微软雅黑"/>
+              </a:rPr>
+              <a:t> seedance/seedream </a:t>
+            </a:r>
+            <a:r>
+              <a:rPr lang="zh-CN" sz="1200">
+                <a:solidFill>
+                  <a:srgbClr val="1A1A1A"/>
+                </a:solidFill>
+                <a:latin typeface="微软雅黑"/>
+                <a:ea typeface="微软雅黑"/>
+              </a:rPr>
+              <a:t>独立化诉求，</a:t>
+            </a:r>
+            <a:r>
+              <a:rPr lang="en-US" sz="1200">
+                <a:solidFill>
+                  <a:srgbClr val="1A1A1A"/>
+                </a:solidFill>
+                <a:latin typeface="微软雅黑"/>
+                <a:ea typeface="微软雅黑"/>
+              </a:rPr>
+              <a:t>07-14 </a:t>
+            </a:r>
+            <a:r>
+              <a:rPr lang="zh-CN" sz="1200">
+                <a:solidFill>
+                  <a:srgbClr val="1A1A1A"/>
+                </a:solidFill>
+                <a:latin typeface="微软雅黑"/>
+                <a:ea typeface="微软雅黑"/>
+              </a:rPr>
+              <a:t>图片</a:t>
+            </a:r>
+            <a:r>
+              <a:rPr lang="en-US" sz="1200">
+                <a:solidFill>
+                  <a:srgbClr val="1A1A1A"/>
+                </a:solidFill>
+                <a:latin typeface="微软雅黑"/>
+                <a:ea typeface="微软雅黑"/>
+              </a:rPr>
+              <a:t> · </a:t>
+            </a:r>
+            <a:r>
+              <a:rPr lang="zh-CN" sz="1200">
+                <a:solidFill>
+                  <a:srgbClr val="1A1A1A"/>
+                </a:solidFill>
+                <a:latin typeface="微软雅黑"/>
+                <a:ea typeface="微软雅黑"/>
+              </a:rPr>
+              <a:t>视频生成独立应用落地（营销</a:t>
+            </a:r>
+            <a:r>
+              <a:rPr lang="en-US" sz="1200">
+                <a:solidFill>
+                  <a:srgbClr val="1A1A1A"/>
                 </a:solidFill>
                 <a:latin typeface="微软雅黑"/>
                 <a:ea typeface="微软雅黑"/>
@@ -2381,134 +4106,14 @@
               <a:t> / </a:t>
             </a:r>
             <a:r>
-              <a:rPr lang="zh-CN" sz="1350">
-                <a:solidFill>
-                  <a:srgbClr val="FFFFFF"/>
-                </a:solidFill>
-                <a:latin typeface="微软雅黑"/>
-                <a:ea typeface="微软雅黑"/>
-              </a:rPr>
-              <a:t>财务</a:t>
-            </a:r>
-            <a:r>
-              <a:rPr lang="en-US" sz="1350">
-                <a:solidFill>
-                  <a:srgbClr val="FFFFFF"/>
-                </a:solidFill>
-                <a:latin typeface="微软雅黑"/>
-                <a:ea typeface="微软雅黑"/>
-              </a:rPr>
-              <a:t> / </a:t>
-            </a:r>
-            <a:r>
-              <a:rPr lang="zh-CN" sz="1350">
-                <a:solidFill>
-                  <a:srgbClr val="FFFFFF"/>
-                </a:solidFill>
-                <a:latin typeface="微软雅黑"/>
-                <a:ea typeface="微软雅黑"/>
-              </a:rPr>
-              <a:t>销售</a:t>
-            </a:r>
-            <a:r>
-              <a:rPr lang="en-US" sz="1350">
-                <a:solidFill>
-                  <a:srgbClr val="FFFFFF"/>
-                </a:solidFill>
-                <a:latin typeface="微软雅黑"/>
-                <a:ea typeface="微软雅黑"/>
-              </a:rPr>
-              <a:t> / </a:t>
-            </a:r>
-            <a:r>
-              <a:rPr lang="zh-CN" sz="1350">
-                <a:solidFill>
-                  <a:srgbClr val="FFFFFF"/>
-                </a:solidFill>
-                <a:latin typeface="微软雅黑"/>
-                <a:ea typeface="微软雅黑"/>
-              </a:rPr>
-              <a:t>研发</a:t>
-            </a:r>
-            <a:r>
-              <a:rPr lang="en-US" sz="1350">
-                <a:solidFill>
-                  <a:srgbClr val="FFFFFF"/>
-                </a:solidFill>
-                <a:latin typeface="微软雅黑"/>
-                <a:ea typeface="微软雅黑"/>
-              </a:rPr>
-              <a:t> / </a:t>
-            </a:r>
-            <a:r>
-              <a:rPr lang="zh-CN" sz="1350">
-                <a:solidFill>
-                  <a:srgbClr val="FFFFFF"/>
-                </a:solidFill>
-                <a:latin typeface="微软雅黑"/>
-                <a:ea typeface="微软雅黑"/>
-              </a:rPr>
-              <a:t>营销</a:t>
-            </a:r>
-            <a:r>
-              <a:rPr lang="en-US" sz="1350">
-                <a:solidFill>
-                  <a:srgbClr val="FFFFFF"/>
-                </a:solidFill>
-                <a:latin typeface="微软雅黑"/>
-                <a:ea typeface="微软雅黑"/>
-              </a:rPr>
-              <a:t> 6 </a:t>
-            </a:r>
-            <a:r>
-              <a:rPr lang="zh-CN" sz="1350">
-                <a:solidFill>
-                  <a:srgbClr val="FFFFFF"/>
-                </a:solidFill>
-                <a:latin typeface="微软雅黑"/>
-                <a:ea typeface="微软雅黑"/>
-              </a:rPr>
-              <a:t>类业务方；交付快（自研平均</a:t>
-            </a:r>
-            <a:r>
-              <a:rPr lang="en-US" sz="1350">
-                <a:solidFill>
-                  <a:srgbClr val="FFFFFF"/>
-                </a:solidFill>
-                <a:latin typeface="微软雅黑"/>
-                <a:ea typeface="微软雅黑"/>
-              </a:rPr>
-              <a:t> ~25 </a:t>
-            </a:r>
-            <a:r>
-              <a:rPr lang="zh-CN" sz="1350">
-                <a:solidFill>
-                  <a:srgbClr val="FFFFFF"/>
-                </a:solidFill>
-                <a:latin typeface="微软雅黑"/>
-                <a:ea typeface="微软雅黑"/>
-              </a:rPr>
-              <a:t>天）、持续迭代（</a:t>
-            </a:r>
-            <a:r>
-              <a:rPr lang="en-US" sz="1350">
-                <a:solidFill>
-                  <a:srgbClr val="FFFFFF"/>
-                </a:solidFill>
-                <a:latin typeface="微软雅黑"/>
-                <a:ea typeface="微软雅黑"/>
-              </a:rPr>
-              <a:t>110+ </a:t>
-            </a:r>
-            <a:r>
-              <a:rPr lang="zh-CN" sz="1350">
-                <a:solidFill>
-                  <a:srgbClr val="FFFFFF"/>
-                </a:solidFill>
-                <a:latin typeface="微软雅黑"/>
-                <a:ea typeface="微软雅黑"/>
-              </a:rPr>
-              <a:t>条代码）。</a:t>
+              <a:rPr lang="zh-CN" sz="1200">
+                <a:solidFill>
+                  <a:srgbClr val="1A1A1A"/>
+                </a:solidFill>
+                <a:latin typeface="微软雅黑"/>
+                <a:ea typeface="微软雅黑"/>
+              </a:rPr>
+              <a:t>销售自助生产素材）。</a:t>
             </a:r>
             <a:endParaRPr/>
           </a:p>
@@ -2516,7 +4121,7 @@
       </p:sp>
       <p:sp>
         <p:nvSpPr>
-          <p:cNvPr id="49" name="" descr="{&quot;isTemplate&quot;:true,&quot;type&quot;:&quot;text&quot;}"/>
+          <p:cNvPr id="36" name="" descr="{&quot;isTemplate&quot;:true,&quot;type&quot;:&quot;text&quot;}"/>
           <p:cNvSpPr txBox="1"/>
           <p:nvPr/>
         </p:nvSpPr>
@@ -2571,7 +4176,7 @@
       </p:sp>
       <p:sp>
         <p:nvSpPr>
-          <p:cNvPr id="50" name="" descr="{&quot;isTemplate&quot;:true,&quot;type&quot;:&quot;text&quot;}"/>
+          <p:cNvPr id="37" name="" descr="{&quot;isTemplate&quot;:true,&quot;type&quot;:&quot;text&quot;}"/>
           <p:cNvSpPr txBox="1"/>
           <p:nvPr/>
         </p:nvSpPr>
@@ -2598,7 +4203,7 @@
                 <a:latin typeface="微软雅黑"/>
                 <a:ea typeface="微软雅黑"/>
               </a:rPr>
-              <a:t>03 / 13</a:t>
+              <a:t>11 / 13</a:t>
             </a:r>
             <a:endParaRPr/>
           </a:p>
@@ -2609,12 +4214,12 @@
 </p:sld>
 </file>
 
-<file path=ppt/slides/slide4.xml><?xml version="1.0" encoding="utf-8"?>
-<p:sld xmlns:p="http://schemas.openxmlformats.org/presentationml/2006/main" xmlns:a="http://schemas.openxmlformats.org/drawingml/2006/main" xmlns:a16="http://schemas.microsoft.com/office/drawing/2014/main" xmlns:mc="http://schemas.openxmlformats.org/markup-compatibility/2006" mc:Ignorable="a16">
+<file path=ppt/slides/slide12.xml><?xml version="1.0" encoding="utf-8"?>
+<p:sld xmlns:p="http://schemas.openxmlformats.org/presentationml/2006/main" xmlns:a="http://schemas.openxmlformats.org/drawingml/2006/main">
   <p:cSld>
     <p:spTree>
       <p:nvGrpSpPr>
-        <p:cNvPr id="51" name="" descr="&lt;Slide style={{ width:'1280px', height:'720px', position:'relative', background:'#FFFFFF', fontFamily:'微软雅黑' }}&gt;&#10;  &lt;Box style={{ position:'absolute', left:56, top:36, flexDirection:'row', alignItems:'center', gap:12 }}&gt;&#10;    &lt;Box style={{ width:8, height:34, background:'#4472C4' }} /&gt;&#10;    &lt;Text style={{ fontSize:30, fontWeight:'bold', color:'#052B7C' }}&gt;二、自研应用交付总览&lt;/Text&gt;&#10;  &lt;/Box&gt;&#10;&#10;  &lt;Box style={{ position:'absolute', left:56, top:120, right:56 }}&gt;&#10;    &lt;Table&#10;      style={{ width:'100%', height:420 }}&#10;      defaultTextStyle={{ fontSize:15, textAlign:'center', color:'#1A1A1A' }}&#10;      defaultCellStyle={{ border:{ left:{width:1,color:'#CCCCCC'}, right:{width:1,color:'#CCCCCC'}, top:{width:1,color:'#CCCCCC'}, bottom:{width:1,color:'#CCCCCC'} } }}&#10;      cells={[&#10;        [ {text:'应用 / 工具', textStyle:{bold:true,color:'#1A1A1A'}, cellStyle:{background:{color:'#DAE3F3'}}},&#10;          {text:'交付时间', textStyle:{bold:true,color:'#1A1A1A'}, cellStyle:{background:{color:'#DAE3F3'}}},&#10;          {text:'形态', textStyle:{bold:true,color:'#1A1A1A'}, cellStyle:{background:{color:'#DAE3F3'}}},&#10;          {text:'主要对象', textStyle:{bold:true,color:'#1A1A1A'}, cellStyle:{background:{color:'#DAE3F3'}}},&#10;          {text:'当前状态', textStyle:{bold:true,color:'#1A1A1A'}, cellStyle:{background:{color:'#DAE3F3'}}} ],&#10;        ['采购分析助手','05-29','前后端 Web','采购部','维护中（至 07-30）'],&#10;        ['船务 T/T 协议自动化','06-22','前后端 Web','船务部','95%+ 试用'],&#10;        ['数据脱敏 Data_masking','07-28','桌面 .exe','财务部','长期优化'],&#10;        ['对账单','已交付','纯前端 HTML','财务部','已交付'],&#10;        ['Tax_check 退税审单','08-01','桌面 .exe','财务部','已交付运营（收尾）'],&#10;      ]}&#10;    /&gt;&#10;  &lt;/Box&gt;&#10;&#10;  &lt;Box style={{ position:'absolute', left:56, top:560, right:56 }}&gt;&#10;    &lt;Text style={{ fontSize:16, color:'#1A1A1A', lineHeight:1.5 }}&gt;自研平均 &lt;span style={{ fontWeight:'bold', color:'#4472C4' }}&gt;~25 天&lt;/span&gt; 交付；含 1 次 PyQt5→Web 重构（05-27）、2 次架构级重构（采购 06-27、船务 08-01 JSON→SQLite）；110+ 条代码迭代。MSDS 中英文双语生成内嵌于船务助手，不作独立交付项。&lt;/Text&gt;&#10;  &lt;/Box&gt;&#10;&#10;  &lt;Box style={{ position:'absolute', left:56, top:668, right:56, flexDirection:'row', justifyContent:'space-between' }}&gt;&#10;    &lt;Text style={{ fontSize:14, color:'#888' }}&gt;入职以来 AI 工作复盘&lt;/Text&gt;&#10;    &lt;Text style={{ fontSize:14, color:'#888' }}&gt;04 / 13&lt;/Text&gt;&#10;  &lt;/Box&gt;&#10;&lt;/Slide&gt;"/>
+        <p:cNvPr id="38" name="" descr="&lt;Slide style={{ width:'1280px', height:'720px', position:'relative', background:'#FFFFFF', fontFamily:'微软雅黑' }}&gt;&#10;  &lt;Box style={{ position:'absolute', left:56, top:36, flexDirection:'row', alignItems:'center', gap:12 }}&gt;&#10;    &lt;Box style={{ width:8, height:34, background:'#4472C4' }} /&gt;&#10;    &lt;Text style={{ fontSize:30, fontWeight:'bold', color:'#052B7C' }}&gt;六、下阶段计划与需支持事项&lt;/Text&gt;&#10;  &lt;/Box&gt;&#10;&#10;  &lt;Box style={{ position:'absolute', left:56, top:130, right:56, flexDirection:'row', gap:36 }}&gt;&#10;    &lt;Box style={{ flex:1.4, flexDirection:'column', gap:14 }}&gt;&#10;      &lt;Text style={{ fontSize:20, fontWeight:'bold', color:'#052B7C' }}&gt;下阶段计划&lt;/Text&gt;&#10;      {['业务智能助理上线前完成检索稳定性测试，沉淀为营销中心标准智能体','推动供应商修复待解项（图片变视频范围、竖屏不支持）','建立工具活跃度 / 采纳率轻量看板','补采采购 / 船务「节省工时」量化，用于增量价值申报','Tax_check / Data_masking 持续运营深化','价格爬取 Skill 回采购培训，巩固「自建 Skill」能力'].map((t, i) =&gt; (&#10;        &lt;Box key={i} style={{ flexDirection:'row', alignItems:'flex-start', gap:12 }}&gt;&#10;          &lt;Box style={{ width:8, height:8, background:'#4472C4', borderRadius:2, marginTop:8 }} /&gt;&#10;          &lt;Text style={{ fontSize:16, color:'#1A1A1A', lineHeight:1.5 }}&gt;{t}&lt;/Text&gt;&#10;        &lt;/Box&gt;&#10;      ))}&#10;    &lt;/Box&gt;&#10;&#10;    &lt;Box style={{ flex:1, flexDirection:'column', gap:14 }}&gt;&#10;      &lt;Text style={{ fontSize:20, fontWeight:'bold', color:'#C0504D' }}&gt;需支持事项&lt;/Text&gt;&#10;      {['业务智能助理检索测试需营销中心提供真实客户问题样本','待解项修复依赖供应商排期，需领导推动优先级','工时量化需业务方配合记录使用前后耗时','采纳率看板需 IT / 数据侧轻量支持'].map((t, i) =&gt; (&#10;        &lt;Box key={i} style={{ flexDirection:'row', alignItems:'flex-start', gap:12 }}&gt;&#10;          &lt;Box style={{ width:8, height:8, background:'#C0504D', borderRadius:2, marginTop:8 }} /&gt;&#10;          &lt;Text style={{ fontSize:16, color:'#1A1A1A', lineHeight:1.5 }}&gt;{t}&lt;/Text&gt;&#10;        &lt;/Box&gt;&#10;      ))}&#10;    &lt;/Box&gt;&#10;  &lt;/Box&gt;&#10;&#10;  &lt;Box style={{ position:'absolute', left:56, top:668, right:56, flexDirection:'row', justifyContent:'space-between' }}&gt;&#10;    &lt;Text style={{ fontSize:14, color:'#888' }}&gt;入职以来 AI 工作复盘&lt;/Text&gt;&#10;    &lt;Text style={{ fontSize:14, color:'#888' }}&gt;12 / 13&lt;/Text&gt;&#10;  &lt;/Box&gt;&#10;&lt;/Slide&gt;"/>
         <p:cNvGrpSpPr/>
         <p:nvPr/>
       </p:nvGrpSpPr>
@@ -2628,7 +4233,7 @@
       </p:grpSpPr>
       <p:sp>
         <p:nvSpPr>
-          <p:cNvPr id="52" name=""/>
+          <p:cNvPr id="39" name=""/>
           <p:cNvSpPr/>
           <p:nvPr/>
         </p:nvSpPr>
@@ -2652,7 +4257,7 @@
       </p:sp>
       <p:sp>
         <p:nvSpPr>
-          <p:cNvPr id="53" name=""/>
+          <p:cNvPr id="40" name=""/>
           <p:cNvSpPr/>
           <p:nvPr/>
         </p:nvSpPr>
@@ -2676,14 +4281,14 @@
       </p:sp>
       <p:sp>
         <p:nvSpPr>
-          <p:cNvPr id="54" name="" descr="{&quot;isTemplate&quot;:true,&quot;type&quot;:&quot;text&quot;}"/>
+          <p:cNvPr id="41" name="" descr="{&quot;isTemplate&quot;:true,&quot;type&quot;:&quot;text&quot;}"/>
           <p:cNvSpPr txBox="1"/>
           <p:nvPr/>
         </p:nvSpPr>
         <p:spPr>
           <a:xfrm rot="0" flipH="0" flipV="0">
             <a:off x="723900" y="342900"/>
-            <a:ext cx="2857500" cy="342900"/>
+            <a:ext cx="3714750" cy="342900"/>
           </a:xfrm>
           <a:prstGeom prst="rect"/>
         </p:spPr>
@@ -2703,15 +4308,3023 @@
                 <a:latin typeface="微软雅黑"/>
                 <a:ea typeface="微软雅黑"/>
               </a:rPr>
-              <a:t>二、自研应用交付总览</a:t>
+              <a:t>六、下阶段计划与需支持事项</a:t>
             </a:r>
             <a:endParaRPr/>
           </a:p>
         </p:txBody>
       </p:sp>
+      <p:sp>
+        <p:nvSpPr>
+          <p:cNvPr id="42" name="" descr="{&quot;isTemplate&quot;:true,&quot;type&quot;:&quot;text&quot;}"/>
+          <p:cNvSpPr txBox="1"/>
+          <p:nvPr/>
+        </p:nvSpPr>
+        <p:spPr>
+          <a:xfrm rot="0" flipH="0" flipV="0">
+            <a:off x="533400" y="1238250"/>
+            <a:ext cx="6286500" cy="228600"/>
+          </a:xfrm>
+          <a:prstGeom prst="rect"/>
+        </p:spPr>
+        <p:txBody>
+          <a:bodyPr wrap="none" lIns="0" tIns="0" rIns="0" bIns="0"/>
+          <a:p>
+            <a:pPr>
+              <a:lnSpc>
+                <a:spcPct val="100000"/>
+              </a:lnSpc>
+            </a:pPr>
+            <a:r>
+              <a:rPr lang="zh-CN" sz="1500" b="1">
+                <a:solidFill>
+                  <a:srgbClr val="052B7C"/>
+                </a:solidFill>
+                <a:latin typeface="微软雅黑"/>
+                <a:ea typeface="微软雅黑"/>
+              </a:rPr>
+              <a:t>下阶段计划</a:t>
+            </a:r>
+            <a:endParaRPr/>
+          </a:p>
+        </p:txBody>
+      </p:sp>
+      <p:sp>
+        <p:nvSpPr>
+          <p:cNvPr id="43" name=""/>
+          <p:cNvSpPr/>
+          <p:nvPr/>
+        </p:nvSpPr>
+        <p:spPr>
+          <a:xfrm rot="0" flipH="0" flipV="0">
+            <a:off x="533400" y="1676400"/>
+            <a:ext cx="76200" cy="76200"/>
+          </a:xfrm>
+          <a:prstGeom prst="roundRect">
+            <a:avLst>
+              <a:gd name="adj" fmla="val 25000"/>
+            </a:avLst>
+          </a:prstGeom>
+          <a:solidFill>
+            <a:srgbClr val="4472C4"/>
+          </a:solidFill>
+          <a:ln/>
+        </p:spPr>
+        <p:txBody>
+          <a:bodyPr/>
+          <a:p/>
+        </p:txBody>
+      </p:sp>
+      <p:sp>
+        <p:nvSpPr>
+          <p:cNvPr id="44" name="" descr="{&quot;isTemplate&quot;:true,&quot;type&quot;:&quot;text&quot;}"/>
+          <p:cNvSpPr txBox="1"/>
+          <p:nvPr/>
+        </p:nvSpPr>
+        <p:spPr>
+          <a:xfrm rot="0" flipH="0" flipV="0">
+            <a:off x="723900" y="1600200"/>
+            <a:ext cx="4724400" cy="276225"/>
+          </a:xfrm>
+          <a:prstGeom prst="rect"/>
+        </p:spPr>
+        <p:txBody>
+          <a:bodyPr wrap="none" lIns="0" tIns="0" rIns="0" bIns="0"/>
+          <a:p>
+            <a:pPr>
+              <a:lnSpc>
+                <a:spcPct val="150000"/>
+              </a:lnSpc>
+            </a:pPr>
+            <a:r>
+              <a:rPr lang="zh-CN" sz="1200">
+                <a:solidFill>
+                  <a:srgbClr val="1A1A1A"/>
+                </a:solidFill>
+                <a:latin typeface="微软雅黑"/>
+                <a:ea typeface="微软雅黑"/>
+              </a:rPr>
+              <a:t>业务智能助理上线前完成检索稳定性测试，沉淀为营销中心标准智能体</a:t>
+            </a:r>
+            <a:endParaRPr/>
+          </a:p>
+        </p:txBody>
+      </p:sp>
+      <p:sp>
+        <p:nvSpPr>
+          <p:cNvPr id="45" name=""/>
+          <p:cNvSpPr/>
+          <p:nvPr/>
+        </p:nvSpPr>
+        <p:spPr>
+          <a:xfrm rot="0" flipH="0" flipV="0">
+            <a:off x="533400" y="2085975"/>
+            <a:ext cx="76200" cy="76200"/>
+          </a:xfrm>
+          <a:prstGeom prst="roundRect">
+            <a:avLst>
+              <a:gd name="adj" fmla="val 25000"/>
+            </a:avLst>
+          </a:prstGeom>
+          <a:solidFill>
+            <a:srgbClr val="4472C4"/>
+          </a:solidFill>
+          <a:ln/>
+        </p:spPr>
+        <p:txBody>
+          <a:bodyPr/>
+          <a:p/>
+        </p:txBody>
+      </p:sp>
+      <p:sp>
+        <p:nvSpPr>
+          <p:cNvPr id="46" name="" descr="{&quot;isTemplate&quot;:true,&quot;type&quot;:&quot;text&quot;}"/>
+          <p:cNvSpPr txBox="1"/>
+          <p:nvPr/>
+        </p:nvSpPr>
+        <p:spPr>
+          <a:xfrm rot="0" flipH="0" flipV="0">
+            <a:off x="723900" y="2009775"/>
+            <a:ext cx="3810000" cy="276225"/>
+          </a:xfrm>
+          <a:prstGeom prst="rect"/>
+        </p:spPr>
+        <p:txBody>
+          <a:bodyPr wrap="none" lIns="0" tIns="0" rIns="0" bIns="0"/>
+          <a:p>
+            <a:pPr>
+              <a:lnSpc>
+                <a:spcPct val="150000"/>
+              </a:lnSpc>
+            </a:pPr>
+            <a:r>
+              <a:rPr lang="zh-CN" sz="1200">
+                <a:solidFill>
+                  <a:srgbClr val="1A1A1A"/>
+                </a:solidFill>
+                <a:latin typeface="微软雅黑"/>
+                <a:ea typeface="微软雅黑"/>
+              </a:rPr>
+              <a:t>推动供应商修复待解项（图片变视频范围、竖屏不支持）</a:t>
+            </a:r>
+            <a:endParaRPr/>
+          </a:p>
+        </p:txBody>
+      </p:sp>
+      <p:sp>
+        <p:nvSpPr>
+          <p:cNvPr id="47" name=""/>
+          <p:cNvSpPr/>
+          <p:nvPr/>
+        </p:nvSpPr>
+        <p:spPr>
+          <a:xfrm rot="0" flipH="0" flipV="0">
+            <a:off x="533400" y="2495550"/>
+            <a:ext cx="76200" cy="76200"/>
+          </a:xfrm>
+          <a:prstGeom prst="roundRect">
+            <a:avLst>
+              <a:gd name="adj" fmla="val 25000"/>
+            </a:avLst>
+          </a:prstGeom>
+          <a:solidFill>
+            <a:srgbClr val="4472C4"/>
+          </a:solidFill>
+          <a:ln/>
+        </p:spPr>
+        <p:txBody>
+          <a:bodyPr/>
+          <a:p/>
+        </p:txBody>
+      </p:sp>
+      <p:sp>
+        <p:nvSpPr>
+          <p:cNvPr id="48" name="" descr="{&quot;isTemplate&quot;:true,&quot;type&quot;:&quot;text&quot;}"/>
+          <p:cNvSpPr txBox="1"/>
+          <p:nvPr/>
+        </p:nvSpPr>
+        <p:spPr>
+          <a:xfrm rot="0" flipH="0" flipV="0">
+            <a:off x="723900" y="2419350"/>
+            <a:ext cx="2295525" cy="276225"/>
+          </a:xfrm>
+          <a:prstGeom prst="rect"/>
+        </p:spPr>
+        <p:txBody>
+          <a:bodyPr wrap="none" lIns="0" tIns="0" rIns="0" bIns="0"/>
+          <a:p>
+            <a:pPr>
+              <a:lnSpc>
+                <a:spcPct val="150000"/>
+              </a:lnSpc>
+            </a:pPr>
+            <a:r>
+              <a:rPr lang="zh-CN" sz="1200">
+                <a:solidFill>
+                  <a:srgbClr val="1A1A1A"/>
+                </a:solidFill>
+                <a:latin typeface="微软雅黑"/>
+                <a:ea typeface="微软雅黑"/>
+              </a:rPr>
+              <a:t>建立工具活跃度</a:t>
+            </a:r>
+            <a:r>
+              <a:rPr lang="en-US" sz="1200">
+                <a:solidFill>
+                  <a:srgbClr val="1A1A1A"/>
+                </a:solidFill>
+                <a:latin typeface="微软雅黑"/>
+                <a:ea typeface="微软雅黑"/>
+              </a:rPr>
+              <a:t> / </a:t>
+            </a:r>
+            <a:r>
+              <a:rPr lang="zh-CN" sz="1200">
+                <a:solidFill>
+                  <a:srgbClr val="1A1A1A"/>
+                </a:solidFill>
+                <a:latin typeface="微软雅黑"/>
+                <a:ea typeface="微软雅黑"/>
+              </a:rPr>
+              <a:t>采纳率轻量看板</a:t>
+            </a:r>
+            <a:endParaRPr/>
+          </a:p>
+        </p:txBody>
+      </p:sp>
+      <p:sp>
+        <p:nvSpPr>
+          <p:cNvPr id="49" name=""/>
+          <p:cNvSpPr/>
+          <p:nvPr/>
+        </p:nvSpPr>
+        <p:spPr>
+          <a:xfrm rot="0" flipH="0" flipV="0">
+            <a:off x="533400" y="2905125"/>
+            <a:ext cx="76200" cy="76200"/>
+          </a:xfrm>
+          <a:prstGeom prst="roundRect">
+            <a:avLst>
+              <a:gd name="adj" fmla="val 25000"/>
+            </a:avLst>
+          </a:prstGeom>
+          <a:solidFill>
+            <a:srgbClr val="4472C4"/>
+          </a:solidFill>
+          <a:ln/>
+        </p:spPr>
+        <p:txBody>
+          <a:bodyPr/>
+          <a:p/>
+        </p:txBody>
+      </p:sp>
+      <p:sp>
+        <p:nvSpPr>
+          <p:cNvPr id="50" name="" descr="{&quot;isTemplate&quot;:true,&quot;type&quot;:&quot;text&quot;}"/>
+          <p:cNvSpPr txBox="1"/>
+          <p:nvPr/>
+        </p:nvSpPr>
+        <p:spPr>
+          <a:xfrm rot="0" flipH="0" flipV="0">
+            <a:off x="723900" y="2828925"/>
+            <a:ext cx="3667125" cy="276225"/>
+          </a:xfrm>
+          <a:prstGeom prst="rect"/>
+        </p:spPr>
+        <p:txBody>
+          <a:bodyPr wrap="none" lIns="0" tIns="0" rIns="0" bIns="0"/>
+          <a:p>
+            <a:pPr>
+              <a:lnSpc>
+                <a:spcPct val="150000"/>
+              </a:lnSpc>
+            </a:pPr>
+            <a:r>
+              <a:rPr lang="zh-CN" sz="1200">
+                <a:solidFill>
+                  <a:srgbClr val="1A1A1A"/>
+                </a:solidFill>
+                <a:latin typeface="微软雅黑"/>
+                <a:ea typeface="微软雅黑"/>
+              </a:rPr>
+              <a:t>补采采购</a:t>
+            </a:r>
+            <a:r>
+              <a:rPr lang="en-US" sz="1200">
+                <a:solidFill>
+                  <a:srgbClr val="1A1A1A"/>
+                </a:solidFill>
+                <a:latin typeface="微软雅黑"/>
+                <a:ea typeface="微软雅黑"/>
+              </a:rPr>
+              <a:t> / </a:t>
+            </a:r>
+            <a:r>
+              <a:rPr lang="zh-CN" sz="1200">
+                <a:solidFill>
+                  <a:srgbClr val="1A1A1A"/>
+                </a:solidFill>
+                <a:latin typeface="微软雅黑"/>
+                <a:ea typeface="微软雅黑"/>
+              </a:rPr>
+              <a:t>船务「节省工时」量化，用于增量价值申报</a:t>
+            </a:r>
+            <a:endParaRPr/>
+          </a:p>
+        </p:txBody>
+      </p:sp>
+      <p:sp>
+        <p:nvSpPr>
+          <p:cNvPr id="51" name=""/>
+          <p:cNvSpPr/>
+          <p:nvPr/>
+        </p:nvSpPr>
+        <p:spPr>
+          <a:xfrm rot="0" flipH="0" flipV="0">
+            <a:off x="533400" y="3314700"/>
+            <a:ext cx="76200" cy="76200"/>
+          </a:xfrm>
+          <a:prstGeom prst="roundRect">
+            <a:avLst>
+              <a:gd name="adj" fmla="val 25000"/>
+            </a:avLst>
+          </a:prstGeom>
+          <a:solidFill>
+            <a:srgbClr val="4472C4"/>
+          </a:solidFill>
+          <a:ln/>
+        </p:spPr>
+        <p:txBody>
+          <a:bodyPr/>
+          <a:p/>
+        </p:txBody>
+      </p:sp>
+      <p:sp>
+        <p:nvSpPr>
+          <p:cNvPr id="52" name="" descr="{&quot;isTemplate&quot;:true,&quot;type&quot;:&quot;text&quot;}"/>
+          <p:cNvSpPr txBox="1"/>
+          <p:nvPr/>
+        </p:nvSpPr>
+        <p:spPr>
+          <a:xfrm rot="0" flipH="0" flipV="0">
+            <a:off x="723900" y="3238500"/>
+            <a:ext cx="2762250" cy="276225"/>
+          </a:xfrm>
+          <a:prstGeom prst="rect"/>
+        </p:spPr>
+        <p:txBody>
+          <a:bodyPr wrap="none" lIns="0" tIns="0" rIns="0" bIns="0"/>
+          <a:p>
+            <a:pPr>
+              <a:lnSpc>
+                <a:spcPct val="150000"/>
+              </a:lnSpc>
+            </a:pPr>
+            <a:r>
+              <a:rPr lang="en-US" sz="1200">
+                <a:solidFill>
+                  <a:srgbClr val="1A1A1A"/>
+                </a:solidFill>
+                <a:latin typeface="微软雅黑"/>
+                <a:ea typeface="微软雅黑"/>
+              </a:rPr>
+              <a:t>Tax_check / Data_masking </a:t>
+            </a:r>
+            <a:r>
+              <a:rPr lang="zh-CN" sz="1200">
+                <a:solidFill>
+                  <a:srgbClr val="1A1A1A"/>
+                </a:solidFill>
+                <a:latin typeface="微软雅黑"/>
+                <a:ea typeface="微软雅黑"/>
+              </a:rPr>
+              <a:t>持续运营深化</a:t>
+            </a:r>
+            <a:endParaRPr/>
+          </a:p>
+        </p:txBody>
+      </p:sp>
+      <p:sp>
+        <p:nvSpPr>
+          <p:cNvPr id="53" name=""/>
+          <p:cNvSpPr/>
+          <p:nvPr/>
+        </p:nvSpPr>
+        <p:spPr>
+          <a:xfrm rot="0" flipH="0" flipV="0">
+            <a:off x="533400" y="3724275"/>
+            <a:ext cx="76200" cy="76200"/>
+          </a:xfrm>
+          <a:prstGeom prst="roundRect">
+            <a:avLst>
+              <a:gd name="adj" fmla="val 25000"/>
+            </a:avLst>
+          </a:prstGeom>
+          <a:solidFill>
+            <a:srgbClr val="4472C4"/>
+          </a:solidFill>
+          <a:ln/>
+        </p:spPr>
+        <p:txBody>
+          <a:bodyPr/>
+          <a:p/>
+        </p:txBody>
+      </p:sp>
+      <p:sp>
+        <p:nvSpPr>
+          <p:cNvPr id="54" name="" descr="{&quot;isTemplate&quot;:true,&quot;type&quot;:&quot;text&quot;}"/>
+          <p:cNvSpPr txBox="1"/>
+          <p:nvPr/>
+        </p:nvSpPr>
+        <p:spPr>
+          <a:xfrm rot="0" flipH="0" flipV="0">
+            <a:off x="723900" y="3648075"/>
+            <a:ext cx="3419475" cy="276225"/>
+          </a:xfrm>
+          <a:prstGeom prst="rect"/>
+        </p:spPr>
+        <p:txBody>
+          <a:bodyPr wrap="none" lIns="0" tIns="0" rIns="0" bIns="0"/>
+          <a:p>
+            <a:pPr>
+              <a:lnSpc>
+                <a:spcPct val="150000"/>
+              </a:lnSpc>
+            </a:pPr>
+            <a:r>
+              <a:rPr lang="zh-CN" sz="1200">
+                <a:solidFill>
+                  <a:srgbClr val="1A1A1A"/>
+                </a:solidFill>
+                <a:latin typeface="微软雅黑"/>
+                <a:ea typeface="微软雅黑"/>
+              </a:rPr>
+              <a:t>价格爬取</a:t>
+            </a:r>
+            <a:r>
+              <a:rPr lang="en-US" sz="1200">
+                <a:solidFill>
+                  <a:srgbClr val="1A1A1A"/>
+                </a:solidFill>
+                <a:latin typeface="微软雅黑"/>
+                <a:ea typeface="微软雅黑"/>
+              </a:rPr>
+              <a:t> Skill </a:t>
+            </a:r>
+            <a:r>
+              <a:rPr lang="zh-CN" sz="1200">
+                <a:solidFill>
+                  <a:srgbClr val="1A1A1A"/>
+                </a:solidFill>
+                <a:latin typeface="微软雅黑"/>
+                <a:ea typeface="微软雅黑"/>
+              </a:rPr>
+              <a:t>回采购培训，巩固「自建</a:t>
+            </a:r>
+            <a:r>
+              <a:rPr lang="en-US" sz="1200">
+                <a:solidFill>
+                  <a:srgbClr val="1A1A1A"/>
+                </a:solidFill>
+                <a:latin typeface="微软雅黑"/>
+                <a:ea typeface="微软雅黑"/>
+              </a:rPr>
+              <a:t> Skill</a:t>
+            </a:r>
+            <a:r>
+              <a:rPr lang="zh-CN" sz="1200">
+                <a:solidFill>
+                  <a:srgbClr val="1A1A1A"/>
+                </a:solidFill>
+                <a:latin typeface="微软雅黑"/>
+                <a:ea typeface="微软雅黑"/>
+              </a:rPr>
+              <a:t>」能力</a:t>
+            </a:r>
+            <a:endParaRPr/>
+          </a:p>
+        </p:txBody>
+      </p:sp>
+      <p:sp>
+        <p:nvSpPr>
+          <p:cNvPr id="55" name="" descr="{&quot;isTemplate&quot;:true,&quot;type&quot;:&quot;text&quot;}"/>
+          <p:cNvSpPr txBox="1"/>
+          <p:nvPr/>
+        </p:nvSpPr>
+        <p:spPr>
+          <a:xfrm rot="0" flipH="0" flipV="0">
+            <a:off x="7162800" y="1238250"/>
+            <a:ext cx="4495800" cy="228600"/>
+          </a:xfrm>
+          <a:prstGeom prst="rect"/>
+        </p:spPr>
+        <p:txBody>
+          <a:bodyPr wrap="none" lIns="0" tIns="0" rIns="0" bIns="0"/>
+          <a:p>
+            <a:pPr>
+              <a:lnSpc>
+                <a:spcPct val="100000"/>
+              </a:lnSpc>
+            </a:pPr>
+            <a:r>
+              <a:rPr lang="zh-CN" sz="1500" b="1">
+                <a:solidFill>
+                  <a:srgbClr val="C0504D"/>
+                </a:solidFill>
+                <a:latin typeface="微软雅黑"/>
+                <a:ea typeface="微软雅黑"/>
+              </a:rPr>
+              <a:t>需支持事项</a:t>
+            </a:r>
+            <a:endParaRPr/>
+          </a:p>
+        </p:txBody>
+      </p:sp>
+      <p:sp>
+        <p:nvSpPr>
+          <p:cNvPr id="56" name=""/>
+          <p:cNvSpPr/>
+          <p:nvPr/>
+        </p:nvSpPr>
+        <p:spPr>
+          <a:xfrm rot="0" flipH="0" flipV="0">
+            <a:off x="7162800" y="1676400"/>
+            <a:ext cx="76200" cy="76200"/>
+          </a:xfrm>
+          <a:prstGeom prst="roundRect">
+            <a:avLst>
+              <a:gd name="adj" fmla="val 25000"/>
+            </a:avLst>
+          </a:prstGeom>
+          <a:solidFill>
+            <a:srgbClr val="C0504D"/>
+          </a:solidFill>
+          <a:ln/>
+        </p:spPr>
+        <p:txBody>
+          <a:bodyPr/>
+          <a:p/>
+        </p:txBody>
+      </p:sp>
+      <p:sp>
+        <p:nvSpPr>
+          <p:cNvPr id="57" name="" descr="{&quot;isTemplate&quot;:true,&quot;type&quot;:&quot;text&quot;}"/>
+          <p:cNvSpPr txBox="1"/>
+          <p:nvPr/>
+        </p:nvSpPr>
+        <p:spPr>
+          <a:xfrm rot="0" flipH="0" flipV="0">
+            <a:off x="7353300" y="1600200"/>
+            <a:ext cx="3810000" cy="276225"/>
+          </a:xfrm>
+          <a:prstGeom prst="rect"/>
+        </p:spPr>
+        <p:txBody>
+          <a:bodyPr wrap="none" lIns="0" tIns="0" rIns="0" bIns="0"/>
+          <a:p>
+            <a:pPr>
+              <a:lnSpc>
+                <a:spcPct val="150000"/>
+              </a:lnSpc>
+            </a:pPr>
+            <a:r>
+              <a:rPr lang="zh-CN" sz="1200">
+                <a:solidFill>
+                  <a:srgbClr val="1A1A1A"/>
+                </a:solidFill>
+                <a:latin typeface="微软雅黑"/>
+                <a:ea typeface="微软雅黑"/>
+              </a:rPr>
+              <a:t>业务智能助理检索测试需营销中心提供真实客户问题样本</a:t>
+            </a:r>
+            <a:endParaRPr/>
+          </a:p>
+        </p:txBody>
+      </p:sp>
+      <p:sp>
+        <p:nvSpPr>
+          <p:cNvPr id="58" name=""/>
+          <p:cNvSpPr/>
+          <p:nvPr/>
+        </p:nvSpPr>
+        <p:spPr>
+          <a:xfrm rot="0" flipH="0" flipV="0">
+            <a:off x="7162800" y="2085975"/>
+            <a:ext cx="76200" cy="76200"/>
+          </a:xfrm>
+          <a:prstGeom prst="roundRect">
+            <a:avLst>
+              <a:gd name="adj" fmla="val 25000"/>
+            </a:avLst>
+          </a:prstGeom>
+          <a:solidFill>
+            <a:srgbClr val="C0504D"/>
+          </a:solidFill>
+          <a:ln/>
+        </p:spPr>
+        <p:txBody>
+          <a:bodyPr/>
+          <a:p/>
+        </p:txBody>
+      </p:sp>
+      <p:sp>
+        <p:nvSpPr>
+          <p:cNvPr id="59" name="" descr="{&quot;isTemplate&quot;:true,&quot;type&quot;:&quot;text&quot;}"/>
+          <p:cNvSpPr txBox="1"/>
+          <p:nvPr/>
+        </p:nvSpPr>
+        <p:spPr>
+          <a:xfrm rot="0" flipH="0" flipV="0">
+            <a:off x="7353300" y="2009775"/>
+            <a:ext cx="3200400" cy="276225"/>
+          </a:xfrm>
+          <a:prstGeom prst="rect"/>
+        </p:spPr>
+        <p:txBody>
+          <a:bodyPr wrap="none" lIns="0" tIns="0" rIns="0" bIns="0"/>
+          <a:p>
+            <a:pPr>
+              <a:lnSpc>
+                <a:spcPct val="150000"/>
+              </a:lnSpc>
+            </a:pPr>
+            <a:r>
+              <a:rPr lang="zh-CN" sz="1200">
+                <a:solidFill>
+                  <a:srgbClr val="1A1A1A"/>
+                </a:solidFill>
+                <a:latin typeface="微软雅黑"/>
+                <a:ea typeface="微软雅黑"/>
+              </a:rPr>
+              <a:t>待解项修复依赖供应商排期，需领导推动优先级</a:t>
+            </a:r>
+            <a:endParaRPr/>
+          </a:p>
+        </p:txBody>
+      </p:sp>
+      <p:sp>
+        <p:nvSpPr>
+          <p:cNvPr id="60" name=""/>
+          <p:cNvSpPr/>
+          <p:nvPr/>
+        </p:nvSpPr>
+        <p:spPr>
+          <a:xfrm rot="0" flipH="0" flipV="0">
+            <a:off x="7162800" y="2495550"/>
+            <a:ext cx="76200" cy="76200"/>
+          </a:xfrm>
+          <a:prstGeom prst="roundRect">
+            <a:avLst>
+              <a:gd name="adj" fmla="val 25000"/>
+            </a:avLst>
+          </a:prstGeom>
+          <a:solidFill>
+            <a:srgbClr val="C0504D"/>
+          </a:solidFill>
+          <a:ln/>
+        </p:spPr>
+        <p:txBody>
+          <a:bodyPr/>
+          <a:p/>
+        </p:txBody>
+      </p:sp>
+      <p:sp>
+        <p:nvSpPr>
+          <p:cNvPr id="61" name="" descr="{&quot;isTemplate&quot;:true,&quot;type&quot;:&quot;text&quot;}"/>
+          <p:cNvSpPr txBox="1"/>
+          <p:nvPr/>
+        </p:nvSpPr>
+        <p:spPr>
+          <a:xfrm rot="0" flipH="0" flipV="0">
+            <a:off x="7353300" y="2419350"/>
+            <a:ext cx="2743200" cy="276225"/>
+          </a:xfrm>
+          <a:prstGeom prst="rect"/>
+        </p:spPr>
+        <p:txBody>
+          <a:bodyPr wrap="none" lIns="0" tIns="0" rIns="0" bIns="0"/>
+          <a:p>
+            <a:pPr>
+              <a:lnSpc>
+                <a:spcPct val="150000"/>
+              </a:lnSpc>
+            </a:pPr>
+            <a:r>
+              <a:rPr lang="zh-CN" sz="1200">
+                <a:solidFill>
+                  <a:srgbClr val="1A1A1A"/>
+                </a:solidFill>
+                <a:latin typeface="微软雅黑"/>
+                <a:ea typeface="微软雅黑"/>
+              </a:rPr>
+              <a:t>工时量化需业务方配合记录使用前后耗时</a:t>
+            </a:r>
+            <a:endParaRPr/>
+          </a:p>
+        </p:txBody>
+      </p:sp>
+      <p:sp>
+        <p:nvSpPr>
+          <p:cNvPr id="62" name=""/>
+          <p:cNvSpPr/>
+          <p:nvPr/>
+        </p:nvSpPr>
+        <p:spPr>
+          <a:xfrm rot="0" flipH="0" flipV="0">
+            <a:off x="7162800" y="2905125"/>
+            <a:ext cx="76200" cy="76200"/>
+          </a:xfrm>
+          <a:prstGeom prst="roundRect">
+            <a:avLst>
+              <a:gd name="adj" fmla="val 25000"/>
+            </a:avLst>
+          </a:prstGeom>
+          <a:solidFill>
+            <a:srgbClr val="C0504D"/>
+          </a:solidFill>
+          <a:ln/>
+        </p:spPr>
+        <p:txBody>
+          <a:bodyPr/>
+          <a:p/>
+        </p:txBody>
+      </p:sp>
+      <p:sp>
+        <p:nvSpPr>
+          <p:cNvPr id="63" name="" descr="{&quot;isTemplate&quot;:true,&quot;type&quot;:&quot;text&quot;}"/>
+          <p:cNvSpPr txBox="1"/>
+          <p:nvPr/>
+        </p:nvSpPr>
+        <p:spPr>
+          <a:xfrm rot="0" flipH="0" flipV="0">
+            <a:off x="7353300" y="2828925"/>
+            <a:ext cx="2333625" cy="276225"/>
+          </a:xfrm>
+          <a:prstGeom prst="rect"/>
+        </p:spPr>
+        <p:txBody>
+          <a:bodyPr wrap="none" lIns="0" tIns="0" rIns="0" bIns="0"/>
+          <a:p>
+            <a:pPr>
+              <a:lnSpc>
+                <a:spcPct val="150000"/>
+              </a:lnSpc>
+            </a:pPr>
+            <a:r>
+              <a:rPr lang="zh-CN" sz="1200">
+                <a:solidFill>
+                  <a:srgbClr val="1A1A1A"/>
+                </a:solidFill>
+                <a:latin typeface="微软雅黑"/>
+                <a:ea typeface="微软雅黑"/>
+              </a:rPr>
+              <a:t>采纳率看板需</a:t>
+            </a:r>
+            <a:r>
+              <a:rPr lang="en-US" sz="1200">
+                <a:solidFill>
+                  <a:srgbClr val="1A1A1A"/>
+                </a:solidFill>
+                <a:latin typeface="微软雅黑"/>
+                <a:ea typeface="微软雅黑"/>
+              </a:rPr>
+              <a:t> IT / </a:t>
+            </a:r>
+            <a:r>
+              <a:rPr lang="zh-CN" sz="1200">
+                <a:solidFill>
+                  <a:srgbClr val="1A1A1A"/>
+                </a:solidFill>
+                <a:latin typeface="微软雅黑"/>
+                <a:ea typeface="微软雅黑"/>
+              </a:rPr>
+              <a:t>数据侧轻量支持</a:t>
+            </a:r>
+            <a:endParaRPr/>
+          </a:p>
+        </p:txBody>
+      </p:sp>
+      <p:sp>
+        <p:nvSpPr>
+          <p:cNvPr id="64" name="" descr="{&quot;isTemplate&quot;:true,&quot;type&quot;:&quot;text&quot;}"/>
+          <p:cNvSpPr txBox="1"/>
+          <p:nvPr/>
+        </p:nvSpPr>
+        <p:spPr>
+          <a:xfrm rot="0" flipH="0" flipV="0">
+            <a:off x="533400" y="6362700"/>
+            <a:ext cx="1285875" cy="161925"/>
+          </a:xfrm>
+          <a:prstGeom prst="rect"/>
+        </p:spPr>
+        <p:txBody>
+          <a:bodyPr wrap="none" lIns="0" tIns="0" rIns="0" bIns="0"/>
+          <a:p>
+            <a:pPr>
+              <a:lnSpc>
+                <a:spcPct val="100000"/>
+              </a:lnSpc>
+            </a:pPr>
+            <a:r>
+              <a:rPr lang="zh-CN" sz="1050">
+                <a:solidFill>
+                  <a:srgbClr val="888888"/>
+                </a:solidFill>
+                <a:latin typeface="微软雅黑"/>
+                <a:ea typeface="微软雅黑"/>
+              </a:rPr>
+              <a:t>入职以来</a:t>
+            </a:r>
+            <a:r>
+              <a:rPr lang="en-US" sz="1050">
+                <a:solidFill>
+                  <a:srgbClr val="888888"/>
+                </a:solidFill>
+                <a:latin typeface="微软雅黑"/>
+                <a:ea typeface="微软雅黑"/>
+              </a:rPr>
+              <a:t> AI </a:t>
+            </a:r>
+            <a:r>
+              <a:rPr lang="zh-CN" sz="1050">
+                <a:solidFill>
+                  <a:srgbClr val="888888"/>
+                </a:solidFill>
+                <a:latin typeface="微软雅黑"/>
+                <a:ea typeface="微软雅黑"/>
+              </a:rPr>
+              <a:t>工作复盘</a:t>
+            </a:r>
+            <a:endParaRPr/>
+          </a:p>
+        </p:txBody>
+      </p:sp>
+      <p:sp>
+        <p:nvSpPr>
+          <p:cNvPr id="65" name="" descr="{&quot;isTemplate&quot;:true,&quot;type&quot;:&quot;text&quot;}"/>
+          <p:cNvSpPr txBox="1"/>
+          <p:nvPr/>
+        </p:nvSpPr>
+        <p:spPr>
+          <a:xfrm rot="0" flipH="0" flipV="0">
+            <a:off x="11229975" y="6362700"/>
+            <a:ext cx="428625" cy="161925"/>
+          </a:xfrm>
+          <a:prstGeom prst="rect"/>
+        </p:spPr>
+        <p:txBody>
+          <a:bodyPr wrap="none" lIns="0" tIns="0" rIns="0" bIns="0"/>
+          <a:p>
+            <a:pPr>
+              <a:lnSpc>
+                <a:spcPct val="100000"/>
+              </a:lnSpc>
+            </a:pPr>
+            <a:r>
+              <a:rPr lang="en-US" sz="1050">
+                <a:solidFill>
+                  <a:srgbClr val="888888"/>
+                </a:solidFill>
+                <a:latin typeface="微软雅黑"/>
+                <a:ea typeface="微软雅黑"/>
+              </a:rPr>
+              <a:t>12 / 13</a:t>
+            </a:r>
+            <a:endParaRPr/>
+          </a:p>
+        </p:txBody>
+      </p:sp>
+    </p:spTree>
+  </p:cSld>
+</p:sld>
+</file>
+
+<file path=ppt/slides/slide13.xml><?xml version="1.0" encoding="utf-8"?>
+<p:sld xmlns:p="http://schemas.openxmlformats.org/presentationml/2006/main" xmlns:a="http://schemas.openxmlformats.org/drawingml/2006/main">
+  <p:cSld>
+    <p:spTree>
+      <p:nvGrpSpPr>
+        <p:cNvPr id="66" name="" descr="&lt;Slide style={{ width:'1280px', height:'720px', position:'relative', background:'#FFFFFF', fontFamily:'微软雅黑' }}&gt;&#10;  &lt;Box style={{ position:'absolute', left:0, top:300, width:1280, height:230, background:'#4472C4', justifyContent:'center', alignItems:'center' }}&gt;&#10;    &lt;Text style={{ fontSize:56, fontWeight:'bold', color:'#FFFFFF' }}&gt;汇报完毕！&lt;/Text&gt;&#10;    &lt;Text style={{ fontSize:26, color:'#FFFFFF', marginTop:16 }}&gt;没有绩效，一切无效&lt;/Text&gt;&#10;  &lt;/Box&gt;&#10;&#10;  &lt;Box style={{ position:'absolute', left:80, top:120, flexDirection:'row', alignItems:'center', gap:12 }}&gt;&#10;    &lt;Box style={{ width:48, height:3, background:'#4472C4' }} /&gt;&#10;    &lt;Text style={{ fontSize:16, color:'#052B7C' }}&gt;助力企业利润持续增长&lt;/Text&gt;&#10;  &lt;/Box&gt;&#10;&#10;  &lt;Box style={{ position:'absolute', left:80, top:580, flexDirection:'column', gap:10 }}&gt;&#10;    &lt;Text style={{ fontSize:18, color:'#052B7C' }}&gt;部　　门：AI 技术专员（宏昊AI助手平台）&lt;/Text&gt;&#10;    &lt;Text style={{ fontSize:18, color:'#052B7C' }}&gt;汇报人：肖聪&lt;/Text&gt;&#10;    &lt;Text style={{ fontSize:18, color:'#052B7C' }}&gt;汇报期间：2026.04.15 – 2026.07.31（入职以来）&lt;/Text&gt;&#10;  &lt;/Box&gt;&#10;&#10;  &lt;Text style={{ position:'absolute', right:80, bottom:60, fontSize:16, color:'#052B7C', fontWeight:'bold' }}&gt;- 机密受控 -&lt;/Text&gt;&#10;&lt;/Slide&gt;"/>
+        <p:cNvGrpSpPr/>
+        <p:nvPr/>
+      </p:nvGrpSpPr>
+      <p:grpSpPr>
+        <a:xfrm>
+          <a:off x="0" y="0"/>
+          <a:ext cx="0" cy="0"/>
+          <a:chOff x="0" y="0"/>
+          <a:chExt cx="0" cy="0"/>
+        </a:xfrm>
+      </p:grpSpPr>
+      <p:sp>
+        <p:nvSpPr>
+          <p:cNvPr id="67" name=""/>
+          <p:cNvSpPr/>
+          <p:nvPr/>
+        </p:nvSpPr>
+        <p:spPr>
+          <a:xfrm rot="0" flipH="0" flipV="0">
+            <a:off x="0" y="0"/>
+            <a:ext cx="12192000" cy="6858000"/>
+          </a:xfrm>
+          <a:prstGeom prst="rect">
+            <a:avLst/>
+          </a:prstGeom>
+          <a:solidFill>
+            <a:srgbClr val="FFFFFF"/>
+          </a:solidFill>
+          <a:ln/>
+        </p:spPr>
+        <p:txBody>
+          <a:bodyPr/>
+          <a:p/>
+        </p:txBody>
+      </p:sp>
+      <p:sp>
+        <p:nvSpPr>
+          <p:cNvPr id="68" name=""/>
+          <p:cNvSpPr/>
+          <p:nvPr/>
+        </p:nvSpPr>
+        <p:spPr>
+          <a:xfrm rot="0" flipH="0" flipV="0">
+            <a:off x="0" y="2857500"/>
+            <a:ext cx="12192000" cy="2190750"/>
+          </a:xfrm>
+          <a:prstGeom prst="rect">
+            <a:avLst/>
+          </a:prstGeom>
+          <a:solidFill>
+            <a:srgbClr val="4472C4"/>
+          </a:solidFill>
+          <a:ln/>
+        </p:spPr>
+        <p:txBody>
+          <a:bodyPr/>
+          <a:p/>
+        </p:txBody>
+      </p:sp>
+      <p:sp>
+        <p:nvSpPr>
+          <p:cNvPr id="69" name="" descr="{&quot;isTemplate&quot;:true,&quot;type&quot;:&quot;text&quot;}"/>
+          <p:cNvSpPr txBox="1"/>
+          <p:nvPr/>
+        </p:nvSpPr>
+        <p:spPr>
+          <a:xfrm rot="0" flipH="0" flipV="0">
+            <a:off x="4762500" y="3400425"/>
+            <a:ext cx="2667000" cy="647700"/>
+          </a:xfrm>
+          <a:prstGeom prst="rect"/>
+        </p:spPr>
+        <p:txBody>
+          <a:bodyPr wrap="none" lIns="0" tIns="0" rIns="0" bIns="0"/>
+          <a:p>
+            <a:pPr>
+              <a:lnSpc>
+                <a:spcPct val="100000"/>
+              </a:lnSpc>
+            </a:pPr>
+            <a:r>
+              <a:rPr lang="zh-CN" sz="4200" b="1">
+                <a:solidFill>
+                  <a:srgbClr val="FFFFFF"/>
+                </a:solidFill>
+                <a:latin typeface="微软雅黑"/>
+                <a:ea typeface="微软雅黑"/>
+              </a:rPr>
+              <a:t>汇报完毕！</a:t>
+            </a:r>
+            <a:endParaRPr/>
+          </a:p>
+        </p:txBody>
+      </p:sp>
+      <p:sp>
+        <p:nvSpPr>
+          <p:cNvPr id="70" name="" descr="{&quot;isTemplate&quot;:true,&quot;type&quot;:&quot;text&quot;}"/>
+          <p:cNvSpPr txBox="1"/>
+          <p:nvPr/>
+        </p:nvSpPr>
+        <p:spPr>
+          <a:xfrm rot="0" flipH="0" flipV="0">
+            <a:off x="4981575" y="4200525"/>
+            <a:ext cx="2228850" cy="304800"/>
+          </a:xfrm>
+          <a:prstGeom prst="rect"/>
+        </p:spPr>
+        <p:txBody>
+          <a:bodyPr wrap="none" lIns="0" tIns="0" rIns="0" bIns="0"/>
+          <a:p>
+            <a:pPr>
+              <a:lnSpc>
+                <a:spcPct val="100000"/>
+              </a:lnSpc>
+            </a:pPr>
+            <a:r>
+              <a:rPr lang="zh-CN" sz="1950">
+                <a:solidFill>
+                  <a:srgbClr val="FFFFFF"/>
+                </a:solidFill>
+                <a:latin typeface="微软雅黑"/>
+                <a:ea typeface="微软雅黑"/>
+              </a:rPr>
+              <a:t>没有绩效，一切无效</a:t>
+            </a:r>
+            <a:endParaRPr/>
+          </a:p>
+        </p:txBody>
+      </p:sp>
+      <p:sp>
+        <p:nvSpPr>
+          <p:cNvPr id="71" name=""/>
+          <p:cNvSpPr/>
+          <p:nvPr/>
+        </p:nvSpPr>
+        <p:spPr>
+          <a:xfrm rot="0" flipH="0" flipV="0">
+            <a:off x="762000" y="1228725"/>
+            <a:ext cx="457200" cy="28575"/>
+          </a:xfrm>
+          <a:prstGeom prst="rect">
+            <a:avLst/>
+          </a:prstGeom>
+          <a:solidFill>
+            <a:srgbClr val="4472C4"/>
+          </a:solidFill>
+          <a:ln/>
+        </p:spPr>
+        <p:txBody>
+          <a:bodyPr/>
+          <a:p/>
+        </p:txBody>
+      </p:sp>
+      <p:sp>
+        <p:nvSpPr>
+          <p:cNvPr id="72" name="" descr="{&quot;isTemplate&quot;:true,&quot;type&quot;:&quot;text&quot;}"/>
+          <p:cNvSpPr txBox="1"/>
+          <p:nvPr/>
+        </p:nvSpPr>
+        <p:spPr>
+          <a:xfrm rot="0" flipH="0" flipV="0">
+            <a:off x="1333500" y="1143000"/>
+            <a:ext cx="1524000" cy="190500"/>
+          </a:xfrm>
+          <a:prstGeom prst="rect"/>
+        </p:spPr>
+        <p:txBody>
+          <a:bodyPr wrap="none" lIns="0" tIns="0" rIns="0" bIns="0"/>
+          <a:p>
+            <a:pPr>
+              <a:lnSpc>
+                <a:spcPct val="100000"/>
+              </a:lnSpc>
+            </a:pPr>
+            <a:r>
+              <a:rPr lang="zh-CN" sz="1200">
+                <a:solidFill>
+                  <a:srgbClr val="052B7C"/>
+                </a:solidFill>
+                <a:latin typeface="微软雅黑"/>
+                <a:ea typeface="微软雅黑"/>
+              </a:rPr>
+              <a:t>助力企业利润持续增长</a:t>
+            </a:r>
+            <a:endParaRPr/>
+          </a:p>
+        </p:txBody>
+      </p:sp>
+      <p:sp>
+        <p:nvSpPr>
+          <p:cNvPr id="73" name="" descr="{&quot;isTemplate&quot;:true,&quot;type&quot;:&quot;text&quot;}"/>
+          <p:cNvSpPr txBox="1"/>
+          <p:nvPr/>
+        </p:nvSpPr>
+        <p:spPr>
+          <a:xfrm rot="0" flipH="0" flipV="0">
+            <a:off x="762000" y="5524500"/>
+            <a:ext cx="3781425" cy="209550"/>
+          </a:xfrm>
+          <a:prstGeom prst="rect"/>
+        </p:spPr>
+        <p:txBody>
+          <a:bodyPr wrap="none" lIns="0" tIns="0" rIns="0" bIns="0"/>
+          <a:p>
+            <a:pPr>
+              <a:lnSpc>
+                <a:spcPct val="100000"/>
+              </a:lnSpc>
+            </a:pPr>
+            <a:r>
+              <a:rPr lang="zh-CN" sz="1350">
+                <a:solidFill>
+                  <a:srgbClr val="052B7C"/>
+                </a:solidFill>
+                <a:latin typeface="微软雅黑"/>
+                <a:ea typeface="微软雅黑"/>
+              </a:rPr>
+              <a:t>部　　门：</a:t>
+            </a:r>
+            <a:r>
+              <a:rPr lang="en-US" sz="1350">
+                <a:solidFill>
+                  <a:srgbClr val="052B7C"/>
+                </a:solidFill>
+                <a:latin typeface="微软雅黑"/>
+                <a:ea typeface="微软雅黑"/>
+              </a:rPr>
+              <a:t>AI </a:t>
+            </a:r>
+            <a:r>
+              <a:rPr lang="zh-CN" sz="1350">
+                <a:solidFill>
+                  <a:srgbClr val="052B7C"/>
+                </a:solidFill>
+                <a:latin typeface="微软雅黑"/>
+                <a:ea typeface="微软雅黑"/>
+              </a:rPr>
+              <a:t>技术专员（宏昊</a:t>
+            </a:r>
+            <a:r>
+              <a:rPr lang="en-US" sz="1350">
+                <a:solidFill>
+                  <a:srgbClr val="052B7C"/>
+                </a:solidFill>
+                <a:latin typeface="微软雅黑"/>
+                <a:ea typeface="微软雅黑"/>
+              </a:rPr>
+              <a:t>AI</a:t>
+            </a:r>
+            <a:r>
+              <a:rPr lang="zh-CN" sz="1350">
+                <a:solidFill>
+                  <a:srgbClr val="052B7C"/>
+                </a:solidFill>
+                <a:latin typeface="微软雅黑"/>
+                <a:ea typeface="微软雅黑"/>
+              </a:rPr>
+              <a:t>助手平台）</a:t>
+            </a:r>
+            <a:endParaRPr/>
+          </a:p>
+        </p:txBody>
+      </p:sp>
+      <p:sp>
+        <p:nvSpPr>
+          <p:cNvPr id="74" name="" descr="{&quot;isTemplate&quot;:true,&quot;type&quot;:&quot;text&quot;}"/>
+          <p:cNvSpPr txBox="1"/>
+          <p:nvPr/>
+        </p:nvSpPr>
+        <p:spPr>
+          <a:xfrm rot="0" flipH="0" flipV="0">
+            <a:off x="762000" y="5829300"/>
+            <a:ext cx="3781425" cy="209550"/>
+          </a:xfrm>
+          <a:prstGeom prst="rect"/>
+        </p:spPr>
+        <p:txBody>
+          <a:bodyPr wrap="none" lIns="0" tIns="0" rIns="0" bIns="0"/>
+          <a:p>
+            <a:pPr>
+              <a:lnSpc>
+                <a:spcPct val="100000"/>
+              </a:lnSpc>
+            </a:pPr>
+            <a:r>
+              <a:rPr lang="zh-CN" sz="1350">
+                <a:solidFill>
+                  <a:srgbClr val="052B7C"/>
+                </a:solidFill>
+                <a:latin typeface="微软雅黑"/>
+                <a:ea typeface="微软雅黑"/>
+              </a:rPr>
+              <a:t>汇报人：肖聪</a:t>
+            </a:r>
+            <a:endParaRPr/>
+          </a:p>
+        </p:txBody>
+      </p:sp>
+      <p:sp>
+        <p:nvSpPr>
+          <p:cNvPr id="75" name="" descr="{&quot;isTemplate&quot;:true,&quot;type&quot;:&quot;text&quot;}"/>
+          <p:cNvSpPr txBox="1"/>
+          <p:nvPr/>
+        </p:nvSpPr>
+        <p:spPr>
+          <a:xfrm rot="0" flipH="0" flipV="0">
+            <a:off x="762000" y="6134100"/>
+            <a:ext cx="3781425" cy="209550"/>
+          </a:xfrm>
+          <a:prstGeom prst="rect"/>
+        </p:spPr>
+        <p:txBody>
+          <a:bodyPr wrap="none" lIns="0" tIns="0" rIns="0" bIns="0"/>
+          <a:p>
+            <a:pPr>
+              <a:lnSpc>
+                <a:spcPct val="100000"/>
+              </a:lnSpc>
+            </a:pPr>
+            <a:r>
+              <a:rPr lang="zh-CN" sz="1350">
+                <a:solidFill>
+                  <a:srgbClr val="052B7C"/>
+                </a:solidFill>
+                <a:latin typeface="微软雅黑"/>
+                <a:ea typeface="微软雅黑"/>
+              </a:rPr>
+              <a:t>汇报期间：</a:t>
+            </a:r>
+            <a:r>
+              <a:rPr lang="en-US" sz="1350">
+                <a:solidFill>
+                  <a:srgbClr val="052B7C"/>
+                </a:solidFill>
+                <a:latin typeface="微软雅黑"/>
+                <a:ea typeface="微软雅黑"/>
+              </a:rPr>
+              <a:t>2026.04.15 – 2026.07.31</a:t>
+            </a:r>
+            <a:r>
+              <a:rPr lang="zh-CN" sz="1350">
+                <a:solidFill>
+                  <a:srgbClr val="052B7C"/>
+                </a:solidFill>
+                <a:latin typeface="微软雅黑"/>
+                <a:ea typeface="微软雅黑"/>
+              </a:rPr>
+              <a:t>（入职以来）</a:t>
+            </a:r>
+            <a:endParaRPr/>
+          </a:p>
+        </p:txBody>
+      </p:sp>
+      <p:sp>
+        <p:nvSpPr>
+          <p:cNvPr id="76" name="" descr="{&quot;isTemplate&quot;:true,&quot;type&quot;:&quot;text&quot;}"/>
+          <p:cNvSpPr txBox="1"/>
+          <p:nvPr/>
+        </p:nvSpPr>
+        <p:spPr>
+          <a:xfrm rot="0" flipH="0" flipV="0">
+            <a:off x="10591800" y="6096000"/>
+            <a:ext cx="838200" cy="190500"/>
+          </a:xfrm>
+          <a:prstGeom prst="rect"/>
+        </p:spPr>
+        <p:txBody>
+          <a:bodyPr wrap="none" lIns="0" tIns="0" rIns="0" bIns="0"/>
+          <a:p>
+            <a:pPr>
+              <a:lnSpc>
+                <a:spcPct val="100000"/>
+              </a:lnSpc>
+            </a:pPr>
+            <a:r>
+              <a:rPr lang="en-US" sz="1200" b="1">
+                <a:solidFill>
+                  <a:srgbClr val="052B7C"/>
+                </a:solidFill>
+                <a:latin typeface="微软雅黑"/>
+                <a:ea typeface="微软雅黑"/>
+              </a:rPr>
+              <a:t>- </a:t>
+            </a:r>
+            <a:r>
+              <a:rPr lang="zh-CN" sz="1200" b="1">
+                <a:solidFill>
+                  <a:srgbClr val="052B7C"/>
+                </a:solidFill>
+                <a:latin typeface="微软雅黑"/>
+                <a:ea typeface="微软雅黑"/>
+              </a:rPr>
+              <a:t>机密受控</a:t>
+            </a:r>
+            <a:r>
+              <a:rPr lang="en-US" sz="1200" b="1">
+                <a:solidFill>
+                  <a:srgbClr val="052B7C"/>
+                </a:solidFill>
+                <a:latin typeface="微软雅黑"/>
+                <a:ea typeface="微软雅黑"/>
+              </a:rPr>
+              <a:t> -</a:t>
+            </a:r>
+            <a:endParaRPr/>
+          </a:p>
+        </p:txBody>
+      </p:sp>
+    </p:spTree>
+  </p:cSld>
+</p:sld>
+</file>
+
+<file path=ppt/slides/slide2.xml><?xml version="1.0" encoding="utf-8"?>
+<p:sld xmlns:p="http://schemas.openxmlformats.org/presentationml/2006/main" xmlns:a="http://schemas.openxmlformats.org/drawingml/2006/main">
+  <p:cSld>
+    <p:spTree>
+      <p:nvGrpSpPr>
+        <p:cNvPr id="77" name="" descr="&lt;Slide style={{ width:'1280px', height:'720px', position:'relative', background:'#FFFFFF', fontFamily:'微软雅黑' }}&gt;&#10;  &lt;Box style={{ position:'absolute', left:56, top:80, right:56, flexDirection:'row', gap:48, height:520, alignItems:'center' }}&gt;&#10;    &lt;Box style={{ width:300, justifyContent:'center' }}&gt;&#10;      &lt;Text style={{ fontSize:54, fontWeight:'bold', color:'#2F5597' }}&gt;目录&lt;/Text&gt;&#10;      &lt;Text style={{ fontSize:24, color:'#2F5597', marginTop:8, letterSpacing:4 }}&gt;CONTENTS&lt;/Text&gt;&#10;    &lt;/Box&gt;&#10;    &lt;Box style={{ width:2, height:300, background:'#4472C4' }} /&gt;&#10;    &lt;Box style={{ flex:1, flexDirection:'column', gap:20, justifyContent:'center' }}&gt;&#10;      {['一、工作概览与量化总览','二、内部工作：自研应用交付','三、内部工作：Skill 抽象与复用','四、内部工作：培训与推广','五、外部工作：宏昊AI助手平台','六、下阶段计划与需支持事项'].map((t, i) =&gt; (&#10;        &lt;Text key={i} style={{ fontSize:24, fontWeight:'bold', color:'#1A1A1A' }}&gt;{t}&lt;/Text&gt;&#10;      ))}&#10;    &lt;/Box&gt;&#10;  &lt;/Box&gt;&#10;  &lt;Box style={{ position:'absolute', left:56, top:668, right:56, flexDirection:'row', justifyContent:'space-between' }}&gt;&#10;    &lt;Text style={{ fontSize:14, color:'#888' }}&gt;入职以来 AI 工作复盘&lt;/Text&gt;&#10;    &lt;Text style={{ fontSize:14, color:'#888' }}&gt;02 / 13&lt;/Text&gt;&#10;  &lt;/Box&gt;&#10;&lt;/Slide&gt;"/>
+        <p:cNvGrpSpPr/>
+        <p:nvPr/>
+      </p:nvGrpSpPr>
+      <p:grpSpPr>
+        <a:xfrm>
+          <a:off x="0" y="0"/>
+          <a:ext cx="0" cy="0"/>
+          <a:chOff x="0" y="0"/>
+          <a:chExt cx="0" cy="0"/>
+        </a:xfrm>
+      </p:grpSpPr>
+      <p:sp>
+        <p:nvSpPr>
+          <p:cNvPr id="78" name=""/>
+          <p:cNvSpPr/>
+          <p:nvPr/>
+        </p:nvSpPr>
+        <p:spPr>
+          <a:xfrm rot="0" flipH="0" flipV="0">
+            <a:off x="0" y="0"/>
+            <a:ext cx="12192000" cy="6858000"/>
+          </a:xfrm>
+          <a:prstGeom prst="rect">
+            <a:avLst/>
+          </a:prstGeom>
+          <a:solidFill>
+            <a:srgbClr val="FFFFFF"/>
+          </a:solidFill>
+          <a:ln/>
+        </p:spPr>
+        <p:txBody>
+          <a:bodyPr/>
+          <a:p/>
+        </p:txBody>
+      </p:sp>
+      <p:sp>
+        <p:nvSpPr>
+          <p:cNvPr id="79" name="" descr="{&quot;isTemplate&quot;:true,&quot;type&quot;:&quot;text&quot;}"/>
+          <p:cNvSpPr txBox="1"/>
+          <p:nvPr/>
+        </p:nvSpPr>
+        <p:spPr>
+          <a:xfrm rot="0" flipH="0" flipV="0">
+            <a:off x="533400" y="2752725"/>
+            <a:ext cx="2857500" cy="619125"/>
+          </a:xfrm>
+          <a:prstGeom prst="rect"/>
+        </p:spPr>
+        <p:txBody>
+          <a:bodyPr wrap="none" lIns="0" tIns="0" rIns="0" bIns="0"/>
+          <a:p>
+            <a:pPr>
+              <a:lnSpc>
+                <a:spcPct val="100000"/>
+              </a:lnSpc>
+            </a:pPr>
+            <a:r>
+              <a:rPr lang="zh-CN" sz="4050" b="1">
+                <a:solidFill>
+                  <a:srgbClr val="2F5597"/>
+                </a:solidFill>
+                <a:latin typeface="微软雅黑"/>
+                <a:ea typeface="微软雅黑"/>
+              </a:rPr>
+              <a:t>目录</a:t>
+            </a:r>
+            <a:endParaRPr/>
+          </a:p>
+        </p:txBody>
+      </p:sp>
+      <p:sp>
+        <p:nvSpPr>
+          <p:cNvPr id="80" name="" descr="{&quot;isTemplate&quot;:true,&quot;type&quot;:&quot;text&quot;}"/>
+          <p:cNvSpPr txBox="1"/>
+          <p:nvPr/>
+        </p:nvSpPr>
+        <p:spPr>
+          <a:xfrm rot="0" flipH="0" flipV="0">
+            <a:off x="533400" y="3448050"/>
+            <a:ext cx="2857500" cy="276225"/>
+          </a:xfrm>
+          <a:prstGeom prst="rect"/>
+        </p:spPr>
+        <p:txBody>
+          <a:bodyPr wrap="none" lIns="0" tIns="0" rIns="0" bIns="0"/>
+          <a:p>
+            <a:pPr>
+              <a:lnSpc>
+                <a:spcPct val="100000"/>
+              </a:lnSpc>
+            </a:pPr>
+            <a:r>
+              <a:rPr lang="en-US" sz="1800" spc="300">
+                <a:solidFill>
+                  <a:srgbClr val="2F5597"/>
+                </a:solidFill>
+                <a:latin typeface="微软雅黑"/>
+                <a:ea typeface="微软雅黑"/>
+              </a:rPr>
+              <a:t>CONTENTS</a:t>
+            </a:r>
+            <a:endParaRPr/>
+          </a:p>
+        </p:txBody>
+      </p:sp>
+      <p:sp>
+        <p:nvSpPr>
+          <p:cNvPr id="81" name=""/>
+          <p:cNvSpPr/>
+          <p:nvPr/>
+        </p:nvSpPr>
+        <p:spPr>
+          <a:xfrm rot="0" flipH="0" flipV="0">
+            <a:off x="3848100" y="1809750"/>
+            <a:ext cx="19050" cy="2857500"/>
+          </a:xfrm>
+          <a:prstGeom prst="rect">
+            <a:avLst/>
+          </a:prstGeom>
+          <a:solidFill>
+            <a:srgbClr val="4472C4"/>
+          </a:solidFill>
+          <a:ln/>
+        </p:spPr>
+        <p:txBody>
+          <a:bodyPr/>
+          <a:p/>
+        </p:txBody>
+      </p:sp>
+      <p:sp>
+        <p:nvSpPr>
+          <p:cNvPr id="82" name="" descr="{&quot;isTemplate&quot;:true,&quot;type&quot;:&quot;text&quot;}"/>
+          <p:cNvSpPr txBox="1"/>
+          <p:nvPr/>
+        </p:nvSpPr>
+        <p:spPr>
+          <a:xfrm rot="0" flipH="0" flipV="0">
+            <a:off x="4324350" y="1933575"/>
+            <a:ext cx="7334250" cy="276225"/>
+          </a:xfrm>
+          <a:prstGeom prst="rect"/>
+        </p:spPr>
+        <p:txBody>
+          <a:bodyPr wrap="none" lIns="0" tIns="0" rIns="0" bIns="0"/>
+          <a:p>
+            <a:pPr>
+              <a:lnSpc>
+                <a:spcPct val="100000"/>
+              </a:lnSpc>
+            </a:pPr>
+            <a:r>
+              <a:rPr lang="zh-CN" sz="1800" b="1">
+                <a:solidFill>
+                  <a:srgbClr val="1A1A1A"/>
+                </a:solidFill>
+                <a:latin typeface="微软雅黑"/>
+                <a:ea typeface="微软雅黑"/>
+              </a:rPr>
+              <a:t>一、工作概览与量化总览</a:t>
+            </a:r>
+            <a:endParaRPr/>
+          </a:p>
+        </p:txBody>
+      </p:sp>
+      <p:sp>
+        <p:nvSpPr>
+          <p:cNvPr id="83" name="" descr="{&quot;isTemplate&quot;:true,&quot;type&quot;:&quot;text&quot;}"/>
+          <p:cNvSpPr txBox="1"/>
+          <p:nvPr/>
+        </p:nvSpPr>
+        <p:spPr>
+          <a:xfrm rot="0" flipH="0" flipV="0">
+            <a:off x="4324350" y="2400300"/>
+            <a:ext cx="7334250" cy="276225"/>
+          </a:xfrm>
+          <a:prstGeom prst="rect"/>
+        </p:spPr>
+        <p:txBody>
+          <a:bodyPr wrap="none" lIns="0" tIns="0" rIns="0" bIns="0"/>
+          <a:p>
+            <a:pPr>
+              <a:lnSpc>
+                <a:spcPct val="100000"/>
+              </a:lnSpc>
+            </a:pPr>
+            <a:r>
+              <a:rPr lang="zh-CN" sz="1800" b="1">
+                <a:solidFill>
+                  <a:srgbClr val="1A1A1A"/>
+                </a:solidFill>
+                <a:latin typeface="微软雅黑"/>
+                <a:ea typeface="微软雅黑"/>
+              </a:rPr>
+              <a:t>二、内部工作：自研应用交付</a:t>
+            </a:r>
+            <a:endParaRPr/>
+          </a:p>
+        </p:txBody>
+      </p:sp>
+      <p:sp>
+        <p:nvSpPr>
+          <p:cNvPr id="84" name="" descr="{&quot;isTemplate&quot;:true,&quot;type&quot;:&quot;text&quot;}"/>
+          <p:cNvSpPr txBox="1"/>
+          <p:nvPr/>
+        </p:nvSpPr>
+        <p:spPr>
+          <a:xfrm rot="0" flipH="0" flipV="0">
+            <a:off x="4324350" y="2867025"/>
+            <a:ext cx="7334250" cy="276225"/>
+          </a:xfrm>
+          <a:prstGeom prst="rect"/>
+        </p:spPr>
+        <p:txBody>
+          <a:bodyPr wrap="none" lIns="0" tIns="0" rIns="0" bIns="0"/>
+          <a:p>
+            <a:pPr>
+              <a:lnSpc>
+                <a:spcPct val="100000"/>
+              </a:lnSpc>
+            </a:pPr>
+            <a:r>
+              <a:rPr lang="zh-CN" sz="1800" b="1">
+                <a:solidFill>
+                  <a:srgbClr val="1A1A1A"/>
+                </a:solidFill>
+                <a:latin typeface="微软雅黑"/>
+                <a:ea typeface="微软雅黑"/>
+              </a:rPr>
+              <a:t>三、内部工作：</a:t>
+            </a:r>
+            <a:r>
+              <a:rPr lang="en-US" sz="1800" b="1">
+                <a:solidFill>
+                  <a:srgbClr val="1A1A1A"/>
+                </a:solidFill>
+                <a:latin typeface="微软雅黑"/>
+                <a:ea typeface="微软雅黑"/>
+              </a:rPr>
+              <a:t>Skill </a:t>
+            </a:r>
+            <a:r>
+              <a:rPr lang="zh-CN" sz="1800" b="1">
+                <a:solidFill>
+                  <a:srgbClr val="1A1A1A"/>
+                </a:solidFill>
+                <a:latin typeface="微软雅黑"/>
+                <a:ea typeface="微软雅黑"/>
+              </a:rPr>
+              <a:t>抽象与复用</a:t>
+            </a:r>
+            <a:endParaRPr/>
+          </a:p>
+        </p:txBody>
+      </p:sp>
+      <p:sp>
+        <p:nvSpPr>
+          <p:cNvPr id="85" name="" descr="{&quot;isTemplate&quot;:true,&quot;type&quot;:&quot;text&quot;}"/>
+          <p:cNvSpPr txBox="1"/>
+          <p:nvPr/>
+        </p:nvSpPr>
+        <p:spPr>
+          <a:xfrm rot="0" flipH="0" flipV="0">
+            <a:off x="4324350" y="3333750"/>
+            <a:ext cx="7334250" cy="276225"/>
+          </a:xfrm>
+          <a:prstGeom prst="rect"/>
+        </p:spPr>
+        <p:txBody>
+          <a:bodyPr wrap="none" lIns="0" tIns="0" rIns="0" bIns="0"/>
+          <a:p>
+            <a:pPr>
+              <a:lnSpc>
+                <a:spcPct val="100000"/>
+              </a:lnSpc>
+            </a:pPr>
+            <a:r>
+              <a:rPr lang="zh-CN" sz="1800" b="1">
+                <a:solidFill>
+                  <a:srgbClr val="1A1A1A"/>
+                </a:solidFill>
+                <a:latin typeface="微软雅黑"/>
+                <a:ea typeface="微软雅黑"/>
+              </a:rPr>
+              <a:t>四、内部工作：培训与推广</a:t>
+            </a:r>
+            <a:endParaRPr/>
+          </a:p>
+        </p:txBody>
+      </p:sp>
+      <p:sp>
+        <p:nvSpPr>
+          <p:cNvPr id="86" name="" descr="{&quot;isTemplate&quot;:true,&quot;type&quot;:&quot;text&quot;}"/>
+          <p:cNvSpPr txBox="1"/>
+          <p:nvPr/>
+        </p:nvSpPr>
+        <p:spPr>
+          <a:xfrm rot="0" flipH="0" flipV="0">
+            <a:off x="4324350" y="3800475"/>
+            <a:ext cx="7334250" cy="276225"/>
+          </a:xfrm>
+          <a:prstGeom prst="rect"/>
+        </p:spPr>
+        <p:txBody>
+          <a:bodyPr wrap="none" lIns="0" tIns="0" rIns="0" bIns="0"/>
+          <a:p>
+            <a:pPr>
+              <a:lnSpc>
+                <a:spcPct val="100000"/>
+              </a:lnSpc>
+            </a:pPr>
+            <a:r>
+              <a:rPr lang="zh-CN" sz="1800" b="1">
+                <a:solidFill>
+                  <a:srgbClr val="1A1A1A"/>
+                </a:solidFill>
+                <a:latin typeface="微软雅黑"/>
+                <a:ea typeface="微软雅黑"/>
+              </a:rPr>
+              <a:t>五、外部工作：宏昊</a:t>
+            </a:r>
+            <a:r>
+              <a:rPr lang="en-US" sz="1800" b="1">
+                <a:solidFill>
+                  <a:srgbClr val="1A1A1A"/>
+                </a:solidFill>
+                <a:latin typeface="微软雅黑"/>
+                <a:ea typeface="微软雅黑"/>
+              </a:rPr>
+              <a:t>AI</a:t>
+            </a:r>
+            <a:r>
+              <a:rPr lang="zh-CN" sz="1800" b="1">
+                <a:solidFill>
+                  <a:srgbClr val="1A1A1A"/>
+                </a:solidFill>
+                <a:latin typeface="微软雅黑"/>
+                <a:ea typeface="微软雅黑"/>
+              </a:rPr>
+              <a:t>助手平台</a:t>
+            </a:r>
+            <a:endParaRPr/>
+          </a:p>
+        </p:txBody>
+      </p:sp>
+      <p:sp>
+        <p:nvSpPr>
+          <p:cNvPr id="87" name="" descr="{&quot;isTemplate&quot;:true,&quot;type&quot;:&quot;text&quot;}"/>
+          <p:cNvSpPr txBox="1"/>
+          <p:nvPr/>
+        </p:nvSpPr>
+        <p:spPr>
+          <a:xfrm rot="0" flipH="0" flipV="0">
+            <a:off x="4324350" y="4267200"/>
+            <a:ext cx="7334250" cy="276225"/>
+          </a:xfrm>
+          <a:prstGeom prst="rect"/>
+        </p:spPr>
+        <p:txBody>
+          <a:bodyPr wrap="none" lIns="0" tIns="0" rIns="0" bIns="0"/>
+          <a:p>
+            <a:pPr>
+              <a:lnSpc>
+                <a:spcPct val="100000"/>
+              </a:lnSpc>
+            </a:pPr>
+            <a:r>
+              <a:rPr lang="zh-CN" sz="1800" b="1">
+                <a:solidFill>
+                  <a:srgbClr val="1A1A1A"/>
+                </a:solidFill>
+                <a:latin typeface="微软雅黑"/>
+                <a:ea typeface="微软雅黑"/>
+              </a:rPr>
+              <a:t>六、下阶段计划与需支持事项</a:t>
+            </a:r>
+            <a:endParaRPr/>
+          </a:p>
+        </p:txBody>
+      </p:sp>
+      <p:sp>
+        <p:nvSpPr>
+          <p:cNvPr id="88" name="" descr="{&quot;isTemplate&quot;:true,&quot;type&quot;:&quot;text&quot;}"/>
+          <p:cNvSpPr txBox="1"/>
+          <p:nvPr/>
+        </p:nvSpPr>
+        <p:spPr>
+          <a:xfrm rot="0" flipH="0" flipV="0">
+            <a:off x="533400" y="6362700"/>
+            <a:ext cx="1285875" cy="161925"/>
+          </a:xfrm>
+          <a:prstGeom prst="rect"/>
+        </p:spPr>
+        <p:txBody>
+          <a:bodyPr wrap="none" lIns="0" tIns="0" rIns="0" bIns="0"/>
+          <a:p>
+            <a:pPr>
+              <a:lnSpc>
+                <a:spcPct val="100000"/>
+              </a:lnSpc>
+            </a:pPr>
+            <a:r>
+              <a:rPr lang="zh-CN" sz="1050">
+                <a:solidFill>
+                  <a:srgbClr val="888888"/>
+                </a:solidFill>
+                <a:latin typeface="微软雅黑"/>
+                <a:ea typeface="微软雅黑"/>
+              </a:rPr>
+              <a:t>入职以来</a:t>
+            </a:r>
+            <a:r>
+              <a:rPr lang="en-US" sz="1050">
+                <a:solidFill>
+                  <a:srgbClr val="888888"/>
+                </a:solidFill>
+                <a:latin typeface="微软雅黑"/>
+                <a:ea typeface="微软雅黑"/>
+              </a:rPr>
+              <a:t> AI </a:t>
+            </a:r>
+            <a:r>
+              <a:rPr lang="zh-CN" sz="1050">
+                <a:solidFill>
+                  <a:srgbClr val="888888"/>
+                </a:solidFill>
+                <a:latin typeface="微软雅黑"/>
+                <a:ea typeface="微软雅黑"/>
+              </a:rPr>
+              <a:t>工作复盘</a:t>
+            </a:r>
+            <a:endParaRPr/>
+          </a:p>
+        </p:txBody>
+      </p:sp>
+      <p:sp>
+        <p:nvSpPr>
+          <p:cNvPr id="89" name="" descr="{&quot;isTemplate&quot;:true,&quot;type&quot;:&quot;text&quot;}"/>
+          <p:cNvSpPr txBox="1"/>
+          <p:nvPr/>
+        </p:nvSpPr>
+        <p:spPr>
+          <a:xfrm rot="0" flipH="0" flipV="0">
+            <a:off x="11229975" y="6362700"/>
+            <a:ext cx="428625" cy="161925"/>
+          </a:xfrm>
+          <a:prstGeom prst="rect"/>
+        </p:spPr>
+        <p:txBody>
+          <a:bodyPr wrap="none" lIns="0" tIns="0" rIns="0" bIns="0"/>
+          <a:p>
+            <a:pPr>
+              <a:lnSpc>
+                <a:spcPct val="100000"/>
+              </a:lnSpc>
+            </a:pPr>
+            <a:r>
+              <a:rPr lang="en-US" sz="1050">
+                <a:solidFill>
+                  <a:srgbClr val="888888"/>
+                </a:solidFill>
+                <a:latin typeface="微软雅黑"/>
+                <a:ea typeface="微软雅黑"/>
+              </a:rPr>
+              <a:t>02 / 13</a:t>
+            </a:r>
+            <a:endParaRPr/>
+          </a:p>
+        </p:txBody>
+      </p:sp>
+    </p:spTree>
+  </p:cSld>
+</p:sld>
+</file>
+
+<file path=ppt/slides/slide3.xml><?xml version="1.0" encoding="utf-8"?>
+<p:sld xmlns:p="http://schemas.openxmlformats.org/presentationml/2006/main" xmlns:a="http://schemas.openxmlformats.org/drawingml/2006/main">
+  <p:cSld>
+    <p:spTree>
+      <p:nvGrpSpPr>
+        <p:cNvPr id="90" name="" descr="&lt;Slide style={{ width:'1280px', height:'720px', position:'relative', background:'#FFFFFF', fontFamily:'微软雅黑' }}&gt;&#10;  &lt;Box style={{ position:'absolute', left:56, top:36, flexDirection:'row', alignItems:'center', gap:12 }}&gt;&#10;    &lt;Box style={{ width:8, height:34, background:'#4472C4' }} /&gt;&#10;    &lt;Text style={{ fontSize:30, fontWeight:'bold', color:'#052B7C' }}&gt;一、工作概览与量化总览&lt;/Text&gt;&#10;  &lt;/Box&gt;&#10;&#10;  &lt;Box style={{ position:'absolute', left:56, top:130, right:56, flexDirection:'column', gap:22 }}&gt;&#10;    &lt;Box style={{ flexDirection:'row', gap:22 }}&gt;&#10;      {[['5','自研应用 / 工具'],['2','复用 Skill'],['4','业务智能体']].map((c, i) =&gt; (&#10;        &lt;Box key={i} style={{ flex:1, background:'#F4F7FC', borderRadius:10, padding:'22px 18px', alignItems:'center' }}&gt;&#10;          &lt;Text style={{ fontSize:56, fontWeight:'bold', color:'#4472C4' }}&gt;{c[0]}&lt;/Text&gt;&#10;          &lt;Text style={{ fontSize:18, color:'#1A1A1A', marginTop:6 }}&gt;{c[1]}&lt;/Text&gt;&#10;        &lt;/Box&gt;&#10;      ))}&#10;    &lt;/Box&gt;&#10;    &lt;Box style={{ flexDirection:'row', gap:22 }}&gt;&#10;      {[['37','平台验收项'],['12','培训场次'],['7','覆盖部门']].map((c, i) =&gt; (&#10;        &lt;Box key={i} style={{ flex:1, background:'#F4F7FC', borderRadius:10, padding:'22px 18px', alignItems:'center' }}&gt;&#10;          &lt;Text style={{ fontSize:56, fontWeight:'bold', color:'#4472C4' }}&gt;{c[0]}&lt;/Text&gt;&#10;          &lt;Text style={{ fontSize:18, color:'#1A1A1A', marginTop:6 }}&gt;{c[1]}&lt;/Text&gt;&#10;        &lt;/Box&gt;&#10;      ))}&#10;    &lt;/Box&gt;&#10;  &lt;/Box&gt;&#10;&#10;  &lt;Box style={{ position:'absolute', left:56, top:560, right:56, background:'#052B7C', borderRadius:10, padding:'16px 22px' }}&gt;&#10;    &lt;Text style={{ fontSize:18, color:'#FFFFFF', lineHeight:1.5 }}&gt;入职 3.5 个月，从 0 搭起「自研工具 + 复用 Skill + 平台验收运营 + 培训推广」完整交付体系，覆盖采购 / 船务 / 财务 / 销售 / 研发 / 营销 6 类业务方；交付快（自研平均 ~25 天）、持续迭代（110+ 条代码）。&lt;/Text&gt;&#10;  &lt;/Box&gt;&#10;&#10;  &lt;Box style={{ position:'absolute', left:56, top:668, right:56, flexDirection:'row', justifyContent:'space-between' }}&gt;&#10;    &lt;Text style={{ fontSize:14, color:'#888' }}&gt;入职以来 AI 工作复盘&lt;/Text&gt;&#10;    &lt;Text style={{ fontSize:14, color:'#888' }}&gt;03 / 13&lt;/Text&gt;&#10;  &lt;/Box&gt;&#10;&lt;/Slide&gt;"/>
+        <p:cNvGrpSpPr/>
+        <p:nvPr/>
+      </p:nvGrpSpPr>
+      <p:grpSpPr>
+        <a:xfrm>
+          <a:off x="0" y="0"/>
+          <a:ext cx="0" cy="0"/>
+          <a:chOff x="0" y="0"/>
+          <a:chExt cx="0" cy="0"/>
+        </a:xfrm>
+      </p:grpSpPr>
+      <p:sp>
+        <p:nvSpPr>
+          <p:cNvPr id="91" name=""/>
+          <p:cNvSpPr/>
+          <p:nvPr/>
+        </p:nvSpPr>
+        <p:spPr>
+          <a:xfrm rot="0" flipH="0" flipV="0">
+            <a:off x="0" y="0"/>
+            <a:ext cx="12192000" cy="6858000"/>
+          </a:xfrm>
+          <a:prstGeom prst="rect">
+            <a:avLst/>
+          </a:prstGeom>
+          <a:solidFill>
+            <a:srgbClr val="FFFFFF"/>
+          </a:solidFill>
+          <a:ln/>
+        </p:spPr>
+        <p:txBody>
+          <a:bodyPr/>
+          <a:p/>
+        </p:txBody>
+      </p:sp>
+      <p:sp>
+        <p:nvSpPr>
+          <p:cNvPr id="92" name=""/>
+          <p:cNvSpPr/>
+          <p:nvPr/>
+        </p:nvSpPr>
+        <p:spPr>
+          <a:xfrm rot="0" flipH="0" flipV="0">
+            <a:off x="533400" y="352425"/>
+            <a:ext cx="76200" cy="323850"/>
+          </a:xfrm>
+          <a:prstGeom prst="rect">
+            <a:avLst/>
+          </a:prstGeom>
+          <a:solidFill>
+            <a:srgbClr val="4472C4"/>
+          </a:solidFill>
+          <a:ln/>
+        </p:spPr>
+        <p:txBody>
+          <a:bodyPr/>
+          <a:p/>
+        </p:txBody>
+      </p:sp>
+      <p:sp>
+        <p:nvSpPr>
+          <p:cNvPr id="93" name="" descr="{&quot;isTemplate&quot;:true,&quot;type&quot;:&quot;text&quot;}"/>
+          <p:cNvSpPr txBox="1"/>
+          <p:nvPr/>
+        </p:nvSpPr>
+        <p:spPr>
+          <a:xfrm rot="0" flipH="0" flipV="0">
+            <a:off x="723900" y="342900"/>
+            <a:ext cx="3143250" cy="342900"/>
+          </a:xfrm>
+          <a:prstGeom prst="rect"/>
+        </p:spPr>
+        <p:txBody>
+          <a:bodyPr wrap="none" lIns="0" tIns="0" rIns="0" bIns="0"/>
+          <a:p>
+            <a:pPr>
+              <a:lnSpc>
+                <a:spcPct val="100000"/>
+              </a:lnSpc>
+            </a:pPr>
+            <a:r>
+              <a:rPr lang="zh-CN" sz="2250" b="1">
+                <a:solidFill>
+                  <a:srgbClr val="052B7C"/>
+                </a:solidFill>
+                <a:latin typeface="微软雅黑"/>
+                <a:ea typeface="微软雅黑"/>
+              </a:rPr>
+              <a:t>一、工作概览与量化总览</a:t>
+            </a:r>
+            <a:endParaRPr/>
+          </a:p>
+        </p:txBody>
+      </p:sp>
+      <p:sp>
+        <p:nvSpPr>
+          <p:cNvPr id="94" name=""/>
+          <p:cNvSpPr/>
+          <p:nvPr/>
+        </p:nvSpPr>
+        <p:spPr>
+          <a:xfrm rot="0" flipH="0" flipV="0">
+            <a:off x="533400" y="1238250"/>
+            <a:ext cx="3571875" cy="1333500"/>
+          </a:xfrm>
+          <a:prstGeom prst="roundRect">
+            <a:avLst>
+              <a:gd name="adj" fmla="val 7143"/>
+            </a:avLst>
+          </a:prstGeom>
+          <a:solidFill>
+            <a:srgbClr val="F4F7FC"/>
+          </a:solidFill>
+          <a:ln/>
+        </p:spPr>
+        <p:txBody>
+          <a:bodyPr/>
+          <a:p/>
+        </p:txBody>
+      </p:sp>
+      <p:sp>
+        <p:nvSpPr>
+          <p:cNvPr id="95" name="" descr="{&quot;isTemplate&quot;:true,&quot;type&quot;:&quot;text&quot;}"/>
+          <p:cNvSpPr txBox="1"/>
+          <p:nvPr/>
+        </p:nvSpPr>
+        <p:spPr>
+          <a:xfrm rot="0" flipH="0" flipV="0">
+            <a:off x="2152650" y="1447800"/>
+            <a:ext cx="342900" cy="647700"/>
+          </a:xfrm>
+          <a:prstGeom prst="rect"/>
+        </p:spPr>
+        <p:txBody>
+          <a:bodyPr wrap="none" lIns="0" tIns="0" rIns="0" bIns="0"/>
+          <a:p>
+            <a:pPr>
+              <a:lnSpc>
+                <a:spcPct val="100000"/>
+              </a:lnSpc>
+            </a:pPr>
+            <a:r>
+              <a:rPr lang="en-US" sz="4200" b="1">
+                <a:solidFill>
+                  <a:srgbClr val="4472C4"/>
+                </a:solidFill>
+                <a:latin typeface="微软雅黑"/>
+                <a:ea typeface="微软雅黑"/>
+              </a:rPr>
+              <a:t>5</a:t>
+            </a:r>
+            <a:endParaRPr/>
+          </a:p>
+        </p:txBody>
+      </p:sp>
+      <p:sp>
+        <p:nvSpPr>
+          <p:cNvPr id="96" name="" descr="{&quot;isTemplate&quot;:true,&quot;type&quot;:&quot;text&quot;}"/>
+          <p:cNvSpPr txBox="1"/>
+          <p:nvPr/>
+        </p:nvSpPr>
+        <p:spPr>
+          <a:xfrm rot="0" flipH="0" flipV="0">
+            <a:off x="1714500" y="2152650"/>
+            <a:ext cx="1209675" cy="209550"/>
+          </a:xfrm>
+          <a:prstGeom prst="rect"/>
+        </p:spPr>
+        <p:txBody>
+          <a:bodyPr wrap="none" lIns="0" tIns="0" rIns="0" bIns="0"/>
+          <a:p>
+            <a:pPr>
+              <a:lnSpc>
+                <a:spcPct val="100000"/>
+              </a:lnSpc>
+            </a:pPr>
+            <a:r>
+              <a:rPr lang="zh-CN" sz="1350">
+                <a:solidFill>
+                  <a:srgbClr val="1A1A1A"/>
+                </a:solidFill>
+                <a:latin typeface="微软雅黑"/>
+                <a:ea typeface="微软雅黑"/>
+              </a:rPr>
+              <a:t>自研应用</a:t>
+            </a:r>
+            <a:r>
+              <a:rPr lang="en-US" sz="1350">
+                <a:solidFill>
+                  <a:srgbClr val="1A1A1A"/>
+                </a:solidFill>
+                <a:latin typeface="微软雅黑"/>
+                <a:ea typeface="微软雅黑"/>
+              </a:rPr>
+              <a:t> / </a:t>
+            </a:r>
+            <a:r>
+              <a:rPr lang="zh-CN" sz="1350">
+                <a:solidFill>
+                  <a:srgbClr val="1A1A1A"/>
+                </a:solidFill>
+                <a:latin typeface="微软雅黑"/>
+                <a:ea typeface="微软雅黑"/>
+              </a:rPr>
+              <a:t>工具</a:t>
+            </a:r>
+            <a:endParaRPr/>
+          </a:p>
+        </p:txBody>
+      </p:sp>
+      <p:sp>
+        <p:nvSpPr>
+          <p:cNvPr id="97" name=""/>
+          <p:cNvSpPr/>
+          <p:nvPr/>
+        </p:nvSpPr>
+        <p:spPr>
+          <a:xfrm rot="0" flipH="0" flipV="0">
+            <a:off x="4314825" y="1238250"/>
+            <a:ext cx="3562350" cy="1333500"/>
+          </a:xfrm>
+          <a:prstGeom prst="roundRect">
+            <a:avLst>
+              <a:gd name="adj" fmla="val 7143"/>
+            </a:avLst>
+          </a:prstGeom>
+          <a:solidFill>
+            <a:srgbClr val="F4F7FC"/>
+          </a:solidFill>
+          <a:ln/>
+        </p:spPr>
+        <p:txBody>
+          <a:bodyPr/>
+          <a:p/>
+        </p:txBody>
+      </p:sp>
+      <p:sp>
+        <p:nvSpPr>
+          <p:cNvPr id="98" name="" descr="{&quot;isTemplate&quot;:true,&quot;type&quot;:&quot;text&quot;}"/>
+          <p:cNvSpPr txBox="1"/>
+          <p:nvPr/>
+        </p:nvSpPr>
+        <p:spPr>
+          <a:xfrm rot="0" flipH="0" flipV="0">
+            <a:off x="5924550" y="1447800"/>
+            <a:ext cx="342900" cy="647700"/>
+          </a:xfrm>
+          <a:prstGeom prst="rect"/>
+        </p:spPr>
+        <p:txBody>
+          <a:bodyPr wrap="none" lIns="0" tIns="0" rIns="0" bIns="0"/>
+          <a:p>
+            <a:pPr>
+              <a:lnSpc>
+                <a:spcPct val="100000"/>
+              </a:lnSpc>
+            </a:pPr>
+            <a:r>
+              <a:rPr lang="en-US" sz="4200" b="1">
+                <a:solidFill>
+                  <a:srgbClr val="4472C4"/>
+                </a:solidFill>
+                <a:latin typeface="微软雅黑"/>
+                <a:ea typeface="微软雅黑"/>
+              </a:rPr>
+              <a:t>2</a:t>
+            </a:r>
+            <a:endParaRPr/>
+          </a:p>
+        </p:txBody>
+      </p:sp>
+      <p:sp>
+        <p:nvSpPr>
+          <p:cNvPr id="99" name="" descr="{&quot;isTemplate&quot;:true,&quot;type&quot;:&quot;text&quot;}"/>
+          <p:cNvSpPr txBox="1"/>
+          <p:nvPr/>
+        </p:nvSpPr>
+        <p:spPr>
+          <a:xfrm rot="0" flipH="0" flipV="0">
+            <a:off x="5743575" y="2152650"/>
+            <a:ext cx="704850" cy="209550"/>
+          </a:xfrm>
+          <a:prstGeom prst="rect"/>
+        </p:spPr>
+        <p:txBody>
+          <a:bodyPr wrap="none" lIns="0" tIns="0" rIns="0" bIns="0"/>
+          <a:p>
+            <a:pPr>
+              <a:lnSpc>
+                <a:spcPct val="100000"/>
+              </a:lnSpc>
+            </a:pPr>
+            <a:r>
+              <a:rPr lang="zh-CN" sz="1350">
+                <a:solidFill>
+                  <a:srgbClr val="1A1A1A"/>
+                </a:solidFill>
+                <a:latin typeface="微软雅黑"/>
+                <a:ea typeface="微软雅黑"/>
+              </a:rPr>
+              <a:t>复用</a:t>
+            </a:r>
+            <a:r>
+              <a:rPr lang="en-US" sz="1350">
+                <a:solidFill>
+                  <a:srgbClr val="1A1A1A"/>
+                </a:solidFill>
+                <a:latin typeface="微软雅黑"/>
+                <a:ea typeface="微软雅黑"/>
+              </a:rPr>
+              <a:t> Skill</a:t>
+            </a:r>
+            <a:endParaRPr/>
+          </a:p>
+        </p:txBody>
+      </p:sp>
+      <p:sp>
+        <p:nvSpPr>
+          <p:cNvPr id="100" name=""/>
+          <p:cNvSpPr/>
+          <p:nvPr/>
+        </p:nvSpPr>
+        <p:spPr>
+          <a:xfrm rot="0" flipH="0" flipV="0">
+            <a:off x="8086725" y="1238250"/>
+            <a:ext cx="3571875" cy="1333500"/>
+          </a:xfrm>
+          <a:prstGeom prst="roundRect">
+            <a:avLst>
+              <a:gd name="adj" fmla="val 7143"/>
+            </a:avLst>
+          </a:prstGeom>
+          <a:solidFill>
+            <a:srgbClr val="F4F7FC"/>
+          </a:solidFill>
+          <a:ln/>
+        </p:spPr>
+        <p:txBody>
+          <a:bodyPr/>
+          <a:p/>
+        </p:txBody>
+      </p:sp>
+      <p:sp>
+        <p:nvSpPr>
+          <p:cNvPr id="101" name="" descr="{&quot;isTemplate&quot;:true,&quot;type&quot;:&quot;text&quot;}"/>
+          <p:cNvSpPr txBox="1"/>
+          <p:nvPr/>
+        </p:nvSpPr>
+        <p:spPr>
+          <a:xfrm rot="0" flipH="0" flipV="0">
+            <a:off x="9705975" y="1447800"/>
+            <a:ext cx="342900" cy="647700"/>
+          </a:xfrm>
+          <a:prstGeom prst="rect"/>
+        </p:spPr>
+        <p:txBody>
+          <a:bodyPr wrap="none" lIns="0" tIns="0" rIns="0" bIns="0"/>
+          <a:p>
+            <a:pPr>
+              <a:lnSpc>
+                <a:spcPct val="100000"/>
+              </a:lnSpc>
+            </a:pPr>
+            <a:r>
+              <a:rPr lang="en-US" sz="4200" b="1">
+                <a:solidFill>
+                  <a:srgbClr val="4472C4"/>
+                </a:solidFill>
+                <a:latin typeface="微软雅黑"/>
+                <a:ea typeface="微软雅黑"/>
+              </a:rPr>
+              <a:t>4</a:t>
+            </a:r>
+            <a:endParaRPr/>
+          </a:p>
+        </p:txBody>
+      </p:sp>
+      <p:sp>
+        <p:nvSpPr>
+          <p:cNvPr id="102" name="" descr="{&quot;isTemplate&quot;:true,&quot;type&quot;:&quot;text&quot;}"/>
+          <p:cNvSpPr txBox="1"/>
+          <p:nvPr/>
+        </p:nvSpPr>
+        <p:spPr>
+          <a:xfrm rot="0" flipH="0" flipV="0">
+            <a:off x="9448800" y="2152650"/>
+            <a:ext cx="857250" cy="209550"/>
+          </a:xfrm>
+          <a:prstGeom prst="rect"/>
+        </p:spPr>
+        <p:txBody>
+          <a:bodyPr wrap="none" lIns="0" tIns="0" rIns="0" bIns="0"/>
+          <a:p>
+            <a:pPr>
+              <a:lnSpc>
+                <a:spcPct val="100000"/>
+              </a:lnSpc>
+            </a:pPr>
+            <a:r>
+              <a:rPr lang="zh-CN" sz="1350">
+                <a:solidFill>
+                  <a:srgbClr val="1A1A1A"/>
+                </a:solidFill>
+                <a:latin typeface="微软雅黑"/>
+                <a:ea typeface="微软雅黑"/>
+              </a:rPr>
+              <a:t>业务智能体</a:t>
+            </a:r>
+            <a:endParaRPr/>
+          </a:p>
+        </p:txBody>
+      </p:sp>
+      <p:sp>
+        <p:nvSpPr>
+          <p:cNvPr id="103" name=""/>
+          <p:cNvSpPr/>
+          <p:nvPr/>
+        </p:nvSpPr>
+        <p:spPr>
+          <a:xfrm rot="0" flipH="0" flipV="0">
+            <a:off x="533400" y="2781300"/>
+            <a:ext cx="3571875" cy="1333500"/>
+          </a:xfrm>
+          <a:prstGeom prst="roundRect">
+            <a:avLst>
+              <a:gd name="adj" fmla="val 7143"/>
+            </a:avLst>
+          </a:prstGeom>
+          <a:solidFill>
+            <a:srgbClr val="F4F7FC"/>
+          </a:solidFill>
+          <a:ln/>
+        </p:spPr>
+        <p:txBody>
+          <a:bodyPr/>
+          <a:p/>
+        </p:txBody>
+      </p:sp>
+      <p:sp>
+        <p:nvSpPr>
+          <p:cNvPr id="104" name="" descr="{&quot;isTemplate&quot;:true,&quot;type&quot;:&quot;text&quot;}"/>
+          <p:cNvSpPr txBox="1"/>
+          <p:nvPr/>
+        </p:nvSpPr>
+        <p:spPr>
+          <a:xfrm rot="0" flipH="0" flipV="0">
+            <a:off x="1981200" y="2990850"/>
+            <a:ext cx="685800" cy="647700"/>
+          </a:xfrm>
+          <a:prstGeom prst="rect"/>
+        </p:spPr>
+        <p:txBody>
+          <a:bodyPr wrap="none" lIns="0" tIns="0" rIns="0" bIns="0"/>
+          <a:p>
+            <a:pPr>
+              <a:lnSpc>
+                <a:spcPct val="100000"/>
+              </a:lnSpc>
+            </a:pPr>
+            <a:r>
+              <a:rPr lang="en-US" sz="4200" b="1">
+                <a:solidFill>
+                  <a:srgbClr val="4472C4"/>
+                </a:solidFill>
+                <a:latin typeface="微软雅黑"/>
+                <a:ea typeface="微软雅黑"/>
+              </a:rPr>
+              <a:t>37</a:t>
+            </a:r>
+            <a:endParaRPr/>
+          </a:p>
+        </p:txBody>
+      </p:sp>
+      <p:sp>
+        <p:nvSpPr>
+          <p:cNvPr id="105" name="" descr="{&quot;isTemplate&quot;:true,&quot;type&quot;:&quot;text&quot;}"/>
+          <p:cNvSpPr txBox="1"/>
+          <p:nvPr/>
+        </p:nvSpPr>
+        <p:spPr>
+          <a:xfrm rot="0" flipH="0" flipV="0">
+            <a:off x="1895475" y="3695700"/>
+            <a:ext cx="857250" cy="209550"/>
+          </a:xfrm>
+          <a:prstGeom prst="rect"/>
+        </p:spPr>
+        <p:txBody>
+          <a:bodyPr wrap="none" lIns="0" tIns="0" rIns="0" bIns="0"/>
+          <a:p>
+            <a:pPr>
+              <a:lnSpc>
+                <a:spcPct val="100000"/>
+              </a:lnSpc>
+            </a:pPr>
+            <a:r>
+              <a:rPr lang="zh-CN" sz="1350">
+                <a:solidFill>
+                  <a:srgbClr val="1A1A1A"/>
+                </a:solidFill>
+                <a:latin typeface="微软雅黑"/>
+                <a:ea typeface="微软雅黑"/>
+              </a:rPr>
+              <a:t>平台验收项</a:t>
+            </a:r>
+            <a:endParaRPr/>
+          </a:p>
+        </p:txBody>
+      </p:sp>
+      <p:sp>
+        <p:nvSpPr>
+          <p:cNvPr id="106" name=""/>
+          <p:cNvSpPr/>
+          <p:nvPr/>
+        </p:nvSpPr>
+        <p:spPr>
+          <a:xfrm rot="0" flipH="0" flipV="0">
+            <a:off x="4314825" y="2781300"/>
+            <a:ext cx="3562350" cy="1333500"/>
+          </a:xfrm>
+          <a:prstGeom prst="roundRect">
+            <a:avLst>
+              <a:gd name="adj" fmla="val 7143"/>
+            </a:avLst>
+          </a:prstGeom>
+          <a:solidFill>
+            <a:srgbClr val="F4F7FC"/>
+          </a:solidFill>
+          <a:ln/>
+        </p:spPr>
+        <p:txBody>
+          <a:bodyPr/>
+          <a:p/>
+        </p:txBody>
+      </p:sp>
+      <p:sp>
+        <p:nvSpPr>
+          <p:cNvPr id="107" name="" descr="{&quot;isTemplate&quot;:true,&quot;type&quot;:&quot;text&quot;}"/>
+          <p:cNvSpPr txBox="1"/>
+          <p:nvPr/>
+        </p:nvSpPr>
+        <p:spPr>
+          <a:xfrm rot="0" flipH="0" flipV="0">
+            <a:off x="5753100" y="2990850"/>
+            <a:ext cx="685800" cy="647700"/>
+          </a:xfrm>
+          <a:prstGeom prst="rect"/>
+        </p:spPr>
+        <p:txBody>
+          <a:bodyPr wrap="none" lIns="0" tIns="0" rIns="0" bIns="0"/>
+          <a:p>
+            <a:pPr>
+              <a:lnSpc>
+                <a:spcPct val="100000"/>
+              </a:lnSpc>
+            </a:pPr>
+            <a:r>
+              <a:rPr lang="en-US" sz="4200" b="1">
+                <a:solidFill>
+                  <a:srgbClr val="4472C4"/>
+                </a:solidFill>
+                <a:latin typeface="微软雅黑"/>
+                <a:ea typeface="微软雅黑"/>
+              </a:rPr>
+              <a:t>12</a:t>
+            </a:r>
+            <a:endParaRPr/>
+          </a:p>
+        </p:txBody>
+      </p:sp>
+      <p:sp>
+        <p:nvSpPr>
+          <p:cNvPr id="108" name="" descr="{&quot;isTemplate&quot;:true,&quot;type&quot;:&quot;text&quot;}"/>
+          <p:cNvSpPr txBox="1"/>
+          <p:nvPr/>
+        </p:nvSpPr>
+        <p:spPr>
+          <a:xfrm rot="0" flipH="0" flipV="0">
+            <a:off x="5753100" y="3695700"/>
+            <a:ext cx="685800" cy="209550"/>
+          </a:xfrm>
+          <a:prstGeom prst="rect"/>
+        </p:spPr>
+        <p:txBody>
+          <a:bodyPr wrap="none" lIns="0" tIns="0" rIns="0" bIns="0"/>
+          <a:p>
+            <a:pPr>
+              <a:lnSpc>
+                <a:spcPct val="100000"/>
+              </a:lnSpc>
+            </a:pPr>
+            <a:r>
+              <a:rPr lang="zh-CN" sz="1350">
+                <a:solidFill>
+                  <a:srgbClr val="1A1A1A"/>
+                </a:solidFill>
+                <a:latin typeface="微软雅黑"/>
+                <a:ea typeface="微软雅黑"/>
+              </a:rPr>
+              <a:t>培训场次</a:t>
+            </a:r>
+            <a:endParaRPr/>
+          </a:p>
+        </p:txBody>
+      </p:sp>
+      <p:sp>
+        <p:nvSpPr>
+          <p:cNvPr id="109" name=""/>
+          <p:cNvSpPr/>
+          <p:nvPr/>
+        </p:nvSpPr>
+        <p:spPr>
+          <a:xfrm rot="0" flipH="0" flipV="0">
+            <a:off x="8086725" y="2781300"/>
+            <a:ext cx="3571875" cy="1333500"/>
+          </a:xfrm>
+          <a:prstGeom prst="roundRect">
+            <a:avLst>
+              <a:gd name="adj" fmla="val 7143"/>
+            </a:avLst>
+          </a:prstGeom>
+          <a:solidFill>
+            <a:srgbClr val="F4F7FC"/>
+          </a:solidFill>
+          <a:ln/>
+        </p:spPr>
+        <p:txBody>
+          <a:bodyPr/>
+          <a:p/>
+        </p:txBody>
+      </p:sp>
+      <p:sp>
+        <p:nvSpPr>
+          <p:cNvPr id="110" name="" descr="{&quot;isTemplate&quot;:true,&quot;type&quot;:&quot;text&quot;}"/>
+          <p:cNvSpPr txBox="1"/>
+          <p:nvPr/>
+        </p:nvSpPr>
+        <p:spPr>
+          <a:xfrm rot="0" flipH="0" flipV="0">
+            <a:off x="9705975" y="2990850"/>
+            <a:ext cx="342900" cy="647700"/>
+          </a:xfrm>
+          <a:prstGeom prst="rect"/>
+        </p:spPr>
+        <p:txBody>
+          <a:bodyPr wrap="none" lIns="0" tIns="0" rIns="0" bIns="0"/>
+          <a:p>
+            <a:pPr>
+              <a:lnSpc>
+                <a:spcPct val="100000"/>
+              </a:lnSpc>
+            </a:pPr>
+            <a:r>
+              <a:rPr lang="en-US" sz="4200" b="1">
+                <a:solidFill>
+                  <a:srgbClr val="4472C4"/>
+                </a:solidFill>
+                <a:latin typeface="微软雅黑"/>
+                <a:ea typeface="微软雅黑"/>
+              </a:rPr>
+              <a:t>7</a:t>
+            </a:r>
+            <a:endParaRPr/>
+          </a:p>
+        </p:txBody>
+      </p:sp>
+      <p:sp>
+        <p:nvSpPr>
+          <p:cNvPr id="111" name="" descr="{&quot;isTemplate&quot;:true,&quot;type&quot;:&quot;text&quot;}"/>
+          <p:cNvSpPr txBox="1"/>
+          <p:nvPr/>
+        </p:nvSpPr>
+        <p:spPr>
+          <a:xfrm rot="0" flipH="0" flipV="0">
+            <a:off x="9534525" y="3695700"/>
+            <a:ext cx="685800" cy="209550"/>
+          </a:xfrm>
+          <a:prstGeom prst="rect"/>
+        </p:spPr>
+        <p:txBody>
+          <a:bodyPr wrap="none" lIns="0" tIns="0" rIns="0" bIns="0"/>
+          <a:p>
+            <a:pPr>
+              <a:lnSpc>
+                <a:spcPct val="100000"/>
+              </a:lnSpc>
+            </a:pPr>
+            <a:r>
+              <a:rPr lang="zh-CN" sz="1350">
+                <a:solidFill>
+                  <a:srgbClr val="1A1A1A"/>
+                </a:solidFill>
+                <a:latin typeface="微软雅黑"/>
+                <a:ea typeface="微软雅黑"/>
+              </a:rPr>
+              <a:t>覆盖部门</a:t>
+            </a:r>
+            <a:endParaRPr/>
+          </a:p>
+        </p:txBody>
+      </p:sp>
+      <p:sp>
+        <p:nvSpPr>
+          <p:cNvPr id="112" name=""/>
+          <p:cNvSpPr/>
+          <p:nvPr/>
+        </p:nvSpPr>
+        <p:spPr>
+          <a:xfrm rot="0" flipH="0" flipV="0">
+            <a:off x="533400" y="5334000"/>
+            <a:ext cx="11125200" cy="923925"/>
+          </a:xfrm>
+          <a:prstGeom prst="roundRect">
+            <a:avLst>
+              <a:gd name="adj" fmla="val 10309"/>
+            </a:avLst>
+          </a:prstGeom>
+          <a:solidFill>
+            <a:srgbClr val="052B7C"/>
+          </a:solidFill>
+          <a:ln/>
+        </p:spPr>
+        <p:txBody>
+          <a:bodyPr/>
+          <a:p/>
+        </p:txBody>
+      </p:sp>
+      <p:sp>
+        <p:nvSpPr>
+          <p:cNvPr id="113" name="" descr="{&quot;isTemplate&quot;:true,&quot;type&quot;:&quot;text&quot;}"/>
+          <p:cNvSpPr txBox="1"/>
+          <p:nvPr/>
+        </p:nvSpPr>
+        <p:spPr>
+          <a:xfrm rot="0" flipH="0" flipV="0">
+            <a:off x="742950" y="5486400"/>
+            <a:ext cx="10706100" cy="619125"/>
+          </a:xfrm>
+          <a:prstGeom prst="rect"/>
+        </p:spPr>
+        <p:txBody>
+          <a:bodyPr wrap="square" lIns="0" tIns="0" rIns="0" bIns="0">
+            <a:normAutofit/>
+          </a:bodyPr>
+          <a:p>
+            <a:pPr>
+              <a:lnSpc>
+                <a:spcPct val="150000"/>
+              </a:lnSpc>
+            </a:pPr>
+            <a:r>
+              <a:rPr lang="zh-CN" sz="1350">
+                <a:solidFill>
+                  <a:srgbClr val="FFFFFF"/>
+                </a:solidFill>
+                <a:latin typeface="微软雅黑"/>
+                <a:ea typeface="微软雅黑"/>
+              </a:rPr>
+              <a:t>入职</a:t>
+            </a:r>
+            <a:r>
+              <a:rPr lang="en-US" sz="1350">
+                <a:solidFill>
+                  <a:srgbClr val="FFFFFF"/>
+                </a:solidFill>
+                <a:latin typeface="微软雅黑"/>
+                <a:ea typeface="微软雅黑"/>
+              </a:rPr>
+              <a:t> 3.5 </a:t>
+            </a:r>
+            <a:r>
+              <a:rPr lang="zh-CN" sz="1350">
+                <a:solidFill>
+                  <a:srgbClr val="FFFFFF"/>
+                </a:solidFill>
+                <a:latin typeface="微软雅黑"/>
+                <a:ea typeface="微软雅黑"/>
+              </a:rPr>
+              <a:t>个月，从</a:t>
+            </a:r>
+            <a:r>
+              <a:rPr lang="en-US" sz="1350">
+                <a:solidFill>
+                  <a:srgbClr val="FFFFFF"/>
+                </a:solidFill>
+                <a:latin typeface="微软雅黑"/>
+                <a:ea typeface="微软雅黑"/>
+              </a:rPr>
+              <a:t> 0 </a:t>
+            </a:r>
+            <a:r>
+              <a:rPr lang="zh-CN" sz="1350">
+                <a:solidFill>
+                  <a:srgbClr val="FFFFFF"/>
+                </a:solidFill>
+                <a:latin typeface="微软雅黑"/>
+                <a:ea typeface="微软雅黑"/>
+              </a:rPr>
+              <a:t>搭起「自研工具</a:t>
+            </a:r>
+            <a:r>
+              <a:rPr lang="en-US" sz="1350">
+                <a:solidFill>
+                  <a:srgbClr val="FFFFFF"/>
+                </a:solidFill>
+                <a:latin typeface="微软雅黑"/>
+                <a:ea typeface="微软雅黑"/>
+              </a:rPr>
+              <a:t> + </a:t>
+            </a:r>
+            <a:r>
+              <a:rPr lang="zh-CN" sz="1350">
+                <a:solidFill>
+                  <a:srgbClr val="FFFFFF"/>
+                </a:solidFill>
+                <a:latin typeface="微软雅黑"/>
+                <a:ea typeface="微软雅黑"/>
+              </a:rPr>
+              <a:t>复用</a:t>
+            </a:r>
+            <a:r>
+              <a:rPr lang="en-US" sz="1350">
+                <a:solidFill>
+                  <a:srgbClr val="FFFFFF"/>
+                </a:solidFill>
+                <a:latin typeface="微软雅黑"/>
+                <a:ea typeface="微软雅黑"/>
+              </a:rPr>
+              <a:t> Skill + </a:t>
+            </a:r>
+            <a:r>
+              <a:rPr lang="zh-CN" sz="1350">
+                <a:solidFill>
+                  <a:srgbClr val="FFFFFF"/>
+                </a:solidFill>
+                <a:latin typeface="微软雅黑"/>
+                <a:ea typeface="微软雅黑"/>
+              </a:rPr>
+              <a:t>平台验收运营</a:t>
+            </a:r>
+            <a:r>
+              <a:rPr lang="en-US" sz="1350">
+                <a:solidFill>
+                  <a:srgbClr val="FFFFFF"/>
+                </a:solidFill>
+                <a:latin typeface="微软雅黑"/>
+                <a:ea typeface="微软雅黑"/>
+              </a:rPr>
+              <a:t> + </a:t>
+            </a:r>
+            <a:r>
+              <a:rPr lang="zh-CN" sz="1350">
+                <a:solidFill>
+                  <a:srgbClr val="FFFFFF"/>
+                </a:solidFill>
+                <a:latin typeface="微软雅黑"/>
+                <a:ea typeface="微软雅黑"/>
+              </a:rPr>
+              <a:t>培训推广」完整交付体系，覆盖采购</a:t>
+            </a:r>
+            <a:r>
+              <a:rPr lang="en-US" sz="1350">
+                <a:solidFill>
+                  <a:srgbClr val="FFFFFF"/>
+                </a:solidFill>
+                <a:latin typeface="微软雅黑"/>
+                <a:ea typeface="微软雅黑"/>
+              </a:rPr>
+              <a:t> / </a:t>
+            </a:r>
+            <a:r>
+              <a:rPr lang="zh-CN" sz="1350">
+                <a:solidFill>
+                  <a:srgbClr val="FFFFFF"/>
+                </a:solidFill>
+                <a:latin typeface="微软雅黑"/>
+                <a:ea typeface="微软雅黑"/>
+              </a:rPr>
+              <a:t>船务</a:t>
+            </a:r>
+            <a:r>
+              <a:rPr lang="en-US" sz="1350">
+                <a:solidFill>
+                  <a:srgbClr val="FFFFFF"/>
+                </a:solidFill>
+                <a:latin typeface="微软雅黑"/>
+                <a:ea typeface="微软雅黑"/>
+              </a:rPr>
+              <a:t> / </a:t>
+            </a:r>
+            <a:r>
+              <a:rPr lang="zh-CN" sz="1350">
+                <a:solidFill>
+                  <a:srgbClr val="FFFFFF"/>
+                </a:solidFill>
+                <a:latin typeface="微软雅黑"/>
+                <a:ea typeface="微软雅黑"/>
+              </a:rPr>
+              <a:t>财务</a:t>
+            </a:r>
+            <a:r>
+              <a:rPr lang="en-US" sz="1350">
+                <a:solidFill>
+                  <a:srgbClr val="FFFFFF"/>
+                </a:solidFill>
+                <a:latin typeface="微软雅黑"/>
+                <a:ea typeface="微软雅黑"/>
+              </a:rPr>
+              <a:t> / </a:t>
+            </a:r>
+            <a:r>
+              <a:rPr lang="zh-CN" sz="1350">
+                <a:solidFill>
+                  <a:srgbClr val="FFFFFF"/>
+                </a:solidFill>
+                <a:latin typeface="微软雅黑"/>
+                <a:ea typeface="微软雅黑"/>
+              </a:rPr>
+              <a:t>销售</a:t>
+            </a:r>
+            <a:r>
+              <a:rPr lang="en-US" sz="1350">
+                <a:solidFill>
+                  <a:srgbClr val="FFFFFF"/>
+                </a:solidFill>
+                <a:latin typeface="微软雅黑"/>
+                <a:ea typeface="微软雅黑"/>
+              </a:rPr>
+              <a:t> / </a:t>
+            </a:r>
+            <a:r>
+              <a:rPr lang="zh-CN" sz="1350">
+                <a:solidFill>
+                  <a:srgbClr val="FFFFFF"/>
+                </a:solidFill>
+                <a:latin typeface="微软雅黑"/>
+                <a:ea typeface="微软雅黑"/>
+              </a:rPr>
+              <a:t>研发</a:t>
+            </a:r>
+            <a:r>
+              <a:rPr lang="en-US" sz="1350">
+                <a:solidFill>
+                  <a:srgbClr val="FFFFFF"/>
+                </a:solidFill>
+                <a:latin typeface="微软雅黑"/>
+                <a:ea typeface="微软雅黑"/>
+              </a:rPr>
+              <a:t> / </a:t>
+            </a:r>
+            <a:r>
+              <a:rPr lang="zh-CN" sz="1350">
+                <a:solidFill>
+                  <a:srgbClr val="FFFFFF"/>
+                </a:solidFill>
+                <a:latin typeface="微软雅黑"/>
+                <a:ea typeface="微软雅黑"/>
+              </a:rPr>
+              <a:t>营销</a:t>
+            </a:r>
+            <a:r>
+              <a:rPr lang="en-US" sz="1350">
+                <a:solidFill>
+                  <a:srgbClr val="FFFFFF"/>
+                </a:solidFill>
+                <a:latin typeface="微软雅黑"/>
+                <a:ea typeface="微软雅黑"/>
+              </a:rPr>
+              <a:t> 6 </a:t>
+            </a:r>
+            <a:r>
+              <a:rPr lang="zh-CN" sz="1350">
+                <a:solidFill>
+                  <a:srgbClr val="FFFFFF"/>
+                </a:solidFill>
+                <a:latin typeface="微软雅黑"/>
+                <a:ea typeface="微软雅黑"/>
+              </a:rPr>
+              <a:t>类业务方；交付快（自研平均</a:t>
+            </a:r>
+            <a:r>
+              <a:rPr lang="en-US" sz="1350">
+                <a:solidFill>
+                  <a:srgbClr val="FFFFFF"/>
+                </a:solidFill>
+                <a:latin typeface="微软雅黑"/>
+                <a:ea typeface="微软雅黑"/>
+              </a:rPr>
+              <a:t> ~25 </a:t>
+            </a:r>
+            <a:r>
+              <a:rPr lang="zh-CN" sz="1350">
+                <a:solidFill>
+                  <a:srgbClr val="FFFFFF"/>
+                </a:solidFill>
+                <a:latin typeface="微软雅黑"/>
+                <a:ea typeface="微软雅黑"/>
+              </a:rPr>
+              <a:t>天）、持续迭代（</a:t>
+            </a:r>
+            <a:r>
+              <a:rPr lang="en-US" sz="1350">
+                <a:solidFill>
+                  <a:srgbClr val="FFFFFF"/>
+                </a:solidFill>
+                <a:latin typeface="微软雅黑"/>
+                <a:ea typeface="微软雅黑"/>
+              </a:rPr>
+              <a:t>110+ </a:t>
+            </a:r>
+            <a:r>
+              <a:rPr lang="zh-CN" sz="1350">
+                <a:solidFill>
+                  <a:srgbClr val="FFFFFF"/>
+                </a:solidFill>
+                <a:latin typeface="微软雅黑"/>
+                <a:ea typeface="微软雅黑"/>
+              </a:rPr>
+              <a:t>条代码）。</a:t>
+            </a:r>
+            <a:endParaRPr/>
+          </a:p>
+        </p:txBody>
+      </p:sp>
+      <p:sp>
+        <p:nvSpPr>
+          <p:cNvPr id="114" name="" descr="{&quot;isTemplate&quot;:true,&quot;type&quot;:&quot;text&quot;}"/>
+          <p:cNvSpPr txBox="1"/>
+          <p:nvPr/>
+        </p:nvSpPr>
+        <p:spPr>
+          <a:xfrm rot="0" flipH="0" flipV="0">
+            <a:off x="533400" y="6362700"/>
+            <a:ext cx="1285875" cy="161925"/>
+          </a:xfrm>
+          <a:prstGeom prst="rect"/>
+        </p:spPr>
+        <p:txBody>
+          <a:bodyPr wrap="none" lIns="0" tIns="0" rIns="0" bIns="0"/>
+          <a:p>
+            <a:pPr>
+              <a:lnSpc>
+                <a:spcPct val="100000"/>
+              </a:lnSpc>
+            </a:pPr>
+            <a:r>
+              <a:rPr lang="zh-CN" sz="1050">
+                <a:solidFill>
+                  <a:srgbClr val="888888"/>
+                </a:solidFill>
+                <a:latin typeface="微软雅黑"/>
+                <a:ea typeface="微软雅黑"/>
+              </a:rPr>
+              <a:t>入职以来</a:t>
+            </a:r>
+            <a:r>
+              <a:rPr lang="en-US" sz="1050">
+                <a:solidFill>
+                  <a:srgbClr val="888888"/>
+                </a:solidFill>
+                <a:latin typeface="微软雅黑"/>
+                <a:ea typeface="微软雅黑"/>
+              </a:rPr>
+              <a:t> AI </a:t>
+            </a:r>
+            <a:r>
+              <a:rPr lang="zh-CN" sz="1050">
+                <a:solidFill>
+                  <a:srgbClr val="888888"/>
+                </a:solidFill>
+                <a:latin typeface="微软雅黑"/>
+                <a:ea typeface="微软雅黑"/>
+              </a:rPr>
+              <a:t>工作复盘</a:t>
+            </a:r>
+            <a:endParaRPr/>
+          </a:p>
+        </p:txBody>
+      </p:sp>
+      <p:sp>
+        <p:nvSpPr>
+          <p:cNvPr id="115" name="" descr="{&quot;isTemplate&quot;:true,&quot;type&quot;:&quot;text&quot;}"/>
+          <p:cNvSpPr txBox="1"/>
+          <p:nvPr/>
+        </p:nvSpPr>
+        <p:spPr>
+          <a:xfrm rot="0" flipH="0" flipV="0">
+            <a:off x="11229975" y="6362700"/>
+            <a:ext cx="428625" cy="161925"/>
+          </a:xfrm>
+          <a:prstGeom prst="rect"/>
+        </p:spPr>
+        <p:txBody>
+          <a:bodyPr wrap="none" lIns="0" tIns="0" rIns="0" bIns="0"/>
+          <a:p>
+            <a:pPr>
+              <a:lnSpc>
+                <a:spcPct val="100000"/>
+              </a:lnSpc>
+            </a:pPr>
+            <a:r>
+              <a:rPr lang="en-US" sz="1050">
+                <a:solidFill>
+                  <a:srgbClr val="888888"/>
+                </a:solidFill>
+                <a:latin typeface="微软雅黑"/>
+                <a:ea typeface="微软雅黑"/>
+              </a:rPr>
+              <a:t>03 / 13</a:t>
+            </a:r>
+            <a:endParaRPr/>
+          </a:p>
+        </p:txBody>
+      </p:sp>
+    </p:spTree>
+  </p:cSld>
+</p:sld>
+</file>
+
+<file path=ppt/slides/slide4.xml><?xml version="1.0" encoding="utf-8"?>
+<p:sld xmlns:p="http://schemas.openxmlformats.org/presentationml/2006/main" xmlns:a="http://schemas.openxmlformats.org/drawingml/2006/main" xmlns:a16="http://schemas.microsoft.com/office/drawing/2014/main" xmlns:mc="http://schemas.openxmlformats.org/markup-compatibility/2006" mc:Ignorable="a16">
+  <p:cSld>
+    <p:spTree>
+      <p:nvGrpSpPr>
+        <p:cNvPr id="116" name="" descr="&lt;Slide style={{ width:'1280px', height:'720px', position:'relative', background:'#FFFFFF', fontFamily:'微软雅黑' }}&gt;&#10;  &lt;Box style={{ position:'absolute', left:56, top:36, flexDirection:'row', alignItems:'center', gap:12 }}&gt;&#10;    &lt;Box style={{ width:8, height:34, background:'#4472C4' }} /&gt;&#10;    &lt;Text style={{ fontSize:30, fontWeight:'bold', color:'#052B7C' }}&gt;二、自研应用交付总览&lt;/Text&gt;&#10;  &lt;/Box&gt;&#10;&#10;  &lt;Box style={{ position:'absolute', left:56, top:120, right:56 }}&gt;&#10;    &lt;Table&#10;      style={{ width:'100%', height:420 }}&#10;      defaultTextStyle={{ fontSize:15, textAlign:'center', color:'#1A1A1A' }}&#10;      defaultCellStyle={{ border:{ left:{width:1,color:'#CCCCCC'}, right:{width:1,color:'#CCCCCC'}, top:{width:1,color:'#CCCCCC'}, bottom:{width:1,color:'#CCCCCC'} } }}&#10;      cells={[&#10;        [ {text:'应用 / 工具', textStyle:{bold:true,color:'#1A1A1A'}, cellStyle:{background:{color:'#DAE3F3'}}},&#10;          {text:'交付时间', textStyle:{bold:true,color:'#1A1A1A'}, cellStyle:{background:{color:'#DAE3F3'}}},&#10;          {text:'形态', textStyle:{bold:true,color:'#1A1A1A'}, cellStyle:{background:{color:'#DAE3F3'}}},&#10;          {text:'主要对象', textStyle:{bold:true,color:'#1A1A1A'}, cellStyle:{background:{color:'#DAE3F3'}}},&#10;          {text:'当前状态', textStyle:{bold:true,color:'#1A1A1A'}, cellStyle:{background:{color:'#DAE3F3'}}} ],&#10;        ['采购分析助手','05-29','前后端 Web','采购部','维护中（至 07-30）'],&#10;        ['船务 T/T 协议自动化','06-22','前后端 Web','船务部','95%+ 试用'],&#10;        ['数据脱敏 Data_masking','07-28','桌面 .exe','财务部','长期优化'],&#10;        ['对账单','已交付','纯前端 HTML','财务部','已交付'],&#10;        ['Tax_check 退税审单','08-01','桌面 .exe','财务部','已交付运营（收尾）'],&#10;      ]}&#10;    /&gt;&#10;  &lt;/Box&gt;&#10;&#10;  &lt;Box style={{ position:'absolute', left:56, top:560, right:56 }}&gt;&#10;    &lt;Text style={{ fontSize:16, color:'#1A1A1A', lineHeight:1.5 }}&gt;自研平均 &lt;span style={{ fontWeight:'bold', color:'#4472C4' }}&gt;~25 天&lt;/span&gt; 交付；含 1 次 PyQt5→Web 重构（05-27）、2 次架构级重构（采购 06-27、船务 08-01 JSON→SQLite）；110+ 条代码迭代。MSDS 中英文双语生成内嵌于船务助手，不作独立交付项。&lt;/Text&gt;&#10;  &lt;/Box&gt;&#10;&#10;  &lt;Box style={{ position:'absolute', left:56, top:668, right:56, flexDirection:'row', justifyContent:'space-between' }}&gt;&#10;    &lt;Text style={{ fontSize:14, color:'#888' }}&gt;入职以来 AI 工作复盘&lt;/Text&gt;&#10;    &lt;Text style={{ fontSize:14, color:'#888' }}&gt;04 / 13&lt;/Text&gt;&#10;  &lt;/Box&gt;&#10;&lt;/Slide&gt;"/>
+        <p:cNvGrpSpPr/>
+        <p:nvPr/>
+      </p:nvGrpSpPr>
+      <p:grpSpPr>
+        <a:xfrm>
+          <a:off x="0" y="0"/>
+          <a:ext cx="0" cy="0"/>
+          <a:chOff x="0" y="0"/>
+          <a:chExt cx="0" cy="0"/>
+        </a:xfrm>
+      </p:grpSpPr>
+      <p:sp>
+        <p:nvSpPr>
+          <p:cNvPr id="117" name=""/>
+          <p:cNvSpPr/>
+          <p:nvPr/>
+        </p:nvSpPr>
+        <p:spPr>
+          <a:xfrm rot="0" flipH="0" flipV="0">
+            <a:off x="0" y="0"/>
+            <a:ext cx="12192000" cy="6858000"/>
+          </a:xfrm>
+          <a:prstGeom prst="rect">
+            <a:avLst/>
+          </a:prstGeom>
+          <a:solidFill>
+            <a:srgbClr val="FFFFFF"/>
+          </a:solidFill>
+          <a:ln/>
+        </p:spPr>
+        <p:txBody>
+          <a:bodyPr/>
+          <a:p/>
+        </p:txBody>
+      </p:sp>
+      <p:sp>
+        <p:nvSpPr>
+          <p:cNvPr id="118" name=""/>
+          <p:cNvSpPr/>
+          <p:nvPr/>
+        </p:nvSpPr>
+        <p:spPr>
+          <a:xfrm rot="0" flipH="0" flipV="0">
+            <a:off x="533400" y="352425"/>
+            <a:ext cx="76200" cy="323850"/>
+          </a:xfrm>
+          <a:prstGeom prst="rect">
+            <a:avLst/>
+          </a:prstGeom>
+          <a:solidFill>
+            <a:srgbClr val="4472C4"/>
+          </a:solidFill>
+          <a:ln/>
+        </p:spPr>
+        <p:txBody>
+          <a:bodyPr/>
+          <a:p/>
+        </p:txBody>
+      </p:sp>
+      <p:sp>
+        <p:nvSpPr>
+          <p:cNvPr id="119" name="" descr="{&quot;isTemplate&quot;:true,&quot;type&quot;:&quot;text&quot;}"/>
+          <p:cNvSpPr txBox="1"/>
+          <p:nvPr/>
+        </p:nvSpPr>
+        <p:spPr>
+          <a:xfrm rot="0" flipH="0" flipV="0">
+            <a:off x="723900" y="342900"/>
+            <a:ext cx="2857500" cy="342900"/>
+          </a:xfrm>
+          <a:prstGeom prst="rect"/>
+        </p:spPr>
+        <p:txBody>
+          <a:bodyPr wrap="none" lIns="0" tIns="0" rIns="0" bIns="0"/>
+          <a:p>
+            <a:pPr>
+              <a:lnSpc>
+                <a:spcPct val="100000"/>
+              </a:lnSpc>
+            </a:pPr>
+            <a:r>
+              <a:rPr lang="zh-CN" sz="2250" b="1">
+                <a:solidFill>
+                  <a:srgbClr val="052B7C"/>
+                </a:solidFill>
+                <a:latin typeface="微软雅黑"/>
+                <a:ea typeface="微软雅黑"/>
+              </a:rPr>
+              <a:t>二、自研应用交付总览</a:t>
+            </a:r>
+            <a:endParaRPr/>
+          </a:p>
+        </p:txBody>
+      </p:sp>
       <p:graphicFrame>
         <p:nvGraphicFramePr>
-          <p:cNvPr id="55" name=""/>
+          <p:cNvPr id="120" name=""/>
           <p:cNvGraphicFramePr/>
           <p:nvPr/>
         </p:nvGraphicFramePr>
@@ -3992,7 +8605,7 @@
       </p:graphicFrame>
       <p:sp>
         <p:nvSpPr>
-          <p:cNvPr id="56" name="" descr="{&quot;isTemplate&quot;:true,&quot;type&quot;:&quot;text&quot;}"/>
+          <p:cNvPr id="121" name="" descr="{&quot;isTemplate&quot;:true,&quot;type&quot;:&quot;text&quot;}"/>
           <p:cNvSpPr txBox="1"/>
           <p:nvPr/>
         </p:nvSpPr>
@@ -4239,7 +8852,7 @@
       </p:sp>
       <p:sp>
         <p:nvSpPr>
-          <p:cNvPr id="57" name="" descr="{&quot;isTemplate&quot;:true,&quot;type&quot;:&quot;text&quot;}"/>
+          <p:cNvPr id="122" name="" descr="{&quot;isTemplate&quot;:true,&quot;type&quot;:&quot;text&quot;}"/>
           <p:cNvSpPr txBox="1"/>
           <p:nvPr/>
         </p:nvSpPr>
@@ -4294,7 +8907,7 @@
       </p:sp>
       <p:sp>
         <p:nvSpPr>
-          <p:cNvPr id="58" name="" descr="{&quot;isTemplate&quot;:true,&quot;type&quot;:&quot;text&quot;}"/>
+          <p:cNvPr id="123" name="" descr="{&quot;isTemplate&quot;:true,&quot;type&quot;:&quot;text&quot;}"/>
           <p:cNvSpPr txBox="1"/>
           <p:nvPr/>
         </p:nvSpPr>
@@ -4337,7 +8950,7 @@
   <p:cSld>
     <p:spTree>
       <p:nvGrpSpPr>
-        <p:cNvPr id="59" name="" descr="&lt;Slide style={{ width:'1280px', height:'720px', position:'relative', background:'#FFFFFF', fontFamily:'微软雅黑' }}&gt;&#10;  &lt;Box style={{ position:'absolute', left:56, top:36, flexDirection:'row', alignItems:'center', gap:12 }}&gt;&#10;    &lt;Box style={{ width:8, height:34, background:'#4472C4' }} /&gt;&#10;    &lt;Text style={{ fontSize:30, fontWeight:'bold', color:'#052B7C' }}&gt;采购分析助手（ProcurementAnalysis）&lt;/Text&gt;&#10;  &lt;/Box&gt;&#10;&#10;  &lt;Box style={{ position:'absolute', left:56, top:140, right:56, flexDirection:'row', gap:36 }}&gt;&#10;    &lt;Box style={{ width:420, flexDirection:'column', gap:18 }}&gt;&#10;      &lt;Box style={{ background:'#F4F7FC', borderRadius:10, padding:'18px 22px' }}&gt;&#10;        &lt;Text style={{ fontSize:60, fontWeight:'bold', color:'#4472C4' }}&gt;15,227&lt;/Text&gt;&#10;        &lt;Text style={{ fontSize:16, color:'#1A1A1A', marginTop:4 }}&gt;条价格数据（基准价 5,673 + 报价 9,554）&lt;/Text&gt;&#10;      &lt;/Box&gt;&#10;      &lt;Box style={{ flexDirection:'row', gap:18 }}&gt;&#10;        &lt;Box style={{ flex:1, background:'#F4F7FC', borderRadius:10, padding:'16px 18px', alignItems:'center' }}&gt;&#10;          &lt;Text style={{ fontSize:44, fontWeight:'bold', color:'#052B7C' }}&gt;61&lt;/Text&gt;&#10;          &lt;Text style={{ fontSize:15, color:'#1A1A1A', marginTop:2 }}&gt;覆盖品类&lt;/Text&gt;&#10;        &lt;/Box&gt;&#10;        &lt;Box style={{ flex:1, background:'#F4F7FC', borderRadius:10, padding:'16px 18px', alignItems:'center' }}&gt;&#10;          &lt;Text style={{ fontSize:44, fontWeight:'bold', color:'#052B7C' }}&gt;7&lt;/Text&gt;&#10;          &lt;Text style={{ fontSize:15, color:'#1A1A1A', marginTop:2 }}&gt;功能模块&lt;/Text&gt;&#10;        &lt;/Box&gt;&#10;      &lt;/Box&gt;&#10;      &lt;Text style={{ fontSize:16, color:'#1A1A1A' }}&gt;交付周期 &lt;span style={{ fontWeight:'bold', color:'#4472C4' }}&gt;29 天&lt;/span&gt;（04-30 → 05-29 移交采购部）&lt;/Text&gt;&#10;    &lt;/Box&gt;&#10;&#10;    &lt;Box style={{ flex:1, flexDirection:'column', gap:14, justifyContent:'center' }}&gt;&#10;      &lt;Text style={{ fontSize:18, fontWeight:'bold', color:'#052B7C' }}&gt;痛点&lt;/Text&gt;&#10;      &lt;Text style={{ fontSize:17, color:'#1A1A1A', lineHeight:1.6 }}&gt;采购原料价格波动大、品类多（61 个），原靠人工盯盘 + Excel，价格异常往往事后才发现，供应商比价缺系统支撑。&lt;/Text&gt;&#10;      &lt;Text style={{ fontSize:18, fontWeight:'bold', color:'#052B7C', marginTop:6 }}&gt;价值&lt;/Text&gt;&#10;      &lt;Text style={{ fontSize:17, color:'#1A1A1A', lineHeight:1.6 }}&gt;15,227 条数据 + 7 模块把价格监控系统化——看板看趋势、预警推异常、供应商看板横向比价；6 月架构重构后查询更快更稳，让「拍脑袋比价」变「看数据决策」。&lt;/Text&gt;&#10;      &lt;Text style={{ fontSize:17, color:'#1A1A1A', marginTop:4 }}&gt;主要对象：&lt;span style={{ fontWeight:'bold' }}&gt;采购部&lt;/span&gt;&lt;/Text&gt;&#10;    &lt;/Box&gt;&#10;  &lt;/Box&gt;&#10;&#10;  &lt;Box style={{ position:'absolute', left:56, top:668, right:56, flexDirection:'row', justifyContent:'space-between' }}&gt;&#10;    &lt;Text style={{ fontSize:14, color:'#888' }}&gt;入职以来 AI 工作复盘&lt;/Text&gt;&#10;    &lt;Text style={{ fontSize:14, color:'#888' }}&gt;05 / 13&lt;/Text&gt;&#10;  &lt;/Box&gt;&#10;&lt;/Slide&gt;"/>
+        <p:cNvPr id="124" name="" descr="&lt;Slide style={{ width:'1280px', height:'720px', position:'relative', background:'#FFFFFF', fontFamily:'微软雅黑' }}&gt;&#10;  &lt;Box style={{ position:'absolute', left:56, top:36, flexDirection:'row', alignItems:'center', gap:12 }}&gt;&#10;    &lt;Box style={{ width:8, height:34, background:'#4472C4' }} /&gt;&#10;    &lt;Text style={{ fontSize:30, fontWeight:'bold', color:'#052B7C' }}&gt;采购分析助手（ProcurementAnalysis）&lt;/Text&gt;&#10;  &lt;/Box&gt;&#10;&#10;  &lt;Box style={{ position:'absolute', left:56, top:140, right:56, flexDirection:'row', gap:36 }}&gt;&#10;    &lt;Box style={{ width:420, flexDirection:'column', gap:18 }}&gt;&#10;      &lt;Box style={{ background:'#F4F7FC', borderRadius:10, padding:'18px 22px' }}&gt;&#10;        &lt;Text style={{ fontSize:60, fontWeight:'bold', color:'#4472C4' }}&gt;15,227&lt;/Text&gt;&#10;        &lt;Text style={{ fontSize:16, color:'#1A1A1A', marginTop:4 }}&gt;条价格数据（基准价 5,673 + 报价 9,554）&lt;/Text&gt;&#10;      &lt;/Box&gt;&#10;      &lt;Box style={{ flexDirection:'row', gap:18 }}&gt;&#10;        &lt;Box style={{ flex:1, background:'#F4F7FC', borderRadius:10, padding:'16px 18px', alignItems:'center' }}&gt;&#10;          &lt;Text style={{ fontSize:44, fontWeight:'bold', color:'#052B7C' }}&gt;61&lt;/Text&gt;&#10;          &lt;Text style={{ fontSize:15, color:'#1A1A1A', marginTop:2 }}&gt;覆盖品类&lt;/Text&gt;&#10;        &lt;/Box&gt;&#10;        &lt;Box style={{ flex:1, background:'#F4F7FC', borderRadius:10, padding:'16px 18px', alignItems:'center' }}&gt;&#10;          &lt;Text style={{ fontSize:44, fontWeight:'bold', color:'#052B7C' }}&gt;7&lt;/Text&gt;&#10;          &lt;Text style={{ fontSize:15, color:'#1A1A1A', marginTop:2 }}&gt;功能模块&lt;/Text&gt;&#10;        &lt;/Box&gt;&#10;      &lt;/Box&gt;&#10;      &lt;Text style={{ fontSize:16, color:'#1A1A1A' }}&gt;交付周期 &lt;span style={{ fontWeight:'bold', color:'#4472C4' }}&gt;29 天&lt;/span&gt;（04-30 → 05-29 移交采购部）&lt;/Text&gt;&#10;    &lt;/Box&gt;&#10;&#10;    &lt;Box style={{ flex:1, flexDirection:'column', gap:14, justifyContent:'center' }}&gt;&#10;      &lt;Text style={{ fontSize:18, fontWeight:'bold', color:'#052B7C' }}&gt;痛点&lt;/Text&gt;&#10;      &lt;Text style={{ fontSize:17, color:'#1A1A1A', lineHeight:1.6 }}&gt;采购原料价格波动大、品类多（61 个），原靠人工盯盘 + Excel，价格异常往往事后才发现，供应商比价缺系统支撑。&lt;/Text&gt;&#10;      &lt;Text style={{ fontSize:18, fontWeight:'bold', color:'#052B7C', marginTop:6 }}&gt;价值&lt;/Text&gt;&#10;      &lt;Text style={{ fontSize:17, color:'#1A1A1A', lineHeight:1.6 }}&gt;15,227 条数据 + 7 模块把价格监控系统化——看板看趋势、预警推异常、供应商看板横向比价；6 月架构重构后查询更快更稳，让「拍脑袋比价」变「看数据决策」。&lt;/Text&gt;&#10;      &lt;Text style={{ fontSize:17, color:'#1A1A1A', marginTop:4 }}&gt;主要对象：&lt;span style={{ fontWeight:'bold' }}&gt;采购部&lt;/span&gt;&lt;/Text&gt;&#10;    &lt;/Box&gt;&#10;  &lt;/Box&gt;&#10;&#10;  &lt;Box style={{ position:'absolute', left:56, top:668, right:56, flexDirection:'row', justifyContent:'space-between' }}&gt;&#10;    &lt;Text style={{ fontSize:14, color:'#888' }}&gt;入职以来 AI 工作复盘&lt;/Text&gt;&#10;    &lt;Text style={{ fontSize:14, color:'#888' }}&gt;05 / 13&lt;/Text&gt;&#10;  &lt;/Box&gt;&#10;&lt;/Slide&gt;"/>
         <p:cNvGrpSpPr/>
         <p:nvPr/>
       </p:nvGrpSpPr>
@@ -4351,7 +8964,7 @@
       </p:grpSpPr>
       <p:sp>
         <p:nvSpPr>
-          <p:cNvPr id="60" name=""/>
+          <p:cNvPr id="125" name=""/>
           <p:cNvSpPr/>
           <p:nvPr/>
         </p:nvSpPr>
@@ -4375,7 +8988,7 @@
       </p:sp>
       <p:sp>
         <p:nvSpPr>
-          <p:cNvPr id="61" name=""/>
+          <p:cNvPr id="126" name=""/>
           <p:cNvSpPr/>
           <p:nvPr/>
         </p:nvSpPr>
@@ -4399,7 +9012,7 @@
       </p:sp>
       <p:sp>
         <p:nvSpPr>
-          <p:cNvPr id="62" name="" descr="{&quot;isTemplate&quot;:true,&quot;type&quot;:&quot;text&quot;}"/>
+          <p:cNvPr id="127" name="" descr="{&quot;isTemplate&quot;:true,&quot;type&quot;:&quot;text&quot;}"/>
           <p:cNvSpPr txBox="1"/>
           <p:nvPr/>
         </p:nvSpPr>
@@ -4454,7 +9067,7 @@
       </p:sp>
       <p:sp>
         <p:nvSpPr>
-          <p:cNvPr id="63" name=""/>
+          <p:cNvPr id="128" name=""/>
           <p:cNvSpPr/>
           <p:nvPr/>
         </p:nvSpPr>
@@ -4480,7 +9093,7 @@
       </p:sp>
       <p:sp>
         <p:nvSpPr>
-          <p:cNvPr id="64" name="" descr="{&quot;isTemplate&quot;:true,&quot;type&quot;:&quot;text&quot;}"/>
+          <p:cNvPr id="129" name="" descr="{&quot;isTemplate&quot;:true,&quot;type&quot;:&quot;text&quot;}"/>
           <p:cNvSpPr txBox="1"/>
           <p:nvPr/>
         </p:nvSpPr>
@@ -4515,7 +9128,7 @@
       </p:sp>
       <p:sp>
         <p:nvSpPr>
-          <p:cNvPr id="65" name="" descr="{&quot;isTemplate&quot;:true,&quot;type&quot;:&quot;text&quot;}"/>
+          <p:cNvPr id="130" name="" descr="{&quot;isTemplate&quot;:true,&quot;type&quot;:&quot;text&quot;}"/>
           <p:cNvSpPr txBox="1"/>
           <p:nvPr/>
         </p:nvSpPr>
@@ -4590,7 +9203,7 @@
       </p:sp>
       <p:sp>
         <p:nvSpPr>
-          <p:cNvPr id="66" name=""/>
+          <p:cNvPr id="131" name=""/>
           <p:cNvSpPr/>
           <p:nvPr/>
         </p:nvSpPr>
@@ -4616,7 +9229,7 @@
       </p:sp>
       <p:sp>
         <p:nvSpPr>
-          <p:cNvPr id="67" name="" descr="{&quot;isTemplate&quot;:true,&quot;type&quot;:&quot;text&quot;}"/>
+          <p:cNvPr id="132" name="" descr="{&quot;isTemplate&quot;:true,&quot;type&quot;:&quot;text&quot;}"/>
           <p:cNvSpPr txBox="1"/>
           <p:nvPr/>
         </p:nvSpPr>
@@ -4651,7 +9264,7 @@
       </p:sp>
       <p:sp>
         <p:nvSpPr>
-          <p:cNvPr id="68" name="" descr="{&quot;isTemplate&quot;:true,&quot;type&quot;:&quot;text&quot;}"/>
+          <p:cNvPr id="133" name="" descr="{&quot;isTemplate&quot;:true,&quot;type&quot;:&quot;text&quot;}"/>
           <p:cNvSpPr txBox="1"/>
           <p:nvPr/>
         </p:nvSpPr>
@@ -4686,7 +9299,7 @@
       </p:sp>
       <p:sp>
         <p:nvSpPr>
-          <p:cNvPr id="69" name=""/>
+          <p:cNvPr id="134" name=""/>
           <p:cNvSpPr/>
           <p:nvPr/>
         </p:nvSpPr>
@@ -4712,7 +9325,7 @@
       </p:sp>
       <p:sp>
         <p:nvSpPr>
-          <p:cNvPr id="70" name="" descr="{&quot;isTemplate&quot;:true,&quot;type&quot;:&quot;text&quot;}"/>
+          <p:cNvPr id="135" name="" descr="{&quot;isTemplate&quot;:true,&quot;type&quot;:&quot;text&quot;}"/>
           <p:cNvSpPr txBox="1"/>
           <p:nvPr/>
         </p:nvSpPr>
@@ -4747,7 +9360,7 @@
       </p:sp>
       <p:sp>
         <p:nvSpPr>
-          <p:cNvPr id="71" name="" descr="{&quot;isTemplate&quot;:true,&quot;type&quot;:&quot;text&quot;}"/>
+          <p:cNvPr id="136" name="" descr="{&quot;isTemplate&quot;:true,&quot;type&quot;:&quot;text&quot;}"/>
           <p:cNvSpPr txBox="1"/>
           <p:nvPr/>
         </p:nvSpPr>
@@ -4782,7 +9395,7 @@
       </p:sp>
       <p:sp>
         <p:nvSpPr>
-          <p:cNvPr id="72" name="" descr="{&quot;isTemplate&quot;:true,&quot;type&quot;:&quot;text&quot;}"/>
+          <p:cNvPr id="137" name="" descr="{&quot;isTemplate&quot;:true,&quot;type&quot;:&quot;text&quot;}"/>
           <p:cNvSpPr txBox="1"/>
           <p:nvPr/>
         </p:nvSpPr>
@@ -4877,7 +9490,7 @@
       </p:sp>
       <p:sp>
         <p:nvSpPr>
-          <p:cNvPr id="73" name="" descr="{&quot;isTemplate&quot;:true,&quot;type&quot;:&quot;text&quot;}"/>
+          <p:cNvPr id="138" name="" descr="{&quot;isTemplate&quot;:true,&quot;type&quot;:&quot;text&quot;}"/>
           <p:cNvSpPr txBox="1"/>
           <p:nvPr/>
         </p:nvSpPr>
@@ -4912,7 +9525,7 @@
       </p:sp>
       <p:sp>
         <p:nvSpPr>
-          <p:cNvPr id="74" name="" descr="{&quot;isTemplate&quot;:true,&quot;type&quot;:&quot;text&quot;}"/>
+          <p:cNvPr id="139" name="" descr="{&quot;isTemplate&quot;:true,&quot;type&quot;:&quot;text&quot;}"/>
           <p:cNvSpPr txBox="1"/>
           <p:nvPr/>
         </p:nvSpPr>
@@ -4989,7 +9602,7 @@
       </p:sp>
       <p:sp>
         <p:nvSpPr>
-          <p:cNvPr id="75" name="" descr="{&quot;isTemplate&quot;:true,&quot;type&quot;:&quot;text&quot;}"/>
+          <p:cNvPr id="140" name="" descr="{&quot;isTemplate&quot;:true,&quot;type&quot;:&quot;text&quot;}"/>
           <p:cNvSpPr txBox="1"/>
           <p:nvPr/>
         </p:nvSpPr>
@@ -5024,7 +9637,7 @@
       </p:sp>
       <p:sp>
         <p:nvSpPr>
-          <p:cNvPr id="76" name="" descr="{&quot;isTemplate&quot;:true,&quot;type&quot;:&quot;text&quot;}"/>
+          <p:cNvPr id="141" name="" descr="{&quot;isTemplate&quot;:true,&quot;type&quot;:&quot;text&quot;}"/>
           <p:cNvSpPr txBox="1"/>
           <p:nvPr/>
         </p:nvSpPr>
@@ -5111,7 +9724,7 @@
       </p:sp>
       <p:sp>
         <p:nvSpPr>
-          <p:cNvPr id="77" name="" descr="{&quot;isTemplate&quot;:true,&quot;type&quot;:&quot;text&quot;}"/>
+          <p:cNvPr id="142" name="" descr="{&quot;isTemplate&quot;:true,&quot;type&quot;:&quot;text&quot;}"/>
           <p:cNvSpPr txBox="1"/>
           <p:nvPr/>
         </p:nvSpPr>
@@ -5156,7 +9769,7 @@
       </p:sp>
       <p:sp>
         <p:nvSpPr>
-          <p:cNvPr id="78" name="" descr="{&quot;isTemplate&quot;:true,&quot;type&quot;:&quot;text&quot;}"/>
+          <p:cNvPr id="143" name="" descr="{&quot;isTemplate&quot;:true,&quot;type&quot;:&quot;text&quot;}"/>
           <p:cNvSpPr txBox="1"/>
           <p:nvPr/>
         </p:nvSpPr>
@@ -5211,7 +9824,7 @@
       </p:sp>
       <p:sp>
         <p:nvSpPr>
-          <p:cNvPr id="79" name="" descr="{&quot;isTemplate&quot;:true,&quot;type&quot;:&quot;text&quot;}"/>
+          <p:cNvPr id="144" name="" descr="{&quot;isTemplate&quot;:true,&quot;type&quot;:&quot;text&quot;}"/>
           <p:cNvSpPr txBox="1"/>
           <p:nvPr/>
         </p:nvSpPr>
@@ -5254,7 +9867,7 @@
   <p:cSld>
     <p:spTree>
       <p:nvGrpSpPr>
-        <p:cNvPr id="80" name="" descr="&lt;Slide style={{ width:'1280px', height:'720px', position:'relative', background:'#FFFFFF', fontFamily:'微软雅黑' }}&gt;&#10;  &lt;Box style={{ position:'absolute', left:56, top:36, flexDirection:'row', alignItems:'center', gap:12 }}&gt;&#10;    &lt;Box style={{ width:8, height:34, background:'#4472C4' }} /&gt;&#10;    &lt;Text style={{ fontSize:30, fontWeight:'bold', color:'#052B7C' }}&gt;船务 T/T 协议自动化（shipping-helper）&lt;/Text&gt;&#10;  &lt;/Box&gt;&#10;&#10;  &lt;Box style={{ position:'absolute', left:56, top:140, right:56, flexDirection:'row', gap:36 }}&gt;&#10;    &lt;Box style={{ width:400, flexDirection:'column', gap:14 }}&gt;&#10;      {[['26 天','首版交付周期（05-28 → 06-22）'],['4 类','支持单证：Booking / LOI / MSDS / 报关'],['389','HS 编码基础数据'],['13+2+3','桶型 / 托盘 / 运输模式'],['95%+','当前进度（07-24 完成培训）']].map((c, i) =&gt; (&#10;        &lt;Box key={i} style={{ flexDirection:'row', alignItems:'center', gap:14, background:'#F4F7FC', borderRadius:10, padding:'12px 18px' }}&gt;&#10;          &lt;Text style={{ fontSize:30, fontWeight:'bold', color:'#4472C4', minWidth:90 }}&gt;{c[0]}&lt;/Text&gt;&#10;          &lt;Text style={{ fontSize:15, color:'#1A1A1A' }}&gt;{c[1]}&lt;/Text&gt;&#10;        &lt;/Box&gt;&#10;      ))}&#10;    &lt;/Box&gt;&#10;&#10;    &lt;Box style={{ flex:1, flexDirection:'column', gap:14, justifyContent:'center' }}&gt;&#10;      &lt;Text style={{ fontSize:18, fontWeight:'bold', color:'#052B7C' }}&gt;痛点&lt;/Text&gt;&#10;      &lt;Text style={{ fontSize:17, color:'#1A1A1A', lineHeight:1.6 }}&gt;船务 TT 协议涉及订舱单、保函、MSDS、报关资料多类单证，原靠人工逐项填写，易错、耗时长；HS 编码归类、包装计算尤其易算错，错了即退单 / 延误。&lt;/Text&gt;&#10;      &lt;Text style={{ fontSize:18, fontWeight:'bold', color:'#052B7C', marginTop:6 }}&gt;价值&lt;/Text&gt;&#10;      &lt;Text style={{ fontSize:17, color:'#1A1A1A', lineHeight:1.6 }}&gt;把 14 份梳理文档沉淀的流程变成自动化工具——录入基础数据即生成 4 类单证、自动算包装与 HS 编码；7 月深化后 PI 解析接入 DeepSeek、报关资料自动化，把「人填」变「系统出」。MSDS 双语生成内嵌，免翻译免乱码。&lt;/Text&gt;&#10;      &lt;Text style={{ fontSize:17, color:'#1A1A1A', marginTop:4 }}&gt;主要对象：&lt;span style={{ fontWeight:'bold' }}&gt;船务部&lt;/span&gt;（万凤、潘慧兰）&lt;/Text&gt;&#10;    &lt;/Box&gt;&#10;  &lt;/Box&gt;&#10;&#10;  &lt;Box style={{ position:'absolute', left:56, top:668, right:56, flexDirection:'row', justifyContent:'space-between' }}&gt;&#10;    &lt;Text style={{ fontSize:14, color:'#888' }}&gt;入职以来 AI 工作复盘&lt;/Text&gt;&#10;    &lt;Text style={{ fontSize:14, color:'#888' }}&gt;06 / 13&lt;/Text&gt;&#10;  &lt;/Box&gt;&#10;&lt;/Slide&gt;"/>
+        <p:cNvPr id="145" name="" descr="&lt;Slide style={{ width:'1280px', height:'720px', position:'relative', background:'#FFFFFF', fontFamily:'微软雅黑' }}&gt;&#10;  &lt;Box style={{ position:'absolute', left:56, top:36, flexDirection:'row', alignItems:'center', gap:12 }}&gt;&#10;    &lt;Box style={{ width:8, height:34, background:'#4472C4' }} /&gt;&#10;    &lt;Text style={{ fontSize:30, fontWeight:'bold', color:'#052B7C' }}&gt;船务 T/T 协议自动化（shipping-helper）&lt;/Text&gt;&#10;  &lt;/Box&gt;&#10;&#10;  &lt;Box style={{ position:'absolute', left:56, top:140, right:56, flexDirection:'row', gap:36 }}&gt;&#10;    &lt;Box style={{ width:400, flexDirection:'column', gap:14 }}&gt;&#10;      {[['26 天','首版交付周期（05-28 → 06-22）'],['4 类','支持单证：Booking / LOI / MSDS / 报关'],['389','HS 编码基础数据'],['13+2+3','桶型 / 托盘 / 运输模式'],['95%+','当前进度（07-24 完成培训）']].map((c, i) =&gt; (&#10;        &lt;Box key={i} style={{ flexDirection:'row', alignItems:'center', gap:14, background:'#F4F7FC', borderRadius:10, padding:'12px 18px' }}&gt;&#10;          &lt;Text style={{ fontSize:30, fontWeight:'bold', color:'#4472C4', minWidth:90 }}&gt;{c[0]}&lt;/Text&gt;&#10;          &lt;Text style={{ fontSize:15, color:'#1A1A1A' }}&gt;{c[1]}&lt;/Text&gt;&#10;        &lt;/Box&gt;&#10;      ))}&#10;    &lt;/Box&gt;&#10;&#10;    &lt;Box style={{ flex:1, flexDirection:'column', gap:14, justifyContent:'center' }}&gt;&#10;      &lt;Text style={{ fontSize:18, fontWeight:'bold', color:'#052B7C' }}&gt;痛点&lt;/Text&gt;&#10;      &lt;Text style={{ fontSize:17, color:'#1A1A1A', lineHeight:1.6 }}&gt;船务 TT 协议涉及订舱单、保函、MSDS、报关资料多类单证，原靠人工逐项填写，易错、耗时长；HS 编码归类、包装计算尤其易算错，错了即退单 / 延误。&lt;/Text&gt;&#10;      &lt;Text style={{ fontSize:18, fontWeight:'bold', color:'#052B7C', marginTop:6 }}&gt;价值&lt;/Text&gt;&#10;      &lt;Text style={{ fontSize:17, color:'#1A1A1A', lineHeight:1.6 }}&gt;把 14 份梳理文档沉淀的流程变成自动化工具——录入基础数据即生成 4 类单证、自动算包装与 HS 编码；7 月深化后 PI 解析接入 DeepSeek、报关资料自动化，把「人填」变「系统出」。MSDS 双语生成内嵌，免翻译免乱码。&lt;/Text&gt;&#10;      &lt;Text style={{ fontSize:17, color:'#1A1A1A', marginTop:4 }}&gt;主要对象：&lt;span style={{ fontWeight:'bold' }}&gt;船务部&lt;/span&gt;（万凤、潘慧兰）&lt;/Text&gt;&#10;    &lt;/Box&gt;&#10;  &lt;/Box&gt;&#10;&#10;  &lt;Box style={{ position:'absolute', left:56, top:668, right:56, flexDirection:'row', justifyContent:'space-between' }}&gt;&#10;    &lt;Text style={{ fontSize:14, color:'#888' }}&gt;入职以来 AI 工作复盘&lt;/Text&gt;&#10;    &lt;Text style={{ fontSize:14, color:'#888' }}&gt;06 / 13&lt;/Text&gt;&#10;  &lt;/Box&gt;&#10;&lt;/Slide&gt;"/>
         <p:cNvGrpSpPr/>
         <p:nvPr/>
       </p:nvGrpSpPr>
@@ -5268,7 +9881,7 @@
       </p:grpSpPr>
       <p:sp>
         <p:nvSpPr>
-          <p:cNvPr id="81" name=""/>
+          <p:cNvPr id="146" name=""/>
           <p:cNvSpPr/>
           <p:nvPr/>
         </p:nvSpPr>
@@ -5292,7 +9905,7 @@
       </p:sp>
       <p:sp>
         <p:nvSpPr>
-          <p:cNvPr id="82" name=""/>
+          <p:cNvPr id="147" name=""/>
           <p:cNvSpPr/>
           <p:nvPr/>
         </p:nvSpPr>
@@ -5316,7 +9929,7 @@
       </p:sp>
       <p:sp>
         <p:nvSpPr>
-          <p:cNvPr id="83" name="" descr="{&quot;isTemplate&quot;:true,&quot;type&quot;:&quot;text&quot;}"/>
+          <p:cNvPr id="148" name="" descr="{&quot;isTemplate&quot;:true,&quot;type&quot;:&quot;text&quot;}"/>
           <p:cNvSpPr txBox="1"/>
           <p:nvPr/>
         </p:nvSpPr>
@@ -5391,7 +10004,7 @@
       </p:sp>
       <p:sp>
         <p:nvSpPr>
-          <p:cNvPr id="84" name=""/>
+          <p:cNvPr id="149" name=""/>
           <p:cNvSpPr/>
           <p:nvPr/>
         </p:nvSpPr>
@@ -5417,7 +10030,7 @@
       </p:sp>
       <p:sp>
         <p:nvSpPr>
-          <p:cNvPr id="85" name="" descr="{&quot;isTemplate&quot;:true,&quot;type&quot;:&quot;text&quot;}"/>
+          <p:cNvPr id="150" name="" descr="{&quot;isTemplate&quot;:true,&quot;type&quot;:&quot;text&quot;}"/>
           <p:cNvSpPr txBox="1"/>
           <p:nvPr/>
         </p:nvSpPr>
@@ -5462,7 +10075,7 @@
       </p:sp>
       <p:sp>
         <p:nvSpPr>
-          <p:cNvPr id="86" name="" descr="{&quot;isTemplate&quot;:true,&quot;type&quot;:&quot;text&quot;}"/>
+          <p:cNvPr id="151" name="" descr="{&quot;isTemplate&quot;:true,&quot;type&quot;:&quot;text&quot;}"/>
           <p:cNvSpPr txBox="1"/>
           <p:nvPr/>
         </p:nvSpPr>
@@ -5517,7 +10130,7 @@
       </p:sp>
       <p:sp>
         <p:nvSpPr>
-          <p:cNvPr id="87" name=""/>
+          <p:cNvPr id="152" name=""/>
           <p:cNvSpPr/>
           <p:nvPr/>
         </p:nvSpPr>
@@ -5543,7 +10156,7 @@
       </p:sp>
       <p:sp>
         <p:nvSpPr>
-          <p:cNvPr id="88" name="" descr="{&quot;isTemplate&quot;:true,&quot;type&quot;:&quot;text&quot;}"/>
+          <p:cNvPr id="153" name="" descr="{&quot;isTemplate&quot;:true,&quot;type&quot;:&quot;text&quot;}"/>
           <p:cNvSpPr txBox="1"/>
           <p:nvPr/>
         </p:nvSpPr>
@@ -5588,7 +10201,7 @@
       </p:sp>
       <p:sp>
         <p:nvSpPr>
-          <p:cNvPr id="89" name="" descr="{&quot;isTemplate&quot;:true,&quot;type&quot;:&quot;text&quot;}"/>
+          <p:cNvPr id="154" name="" descr="{&quot;isTemplate&quot;:true,&quot;type&quot;:&quot;text&quot;}"/>
           <p:cNvSpPr txBox="1"/>
           <p:nvPr/>
         </p:nvSpPr>
@@ -5643,7 +10256,7 @@
       </p:sp>
       <p:sp>
         <p:nvSpPr>
-          <p:cNvPr id="90" name=""/>
+          <p:cNvPr id="155" name=""/>
           <p:cNvSpPr/>
           <p:nvPr/>
         </p:nvSpPr>
@@ -5669,7 +10282,7 @@
       </p:sp>
       <p:sp>
         <p:nvSpPr>
-          <p:cNvPr id="91" name="" descr="{&quot;isTemplate&quot;:true,&quot;type&quot;:&quot;text&quot;}"/>
+          <p:cNvPr id="156" name="" descr="{&quot;isTemplate&quot;:true,&quot;type&quot;:&quot;text&quot;}"/>
           <p:cNvSpPr txBox="1"/>
           <p:nvPr/>
         </p:nvSpPr>
@@ -5704,7 +10317,7 @@
       </p:sp>
       <p:sp>
         <p:nvSpPr>
-          <p:cNvPr id="92" name="" descr="{&quot;isTemplate&quot;:true,&quot;type&quot;:&quot;text&quot;}"/>
+          <p:cNvPr id="157" name="" descr="{&quot;isTemplate&quot;:true,&quot;type&quot;:&quot;text&quot;}"/>
           <p:cNvSpPr txBox="1"/>
           <p:nvPr/>
         </p:nvSpPr>
@@ -5749,7 +10362,7 @@
       </p:sp>
       <p:sp>
         <p:nvSpPr>
-          <p:cNvPr id="93" name=""/>
+          <p:cNvPr id="158" name=""/>
           <p:cNvSpPr/>
           <p:nvPr/>
         </p:nvSpPr>
@@ -5775,7 +10388,7 @@
       </p:sp>
       <p:sp>
         <p:nvSpPr>
-          <p:cNvPr id="94" name="" descr="{&quot;isTemplate&quot;:true,&quot;type&quot;:&quot;text&quot;}"/>
+          <p:cNvPr id="159" name="" descr="{&quot;isTemplate&quot;:true,&quot;type&quot;:&quot;text&quot;}"/>
           <p:cNvSpPr txBox="1"/>
           <p:nvPr/>
         </p:nvSpPr>
@@ -5810,7 +10423,7 @@
       </p:sp>
       <p:sp>
         <p:nvSpPr>
-          <p:cNvPr id="95" name="" descr="{&quot;isTemplate&quot;:true,&quot;type&quot;:&quot;text&quot;}"/>
+          <p:cNvPr id="160" name="" descr="{&quot;isTemplate&quot;:true,&quot;type&quot;:&quot;text&quot;}"/>
           <p:cNvSpPr txBox="1"/>
           <p:nvPr/>
         </p:nvSpPr>
@@ -5885,7 +10498,7 @@
       </p:sp>
       <p:sp>
         <p:nvSpPr>
-          <p:cNvPr id="96" name=""/>
+          <p:cNvPr id="161" name=""/>
           <p:cNvSpPr/>
           <p:nvPr/>
         </p:nvSpPr>
@@ -5911,7 +10524,7 @@
       </p:sp>
       <p:sp>
         <p:nvSpPr>
-          <p:cNvPr id="97" name="" descr="{&quot;isTemplate&quot;:true,&quot;type&quot;:&quot;text&quot;}"/>
+          <p:cNvPr id="162" name="" descr="{&quot;isTemplate&quot;:true,&quot;type&quot;:&quot;text&quot;}"/>
           <p:cNvSpPr txBox="1"/>
           <p:nvPr/>
         </p:nvSpPr>
@@ -5946,7 +10559,7 @@
       </p:sp>
       <p:sp>
         <p:nvSpPr>
-          <p:cNvPr id="98" name="" descr="{&quot;isTemplate&quot;:true,&quot;type&quot;:&quot;text&quot;}"/>
+          <p:cNvPr id="163" name="" descr="{&quot;isTemplate&quot;:true,&quot;type&quot;:&quot;text&quot;}"/>
           <p:cNvSpPr txBox="1"/>
           <p:nvPr/>
         </p:nvSpPr>
@@ -6001,7 +10614,7 @@
       </p:sp>
       <p:sp>
         <p:nvSpPr>
-          <p:cNvPr id="99" name="" descr="{&quot;isTemplate&quot;:true,&quot;type&quot;:&quot;text&quot;}"/>
+          <p:cNvPr id="164" name="" descr="{&quot;isTemplate&quot;:true,&quot;type&quot;:&quot;text&quot;}"/>
           <p:cNvSpPr txBox="1"/>
           <p:nvPr/>
         </p:nvSpPr>
@@ -6036,7 +10649,7 @@
       </p:sp>
       <p:sp>
         <p:nvSpPr>
-          <p:cNvPr id="100" name="" descr="{&quot;isTemplate&quot;:true,&quot;type&quot;:&quot;text&quot;}"/>
+          <p:cNvPr id="165" name="" descr="{&quot;isTemplate&quot;:true,&quot;type&quot;:&quot;text&quot;}"/>
           <p:cNvSpPr txBox="1"/>
           <p:nvPr/>
         </p:nvSpPr>
@@ -6153,7 +10766,7 @@
       </p:sp>
       <p:sp>
         <p:nvSpPr>
-          <p:cNvPr id="101" name="" descr="{&quot;isTemplate&quot;:true,&quot;type&quot;:&quot;text&quot;}"/>
+          <p:cNvPr id="166" name="" descr="{&quot;isTemplate&quot;:true,&quot;type&quot;:&quot;text&quot;}"/>
           <p:cNvSpPr txBox="1"/>
           <p:nvPr/>
         </p:nvSpPr>
@@ -6188,7 +10801,7 @@
       </p:sp>
       <p:sp>
         <p:nvSpPr>
-          <p:cNvPr id="102" name="" descr="{&quot;isTemplate&quot;:true,&quot;type&quot;:&quot;text&quot;}"/>
+          <p:cNvPr id="167" name="" descr="{&quot;isTemplate&quot;:true,&quot;type&quot;:&quot;text&quot;}"/>
           <p:cNvSpPr txBox="1"/>
           <p:nvPr/>
         </p:nvSpPr>
@@ -6365,7 +10978,7 @@
       </p:sp>
       <p:sp>
         <p:nvSpPr>
-          <p:cNvPr id="103" name="" descr="{&quot;isTemplate&quot;:true,&quot;type&quot;:&quot;text&quot;}"/>
+          <p:cNvPr id="168" name="" descr="{&quot;isTemplate&quot;:true,&quot;type&quot;:&quot;text&quot;}"/>
           <p:cNvSpPr txBox="1"/>
           <p:nvPr/>
         </p:nvSpPr>
@@ -6420,7 +11033,7 @@
       </p:sp>
       <p:sp>
         <p:nvSpPr>
-          <p:cNvPr id="104" name="" descr="{&quot;isTemplate&quot;:true,&quot;type&quot;:&quot;text&quot;}"/>
+          <p:cNvPr id="169" name="" descr="{&quot;isTemplate&quot;:true,&quot;type&quot;:&quot;text&quot;}"/>
           <p:cNvSpPr txBox="1"/>
           <p:nvPr/>
         </p:nvSpPr>
@@ -6475,7 +11088,7 @@
       </p:sp>
       <p:sp>
         <p:nvSpPr>
-          <p:cNvPr id="105" name="" descr="{&quot;isTemplate&quot;:true,&quot;type&quot;:&quot;text&quot;}"/>
+          <p:cNvPr id="170" name="" descr="{&quot;isTemplate&quot;:true,&quot;type&quot;:&quot;text&quot;}"/>
           <p:cNvSpPr txBox="1"/>
           <p:nvPr/>
         </p:nvSpPr>
@@ -6518,7 +11131,7 @@
   <p:cSld>
     <p:spTree>
       <p:nvGrpSpPr>
-        <p:cNvPr id="106" name="" descr="&lt;Slide style={{ width:'1280px', height:'720px', position:'relative', background:'#FFFFFF', fontFamily:'微软雅黑' }}&gt;&#10;  &lt;Box style={{ position:'absolute', left:56, top:36, flexDirection:'row', alignItems:'center', gap:12 }}&gt;&#10;    &lt;Box style={{ width:8, height:34, background:'#4472C4' }} /&gt;&#10;    &lt;Text style={{ fontSize:30, fontWeight:'bold', color:'#052B7C' }}&gt;数据脱敏 / 对账单 / Tax_check&lt;/Text&gt;&#10;  &lt;/Box&gt;&#10;&#10;  &lt;Box style={{ position:'absolute', left:56, top:130, right:56, flexDirection:'row', gap:22 }}&gt;&#10;    &lt;Box style={{ flex:1, background:'#F4F7FC', borderRadius:12, padding:22, flexDirection:'column', gap:10 }}&gt;&#10;      &lt;Text style={{ fontSize:22, fontWeight:'bold', color:'#052B7C' }}&gt;数据脱敏 Data_masking&lt;/Text&gt;&#10;      &lt;Text style={{ fontSize:16, color:'#1A1A1A', lineHeight:1.6 }}&gt;· 12 种脱敏方法（姓名/身份证/手机/银行卡…）&lt;/Text&gt;&#10;      &lt;Text style={{ fontSize:16, color:'#1A1A1A', lineHeight:1.6 }}&gt;· .exe 一键打包，支持 4 种编码&lt;/Text&gt;&#10;      &lt;Text style={{ fontSize:16, color:'#1A1A1A', lineHeight:1.6 }}&gt;· 交付 07-28 财务部&lt;/Text&gt;&#10;      &lt;Box style={{ marginTop:6, background:'#FCE4D6', borderRadius:6, padding:'6px 12px', alignSelf:'flex-start' }}&gt;&lt;Text style={{ fontSize:15, fontWeight:'bold', color:'#C0504D' }}&gt;状态：长期优化（小需求大场景）&lt;/Text&gt;&lt;/Box&gt;&#10;    &lt;/Box&gt;&#10;    &lt;Box style={{ flex:1, background:'#F4F7FC', borderRadius:12, padding:22, flexDirection:'column', gap:10 }}&gt;&#10;      &lt;Text style={{ fontSize:22, fontWeight:'bold', color:'#052B7C' }}&gt;对账单&lt;/Text&gt;&#10;      &lt;Text style={{ fontSize:16, color:'#1A1A1A', lineHeight:1.6 }}&gt;· 纯前端 HTML 单页，零部署即开即用&lt;/Text&gt;&#10;      &lt;Text style={{ fontSize:16, color:'#1A1A1A', lineHeight:1.6 }}&gt;· 财务对账从 Excel 手工 → 网页自助生成&lt;/Text&gt;&#10;      &lt;Text style={{ fontSize:16, color:'#1A1A1A', lineHeight:1.6 }}&gt;· 交付：财务部&lt;/Text&gt;&#10;      &lt;Box style={{ marginTop:6, background:'#DAE3F3', borderRadius:6, padding:'6px 12px', alignSelf:'flex-start' }}&gt;&lt;Text style={{ fontSize:15, fontWeight:'bold', color:'#052B7C' }}&gt;状态：已交付&lt;/Text&gt;&lt;/Box&gt;&#10;    &lt;/Box&gt;&#10;    &lt;Box style={{ flex:1, background:'#F4F7FC', borderRadius:12, padding:22, flexDirection:'column', gap:10 }}&gt;&#10;      &lt;Text style={{ fontSize:22, fontWeight:'bold', color:'#052B7C' }}&gt;Tax_check 退税审单&lt;/Text&gt;&#10;      &lt;Text style={{ fontSize:16, color:'#1A1A1A', lineHeight:1.6 }}&gt;· 16+ 单据 OCR + 价格条款矩阵体检&lt;/Text&gt;&#10;      &lt;Text style={{ fontSize:16, color:'#1A1A1A', lineHeight:1.6 }}&gt;· 本地 .exe 运行，数据不出境&lt;/Text&gt;&#10;      &lt;Text style={{ fontSize:16, color:'#1A1A1A', lineHeight:1.6 }}&gt;· 交付 08-01 财务部&lt;/Text&gt;&#10;      &lt;Box style={{ marginTop:6, background:'#DAE3F3', borderRadius:6, padding:'6px 12px', alignSelf:'flex-start' }}&gt;&lt;Text style={{ fontSize:15, fontWeight:'bold', color:'#052B7C' }}&gt;状态：已交付运营（收尾）&lt;/Text&gt;&lt;/Box&gt;&#10;    &lt;/Box&gt;&#10;  &lt;/Box&gt;&#10;&#10;  &lt;Box style={{ position:'absolute', left:56, top:560, right:56 }}&gt;&#10;    &lt;Text style={{ fontSize:16, color:'#1A1A1A', lineHeight:1.5 }}&gt;三项均为财务侧合规 / 效率工具：数据脱敏与 Tax_check 为桌面 .exe（满足敏感数据不出境），对账单为轻量纯前端——体现「小需求、快交付、大场景」。&lt;/Text&gt;&#10;  &lt;/Box&gt;&#10;&#10;  &lt;Box style={{ position:'absolute', left:56, top:668, right:56, flexDirection:'row', justifyContent:'space-between' }}&gt;&#10;    &lt;Text style={{ fontSize:14, color:'#888' }}&gt;入职以来 AI 工作复盘&lt;/Text&gt;&#10;    &lt;Text style={{ fontSize:14, color:'#888' }}&gt;07 / 13&lt;/Text&gt;&#10;  &lt;/Box&gt;&#10;&lt;/Slide&gt;"/>
+        <p:cNvPr id="171" name="" descr="&lt;Slide style={{ width:'1280px', height:'720px', position:'relative', background:'#FFFFFF', fontFamily:'微软雅黑' }}&gt;&#10;  &lt;Box style={{ position:'absolute', left:56, top:36, flexDirection:'row', alignItems:'center', gap:12 }}&gt;&#10;    &lt;Box style={{ width:8, height:34, background:'#4472C4' }} /&gt;&#10;    &lt;Text style={{ fontSize:30, fontWeight:'bold', color:'#052B7C' }}&gt;数据脱敏 / 对账单 / Tax_check&lt;/Text&gt;&#10;  &lt;/Box&gt;&#10;&#10;  &lt;Box style={{ position:'absolute', left:56, top:130, right:56, flexDirection:'row', gap:22 }}&gt;&#10;    &lt;Box style={{ flex:1, background:'#F4F7FC', borderRadius:12, padding:22, flexDirection:'column', gap:10 }}&gt;&#10;      &lt;Text style={{ fontSize:22, fontWeight:'bold', color:'#052B7C' }}&gt;数据脱敏 Data_masking&lt;/Text&gt;&#10;      &lt;Text style={{ fontSize:16, color:'#1A1A1A', lineHeight:1.6 }}&gt;· 12 种脱敏方法（姓名/身份证/手机/银行卡…）&lt;/Text&gt;&#10;      &lt;Text style={{ fontSize:16, color:'#1A1A1A', lineHeight:1.6 }}&gt;· .exe 一键打包，支持 4 种编码&lt;/Text&gt;&#10;      &lt;Text style={{ fontSize:16, color:'#1A1A1A', lineHeight:1.6 }}&gt;· 交付 07-28 财务部&lt;/Text&gt;&#10;      &lt;Box style={{ marginTop:6, background:'#FCE4D6', borderRadius:6, padding:'6px 12px', alignSelf:'flex-start' }}&gt;&lt;Text style={{ fontSize:15, fontWeight:'bold', color:'#C0504D' }}&gt;状态：长期优化（小需求大场景）&lt;/Text&gt;&lt;/Box&gt;&#10;    &lt;/Box&gt;&#10;    &lt;Box style={{ flex:1, background:'#F4F7FC', borderRadius:12, padding:22, flexDirection:'column', gap:10 }}&gt;&#10;      &lt;Text style={{ fontSize:22, fontWeight:'bold', color:'#052B7C' }}&gt;对账单&lt;/Text&gt;&#10;      &lt;Text style={{ fontSize:16, color:'#1A1A1A', lineHeight:1.6 }}&gt;· 纯前端 HTML 单页，零部署即开即用&lt;/Text&gt;&#10;      &lt;Text style={{ fontSize:16, color:'#1A1A1A', lineHeight:1.6 }}&gt;· 财务对账从 Excel 手工 → 网页自助生成&lt;/Text&gt;&#10;      &lt;Text style={{ fontSize:16, color:'#1A1A1A', lineHeight:1.6 }}&gt;· 交付：财务部&lt;/Text&gt;&#10;      &lt;Box style={{ marginTop:6, background:'#DAE3F3', borderRadius:6, padding:'6px 12px', alignSelf:'flex-start' }}&gt;&lt;Text style={{ fontSize:15, fontWeight:'bold', color:'#052B7C' }}&gt;状态：已交付&lt;/Text&gt;&lt;/Box&gt;&#10;    &lt;/Box&gt;&#10;    &lt;Box style={{ flex:1, background:'#F4F7FC', borderRadius:12, padding:22, flexDirection:'column', gap:10 }}&gt;&#10;      &lt;Text style={{ fontSize:22, fontWeight:'bold', color:'#052B7C' }}&gt;Tax_check 退税审单&lt;/Text&gt;&#10;      &lt;Text style={{ fontSize:16, color:'#1A1A1A', lineHeight:1.6 }}&gt;· 16+ 单据 OCR + 价格条款矩阵体检&lt;/Text&gt;&#10;      &lt;Text style={{ fontSize:16, color:'#1A1A1A', lineHeight:1.6 }}&gt;· 本地 .exe 运行，数据不出境&lt;/Text&gt;&#10;      &lt;Text style={{ fontSize:16, color:'#1A1A1A', lineHeight:1.6 }}&gt;· 交付 08-01 财务部&lt;/Text&gt;&#10;      &lt;Box style={{ marginTop:6, background:'#DAE3F3', borderRadius:6, padding:'6px 12px', alignSelf:'flex-start' }}&gt;&lt;Text style={{ fontSize:15, fontWeight:'bold', color:'#052B7C' }}&gt;状态：已交付运营（收尾）&lt;/Text&gt;&lt;/Box&gt;&#10;    &lt;/Box&gt;&#10;  &lt;/Box&gt;&#10;&#10;  &lt;Box style={{ position:'absolute', left:56, top:560, right:56 }}&gt;&#10;    &lt;Text style={{ fontSize:16, color:'#1A1A1A', lineHeight:1.5 }}&gt;三项均为财务侧合规 / 效率工具：数据脱敏与 Tax_check 为桌面 .exe（满足敏感数据不出境），对账单为轻量纯前端——体现「小需求、快交付、大场景」。&lt;/Text&gt;&#10;  &lt;/Box&gt;&#10;&#10;  &lt;Box style={{ position:'absolute', left:56, top:668, right:56, flexDirection:'row', justifyContent:'space-between' }}&gt;&#10;    &lt;Text style={{ fontSize:14, color:'#888' }}&gt;入职以来 AI 工作复盘&lt;/Text&gt;&#10;    &lt;Text style={{ fontSize:14, color:'#888' }}&gt;07 / 13&lt;/Text&gt;&#10;  &lt;/Box&gt;&#10;&lt;/Slide&gt;"/>
         <p:cNvGrpSpPr/>
         <p:nvPr/>
       </p:nvGrpSpPr>
@@ -6532,7 +11145,7 @@
       </p:grpSpPr>
       <p:sp>
         <p:nvSpPr>
-          <p:cNvPr id="107" name=""/>
+          <p:cNvPr id="172" name=""/>
           <p:cNvSpPr/>
           <p:nvPr/>
         </p:nvSpPr>
@@ -6556,7 +11169,7 @@
       </p:sp>
       <p:sp>
         <p:nvSpPr>
-          <p:cNvPr id="108" name=""/>
+          <p:cNvPr id="173" name=""/>
           <p:cNvSpPr/>
           <p:nvPr/>
         </p:nvSpPr>
@@ -6580,7 +11193,7 @@
       </p:sp>
       <p:sp>
         <p:nvSpPr>
-          <p:cNvPr id="109" name="" descr="{&quot;isTemplate&quot;:true,&quot;type&quot;:&quot;text&quot;}"/>
+          <p:cNvPr id="174" name="" descr="{&quot;isTemplate&quot;:true,&quot;type&quot;:&quot;text&quot;}"/>
           <p:cNvSpPr txBox="1"/>
           <p:nvPr/>
         </p:nvSpPr>
@@ -6645,7 +11258,7 @@
       </p:sp>
       <p:sp>
         <p:nvSpPr>
-          <p:cNvPr id="110" name=""/>
+          <p:cNvPr id="175" name=""/>
           <p:cNvSpPr/>
           <p:nvPr/>
         </p:nvSpPr>
@@ -6671,7 +11284,7 @@
       </p:sp>
       <p:sp>
         <p:nvSpPr>
-          <p:cNvPr id="111" name="" descr="{&quot;isTemplate&quot;:true,&quot;type&quot;:&quot;text&quot;}"/>
+          <p:cNvPr id="176" name="" descr="{&quot;isTemplate&quot;:true,&quot;type&quot;:&quot;text&quot;}"/>
           <p:cNvSpPr txBox="1"/>
           <p:nvPr/>
         </p:nvSpPr>
@@ -6716,7 +11329,7 @@
       </p:sp>
       <p:sp>
         <p:nvSpPr>
-          <p:cNvPr id="112" name="" descr="{&quot;isTemplate&quot;:true,&quot;type&quot;:&quot;text&quot;}"/>
+          <p:cNvPr id="177" name="" descr="{&quot;isTemplate&quot;:true,&quot;type&quot;:&quot;text&quot;}"/>
           <p:cNvSpPr txBox="1"/>
           <p:nvPr/>
         </p:nvSpPr>
@@ -6823,7 +11436,7 @@
       </p:sp>
       <p:sp>
         <p:nvSpPr>
-          <p:cNvPr id="113" name="" descr="{&quot;isTemplate&quot;:true,&quot;type&quot;:&quot;text&quot;}"/>
+          <p:cNvPr id="178" name="" descr="{&quot;isTemplate&quot;:true,&quot;type&quot;:&quot;text&quot;}"/>
           <p:cNvSpPr txBox="1"/>
           <p:nvPr/>
         </p:nvSpPr>
@@ -6888,7 +11501,7 @@
       </p:sp>
       <p:sp>
         <p:nvSpPr>
-          <p:cNvPr id="114" name="" descr="{&quot;isTemplate&quot;:true,&quot;type&quot;:&quot;text&quot;}"/>
+          <p:cNvPr id="179" name="" descr="{&quot;isTemplate&quot;:true,&quot;type&quot;:&quot;text&quot;}"/>
           <p:cNvSpPr txBox="1"/>
           <p:nvPr/>
         </p:nvSpPr>
@@ -6953,7 +11566,7 @@
       </p:sp>
       <p:sp>
         <p:nvSpPr>
-          <p:cNvPr id="115" name=""/>
+          <p:cNvPr id="180" name=""/>
           <p:cNvSpPr/>
           <p:nvPr/>
         </p:nvSpPr>
@@ -6979,7 +11592,7 @@
       </p:sp>
       <p:sp>
         <p:nvSpPr>
-          <p:cNvPr id="116" name="" descr="{&quot;isTemplate&quot;:true,&quot;type&quot;:&quot;text&quot;}"/>
+          <p:cNvPr id="181" name="" descr="{&quot;isTemplate&quot;:true,&quot;type&quot;:&quot;text&quot;}"/>
           <p:cNvSpPr txBox="1"/>
           <p:nvPr/>
         </p:nvSpPr>
@@ -7014,7 +11627,7 @@
       </p:sp>
       <p:sp>
         <p:nvSpPr>
-          <p:cNvPr id="117" name=""/>
+          <p:cNvPr id="182" name=""/>
           <p:cNvSpPr/>
           <p:nvPr/>
         </p:nvSpPr>
@@ -7040,7 +11653,7 @@
       </p:sp>
       <p:sp>
         <p:nvSpPr>
-          <p:cNvPr id="118" name="" descr="{&quot;isTemplate&quot;:true,&quot;type&quot;:&quot;text&quot;}"/>
+          <p:cNvPr id="183" name="" descr="{&quot;isTemplate&quot;:true,&quot;type&quot;:&quot;text&quot;}"/>
           <p:cNvSpPr txBox="1"/>
           <p:nvPr/>
         </p:nvSpPr>
@@ -7075,7 +11688,7 @@
       </p:sp>
       <p:sp>
         <p:nvSpPr>
-          <p:cNvPr id="119" name="" descr="{&quot;isTemplate&quot;:true,&quot;type&quot;:&quot;text&quot;}"/>
+          <p:cNvPr id="184" name="" descr="{&quot;isTemplate&quot;:true,&quot;type&quot;:&quot;text&quot;}"/>
           <p:cNvSpPr txBox="1"/>
           <p:nvPr/>
         </p:nvSpPr>
@@ -7140,7 +11753,7 @@
       </p:sp>
       <p:sp>
         <p:nvSpPr>
-          <p:cNvPr id="120" name="" descr="{&quot;isTemplate&quot;:true,&quot;type&quot;:&quot;text&quot;}"/>
+          <p:cNvPr id="185" name="" descr="{&quot;isTemplate&quot;:true,&quot;type&quot;:&quot;text&quot;}"/>
           <p:cNvSpPr txBox="1"/>
           <p:nvPr/>
         </p:nvSpPr>
@@ -7225,7 +11838,7 @@
       </p:sp>
       <p:sp>
         <p:nvSpPr>
-          <p:cNvPr id="121" name="" descr="{&quot;isTemplate&quot;:true,&quot;type&quot;:&quot;text&quot;}"/>
+          <p:cNvPr id="186" name="" descr="{&quot;isTemplate&quot;:true,&quot;type&quot;:&quot;text&quot;}"/>
           <p:cNvSpPr txBox="1"/>
           <p:nvPr/>
         </p:nvSpPr>
@@ -7270,7 +11883,7 @@
       </p:sp>
       <p:sp>
         <p:nvSpPr>
-          <p:cNvPr id="122" name=""/>
+          <p:cNvPr id="187" name=""/>
           <p:cNvSpPr/>
           <p:nvPr/>
         </p:nvSpPr>
@@ -7296,7 +11909,7 @@
       </p:sp>
       <p:sp>
         <p:nvSpPr>
-          <p:cNvPr id="123" name="" descr="{&quot;isTemplate&quot;:true,&quot;type&quot;:&quot;text&quot;}"/>
+          <p:cNvPr id="188" name="" descr="{&quot;isTemplate&quot;:true,&quot;type&quot;:&quot;text&quot;}"/>
           <p:cNvSpPr txBox="1"/>
           <p:nvPr/>
         </p:nvSpPr>
@@ -7331,7 +11944,7 @@
       </p:sp>
       <p:sp>
         <p:nvSpPr>
-          <p:cNvPr id="124" name=""/>
+          <p:cNvPr id="189" name=""/>
           <p:cNvSpPr/>
           <p:nvPr/>
         </p:nvSpPr>
@@ -7357,7 +11970,7 @@
       </p:sp>
       <p:sp>
         <p:nvSpPr>
-          <p:cNvPr id="125" name="" descr="{&quot;isTemplate&quot;:true,&quot;type&quot;:&quot;text&quot;}"/>
+          <p:cNvPr id="190" name="" descr="{&quot;isTemplate&quot;:true,&quot;type&quot;:&quot;text&quot;}"/>
           <p:cNvSpPr txBox="1"/>
           <p:nvPr/>
         </p:nvSpPr>
@@ -7402,7 +12015,7 @@
       </p:sp>
       <p:sp>
         <p:nvSpPr>
-          <p:cNvPr id="126" name="" descr="{&quot;isTemplate&quot;:true,&quot;type&quot;:&quot;text&quot;}"/>
+          <p:cNvPr id="191" name="" descr="{&quot;isTemplate&quot;:true,&quot;type&quot;:&quot;text&quot;}"/>
           <p:cNvSpPr txBox="1"/>
           <p:nvPr/>
         </p:nvSpPr>
@@ -7467,7 +12080,7 @@
       </p:sp>
       <p:sp>
         <p:nvSpPr>
-          <p:cNvPr id="127" name="" descr="{&quot;isTemplate&quot;:true,&quot;type&quot;:&quot;text&quot;}"/>
+          <p:cNvPr id="192" name="" descr="{&quot;isTemplate&quot;:true,&quot;type&quot;:&quot;text&quot;}"/>
           <p:cNvSpPr txBox="1"/>
           <p:nvPr/>
         </p:nvSpPr>
@@ -7532,7 +12145,7 @@
       </p:sp>
       <p:sp>
         <p:nvSpPr>
-          <p:cNvPr id="128" name="" descr="{&quot;isTemplate&quot;:true,&quot;type&quot;:&quot;text&quot;}"/>
+          <p:cNvPr id="193" name="" descr="{&quot;isTemplate&quot;:true,&quot;type&quot;:&quot;text&quot;}"/>
           <p:cNvSpPr txBox="1"/>
           <p:nvPr/>
         </p:nvSpPr>
@@ -7597,7 +12210,7 @@
       </p:sp>
       <p:sp>
         <p:nvSpPr>
-          <p:cNvPr id="129" name=""/>
+          <p:cNvPr id="194" name=""/>
           <p:cNvSpPr/>
           <p:nvPr/>
         </p:nvSpPr>
@@ -7623,7 +12236,7 @@
       </p:sp>
       <p:sp>
         <p:nvSpPr>
-          <p:cNvPr id="130" name="" descr="{&quot;isTemplate&quot;:true,&quot;type&quot;:&quot;text&quot;}"/>
+          <p:cNvPr id="195" name="" descr="{&quot;isTemplate&quot;:true,&quot;type&quot;:&quot;text&quot;}"/>
           <p:cNvSpPr txBox="1"/>
           <p:nvPr/>
         </p:nvSpPr>
@@ -7658,7 +12271,7 @@
       </p:sp>
       <p:sp>
         <p:nvSpPr>
-          <p:cNvPr id="131" name="" descr="{&quot;isTemplate&quot;:true,&quot;type&quot;:&quot;text&quot;}"/>
+          <p:cNvPr id="196" name="" descr="{&quot;isTemplate&quot;:true,&quot;type&quot;:&quot;text&quot;}"/>
           <p:cNvSpPr txBox="1"/>
           <p:nvPr/>
         </p:nvSpPr>
@@ -7753,7 +12366,7 @@
       </p:sp>
       <p:sp>
         <p:nvSpPr>
-          <p:cNvPr id="132" name="" descr="{&quot;isTemplate&quot;:true,&quot;type&quot;:&quot;text&quot;}"/>
+          <p:cNvPr id="197" name="" descr="{&quot;isTemplate&quot;:true,&quot;type&quot;:&quot;text&quot;}"/>
           <p:cNvSpPr txBox="1"/>
           <p:nvPr/>
         </p:nvSpPr>
@@ -7808,7 +12421,7 @@
       </p:sp>
       <p:sp>
         <p:nvSpPr>
-          <p:cNvPr id="133" name="" descr="{&quot;isTemplate&quot;:true,&quot;type&quot;:&quot;text&quot;}"/>
+          <p:cNvPr id="198" name="" descr="{&quot;isTemplate&quot;:true,&quot;type&quot;:&quot;text&quot;}"/>
           <p:cNvSpPr txBox="1"/>
           <p:nvPr/>
         </p:nvSpPr>
@@ -7851,7 +12464,7 @@
   <p:cSld>
     <p:spTree>
       <p:nvGrpSpPr>
-        <p:cNvPr id="134" name="" descr="&lt;Slide style={{ width:'1280px', height:'720px', position:'relative', background:'#FFFFFF', fontFamily:'微软雅黑' }}&gt;&#10;  &lt;Box style={{ position:'absolute', left:56, top:36, flexDirection:'row', alignItems:'center', gap:12 }}&gt;&#10;    &lt;Box style={{ width:8, height:34, background:'#4472C4' }} /&gt;&#10;    &lt;Text style={{ fontSize:30, fontWeight:'bold', color:'#052B7C' }}&gt;三、Skill 抽象与复用&lt;/Text&gt;&#10;  &lt;/Box&gt;&#10;&#10;  &lt;Box style={{ position:'absolute', left:56, top:118, right:56, background:'#052B7C', borderRadius:10, padding:'14px 22px' }}&gt;&#10;    &lt;Text style={{ fontSize:17, color:'#FFFFFF', lineHeight:1.5 }}&gt;与「建应用」并列的内部第二条交付路径：复现工作场景 → 抽象输入输出 → 复用 / 赋能业务自建。&lt;/Text&gt;&#10;  &lt;/Box&gt;&#10;&#10;  &lt;Box style={{ position:'absolute', left:56, top:200, right:56, flexDirection:'row', gap:28 }}&gt;&#10;    &lt;Box style={{ flex:1, background:'#F4F7FC', borderRadius:12, padding:24, flexDirection:'column', gap:12 }}&gt;&#10;      &lt;Text style={{ fontSize:22, fontWeight:'bold', color:'#4472C4' }}&gt;tax-refund-audit（退税审单 Skill）&lt;/Text&gt;&#10;      &lt;Text style={{ fontSize:17, color:'#1A1A1A', lineHeight:1.7 }}&gt;· 抽象退税审单工作流为可复用 Skill，交付财务部&lt;/Text&gt;&#10;      &lt;Text style={{ fontSize:17, color:'#1A1A1A', lineHeight:1.7 }}&gt;· 与 Tax_check 应用互补：应用做 OCR + 条款矩阵「体检」，Skill 做审单流程复用与下沉&lt;/Text&gt;&#10;      &lt;Text style={{ fontSize:17, color:'#1A1A1A', lineHeight:1.7 }}&gt;· 降低对专人 / 专工具的依赖&lt;/Text&gt;&#10;      &lt;Box style={{ marginTop:4, background:'#DAE3F3', borderRadius:6, padding:'6px 12px', alignSelf:'flex-start' }}&gt;&lt;Text style={{ fontSize:15, fontWeight:'bold', color:'#052B7C' }}&gt;状态：已交付财务使用&lt;/Text&gt;&lt;/Box&gt;&#10;    &lt;/Box&gt;&#10;    &lt;Box style={{ flex:1, background:'#F4F7FC', borderRadius:12, padding:24, flexDirection:'column', gap:12 }}&gt;&#10;      &lt;Text style={{ fontSize:22, fontWeight:'bold', color:'#4472C4' }}&gt;daily-commodity-price-scraper（价格爬取 Skill）&lt;/Text&gt;&#10;      &lt;Text style={{ fontSize:17, color:'#1A1A1A', lineHeight:1.7 }}&gt;· 作为「钩子」培养采购部门自主制作 Skill 的能力&lt;/Text&gt;&#10;      &lt;Text style={{ fontSize:17, color:'#1A1A1A', lineHeight:1.7 }}&gt;· 后续仍回采购部门培训，巩固「自建 Skill」能力&lt;/Text&gt;&#10;      &lt;Text style={{ fontSize:17, color:'#1A1A1A', lineHeight:1.7 }}&gt;· 体现理念：赋能业务自建，AI 小组退后为把关角色&lt;/Text&gt;&#10;      &lt;Box style={{ marginTop:4, background:'#DAE3F3', borderRadius:6, padding:'6px 12px', alignSelf:'flex-start' }}&gt;&lt;Text style={{ fontSize:15, fontWeight:'bold', color:'#052B7C' }}&gt;状态：赋能中（回培训）&lt;/Text&gt;&lt;/Box&gt;&#10;    &lt;/Box&gt;&#10;  &lt;/Box&gt;&#10;&#10;  &lt;Box style={{ position:'absolute', left:56, top:668, right:56, flexDirection:'row', justifyContent:'space-between' }}&gt;&#10;    &lt;Text style={{ fontSize:14, color:'#888' }}&gt;入职以来 AI 工作复盘&lt;/Text&gt;&#10;    &lt;Text style={{ fontSize:14, color:'#888' }}&gt;08 / 13&lt;/Text&gt;&#10;  &lt;/Box&gt;&#10;&lt;/Slide&gt;"/>
+        <p:cNvPr id="199" name="" descr="&lt;Slide style={{ width:'1280px', height:'720px', position:'relative', background:'#FFFFFF', fontFamily:'微软雅黑' }}&gt;&#10;  &lt;Box style={{ position:'absolute', left:56, top:36, flexDirection:'row', alignItems:'center', gap:12 }}&gt;&#10;    &lt;Box style={{ width:8, height:34, background:'#4472C4' }} /&gt;&#10;    &lt;Text style={{ fontSize:30, fontWeight:'bold', color:'#052B7C' }}&gt;三、Skill 抽象与复用&lt;/Text&gt;&#10;  &lt;/Box&gt;&#10;&#10;  &lt;Box style={{ position:'absolute', left:56, top:118, right:56, background:'#052B7C', borderRadius:10, padding:'14px 22px' }}&gt;&#10;    &lt;Text style={{ fontSize:17, color:'#FFFFFF', lineHeight:1.5 }}&gt;与「建应用」并列的内部第二条交付路径：复现工作场景 → 抽象输入输出 → 复用 / 赋能业务自建。&lt;/Text&gt;&#10;  &lt;/Box&gt;&#10;&#10;  &lt;Box style={{ position:'absolute', left:56, top:200, right:56, flexDirection:'row', gap:28 }}&gt;&#10;    &lt;Box style={{ flex:1, background:'#F4F7FC', borderRadius:12, padding:24, flexDirection:'column', gap:12 }}&gt;&#10;      &lt;Text style={{ fontSize:22, fontWeight:'bold', color:'#4472C4' }}&gt;tax-refund-audit（退税审单 Skill）&lt;/Text&gt;&#10;      &lt;Text style={{ fontSize:17, color:'#1A1A1A', lineHeight:1.7 }}&gt;· 抽象退税审单工作流为可复用 Skill，交付财务部&lt;/Text&gt;&#10;      &lt;Text style={{ fontSize:17, color:'#1A1A1A', lineHeight:1.7 }}&gt;· 与 Tax_check 应用互补：应用做 OCR + 条款矩阵「体检」，Skill 做审单流程复用与下沉&lt;/Text&gt;&#10;      &lt;Text style={{ fontSize:17, color:'#1A1A1A', lineHeight:1.7 }}&gt;· 降低对专人 / 专工具的依赖&lt;/Text&gt;&#10;      &lt;Box style={{ marginTop:4, background:'#DAE3F3', borderRadius:6, padding:'6px 12px', alignSelf:'flex-start' }}&gt;&lt;Text style={{ fontSize:15, fontWeight:'bold', color:'#052B7C' }}&gt;状态：已交付财务使用&lt;/Text&gt;&lt;/Box&gt;&#10;    &lt;/Box&gt;&#10;    &lt;Box style={{ flex:1, background:'#F4F7FC', borderRadius:12, padding:24, flexDirection:'column', gap:12 }}&gt;&#10;      &lt;Text style={{ fontSize:22, fontWeight:'bold', color:'#4472C4' }}&gt;daily-commodity-price-scraper（价格爬取 Skill）&lt;/Text&gt;&#10;      &lt;Text style={{ fontSize:17, color:'#1A1A1A', lineHeight:1.7 }}&gt;· 作为「钩子」培养采购部门自主制作 Skill 的能力&lt;/Text&gt;&#10;      &lt;Text style={{ fontSize:17, color:'#1A1A1A', lineHeight:1.7 }}&gt;· 后续仍回采购部门培训，巩固「自建 Skill」能力&lt;/Text&gt;&#10;      &lt;Text style={{ fontSize:17, color:'#1A1A1A', lineHeight:1.7 }}&gt;· 体现理念：赋能业务自建，AI 小组退后为把关角色&lt;/Text&gt;&#10;      &lt;Box style={{ marginTop:4, background:'#DAE3F3', borderRadius:6, padding:'6px 12px', alignSelf:'flex-start' }}&gt;&lt;Text style={{ fontSize:15, fontWeight:'bold', color:'#052B7C' }}&gt;状态：赋能中（回培训）&lt;/Text&gt;&lt;/Box&gt;&#10;    &lt;/Box&gt;&#10;  &lt;/Box&gt;&#10;&#10;  &lt;Box style={{ position:'absolute', left:56, top:668, right:56, flexDirection:'row', justifyContent:'space-between' }}&gt;&#10;    &lt;Text style={{ fontSize:14, color:'#888' }}&gt;入职以来 AI 工作复盘&lt;/Text&gt;&#10;    &lt;Text style={{ fontSize:14, color:'#888' }}&gt;08 / 13&lt;/Text&gt;&#10;  &lt;/Box&gt;&#10;&lt;/Slide&gt;"/>
         <p:cNvGrpSpPr/>
         <p:nvPr/>
       </p:nvGrpSpPr>
@@ -7865,7 +12478,7 @@
       </p:grpSpPr>
       <p:sp>
         <p:nvSpPr>
-          <p:cNvPr id="135" name=""/>
+          <p:cNvPr id="200" name=""/>
           <p:cNvSpPr/>
           <p:nvPr/>
         </p:nvSpPr>
@@ -7889,7 +12502,7 @@
       </p:sp>
       <p:sp>
         <p:nvSpPr>
-          <p:cNvPr id="136" name=""/>
+          <p:cNvPr id="201" name=""/>
           <p:cNvSpPr/>
           <p:nvPr/>
         </p:nvSpPr>
@@ -7913,7 +12526,7 @@
       </p:sp>
       <p:sp>
         <p:nvSpPr>
-          <p:cNvPr id="137" name="" descr="{&quot;isTemplate&quot;:true,&quot;type&quot;:&quot;text&quot;}"/>
+          <p:cNvPr id="202" name="" descr="{&quot;isTemplate&quot;:true,&quot;type&quot;:&quot;text&quot;}"/>
           <p:cNvSpPr txBox="1"/>
           <p:nvPr/>
         </p:nvSpPr>
@@ -7968,7 +12581,7 @@
       </p:sp>
       <p:sp>
         <p:nvSpPr>
-          <p:cNvPr id="138" name=""/>
+          <p:cNvPr id="203" name=""/>
           <p:cNvSpPr/>
           <p:nvPr/>
         </p:nvSpPr>
@@ -7994,7 +12607,7 @@
       </p:sp>
       <p:sp>
         <p:nvSpPr>
-          <p:cNvPr id="139" name="" descr="{&quot;isTemplate&quot;:true,&quot;type&quot;:&quot;text&quot;}"/>
+          <p:cNvPr id="204" name="" descr="{&quot;isTemplate&quot;:true,&quot;type&quot;:&quot;text&quot;}"/>
           <p:cNvSpPr txBox="1"/>
           <p:nvPr/>
         </p:nvSpPr>
@@ -8089,7 +12702,7 @@
       </p:sp>
       <p:sp>
         <p:nvSpPr>
-          <p:cNvPr id="140" name=""/>
+          <p:cNvPr id="205" name=""/>
           <p:cNvSpPr/>
           <p:nvPr/>
         </p:nvSpPr>
@@ -8115,7 +12728,7 @@
       </p:sp>
       <p:sp>
         <p:nvSpPr>
-          <p:cNvPr id="141" name="" descr="{&quot;isTemplate&quot;:true,&quot;type&quot;:&quot;text&quot;}"/>
+          <p:cNvPr id="206" name="" descr="{&quot;isTemplate&quot;:true,&quot;type&quot;:&quot;text&quot;}"/>
           <p:cNvSpPr txBox="1"/>
           <p:nvPr/>
         </p:nvSpPr>
@@ -8180,7 +12793,7 @@
       </p:sp>
       <p:sp>
         <p:nvSpPr>
-          <p:cNvPr id="142" name="" descr="{&quot;isTemplate&quot;:true,&quot;type&quot;:&quot;text&quot;}"/>
+          <p:cNvPr id="207" name="" descr="{&quot;isTemplate&quot;:true,&quot;type&quot;:&quot;text&quot;}"/>
           <p:cNvSpPr txBox="1"/>
           <p:nvPr/>
         </p:nvSpPr>
@@ -8245,7 +12858,7 @@
       </p:sp>
       <p:sp>
         <p:nvSpPr>
-          <p:cNvPr id="143" name="" descr="{&quot;isTemplate&quot;:true,&quot;type&quot;:&quot;text&quot;}"/>
+          <p:cNvPr id="208" name="" descr="{&quot;isTemplate&quot;:true,&quot;type&quot;:&quot;text&quot;}"/>
           <p:cNvSpPr txBox="1"/>
           <p:nvPr/>
         </p:nvSpPr>
@@ -8352,7 +12965,7 @@
       </p:sp>
       <p:sp>
         <p:nvSpPr>
-          <p:cNvPr id="144" name="" descr="{&quot;isTemplate&quot;:true,&quot;type&quot;:&quot;text&quot;}"/>
+          <p:cNvPr id="209" name="" descr="{&quot;isTemplate&quot;:true,&quot;type&quot;:&quot;text&quot;}"/>
           <p:cNvSpPr txBox="1"/>
           <p:nvPr/>
         </p:nvSpPr>
@@ -8417,7 +13030,7 @@
       </p:sp>
       <p:sp>
         <p:nvSpPr>
-          <p:cNvPr id="145" name=""/>
+          <p:cNvPr id="210" name=""/>
           <p:cNvSpPr/>
           <p:nvPr/>
         </p:nvSpPr>
@@ -8443,7 +13056,7 @@
       </p:sp>
       <p:sp>
         <p:nvSpPr>
-          <p:cNvPr id="146" name="" descr="{&quot;isTemplate&quot;:true,&quot;type&quot;:&quot;text&quot;}"/>
+          <p:cNvPr id="211" name="" descr="{&quot;isTemplate&quot;:true,&quot;type&quot;:&quot;text&quot;}"/>
           <p:cNvSpPr txBox="1"/>
           <p:nvPr/>
         </p:nvSpPr>
@@ -8478,7 +13091,7 @@
       </p:sp>
       <p:sp>
         <p:nvSpPr>
-          <p:cNvPr id="147" name=""/>
+          <p:cNvPr id="212" name=""/>
           <p:cNvSpPr/>
           <p:nvPr/>
         </p:nvSpPr>
@@ -8504,7 +13117,7 @@
       </p:sp>
       <p:sp>
         <p:nvSpPr>
-          <p:cNvPr id="148" name="" descr="{&quot;isTemplate&quot;:true,&quot;type&quot;:&quot;text&quot;}"/>
+          <p:cNvPr id="213" name="" descr="{&quot;isTemplate&quot;:true,&quot;type&quot;:&quot;text&quot;}"/>
           <p:cNvSpPr txBox="1"/>
           <p:nvPr/>
         </p:nvSpPr>
@@ -8571,7 +13184,7 @@
       </p:sp>
       <p:sp>
         <p:nvSpPr>
-          <p:cNvPr id="149" name="" descr="{&quot;isTemplate&quot;:true,&quot;type&quot;:&quot;text&quot;}"/>
+          <p:cNvPr id="214" name="" descr="{&quot;isTemplate&quot;:true,&quot;type&quot;:&quot;text&quot;}"/>
           <p:cNvSpPr txBox="1"/>
           <p:nvPr/>
         </p:nvSpPr>
@@ -8636,7 +13249,7 @@
       </p:sp>
       <p:sp>
         <p:nvSpPr>
-          <p:cNvPr id="150" name="" descr="{&quot;isTemplate&quot;:true,&quot;type&quot;:&quot;text&quot;}"/>
+          <p:cNvPr id="215" name="" descr="{&quot;isTemplate&quot;:true,&quot;type&quot;:&quot;text&quot;}"/>
           <p:cNvSpPr txBox="1"/>
           <p:nvPr/>
         </p:nvSpPr>
@@ -8701,7 +13314,7 @@
       </p:sp>
       <p:sp>
         <p:nvSpPr>
-          <p:cNvPr id="151" name="" descr="{&quot;isTemplate&quot;:true,&quot;type&quot;:&quot;text&quot;}"/>
+          <p:cNvPr id="216" name="" descr="{&quot;isTemplate&quot;:true,&quot;type&quot;:&quot;text&quot;}"/>
           <p:cNvSpPr txBox="1"/>
           <p:nvPr/>
         </p:nvSpPr>
@@ -8766,7 +13379,7 @@
       </p:sp>
       <p:sp>
         <p:nvSpPr>
-          <p:cNvPr id="152" name=""/>
+          <p:cNvPr id="217" name=""/>
           <p:cNvSpPr/>
           <p:nvPr/>
         </p:nvSpPr>
@@ -8792,7 +13405,7 @@
       </p:sp>
       <p:sp>
         <p:nvSpPr>
-          <p:cNvPr id="153" name="" descr="{&quot;isTemplate&quot;:true,&quot;type&quot;:&quot;text&quot;}"/>
+          <p:cNvPr id="218" name="" descr="{&quot;isTemplate&quot;:true,&quot;type&quot;:&quot;text&quot;}"/>
           <p:cNvSpPr txBox="1"/>
           <p:nvPr/>
         </p:nvSpPr>
@@ -8827,7 +13440,7 @@
       </p:sp>
       <p:sp>
         <p:nvSpPr>
-          <p:cNvPr id="154" name="" descr="{&quot;isTemplate&quot;:true,&quot;type&quot;:&quot;text&quot;}"/>
+          <p:cNvPr id="219" name="" descr="{&quot;isTemplate&quot;:true,&quot;type&quot;:&quot;text&quot;}"/>
           <p:cNvSpPr txBox="1"/>
           <p:nvPr/>
         </p:nvSpPr>
@@ -8882,7 +13495,7 @@
       </p:sp>
       <p:sp>
         <p:nvSpPr>
-          <p:cNvPr id="155" name="" descr="{&quot;isTemplate&quot;:true,&quot;type&quot;:&quot;text&quot;}"/>
+          <p:cNvPr id="220" name="" descr="{&quot;isTemplate&quot;:true,&quot;type&quot;:&quot;text&quot;}"/>
           <p:cNvSpPr txBox="1"/>
           <p:nvPr/>
         </p:nvSpPr>
@@ -8910,6 +13523,1347 @@
                 <a:ea typeface="微软雅黑"/>
               </a:rPr>
               <a:t>08 / 13</a:t>
+            </a:r>
+            <a:endParaRPr/>
+          </a:p>
+        </p:txBody>
+      </p:sp>
+    </p:spTree>
+  </p:cSld>
+</p:sld>
+</file>
+
+<file path=ppt/slides/slide9.xml><?xml version="1.0" encoding="utf-8"?>
+<p:sld xmlns:p="http://schemas.openxmlformats.org/presentationml/2006/main" xmlns:a="http://schemas.openxmlformats.org/drawingml/2006/main" xmlns:a16="http://schemas.microsoft.com/office/drawing/2014/main" xmlns:mc="http://schemas.openxmlformats.org/markup-compatibility/2006" mc:Ignorable="a16">
+  <p:cSld>
+    <p:spTree>
+      <p:nvGrpSpPr>
+        <p:cNvPr id="221" name="" descr="&lt;Slide style={{ width:'1280px', height:'720px', position:'relative', background:'#FFFFFF', fontFamily:'微软雅黑' }}&gt;&#10;  &lt;Box style={{ position:'absolute', left:56, top:36, flexDirection:'row', alignItems:'center', gap:12 }}&gt;&#10;    &lt;Box style={{ width:8, height:34, background:'#4472C4' }} /&gt;&#10;    &lt;Text style={{ fontSize:30, fontWeight:'bold', color:'#052B7C' }}&gt;四、培训与推广&lt;/Text&gt;&#10;  &lt;/Box&gt;&#10;&#10;  &lt;Box style={{ position:'absolute', left:56, top:120, right:56 }}&gt;&#10;    &lt;Table&#10;      style={{ width:'100%', height:430 }}&#10;      defaultTextStyle={{ fontSize:15, textAlign:'center', color:'#1A1A1A' }}&#10;      defaultCellStyle={{ border:{ left:{width:1,color:'#CCCCCC'}, right:{width:1,color:'#CCCCCC'}, top:{width:1,color:'#CCCCCC'}, bottom:{width:1,color:'#CCCCCC'} } }}&#10;      cells={[&#10;        [ {text:'月份', textStyle:{bold:true,color:'#1A1A1A'}, cellStyle:{background:{color:'#DAE3F3'}}},&#10;          {text:'主导', textStyle:{bold:true,color:'#1A1A1A'}, cellStyle:{background:{color:'#DAE3F3'}}},&#10;          {text:'协助 / 参与', textStyle:{bold:true,color:'#1A1A1A'}, cellStyle:{background:{color:'#DAE3F3'}}},&#10;          {text:'主要培训主题', textStyle:{bold:true,color:'#1A1A1A',textAlign:'left'}, cellStyle:{background:{color:'#DAE3F3'}}} ],&#10;        [ '4 月', '1', '2', {text:'Claude Code + 前后端数据库组内培训(04-30)；协助研发部培训；协助采购部 OpenClaw 部署(04-24)', textStyle:{textAlign:'left'}} ],&#10;        [ '5 月', '1', '3', {text:'AI 小组软件开发流程培训 + 作业(05-08)；参与视频生成 / AI 培训助手 / PBC 培训', textStyle:{textAlign:'left'}} ],&#10;        [ '6 月', '3', '1', {text:'月度培训 ×2（AI 工具推荐 / AI 黑话扫盲）、总经办 mmxCode/codex 培训(06-05)；协助销售五部三合一(06-22)', textStyle:{textAlign:'left'}} ],&#10;        [ '7 月', '1', '0', {text:'船务部 shipping-helper 使用培训(07-24)', textStyle:{textAlign:'left'}} ],&#10;        [ {text:'合计', textStyle:{bold:true}, cellStyle:{background:{color:'#FCE4D6'}}},&#10;          {text:'6', textStyle:{bold:true}, cellStyle:{background:{color:'#FCE4D6'}}},&#10;          {text:'6', textStyle:{bold:true}, cellStyle:{background:{color:'#FCE4D6'}}},&#10;          {text:'12 场，覆盖采购 / 船务 / 销售五部 / 研发 / 总经办等多部门', textStyle:{bold:true,textAlign:'left'}, cellStyle:{background:{color:'#FCE4D6'}}} ],&#10;      ]}&#10;    /&gt;&#10;  &lt;/Box&gt;&#10;&#10;  &lt;Box style={{ position:'absolute', left:56, top:565, right:56 }}&gt;&#10;    &lt;Text style={{ fontSize:16, color:'#1A1A1A', lineHeight:1.5 }}&gt;推广与采纳驱动是交付物产生业务价值的「最后一公里」——培训不止「讲」，更含采纳驱动与内部宣推：06-22 销售五部三合一、07-24 船务部使用培训直接对应两个自研工具的上手落地；价格爬取 Skill 以「回采购培训」巩固自建能力。&lt;/Text&gt;&#10;  &lt;/Box&gt;&#10;&#10;  &lt;Box style={{ position:'absolute', left:56, top:668, right:56, flexDirection:'row', justifyContent:'space-between' }}&gt;&#10;    &lt;Text style={{ fontSize:14, color:'#888' }}&gt;入职以来 AI 工作复盘&lt;/Text&gt;&#10;    &lt;Text style={{ fontSize:14, color:'#888' }}&gt;09 / 13&lt;/Text&gt;&#10;  &lt;/Box&gt;&#10;&lt;/Slide&gt;"/>
+        <p:cNvGrpSpPr/>
+        <p:nvPr/>
+      </p:nvGrpSpPr>
+      <p:grpSpPr>
+        <a:xfrm>
+          <a:off x="0" y="0"/>
+          <a:ext cx="0" cy="0"/>
+          <a:chOff x="0" y="0"/>
+          <a:chExt cx="0" cy="0"/>
+        </a:xfrm>
+      </p:grpSpPr>
+      <p:sp>
+        <p:nvSpPr>
+          <p:cNvPr id="222" name=""/>
+          <p:cNvSpPr/>
+          <p:nvPr/>
+        </p:nvSpPr>
+        <p:spPr>
+          <a:xfrm rot="0" flipH="0" flipV="0">
+            <a:off x="0" y="0"/>
+            <a:ext cx="12192000" cy="6858000"/>
+          </a:xfrm>
+          <a:prstGeom prst="rect">
+            <a:avLst/>
+          </a:prstGeom>
+          <a:solidFill>
+            <a:srgbClr val="FFFFFF"/>
+          </a:solidFill>
+          <a:ln/>
+        </p:spPr>
+        <p:txBody>
+          <a:bodyPr/>
+          <a:p/>
+        </p:txBody>
+      </p:sp>
+      <p:sp>
+        <p:nvSpPr>
+          <p:cNvPr id="223" name=""/>
+          <p:cNvSpPr/>
+          <p:nvPr/>
+        </p:nvSpPr>
+        <p:spPr>
+          <a:xfrm rot="0" flipH="0" flipV="0">
+            <a:off x="533400" y="352425"/>
+            <a:ext cx="76200" cy="323850"/>
+          </a:xfrm>
+          <a:prstGeom prst="rect">
+            <a:avLst/>
+          </a:prstGeom>
+          <a:solidFill>
+            <a:srgbClr val="4472C4"/>
+          </a:solidFill>
+          <a:ln/>
+        </p:spPr>
+        <p:txBody>
+          <a:bodyPr/>
+          <a:p/>
+        </p:txBody>
+      </p:sp>
+      <p:sp>
+        <p:nvSpPr>
+          <p:cNvPr id="224" name="" descr="{&quot;isTemplate&quot;:true,&quot;type&quot;:&quot;text&quot;}"/>
+          <p:cNvSpPr txBox="1"/>
+          <p:nvPr/>
+        </p:nvSpPr>
+        <p:spPr>
+          <a:xfrm rot="0" flipH="0" flipV="0">
+            <a:off x="723900" y="342900"/>
+            <a:ext cx="2000250" cy="342900"/>
+          </a:xfrm>
+          <a:prstGeom prst="rect"/>
+        </p:spPr>
+        <p:txBody>
+          <a:bodyPr wrap="none" lIns="0" tIns="0" rIns="0" bIns="0"/>
+          <a:p>
+            <a:pPr>
+              <a:lnSpc>
+                <a:spcPct val="100000"/>
+              </a:lnSpc>
+            </a:pPr>
+            <a:r>
+              <a:rPr lang="zh-CN" sz="2250" b="1">
+                <a:solidFill>
+                  <a:srgbClr val="052B7C"/>
+                </a:solidFill>
+                <a:latin typeface="微软雅黑"/>
+                <a:ea typeface="微软雅黑"/>
+              </a:rPr>
+              <a:t>四、培训与推广</a:t>
+            </a:r>
+            <a:endParaRPr/>
+          </a:p>
+        </p:txBody>
+      </p:sp>
+      <p:graphicFrame>
+        <p:nvGraphicFramePr>
+          <p:cNvPr id="225" name=""/>
+          <p:cNvGraphicFramePr/>
+          <p:nvPr/>
+        </p:nvGraphicFramePr>
+        <p:xfrm rot="0" flipH="0" flipV="0">
+          <a:off x="533400" y="1143000"/>
+          <a:ext cx="11125200" cy="4095750"/>
+        </p:xfrm>
+        <a:graphic>
+          <a:graphicData uri="http://schemas.openxmlformats.org/drawingml/2006/table">
+            <a:tbl>
+              <a:tblGrid>
+                <a:gridCol w="468978">
+                  <a:extLst>
+                    <a:ext uri="{9D8B030D-6E8A-4147-A177-3AD203B41FA5}">
+                      <a16:colId val="1"/>
+                    </a:ext>
+                  </a:extLst>
+                </a:gridCol>
+                <a:gridCol w="468978">
+                  <a:extLst>
+                    <a:ext uri="{9D8B030D-6E8A-4147-A177-3AD203B41FA5}">
+                      <a16:colId val="2"/>
+                    </a:ext>
+                  </a:extLst>
+                </a:gridCol>
+                <a:gridCol w="1025593">
+                  <a:extLst>
+                    <a:ext uri="{9D8B030D-6E8A-4147-A177-3AD203B41FA5}">
+                      <a16:colId val="3"/>
+                    </a:ext>
+                  </a:extLst>
+                </a:gridCol>
+                <a:gridCol w="9161651">
+                  <a:extLst>
+                    <a:ext uri="{9D8B030D-6E8A-4147-A177-3AD203B41FA5}">
+                      <a16:colId val="4"/>
+                    </a:ext>
+                  </a:extLst>
+                </a:gridCol>
+              </a:tblGrid>
+              <a:tr h="682625">
+                <a:tc>
+                  <a:txBody>
+                    <a:bodyPr wrap="square" lIns="0" tIns="0" rIns="0" bIns="0" anchor="ctr">
+                      <a:normAutofit/>
+                    </a:bodyPr>
+                    <a:p>
+                      <a:pPr marL="114300" marR="114300" algn="l">
+                        <a:lnSpc>
+                          <a:spcPct val="120000"/>
+                        </a:lnSpc>
+                      </a:pPr>
+                      <a:r>
+                        <a:rPr sz="1125" b="1">
+                          <a:solidFill>
+                            <a:srgbClr val="1A1A1A"/>
+                          </a:solidFill>
+                          <a:latin typeface="Microsoft YaHei"/>
+                          <a:ea typeface="Microsoft YaHei"/>
+                        </a:rPr>
+                        <a:t>月份</a:t>
+                      </a:r>
+                      <a:endParaRPr/>
+                    </a:p>
+                  </a:txBody>
+                  <a:tcPr marL="45720" marR="45720" marT="45720" marB="45720" anchor="ctr">
+                    <a:lnL>
+                      <a:noFill/>
+                    </a:lnL>
+                    <a:lnR>
+                      <a:noFill/>
+                    </a:lnR>
+                    <a:lnT>
+                      <a:noFill/>
+                    </a:lnT>
+                    <a:lnB>
+                      <a:noFill/>
+                    </a:lnB>
+                    <a:solidFill>
+                      <a:srgbClr val="DAE3F3"/>
+                    </a:solidFill>
+                  </a:tcPr>
+                </a:tc>
+                <a:tc>
+                  <a:txBody>
+                    <a:bodyPr wrap="square" lIns="0" tIns="0" rIns="0" bIns="0" anchor="ctr">
+                      <a:normAutofit/>
+                    </a:bodyPr>
+                    <a:p>
+                      <a:pPr marL="114300" marR="114300" algn="l">
+                        <a:lnSpc>
+                          <a:spcPct val="120000"/>
+                        </a:lnSpc>
+                      </a:pPr>
+                      <a:r>
+                        <a:rPr sz="1125" b="1">
+                          <a:solidFill>
+                            <a:srgbClr val="1A1A1A"/>
+                          </a:solidFill>
+                          <a:latin typeface="Microsoft YaHei"/>
+                          <a:ea typeface="Microsoft YaHei"/>
+                        </a:rPr>
+                        <a:t>主导</a:t>
+                      </a:r>
+                      <a:endParaRPr/>
+                    </a:p>
+                  </a:txBody>
+                  <a:tcPr marL="45720" marR="45720" marT="45720" marB="45720" anchor="ctr">
+                    <a:lnL>
+                      <a:noFill/>
+                    </a:lnL>
+                    <a:lnR>
+                      <a:noFill/>
+                    </a:lnR>
+                    <a:lnT>
+                      <a:noFill/>
+                    </a:lnT>
+                    <a:lnB>
+                      <a:noFill/>
+                    </a:lnB>
+                    <a:solidFill>
+                      <a:srgbClr val="DAE3F3"/>
+                    </a:solidFill>
+                  </a:tcPr>
+                </a:tc>
+                <a:tc>
+                  <a:txBody>
+                    <a:bodyPr wrap="square" lIns="0" tIns="0" rIns="0" bIns="0" anchor="ctr">
+                      <a:normAutofit/>
+                    </a:bodyPr>
+                    <a:p>
+                      <a:pPr marL="114300" marR="114300" algn="l">
+                        <a:lnSpc>
+                          <a:spcPct val="120000"/>
+                        </a:lnSpc>
+                      </a:pPr>
+                      <a:r>
+                        <a:rPr sz="1125" b="1">
+                          <a:solidFill>
+                            <a:srgbClr val="1A1A1A"/>
+                          </a:solidFill>
+                          <a:latin typeface="Microsoft YaHei"/>
+                          <a:ea typeface="Microsoft YaHei"/>
+                        </a:rPr>
+                        <a:t>协助 / 参与</a:t>
+                      </a:r>
+                      <a:endParaRPr/>
+                    </a:p>
+                  </a:txBody>
+                  <a:tcPr marL="45720" marR="45720" marT="45720" marB="45720" anchor="ctr">
+                    <a:lnL>
+                      <a:noFill/>
+                    </a:lnL>
+                    <a:lnR>
+                      <a:noFill/>
+                    </a:lnR>
+                    <a:lnT>
+                      <a:noFill/>
+                    </a:lnT>
+                    <a:lnB>
+                      <a:noFill/>
+                    </a:lnB>
+                    <a:solidFill>
+                      <a:srgbClr val="DAE3F3"/>
+                    </a:solidFill>
+                  </a:tcPr>
+                </a:tc>
+                <a:tc>
+                  <a:txBody>
+                    <a:bodyPr wrap="square" lIns="0" tIns="0" rIns="0" bIns="0" anchor="ctr">
+                      <a:normAutofit/>
+                    </a:bodyPr>
+                    <a:p>
+                      <a:pPr marL="114300" marR="114300" algn="l">
+                        <a:lnSpc>
+                          <a:spcPct val="120000"/>
+                        </a:lnSpc>
+                      </a:pPr>
+                      <a:r>
+                        <a:rPr sz="1125" b="1">
+                          <a:solidFill>
+                            <a:srgbClr val="1A1A1A"/>
+                          </a:solidFill>
+                          <a:latin typeface="Microsoft YaHei"/>
+                          <a:ea typeface="Microsoft YaHei"/>
+                        </a:rPr>
+                        <a:t>主要培训主题</a:t>
+                      </a:r>
+                      <a:endParaRPr/>
+                    </a:p>
+                  </a:txBody>
+                  <a:tcPr marL="45720" marR="45720" marT="45720" marB="45720" anchor="ctr">
+                    <a:lnL>
+                      <a:noFill/>
+                    </a:lnL>
+                    <a:lnR>
+                      <a:noFill/>
+                    </a:lnR>
+                    <a:lnT>
+                      <a:noFill/>
+                    </a:lnT>
+                    <a:lnB>
+                      <a:noFill/>
+                    </a:lnB>
+                    <a:solidFill>
+                      <a:srgbClr val="DAE3F3"/>
+                    </a:solidFill>
+                  </a:tcPr>
+                </a:tc>
+                <a:extLst>
+                  <a:ext uri="{0D108BD9-81ED-4DB2-BD59-A6C34878D82A}">
+                    <a16:rowId val="1"/>
+                  </a:ext>
+                </a:extLst>
+              </a:tr>
+              <a:tr h="682625">
+                <a:tc>
+                  <a:txBody>
+                    <a:bodyPr wrap="square" lIns="0" tIns="0" rIns="0" bIns="0" anchor="ctr">
+                      <a:normAutofit/>
+                    </a:bodyPr>
+                    <a:p>
+                      <a:pPr marL="114300" marR="114300" algn="l">
+                        <a:lnSpc>
+                          <a:spcPct val="120000"/>
+                        </a:lnSpc>
+                      </a:pPr>
+                      <a:r>
+                        <a:rPr sz="1125">
+                          <a:solidFill>
+                            <a:srgbClr val="1A1A1A"/>
+                          </a:solidFill>
+                          <a:latin typeface="Microsoft YaHei"/>
+                          <a:ea typeface="Microsoft YaHei"/>
+                        </a:rPr>
+                        <a:t>4 月</a:t>
+                      </a:r>
+                      <a:endParaRPr/>
+                    </a:p>
+                  </a:txBody>
+                  <a:tcPr marL="45720" marR="45720" marT="45720" marB="45720" anchor="ctr">
+                    <a:lnL>
+                      <a:noFill/>
+                    </a:lnL>
+                    <a:lnR>
+                      <a:noFill/>
+                    </a:lnR>
+                    <a:lnT>
+                      <a:noFill/>
+                    </a:lnT>
+                    <a:lnB>
+                      <a:noFill/>
+                    </a:lnB>
+                  </a:tcPr>
+                </a:tc>
+                <a:tc>
+                  <a:txBody>
+                    <a:bodyPr wrap="square" lIns="0" tIns="0" rIns="0" bIns="0" anchor="ctr">
+                      <a:normAutofit/>
+                    </a:bodyPr>
+                    <a:p>
+                      <a:pPr marL="114300" marR="114300" algn="l">
+                        <a:lnSpc>
+                          <a:spcPct val="120000"/>
+                        </a:lnSpc>
+                      </a:pPr>
+                      <a:r>
+                        <a:rPr sz="1125">
+                          <a:solidFill>
+                            <a:srgbClr val="1A1A1A"/>
+                          </a:solidFill>
+                          <a:latin typeface="Microsoft YaHei"/>
+                          <a:ea typeface="Microsoft YaHei"/>
+                        </a:rPr>
+                        <a:t>1</a:t>
+                      </a:r>
+                      <a:endParaRPr/>
+                    </a:p>
+                  </a:txBody>
+                  <a:tcPr marL="45720" marR="45720" marT="45720" marB="45720" anchor="ctr">
+                    <a:lnL>
+                      <a:noFill/>
+                    </a:lnL>
+                    <a:lnR>
+                      <a:noFill/>
+                    </a:lnR>
+                    <a:lnT>
+                      <a:noFill/>
+                    </a:lnT>
+                    <a:lnB>
+                      <a:noFill/>
+                    </a:lnB>
+                  </a:tcPr>
+                </a:tc>
+                <a:tc>
+                  <a:txBody>
+                    <a:bodyPr wrap="square" lIns="0" tIns="0" rIns="0" bIns="0" anchor="ctr">
+                      <a:normAutofit/>
+                    </a:bodyPr>
+                    <a:p>
+                      <a:pPr marL="114300" marR="114300" algn="l">
+                        <a:lnSpc>
+                          <a:spcPct val="120000"/>
+                        </a:lnSpc>
+                      </a:pPr>
+                      <a:r>
+                        <a:rPr sz="1125">
+                          <a:solidFill>
+                            <a:srgbClr val="1A1A1A"/>
+                          </a:solidFill>
+                          <a:latin typeface="Microsoft YaHei"/>
+                          <a:ea typeface="Microsoft YaHei"/>
+                        </a:rPr>
+                        <a:t>2</a:t>
+                      </a:r>
+                      <a:endParaRPr/>
+                    </a:p>
+                  </a:txBody>
+                  <a:tcPr marL="45720" marR="45720" marT="45720" marB="45720" anchor="ctr">
+                    <a:lnL>
+                      <a:noFill/>
+                    </a:lnL>
+                    <a:lnR>
+                      <a:noFill/>
+                    </a:lnR>
+                    <a:lnT>
+                      <a:noFill/>
+                    </a:lnT>
+                    <a:lnB>
+                      <a:noFill/>
+                    </a:lnB>
+                  </a:tcPr>
+                </a:tc>
+                <a:tc>
+                  <a:txBody>
+                    <a:bodyPr wrap="square" lIns="0" tIns="0" rIns="0" bIns="0" anchor="ctr">
+                      <a:normAutofit/>
+                    </a:bodyPr>
+                    <a:p>
+                      <a:pPr marL="114300" marR="114300" algn="l">
+                        <a:lnSpc>
+                          <a:spcPct val="120000"/>
+                        </a:lnSpc>
+                      </a:pPr>
+                      <a:r>
+                        <a:rPr sz="1125">
+                          <a:solidFill>
+                            <a:srgbClr val="1A1A1A"/>
+                          </a:solidFill>
+                          <a:latin typeface="Microsoft YaHei"/>
+                          <a:ea typeface="Microsoft YaHei"/>
+                        </a:rPr>
+                        <a:t>Claude Code + 前后端数据库组内培训(04-30)；协助研发部培训；协助采购部 OpenClaw 部署(04-24)</a:t>
+                      </a:r>
+                      <a:endParaRPr/>
+                    </a:p>
+                  </a:txBody>
+                  <a:tcPr marL="45720" marR="45720" marT="45720" marB="45720" anchor="ctr">
+                    <a:lnL>
+                      <a:noFill/>
+                    </a:lnL>
+                    <a:lnR>
+                      <a:noFill/>
+                    </a:lnR>
+                    <a:lnT>
+                      <a:noFill/>
+                    </a:lnT>
+                    <a:lnB>
+                      <a:noFill/>
+                    </a:lnB>
+                  </a:tcPr>
+                </a:tc>
+                <a:extLst>
+                  <a:ext uri="{0D108BD9-81ED-4DB2-BD59-A6C34878D82A}">
+                    <a16:rowId val="2"/>
+                  </a:ext>
+                </a:extLst>
+              </a:tr>
+              <a:tr h="682625">
+                <a:tc>
+                  <a:txBody>
+                    <a:bodyPr wrap="square" lIns="0" tIns="0" rIns="0" bIns="0" anchor="ctr">
+                      <a:normAutofit/>
+                    </a:bodyPr>
+                    <a:p>
+                      <a:pPr marL="114300" marR="114300" algn="l">
+                        <a:lnSpc>
+                          <a:spcPct val="120000"/>
+                        </a:lnSpc>
+                      </a:pPr>
+                      <a:r>
+                        <a:rPr sz="1125">
+                          <a:solidFill>
+                            <a:srgbClr val="1A1A1A"/>
+                          </a:solidFill>
+                          <a:latin typeface="Microsoft YaHei"/>
+                          <a:ea typeface="Microsoft YaHei"/>
+                        </a:rPr>
+                        <a:t>5 月</a:t>
+                      </a:r>
+                      <a:endParaRPr/>
+                    </a:p>
+                  </a:txBody>
+                  <a:tcPr marL="45720" marR="45720" marT="45720" marB="45720" anchor="ctr">
+                    <a:lnL>
+                      <a:noFill/>
+                    </a:lnL>
+                    <a:lnR>
+                      <a:noFill/>
+                    </a:lnR>
+                    <a:lnT>
+                      <a:noFill/>
+                    </a:lnT>
+                    <a:lnB>
+                      <a:noFill/>
+                    </a:lnB>
+                  </a:tcPr>
+                </a:tc>
+                <a:tc>
+                  <a:txBody>
+                    <a:bodyPr wrap="square" lIns="0" tIns="0" rIns="0" bIns="0" anchor="ctr">
+                      <a:normAutofit/>
+                    </a:bodyPr>
+                    <a:p>
+                      <a:pPr marL="114300" marR="114300" algn="l">
+                        <a:lnSpc>
+                          <a:spcPct val="120000"/>
+                        </a:lnSpc>
+                      </a:pPr>
+                      <a:r>
+                        <a:rPr sz="1125">
+                          <a:solidFill>
+                            <a:srgbClr val="1A1A1A"/>
+                          </a:solidFill>
+                          <a:latin typeface="Microsoft YaHei"/>
+                          <a:ea typeface="Microsoft YaHei"/>
+                        </a:rPr>
+                        <a:t>1</a:t>
+                      </a:r>
+                      <a:endParaRPr/>
+                    </a:p>
+                  </a:txBody>
+                  <a:tcPr marL="45720" marR="45720" marT="45720" marB="45720" anchor="ctr">
+                    <a:lnL>
+                      <a:noFill/>
+                    </a:lnL>
+                    <a:lnR>
+                      <a:noFill/>
+                    </a:lnR>
+                    <a:lnT>
+                      <a:noFill/>
+                    </a:lnT>
+                    <a:lnB>
+                      <a:noFill/>
+                    </a:lnB>
+                  </a:tcPr>
+                </a:tc>
+                <a:tc>
+                  <a:txBody>
+                    <a:bodyPr wrap="square" lIns="0" tIns="0" rIns="0" bIns="0" anchor="ctr">
+                      <a:normAutofit/>
+                    </a:bodyPr>
+                    <a:p>
+                      <a:pPr marL="114300" marR="114300" algn="l">
+                        <a:lnSpc>
+                          <a:spcPct val="120000"/>
+                        </a:lnSpc>
+                      </a:pPr>
+                      <a:r>
+                        <a:rPr sz="1125">
+                          <a:solidFill>
+                            <a:srgbClr val="1A1A1A"/>
+                          </a:solidFill>
+                          <a:latin typeface="Microsoft YaHei"/>
+                          <a:ea typeface="Microsoft YaHei"/>
+                        </a:rPr>
+                        <a:t>3</a:t>
+                      </a:r>
+                      <a:endParaRPr/>
+                    </a:p>
+                  </a:txBody>
+                  <a:tcPr marL="45720" marR="45720" marT="45720" marB="45720" anchor="ctr">
+                    <a:lnL>
+                      <a:noFill/>
+                    </a:lnL>
+                    <a:lnR>
+                      <a:noFill/>
+                    </a:lnR>
+                    <a:lnT>
+                      <a:noFill/>
+                    </a:lnT>
+                    <a:lnB>
+                      <a:noFill/>
+                    </a:lnB>
+                  </a:tcPr>
+                </a:tc>
+                <a:tc>
+                  <a:txBody>
+                    <a:bodyPr wrap="square" lIns="0" tIns="0" rIns="0" bIns="0" anchor="ctr">
+                      <a:normAutofit/>
+                    </a:bodyPr>
+                    <a:p>
+                      <a:pPr marL="114300" marR="114300" algn="l">
+                        <a:lnSpc>
+                          <a:spcPct val="120000"/>
+                        </a:lnSpc>
+                      </a:pPr>
+                      <a:r>
+                        <a:rPr sz="1125">
+                          <a:solidFill>
+                            <a:srgbClr val="1A1A1A"/>
+                          </a:solidFill>
+                          <a:latin typeface="Microsoft YaHei"/>
+                          <a:ea typeface="Microsoft YaHei"/>
+                        </a:rPr>
+                        <a:t>AI 小组软件开发流程培训 + 作业(05-08)；参与视频生成 / AI 培训助手 / PBC 培训</a:t>
+                      </a:r>
+                      <a:endParaRPr/>
+                    </a:p>
+                  </a:txBody>
+                  <a:tcPr marL="45720" marR="45720" marT="45720" marB="45720" anchor="ctr">
+                    <a:lnL>
+                      <a:noFill/>
+                    </a:lnL>
+                    <a:lnR>
+                      <a:noFill/>
+                    </a:lnR>
+                    <a:lnT>
+                      <a:noFill/>
+                    </a:lnT>
+                    <a:lnB>
+                      <a:noFill/>
+                    </a:lnB>
+                  </a:tcPr>
+                </a:tc>
+                <a:extLst>
+                  <a:ext uri="{0D108BD9-81ED-4DB2-BD59-A6C34878D82A}">
+                    <a16:rowId val="3"/>
+                  </a:ext>
+                </a:extLst>
+              </a:tr>
+              <a:tr h="682625">
+                <a:tc>
+                  <a:txBody>
+                    <a:bodyPr wrap="square" lIns="0" tIns="0" rIns="0" bIns="0" anchor="ctr">
+                      <a:normAutofit/>
+                    </a:bodyPr>
+                    <a:p>
+                      <a:pPr marL="114300" marR="114300" algn="l">
+                        <a:lnSpc>
+                          <a:spcPct val="120000"/>
+                        </a:lnSpc>
+                      </a:pPr>
+                      <a:r>
+                        <a:rPr sz="1125">
+                          <a:solidFill>
+                            <a:srgbClr val="1A1A1A"/>
+                          </a:solidFill>
+                          <a:latin typeface="Microsoft YaHei"/>
+                          <a:ea typeface="Microsoft YaHei"/>
+                        </a:rPr>
+                        <a:t>6 月</a:t>
+                      </a:r>
+                      <a:endParaRPr/>
+                    </a:p>
+                  </a:txBody>
+                  <a:tcPr marL="45720" marR="45720" marT="45720" marB="45720" anchor="ctr">
+                    <a:lnL>
+                      <a:noFill/>
+                    </a:lnL>
+                    <a:lnR>
+                      <a:noFill/>
+                    </a:lnR>
+                    <a:lnT>
+                      <a:noFill/>
+                    </a:lnT>
+                    <a:lnB>
+                      <a:noFill/>
+                    </a:lnB>
+                  </a:tcPr>
+                </a:tc>
+                <a:tc>
+                  <a:txBody>
+                    <a:bodyPr wrap="square" lIns="0" tIns="0" rIns="0" bIns="0" anchor="ctr">
+                      <a:normAutofit/>
+                    </a:bodyPr>
+                    <a:p>
+                      <a:pPr marL="114300" marR="114300" algn="l">
+                        <a:lnSpc>
+                          <a:spcPct val="120000"/>
+                        </a:lnSpc>
+                      </a:pPr>
+                      <a:r>
+                        <a:rPr sz="1125">
+                          <a:solidFill>
+                            <a:srgbClr val="1A1A1A"/>
+                          </a:solidFill>
+                          <a:latin typeface="Microsoft YaHei"/>
+                          <a:ea typeface="Microsoft YaHei"/>
+                        </a:rPr>
+                        <a:t>3</a:t>
+                      </a:r>
+                      <a:endParaRPr/>
+                    </a:p>
+                  </a:txBody>
+                  <a:tcPr marL="45720" marR="45720" marT="45720" marB="45720" anchor="ctr">
+                    <a:lnL>
+                      <a:noFill/>
+                    </a:lnL>
+                    <a:lnR>
+                      <a:noFill/>
+                    </a:lnR>
+                    <a:lnT>
+                      <a:noFill/>
+                    </a:lnT>
+                    <a:lnB>
+                      <a:noFill/>
+                    </a:lnB>
+                  </a:tcPr>
+                </a:tc>
+                <a:tc>
+                  <a:txBody>
+                    <a:bodyPr wrap="square" lIns="0" tIns="0" rIns="0" bIns="0" anchor="ctr">
+                      <a:normAutofit/>
+                    </a:bodyPr>
+                    <a:p>
+                      <a:pPr marL="114300" marR="114300" algn="l">
+                        <a:lnSpc>
+                          <a:spcPct val="120000"/>
+                        </a:lnSpc>
+                      </a:pPr>
+                      <a:r>
+                        <a:rPr sz="1125">
+                          <a:solidFill>
+                            <a:srgbClr val="1A1A1A"/>
+                          </a:solidFill>
+                          <a:latin typeface="Microsoft YaHei"/>
+                          <a:ea typeface="Microsoft YaHei"/>
+                        </a:rPr>
+                        <a:t>1</a:t>
+                      </a:r>
+                      <a:endParaRPr/>
+                    </a:p>
+                  </a:txBody>
+                  <a:tcPr marL="45720" marR="45720" marT="45720" marB="45720" anchor="ctr">
+                    <a:lnL>
+                      <a:noFill/>
+                    </a:lnL>
+                    <a:lnR>
+                      <a:noFill/>
+                    </a:lnR>
+                    <a:lnT>
+                      <a:noFill/>
+                    </a:lnT>
+                    <a:lnB>
+                      <a:noFill/>
+                    </a:lnB>
+                  </a:tcPr>
+                </a:tc>
+                <a:tc>
+                  <a:txBody>
+                    <a:bodyPr wrap="square" lIns="0" tIns="0" rIns="0" bIns="0" anchor="ctr">
+                      <a:normAutofit/>
+                    </a:bodyPr>
+                    <a:p>
+                      <a:pPr marL="114300" marR="114300" algn="l">
+                        <a:lnSpc>
+                          <a:spcPct val="120000"/>
+                        </a:lnSpc>
+                      </a:pPr>
+                      <a:r>
+                        <a:rPr sz="1125">
+                          <a:solidFill>
+                            <a:srgbClr val="1A1A1A"/>
+                          </a:solidFill>
+                          <a:latin typeface="Microsoft YaHei"/>
+                          <a:ea typeface="Microsoft YaHei"/>
+                        </a:rPr>
+                        <a:t>月度培训 ×2（AI 工具推荐 / AI 黑话扫盲）、总经办 mmxCode/codex 培训(06-05)；协助销售五部三合一(06-22)</a:t>
+                      </a:r>
+                      <a:endParaRPr/>
+                    </a:p>
+                  </a:txBody>
+                  <a:tcPr marL="45720" marR="45720" marT="45720" marB="45720" anchor="ctr">
+                    <a:lnL>
+                      <a:noFill/>
+                    </a:lnL>
+                    <a:lnR>
+                      <a:noFill/>
+                    </a:lnR>
+                    <a:lnT>
+                      <a:noFill/>
+                    </a:lnT>
+                    <a:lnB>
+                      <a:noFill/>
+                    </a:lnB>
+                  </a:tcPr>
+                </a:tc>
+                <a:extLst>
+                  <a:ext uri="{0D108BD9-81ED-4DB2-BD59-A6C34878D82A}">
+                    <a16:rowId val="4"/>
+                  </a:ext>
+                </a:extLst>
+              </a:tr>
+              <a:tr h="682625">
+                <a:tc>
+                  <a:txBody>
+                    <a:bodyPr wrap="square" lIns="0" tIns="0" rIns="0" bIns="0" anchor="ctr">
+                      <a:normAutofit/>
+                    </a:bodyPr>
+                    <a:p>
+                      <a:pPr marL="114300" marR="114300" algn="l">
+                        <a:lnSpc>
+                          <a:spcPct val="120000"/>
+                        </a:lnSpc>
+                      </a:pPr>
+                      <a:r>
+                        <a:rPr sz="1125">
+                          <a:solidFill>
+                            <a:srgbClr val="1A1A1A"/>
+                          </a:solidFill>
+                          <a:latin typeface="Microsoft YaHei"/>
+                          <a:ea typeface="Microsoft YaHei"/>
+                        </a:rPr>
+                        <a:t>7 月</a:t>
+                      </a:r>
+                      <a:endParaRPr/>
+                    </a:p>
+                  </a:txBody>
+                  <a:tcPr marL="45720" marR="45720" marT="45720" marB="45720" anchor="ctr">
+                    <a:lnL>
+                      <a:noFill/>
+                    </a:lnL>
+                    <a:lnR>
+                      <a:noFill/>
+                    </a:lnR>
+                    <a:lnT>
+                      <a:noFill/>
+                    </a:lnT>
+                    <a:lnB>
+                      <a:noFill/>
+                    </a:lnB>
+                  </a:tcPr>
+                </a:tc>
+                <a:tc>
+                  <a:txBody>
+                    <a:bodyPr wrap="square" lIns="0" tIns="0" rIns="0" bIns="0" anchor="ctr">
+                      <a:normAutofit/>
+                    </a:bodyPr>
+                    <a:p>
+                      <a:pPr marL="114300" marR="114300" algn="l">
+                        <a:lnSpc>
+                          <a:spcPct val="120000"/>
+                        </a:lnSpc>
+                      </a:pPr>
+                      <a:r>
+                        <a:rPr sz="1125">
+                          <a:solidFill>
+                            <a:srgbClr val="1A1A1A"/>
+                          </a:solidFill>
+                          <a:latin typeface="Microsoft YaHei"/>
+                          <a:ea typeface="Microsoft YaHei"/>
+                        </a:rPr>
+                        <a:t>1</a:t>
+                      </a:r>
+                      <a:endParaRPr/>
+                    </a:p>
+                  </a:txBody>
+                  <a:tcPr marL="45720" marR="45720" marT="45720" marB="45720" anchor="ctr">
+                    <a:lnL>
+                      <a:noFill/>
+                    </a:lnL>
+                    <a:lnR>
+                      <a:noFill/>
+                    </a:lnR>
+                    <a:lnT>
+                      <a:noFill/>
+                    </a:lnT>
+                    <a:lnB>
+                      <a:noFill/>
+                    </a:lnB>
+                  </a:tcPr>
+                </a:tc>
+                <a:tc>
+                  <a:txBody>
+                    <a:bodyPr wrap="square" lIns="0" tIns="0" rIns="0" bIns="0" anchor="ctr">
+                      <a:normAutofit/>
+                    </a:bodyPr>
+                    <a:p>
+                      <a:pPr marL="114300" marR="114300" algn="l">
+                        <a:lnSpc>
+                          <a:spcPct val="120000"/>
+                        </a:lnSpc>
+                      </a:pPr>
+                      <a:r>
+                        <a:rPr sz="1125">
+                          <a:solidFill>
+                            <a:srgbClr val="1A1A1A"/>
+                          </a:solidFill>
+                          <a:latin typeface="Microsoft YaHei"/>
+                          <a:ea typeface="Microsoft YaHei"/>
+                        </a:rPr>
+                        <a:t>0</a:t>
+                      </a:r>
+                      <a:endParaRPr/>
+                    </a:p>
+                  </a:txBody>
+                  <a:tcPr marL="45720" marR="45720" marT="45720" marB="45720" anchor="ctr">
+                    <a:lnL>
+                      <a:noFill/>
+                    </a:lnL>
+                    <a:lnR>
+                      <a:noFill/>
+                    </a:lnR>
+                    <a:lnT>
+                      <a:noFill/>
+                    </a:lnT>
+                    <a:lnB>
+                      <a:noFill/>
+                    </a:lnB>
+                  </a:tcPr>
+                </a:tc>
+                <a:tc>
+                  <a:txBody>
+                    <a:bodyPr wrap="square" lIns="0" tIns="0" rIns="0" bIns="0" anchor="ctr">
+                      <a:normAutofit/>
+                    </a:bodyPr>
+                    <a:p>
+                      <a:pPr marL="114300" marR="114300" algn="l">
+                        <a:lnSpc>
+                          <a:spcPct val="120000"/>
+                        </a:lnSpc>
+                      </a:pPr>
+                      <a:r>
+                        <a:rPr sz="1125">
+                          <a:solidFill>
+                            <a:srgbClr val="1A1A1A"/>
+                          </a:solidFill>
+                          <a:latin typeface="Microsoft YaHei"/>
+                          <a:ea typeface="Microsoft YaHei"/>
+                        </a:rPr>
+                        <a:t>船务部 shipping-helper 使用培训(07-24)</a:t>
+                      </a:r>
+                      <a:endParaRPr/>
+                    </a:p>
+                  </a:txBody>
+                  <a:tcPr marL="45720" marR="45720" marT="45720" marB="45720" anchor="ctr">
+                    <a:lnL>
+                      <a:noFill/>
+                    </a:lnL>
+                    <a:lnR>
+                      <a:noFill/>
+                    </a:lnR>
+                    <a:lnT>
+                      <a:noFill/>
+                    </a:lnT>
+                    <a:lnB>
+                      <a:noFill/>
+                    </a:lnB>
+                  </a:tcPr>
+                </a:tc>
+                <a:extLst>
+                  <a:ext uri="{0D108BD9-81ED-4DB2-BD59-A6C34878D82A}">
+                    <a16:rowId val="5"/>
+                  </a:ext>
+                </a:extLst>
+              </a:tr>
+              <a:tr h="682625">
+                <a:tc>
+                  <a:txBody>
+                    <a:bodyPr wrap="square" lIns="0" tIns="0" rIns="0" bIns="0" anchor="ctr">
+                      <a:normAutofit/>
+                    </a:bodyPr>
+                    <a:p>
+                      <a:pPr marL="114300" marR="114300" algn="l">
+                        <a:lnSpc>
+                          <a:spcPct val="120000"/>
+                        </a:lnSpc>
+                      </a:pPr>
+                      <a:r>
+                        <a:rPr sz="1125" b="1">
+                          <a:solidFill>
+                            <a:srgbClr val="1A1A1A"/>
+                          </a:solidFill>
+                          <a:latin typeface="Microsoft YaHei"/>
+                          <a:ea typeface="Microsoft YaHei"/>
+                        </a:rPr>
+                        <a:t>合计</a:t>
+                      </a:r>
+                      <a:endParaRPr/>
+                    </a:p>
+                  </a:txBody>
+                  <a:tcPr marL="45720" marR="45720" marT="45720" marB="45720" anchor="ctr">
+                    <a:lnL>
+                      <a:noFill/>
+                    </a:lnL>
+                    <a:lnR>
+                      <a:noFill/>
+                    </a:lnR>
+                    <a:lnT>
+                      <a:noFill/>
+                    </a:lnT>
+                    <a:lnB>
+                      <a:noFill/>
+                    </a:lnB>
+                    <a:solidFill>
+                      <a:srgbClr val="FCE4D6"/>
+                    </a:solidFill>
+                  </a:tcPr>
+                </a:tc>
+                <a:tc>
+                  <a:txBody>
+                    <a:bodyPr wrap="square" lIns="0" tIns="0" rIns="0" bIns="0" anchor="ctr">
+                      <a:normAutofit/>
+                    </a:bodyPr>
+                    <a:p>
+                      <a:pPr marL="114300" marR="114300" algn="l">
+                        <a:lnSpc>
+                          <a:spcPct val="120000"/>
+                        </a:lnSpc>
+                      </a:pPr>
+                      <a:r>
+                        <a:rPr sz="1125" b="1">
+                          <a:solidFill>
+                            <a:srgbClr val="1A1A1A"/>
+                          </a:solidFill>
+                          <a:latin typeface="Microsoft YaHei"/>
+                          <a:ea typeface="Microsoft YaHei"/>
+                        </a:rPr>
+                        <a:t>6</a:t>
+                      </a:r>
+                      <a:endParaRPr/>
+                    </a:p>
+                  </a:txBody>
+                  <a:tcPr marL="45720" marR="45720" marT="45720" marB="45720" anchor="ctr">
+                    <a:lnL>
+                      <a:noFill/>
+                    </a:lnL>
+                    <a:lnR>
+                      <a:noFill/>
+                    </a:lnR>
+                    <a:lnT>
+                      <a:noFill/>
+                    </a:lnT>
+                    <a:lnB>
+                      <a:noFill/>
+                    </a:lnB>
+                    <a:solidFill>
+                      <a:srgbClr val="FCE4D6"/>
+                    </a:solidFill>
+                  </a:tcPr>
+                </a:tc>
+                <a:tc>
+                  <a:txBody>
+                    <a:bodyPr wrap="square" lIns="0" tIns="0" rIns="0" bIns="0" anchor="ctr">
+                      <a:normAutofit/>
+                    </a:bodyPr>
+                    <a:p>
+                      <a:pPr marL="114300" marR="114300" algn="l">
+                        <a:lnSpc>
+                          <a:spcPct val="120000"/>
+                        </a:lnSpc>
+                      </a:pPr>
+                      <a:r>
+                        <a:rPr sz="1125" b="1">
+                          <a:solidFill>
+                            <a:srgbClr val="1A1A1A"/>
+                          </a:solidFill>
+                          <a:latin typeface="Microsoft YaHei"/>
+                          <a:ea typeface="Microsoft YaHei"/>
+                        </a:rPr>
+                        <a:t>6</a:t>
+                      </a:r>
+                      <a:endParaRPr/>
+                    </a:p>
+                  </a:txBody>
+                  <a:tcPr marL="45720" marR="45720" marT="45720" marB="45720" anchor="ctr">
+                    <a:lnL>
+                      <a:noFill/>
+                    </a:lnL>
+                    <a:lnR>
+                      <a:noFill/>
+                    </a:lnR>
+                    <a:lnT>
+                      <a:noFill/>
+                    </a:lnT>
+                    <a:lnB>
+                      <a:noFill/>
+                    </a:lnB>
+                    <a:solidFill>
+                      <a:srgbClr val="FCE4D6"/>
+                    </a:solidFill>
+                  </a:tcPr>
+                </a:tc>
+                <a:tc>
+                  <a:txBody>
+                    <a:bodyPr wrap="square" lIns="0" tIns="0" rIns="0" bIns="0" anchor="ctr">
+                      <a:normAutofit/>
+                    </a:bodyPr>
+                    <a:p>
+                      <a:pPr marL="114300" marR="114300" algn="l">
+                        <a:lnSpc>
+                          <a:spcPct val="120000"/>
+                        </a:lnSpc>
+                      </a:pPr>
+                      <a:r>
+                        <a:rPr sz="1125" b="1">
+                          <a:solidFill>
+                            <a:srgbClr val="1A1A1A"/>
+                          </a:solidFill>
+                          <a:latin typeface="Microsoft YaHei"/>
+                          <a:ea typeface="Microsoft YaHei"/>
+                        </a:rPr>
+                        <a:t>12 场，覆盖采购 / 船务 / 销售五部 / 研发 / 总经办等多部门</a:t>
+                      </a:r>
+                      <a:endParaRPr/>
+                    </a:p>
+                  </a:txBody>
+                  <a:tcPr marL="45720" marR="45720" marT="45720" marB="45720" anchor="ctr">
+                    <a:lnL>
+                      <a:noFill/>
+                    </a:lnL>
+                    <a:lnR>
+                      <a:noFill/>
+                    </a:lnR>
+                    <a:lnT>
+                      <a:noFill/>
+                    </a:lnT>
+                    <a:lnB>
+                      <a:noFill/>
+                    </a:lnB>
+                    <a:solidFill>
+                      <a:srgbClr val="FCE4D6"/>
+                    </a:solidFill>
+                  </a:tcPr>
+                </a:tc>
+                <a:extLst>
+                  <a:ext uri="{0D108BD9-81ED-4DB2-BD59-A6C34878D82A}">
+                    <a16:rowId val="6"/>
+                  </a:ext>
+                </a:extLst>
+              </a:tr>
+            </a:tbl>
+          </a:graphicData>
+        </a:graphic>
+      </p:graphicFrame>
+      <p:sp>
+        <p:nvSpPr>
+          <p:cNvPr id="226" name="" descr="{&quot;isTemplate&quot;:true,&quot;type&quot;:&quot;text&quot;}"/>
+          <p:cNvSpPr txBox="1"/>
+          <p:nvPr/>
+        </p:nvSpPr>
+        <p:spPr>
+          <a:xfrm rot="0" flipH="0" flipV="0">
+            <a:off x="533400" y="5381625"/>
+            <a:ext cx="11125200" cy="552450"/>
+          </a:xfrm>
+          <a:prstGeom prst="rect"/>
+        </p:spPr>
+        <p:txBody>
+          <a:bodyPr wrap="square" lIns="0" tIns="0" rIns="0" bIns="0">
+            <a:normAutofit/>
+          </a:bodyPr>
+          <a:p>
+            <a:pPr>
+              <a:lnSpc>
+                <a:spcPct val="150000"/>
+              </a:lnSpc>
+            </a:pPr>
+            <a:r>
+              <a:rPr lang="zh-CN" sz="1200">
+                <a:solidFill>
+                  <a:srgbClr val="1A1A1A"/>
+                </a:solidFill>
+                <a:latin typeface="微软雅黑"/>
+                <a:ea typeface="微软雅黑"/>
+              </a:rPr>
+              <a:t>推广与采纳驱动是交付物产生业务价值的「最后一公里」——培训不止「讲」，更含采纳驱动与内部宣推：</a:t>
+            </a:r>
+            <a:r>
+              <a:rPr lang="en-US" sz="1200">
+                <a:solidFill>
+                  <a:srgbClr val="1A1A1A"/>
+                </a:solidFill>
+                <a:latin typeface="微软雅黑"/>
+                <a:ea typeface="微软雅黑"/>
+              </a:rPr>
+              <a:t>06-22 </a:t>
+            </a:r>
+            <a:r>
+              <a:rPr lang="zh-CN" sz="1200">
+                <a:solidFill>
+                  <a:srgbClr val="1A1A1A"/>
+                </a:solidFill>
+                <a:latin typeface="微软雅黑"/>
+                <a:ea typeface="微软雅黑"/>
+              </a:rPr>
+              <a:t>销售五部三合一、</a:t>
+            </a:r>
+            <a:r>
+              <a:rPr lang="en-US" sz="1200">
+                <a:solidFill>
+                  <a:srgbClr val="1A1A1A"/>
+                </a:solidFill>
+                <a:latin typeface="微软雅黑"/>
+                <a:ea typeface="微软雅黑"/>
+              </a:rPr>
+              <a:t>07-24 </a:t>
+            </a:r>
+            <a:r>
+              <a:rPr lang="zh-CN" sz="1200">
+                <a:solidFill>
+                  <a:srgbClr val="1A1A1A"/>
+                </a:solidFill>
+                <a:latin typeface="微软雅黑"/>
+                <a:ea typeface="微软雅黑"/>
+              </a:rPr>
+              <a:t>船务部使用培训直接对应两个自研工具的上手落地；价格爬取</a:t>
+            </a:r>
+            <a:r>
+              <a:rPr lang="en-US" sz="1200">
+                <a:solidFill>
+                  <a:srgbClr val="1A1A1A"/>
+                </a:solidFill>
+                <a:latin typeface="微软雅黑"/>
+                <a:ea typeface="微软雅黑"/>
+              </a:rPr>
+              <a:t> Skill </a:t>
+            </a:r>
+            <a:r>
+              <a:rPr lang="zh-CN" sz="1200">
+                <a:solidFill>
+                  <a:srgbClr val="1A1A1A"/>
+                </a:solidFill>
+                <a:latin typeface="微软雅黑"/>
+                <a:ea typeface="微软雅黑"/>
+              </a:rPr>
+              <a:t>以「回采购培训」巩固自建能力。</a:t>
+            </a:r>
+            <a:endParaRPr/>
+          </a:p>
+        </p:txBody>
+      </p:sp>
+      <p:sp>
+        <p:nvSpPr>
+          <p:cNvPr id="227" name="" descr="{&quot;isTemplate&quot;:true,&quot;type&quot;:&quot;text&quot;}"/>
+          <p:cNvSpPr txBox="1"/>
+          <p:nvPr/>
+        </p:nvSpPr>
+        <p:spPr>
+          <a:xfrm rot="0" flipH="0" flipV="0">
+            <a:off x="533400" y="6362700"/>
+            <a:ext cx="1285875" cy="161925"/>
+          </a:xfrm>
+          <a:prstGeom prst="rect"/>
+        </p:spPr>
+        <p:txBody>
+          <a:bodyPr wrap="none" lIns="0" tIns="0" rIns="0" bIns="0"/>
+          <a:p>
+            <a:pPr>
+              <a:lnSpc>
+                <a:spcPct val="100000"/>
+              </a:lnSpc>
+            </a:pPr>
+            <a:r>
+              <a:rPr lang="zh-CN" sz="1050">
+                <a:solidFill>
+                  <a:srgbClr val="888888"/>
+                </a:solidFill>
+                <a:latin typeface="微软雅黑"/>
+                <a:ea typeface="微软雅黑"/>
+              </a:rPr>
+              <a:t>入职以来</a:t>
+            </a:r>
+            <a:r>
+              <a:rPr lang="en-US" sz="1050">
+                <a:solidFill>
+                  <a:srgbClr val="888888"/>
+                </a:solidFill>
+                <a:latin typeface="微软雅黑"/>
+                <a:ea typeface="微软雅黑"/>
+              </a:rPr>
+              <a:t> AI </a:t>
+            </a:r>
+            <a:r>
+              <a:rPr lang="zh-CN" sz="1050">
+                <a:solidFill>
+                  <a:srgbClr val="888888"/>
+                </a:solidFill>
+                <a:latin typeface="微软雅黑"/>
+                <a:ea typeface="微软雅黑"/>
+              </a:rPr>
+              <a:t>工作复盘</a:t>
+            </a:r>
+            <a:endParaRPr/>
+          </a:p>
+        </p:txBody>
+      </p:sp>
+      <p:sp>
+        <p:nvSpPr>
+          <p:cNvPr id="228" name="" descr="{&quot;isTemplate&quot;:true,&quot;type&quot;:&quot;text&quot;}"/>
+          <p:cNvSpPr txBox="1"/>
+          <p:nvPr/>
+        </p:nvSpPr>
+        <p:spPr>
+          <a:xfrm rot="0" flipH="0" flipV="0">
+            <a:off x="11229975" y="6362700"/>
+            <a:ext cx="428625" cy="161925"/>
+          </a:xfrm>
+          <a:prstGeom prst="rect"/>
+        </p:spPr>
+        <p:txBody>
+          <a:bodyPr wrap="none" lIns="0" tIns="0" rIns="0" bIns="0"/>
+          <a:p>
+            <a:pPr>
+              <a:lnSpc>
+                <a:spcPct val="100000"/>
+              </a:lnSpc>
+            </a:pPr>
+            <a:r>
+              <a:rPr lang="en-US" sz="1050">
+                <a:solidFill>
+                  <a:srgbClr val="888888"/>
+                </a:solidFill>
+                <a:latin typeface="微软雅黑"/>
+                <a:ea typeface="微软雅黑"/>
+              </a:rPr>
+              <a:t>09 / 13</a:t>
             </a:r>
             <a:endParaRPr/>
           </a:p>

--- a/PPT/入职以来AI工作复盘/入职以来AI工作复盘.pptx
+++ b/PPT/入职以来AI工作复盘/入职以来AI工作复盘.pptx
@@ -5,7 +5,7 @@
     <p:sldMasterId id="2147483648" r:id="rId1"/>
   </p:sldMasterIdLst>
   <p:notesMasterIdLst>
-    <p:notesMasterId r:id="rId16"/>
+    <p:notesMasterId r:id="rId15"/>
   </p:notesMasterIdLst>
   <p:sldIdLst>
     <p:sldId id="256" r:id="rId3"/>
@@ -16,11 +16,10 @@
     <p:sldId id="261" r:id="rId8"/>
     <p:sldId id="262" r:id="rId9"/>
     <p:sldId id="263" r:id="rId10"/>
-    <p:sldId id="264" r:id="rId11"/>
-    <p:sldId id="265" r:id="rId12"/>
-    <p:sldId id="266" r:id="rId13"/>
-    <p:sldId id="267" r:id="rId14"/>
-    <p:sldId id="268" r:id="rId15"/>
+    <p:sldId id="265" r:id="rId11"/>
+    <p:sldId id="266" r:id="rId12"/>
+    <p:sldId id="267" r:id="rId13"/>
+    <p:sldId id="268" r:id="rId14"/>
   </p:sldIdLst>
   <p:sldSz cx="12192000" cy="6858000"/>
   <p:notesSz cx="6858000" cy="12192000"/>
@@ -912,1723 +911,6 @@
   <p:cSld>
     <p:spTree>
       <p:nvGrpSpPr>
-        <p:cNvPr id="12" name="" descr="&lt;Slide style={{ width:'1280px', height:'720px', position:'relative', background:'#FFFFFF', fontFamily:'微软雅黑' }}&gt;&#10;  &lt;Box style={{ position:'absolute', left:56, top:36, flexDirection:'row', alignItems:'center', gap:12 }}&gt;&#10;    &lt;Box style={{ width:8, height:34, background:'#4472C4' }} /&gt;&#10;    &lt;Text style={{ fontSize:30, fontWeight:'bold', color:'#052B7C' }}&gt;五、宏昊AI助手 · 验收运营&lt;/Text&gt;&#10;  &lt;/Box&gt;&#10;&#10;  &lt;Box style={{ position:'absolute', left:56, top:130, right:56, flexDirection:'row', gap:22 }}&gt;&#10;    {[['37','平台验收项'],['19','问题反馈闭环'],['93.3%','6 月单月通过率']].map((c, i) =&gt; (&#10;      &lt;Box key={i} style={{ flex:1, background:'#F4F7FC', borderRadius:10, padding:'22px 18px', alignItems:'center' }}&gt;&#10;        &lt;Text style={{ fontSize:56, fontWeight:'bold', color:'#4472C4' }}&gt;{c[0]}&lt;/Text&gt;&#10;        &lt;Text style={{ fontSize:18, color:'#1A1A1A', marginTop:6 }}&gt;{c[1]}&lt;/Text&gt;&#10;      &lt;/Box&gt;&#10;    ))}&#10;  &lt;/Box&gt;&#10;&#10;  &lt;Box style={{ position:'absolute', left:56, top:300, right:56, background:'#052B7C', borderRadius:10, padding:'16px 22px' }}&gt;&#10;    &lt;Text style={{ fontSize:18, color:'#FFFFFF', lineHeight:1.5 }}&gt;入职以来 &lt;span style={{ fontWeight:'bold' }}&gt;37 项验收 + 19 项问题反馈闭环&lt;/span&gt;，6 月单月通过率 93.3% → 把「供应商交付」变「可度量、可追溯、有退回机制」的质量门槛。&lt;/Text&gt;&#10;  &lt;/Box&gt;&#10;&#10;  &lt;Box style={{ position:'absolute', left:56, top:400, right:56 }}&gt;&#10;    &lt;Table&#10;      style={{ width:'100%', height:230 }}&#10;      defaultTextStyle={{ fontSize:15, textAlign:'center', color:'#1A1A1A' }}&#10;      defaultCellStyle={{ border:{ left:{width:1,color:'#CCCCCC'}, right:{width:1,color:'#CCCCCC'}, top:{width:1,color:'#CCCCCC'}, bottom:{width:1,color:'#CCCCCC'} } }}&#10;      cells={[&#10;        [ {text:'周期', textStyle:{bold:true,color:'#1A1A1A'}, cellStyle:{background:{color:'#DAE3F3'}}},&#10;          {text:'验收产出', textStyle:{bold:true,color:'#1A1A1A'}, cellStyle:{background:{color:'#DAE3F3'}}},&#10;          {text:'问题反馈', textStyle:{bold:true,color:'#1A1A1A'}, cellStyle:{background:{color:'#DAE3F3'}}},&#10;          {text:'通过情况', textStyle:{bold:true,color:'#1A1A1A'}, cellStyle:{background:{color:'#DAE3F3'}}} ],&#10;        [ '4 月', '3 测试 + 2 验收（5 项）', '4', '—' ],&#10;        [ '5 月', '9 项测试验收', '3', '—' ],&#10;        [ '6 月', '15 用例（5 批次）', '8', {text:'14/15 通过（93.3%）', textStyle:{bold:true,color:'#4472C4'}} ],&#10;        [ '7 月（2607）', '5 轮验收（8 项）', '4', '—' ],&#10;      ]}&#10;    /&gt;&#10;  &lt;/Box&gt;&#10;&#10;  &lt;Box style={{ position:'absolute', left:56, top:668, right:56, flexDirection:'row', justifyContent:'space-between' }}&gt;&#10;    &lt;Text style={{ fontSize:14, color:'#888' }}&gt;入职以来 AI 工作复盘&lt;/Text&gt;&#10;    &lt;Text style={{ fontSize:14, color:'#888' }}&gt;10 / 13&lt;/Text&gt;&#10;  &lt;/Box&gt;&#10;&lt;/Slide&gt;"/>
-        <p:cNvGrpSpPr/>
-        <p:nvPr/>
-      </p:nvGrpSpPr>
-      <p:grpSpPr>
-        <a:xfrm>
-          <a:off x="0" y="0"/>
-          <a:ext cx="0" cy="0"/>
-          <a:chOff x="0" y="0"/>
-          <a:chExt cx="0" cy="0"/>
-        </a:xfrm>
-      </p:grpSpPr>
-      <p:sp>
-        <p:nvSpPr>
-          <p:cNvPr id="13" name="矩形 12"/>
-          <p:cNvSpPr/>
-          <p:nvPr/>
-        </p:nvSpPr>
-        <p:spPr>
-          <a:xfrm>
-            <a:off x="0" y="0"/>
-            <a:ext cx="12192000" cy="6858000"/>
-          </a:xfrm>
-          <a:prstGeom prst="rect">
-            <a:avLst/>
-          </a:prstGeom>
-          <a:solidFill>
-            <a:srgbClr val="FFFFFF"/>
-          </a:solidFill>
-        </p:spPr>
-        <p:txBody>
-          <a:bodyPr/>
-          <a:p/>
-        </p:txBody>
-      </p:sp>
-      <p:sp>
-        <p:nvSpPr>
-          <p:cNvPr id="14" name="矩形 13"/>
-          <p:cNvSpPr/>
-          <p:nvPr/>
-        </p:nvSpPr>
-        <p:spPr>
-          <a:xfrm>
-            <a:off x="533400" y="352425"/>
-            <a:ext cx="76200" cy="323850"/>
-          </a:xfrm>
-          <a:prstGeom prst="rect">
-            <a:avLst/>
-          </a:prstGeom>
-          <a:solidFill>
-            <a:srgbClr val="4472C4"/>
-          </a:solidFill>
-        </p:spPr>
-        <p:txBody>
-          <a:bodyPr/>
-          <a:p/>
-        </p:txBody>
-      </p:sp>
-      <p:sp>
-        <p:nvSpPr>
-          <p:cNvPr id="15" name="文本框 14" descr="{&quot;isTemplate&quot;:true,&quot;type&quot;:&quot;text&quot;}"/>
-          <p:cNvSpPr txBox="1"/>
-          <p:nvPr/>
-        </p:nvSpPr>
-        <p:spPr>
-          <a:xfrm>
-            <a:off x="723900" y="342900"/>
-            <a:ext cx="3467100" cy="342900"/>
-          </a:xfrm>
-          <a:prstGeom prst="rect">
-            <a:avLst/>
-          </a:prstGeom>
-        </p:spPr>
-        <p:txBody>
-          <a:bodyPr wrap="none" lIns="0" tIns="0" rIns="0" bIns="0"/>
-          <a:p>
-            <a:pPr>
-              <a:lnSpc>
-                <a:spcPct val="100000"/>
-              </a:lnSpc>
-            </a:pPr>
-            <a:r>
-              <a:rPr lang="zh-CN" sz="2250" b="1">
-                <a:solidFill>
-                  <a:srgbClr val="052B7C"/>
-                </a:solidFill>
-                <a:latin typeface="微软雅黑" panose="020B0503020204020204" charset="-122"/>
-                <a:ea typeface="微软雅黑" panose="020B0503020204020204" charset="-122"/>
-              </a:rPr>
-              <a:t>五、宏昊</a:t>
-            </a:r>
-            <a:r>
-              <a:rPr lang="en-US" sz="2250" b="1">
-                <a:solidFill>
-                  <a:srgbClr val="052B7C"/>
-                </a:solidFill>
-                <a:latin typeface="微软雅黑" panose="020B0503020204020204" charset="-122"/>
-                <a:ea typeface="微软雅黑" panose="020B0503020204020204" charset="-122"/>
-              </a:rPr>
-              <a:t>AI</a:t>
-            </a:r>
-            <a:r>
-              <a:rPr lang="zh-CN" sz="2250" b="1">
-                <a:solidFill>
-                  <a:srgbClr val="052B7C"/>
-                </a:solidFill>
-                <a:latin typeface="微软雅黑" panose="020B0503020204020204" charset="-122"/>
-                <a:ea typeface="微软雅黑" panose="020B0503020204020204" charset="-122"/>
-              </a:rPr>
-              <a:t>助手</a:t>
-            </a:r>
-            <a:r>
-              <a:rPr lang="en-US" sz="2250" b="1">
-                <a:solidFill>
-                  <a:srgbClr val="052B7C"/>
-                </a:solidFill>
-                <a:latin typeface="微软雅黑" panose="020B0503020204020204" charset="-122"/>
-                <a:ea typeface="微软雅黑" panose="020B0503020204020204" charset="-122"/>
-              </a:rPr>
-              <a:t> · </a:t>
-            </a:r>
-            <a:r>
-              <a:rPr lang="zh-CN" sz="2250" b="1">
-                <a:solidFill>
-                  <a:srgbClr val="052B7C"/>
-                </a:solidFill>
-                <a:latin typeface="微软雅黑" panose="020B0503020204020204" charset="-122"/>
-                <a:ea typeface="微软雅黑" panose="020B0503020204020204" charset="-122"/>
-              </a:rPr>
-              <a:t>验收运营</a:t>
-            </a:r>
-            <a:endParaRPr lang="zh-CN" sz="2250" b="1">
-              <a:solidFill>
-                <a:srgbClr val="052B7C"/>
-              </a:solidFill>
-              <a:latin typeface="微软雅黑" panose="020B0503020204020204" charset="-122"/>
-              <a:ea typeface="微软雅黑" panose="020B0503020204020204" charset="-122"/>
-            </a:endParaRPr>
-          </a:p>
-        </p:txBody>
-      </p:sp>
-      <p:sp>
-        <p:nvSpPr>
-          <p:cNvPr id="16" name="圆角矩形 15"/>
-          <p:cNvSpPr/>
-          <p:nvPr/>
-        </p:nvSpPr>
-        <p:spPr>
-          <a:xfrm>
-            <a:off x="533400" y="1238250"/>
-            <a:ext cx="3571875" cy="1333500"/>
-          </a:xfrm>
-          <a:prstGeom prst="roundRect">
-            <a:avLst>
-              <a:gd name="adj" fmla="val 7143"/>
-            </a:avLst>
-          </a:prstGeom>
-          <a:solidFill>
-            <a:srgbClr val="F4F7FC"/>
-          </a:solidFill>
-        </p:spPr>
-        <p:txBody>
-          <a:bodyPr/>
-          <a:p/>
-        </p:txBody>
-      </p:sp>
-      <p:sp>
-        <p:nvSpPr>
-          <p:cNvPr id="17" name="文本框 16" descr="{&quot;isTemplate&quot;:true,&quot;type&quot;:&quot;text&quot;}"/>
-          <p:cNvSpPr txBox="1"/>
-          <p:nvPr/>
-        </p:nvSpPr>
-        <p:spPr>
-          <a:xfrm>
-            <a:off x="1981200" y="1447800"/>
-            <a:ext cx="685800" cy="647700"/>
-          </a:xfrm>
-          <a:prstGeom prst="rect">
-            <a:avLst/>
-          </a:prstGeom>
-        </p:spPr>
-        <p:txBody>
-          <a:bodyPr wrap="none" lIns="0" tIns="0" rIns="0" bIns="0"/>
-          <a:p>
-            <a:pPr>
-              <a:lnSpc>
-                <a:spcPct val="100000"/>
-              </a:lnSpc>
-            </a:pPr>
-            <a:r>
-              <a:rPr lang="en-US" sz="4200" b="1">
-                <a:solidFill>
-                  <a:srgbClr val="4472C4"/>
-                </a:solidFill>
-                <a:latin typeface="微软雅黑" panose="020B0503020204020204" charset="-122"/>
-                <a:ea typeface="微软雅黑" panose="020B0503020204020204" charset="-122"/>
-              </a:rPr>
-              <a:t>37</a:t>
-            </a:r>
-            <a:endParaRPr lang="en-US" sz="4200" b="1">
-              <a:solidFill>
-                <a:srgbClr val="4472C4"/>
-              </a:solidFill>
-              <a:latin typeface="微软雅黑" panose="020B0503020204020204" charset="-122"/>
-              <a:ea typeface="微软雅黑" panose="020B0503020204020204" charset="-122"/>
-            </a:endParaRPr>
-          </a:p>
-        </p:txBody>
-      </p:sp>
-      <p:sp>
-        <p:nvSpPr>
-          <p:cNvPr id="18" name="文本框 17" descr="{&quot;isTemplate&quot;:true,&quot;type&quot;:&quot;text&quot;}"/>
-          <p:cNvSpPr txBox="1"/>
-          <p:nvPr/>
-        </p:nvSpPr>
-        <p:spPr>
-          <a:xfrm>
-            <a:off x="1895475" y="2152650"/>
-            <a:ext cx="857250" cy="209550"/>
-          </a:xfrm>
-          <a:prstGeom prst="rect">
-            <a:avLst/>
-          </a:prstGeom>
-        </p:spPr>
-        <p:txBody>
-          <a:bodyPr wrap="none" lIns="0" tIns="0" rIns="0" bIns="0"/>
-          <a:p>
-            <a:pPr>
-              <a:lnSpc>
-                <a:spcPct val="100000"/>
-              </a:lnSpc>
-            </a:pPr>
-            <a:r>
-              <a:rPr lang="zh-CN" sz="1350">
-                <a:solidFill>
-                  <a:srgbClr val="1A1A1A"/>
-                </a:solidFill>
-                <a:latin typeface="微软雅黑" panose="020B0503020204020204" charset="-122"/>
-                <a:ea typeface="微软雅黑" panose="020B0503020204020204" charset="-122"/>
-              </a:rPr>
-              <a:t>平台验收项</a:t>
-            </a:r>
-            <a:endParaRPr lang="zh-CN" sz="1350">
-              <a:solidFill>
-                <a:srgbClr val="1A1A1A"/>
-              </a:solidFill>
-              <a:latin typeface="微软雅黑" panose="020B0503020204020204" charset="-122"/>
-              <a:ea typeface="微软雅黑" panose="020B0503020204020204" charset="-122"/>
-            </a:endParaRPr>
-          </a:p>
-        </p:txBody>
-      </p:sp>
-      <p:sp>
-        <p:nvSpPr>
-          <p:cNvPr id="19" name="圆角矩形 18"/>
-          <p:cNvSpPr/>
-          <p:nvPr/>
-        </p:nvSpPr>
-        <p:spPr>
-          <a:xfrm>
-            <a:off x="4314825" y="1238250"/>
-            <a:ext cx="3562350" cy="1333500"/>
-          </a:xfrm>
-          <a:prstGeom prst="roundRect">
-            <a:avLst>
-              <a:gd name="adj" fmla="val 7143"/>
-            </a:avLst>
-          </a:prstGeom>
-          <a:solidFill>
-            <a:srgbClr val="F4F7FC"/>
-          </a:solidFill>
-        </p:spPr>
-        <p:txBody>
-          <a:bodyPr/>
-          <a:p/>
-        </p:txBody>
-      </p:sp>
-      <p:sp>
-        <p:nvSpPr>
-          <p:cNvPr id="20" name="文本框 19" descr="{&quot;isTemplate&quot;:true,&quot;type&quot;:&quot;text&quot;}"/>
-          <p:cNvSpPr txBox="1"/>
-          <p:nvPr/>
-        </p:nvSpPr>
-        <p:spPr>
-          <a:xfrm>
-            <a:off x="5753100" y="1447800"/>
-            <a:ext cx="685800" cy="647700"/>
-          </a:xfrm>
-          <a:prstGeom prst="rect">
-            <a:avLst/>
-          </a:prstGeom>
-        </p:spPr>
-        <p:txBody>
-          <a:bodyPr wrap="none" lIns="0" tIns="0" rIns="0" bIns="0"/>
-          <a:p>
-            <a:pPr>
-              <a:lnSpc>
-                <a:spcPct val="100000"/>
-              </a:lnSpc>
-            </a:pPr>
-            <a:r>
-              <a:rPr lang="en-US" sz="4200" b="1">
-                <a:solidFill>
-                  <a:srgbClr val="4472C4"/>
-                </a:solidFill>
-                <a:latin typeface="微软雅黑" panose="020B0503020204020204" charset="-122"/>
-                <a:ea typeface="微软雅黑" panose="020B0503020204020204" charset="-122"/>
-              </a:rPr>
-              <a:t>19</a:t>
-            </a:r>
-            <a:endParaRPr lang="en-US" sz="4200" b="1">
-              <a:solidFill>
-                <a:srgbClr val="4472C4"/>
-              </a:solidFill>
-              <a:latin typeface="微软雅黑" panose="020B0503020204020204" charset="-122"/>
-              <a:ea typeface="微软雅黑" panose="020B0503020204020204" charset="-122"/>
-            </a:endParaRPr>
-          </a:p>
-        </p:txBody>
-      </p:sp>
-      <p:sp>
-        <p:nvSpPr>
-          <p:cNvPr id="21" name="文本框 20" descr="{&quot;isTemplate&quot;:true,&quot;type&quot;:&quot;text&quot;}"/>
-          <p:cNvSpPr txBox="1"/>
-          <p:nvPr/>
-        </p:nvSpPr>
-        <p:spPr>
-          <a:xfrm>
-            <a:off x="5581650" y="2152650"/>
-            <a:ext cx="1028700" cy="209550"/>
-          </a:xfrm>
-          <a:prstGeom prst="rect">
-            <a:avLst/>
-          </a:prstGeom>
-        </p:spPr>
-        <p:txBody>
-          <a:bodyPr wrap="none" lIns="0" tIns="0" rIns="0" bIns="0"/>
-          <a:p>
-            <a:pPr>
-              <a:lnSpc>
-                <a:spcPct val="100000"/>
-              </a:lnSpc>
-            </a:pPr>
-            <a:r>
-              <a:rPr lang="zh-CN" sz="1350">
-                <a:solidFill>
-                  <a:srgbClr val="1A1A1A"/>
-                </a:solidFill>
-                <a:latin typeface="微软雅黑" panose="020B0503020204020204" charset="-122"/>
-                <a:ea typeface="微软雅黑" panose="020B0503020204020204" charset="-122"/>
-              </a:rPr>
-              <a:t>问题反馈闭环</a:t>
-            </a:r>
-            <a:endParaRPr lang="zh-CN" sz="1350">
-              <a:solidFill>
-                <a:srgbClr val="1A1A1A"/>
-              </a:solidFill>
-              <a:latin typeface="微软雅黑" panose="020B0503020204020204" charset="-122"/>
-              <a:ea typeface="微软雅黑" panose="020B0503020204020204" charset="-122"/>
-            </a:endParaRPr>
-          </a:p>
-        </p:txBody>
-      </p:sp>
-      <p:sp>
-        <p:nvSpPr>
-          <p:cNvPr id="22" name="圆角矩形 21"/>
-          <p:cNvSpPr/>
-          <p:nvPr/>
-        </p:nvSpPr>
-        <p:spPr>
-          <a:xfrm>
-            <a:off x="8086725" y="1238250"/>
-            <a:ext cx="3571875" cy="1333500"/>
-          </a:xfrm>
-          <a:prstGeom prst="roundRect">
-            <a:avLst>
-              <a:gd name="adj" fmla="val 7143"/>
-            </a:avLst>
-          </a:prstGeom>
-          <a:solidFill>
-            <a:srgbClr val="F4F7FC"/>
-          </a:solidFill>
-        </p:spPr>
-        <p:txBody>
-          <a:bodyPr/>
-          <a:p/>
-        </p:txBody>
-      </p:sp>
-      <p:sp>
-        <p:nvSpPr>
-          <p:cNvPr id="23" name="文本框 22" descr="{&quot;isTemplate&quot;:true,&quot;type&quot;:&quot;text&quot;}"/>
-          <p:cNvSpPr txBox="1"/>
-          <p:nvPr/>
-        </p:nvSpPr>
-        <p:spPr>
-          <a:xfrm>
-            <a:off x="8963025" y="1447800"/>
-            <a:ext cx="1828800" cy="647700"/>
-          </a:xfrm>
-          <a:prstGeom prst="rect">
-            <a:avLst/>
-          </a:prstGeom>
-        </p:spPr>
-        <p:txBody>
-          <a:bodyPr wrap="none" lIns="0" tIns="0" rIns="0" bIns="0"/>
-          <a:p>
-            <a:pPr>
-              <a:lnSpc>
-                <a:spcPct val="100000"/>
-              </a:lnSpc>
-            </a:pPr>
-            <a:r>
-              <a:rPr lang="en-US" sz="4200" b="1">
-                <a:solidFill>
-                  <a:srgbClr val="4472C4"/>
-                </a:solidFill>
-                <a:latin typeface="微软雅黑" panose="020B0503020204020204" charset="-122"/>
-                <a:ea typeface="微软雅黑" panose="020B0503020204020204" charset="-122"/>
-              </a:rPr>
-              <a:t>93.3%</a:t>
-            </a:r>
-            <a:endParaRPr lang="en-US" sz="4200" b="1">
-              <a:solidFill>
-                <a:srgbClr val="4472C4"/>
-              </a:solidFill>
-              <a:latin typeface="微软雅黑" panose="020B0503020204020204" charset="-122"/>
-              <a:ea typeface="微软雅黑" panose="020B0503020204020204" charset="-122"/>
-            </a:endParaRPr>
-          </a:p>
-        </p:txBody>
-      </p:sp>
-      <p:sp>
-        <p:nvSpPr>
-          <p:cNvPr id="24" name="文本框 23" descr="{&quot;isTemplate&quot;:true,&quot;type&quot;:&quot;text&quot;}"/>
-          <p:cNvSpPr txBox="1"/>
-          <p:nvPr/>
-        </p:nvSpPr>
-        <p:spPr>
-          <a:xfrm>
-            <a:off x="9286875" y="2152650"/>
-            <a:ext cx="1181100" cy="209550"/>
-          </a:xfrm>
-          <a:prstGeom prst="rect">
-            <a:avLst/>
-          </a:prstGeom>
-        </p:spPr>
-        <p:txBody>
-          <a:bodyPr wrap="none" lIns="0" tIns="0" rIns="0" bIns="0"/>
-          <a:p>
-            <a:pPr>
-              <a:lnSpc>
-                <a:spcPct val="100000"/>
-              </a:lnSpc>
-            </a:pPr>
-            <a:r>
-              <a:rPr lang="en-US" sz="1350">
-                <a:solidFill>
-                  <a:srgbClr val="1A1A1A"/>
-                </a:solidFill>
-                <a:latin typeface="微软雅黑" panose="020B0503020204020204" charset="-122"/>
-                <a:ea typeface="微软雅黑" panose="020B0503020204020204" charset="-122"/>
-              </a:rPr>
-              <a:t>6 </a:t>
-            </a:r>
-            <a:r>
-              <a:rPr lang="zh-CN" sz="1350">
-                <a:solidFill>
-                  <a:srgbClr val="1A1A1A"/>
-                </a:solidFill>
-                <a:latin typeface="微软雅黑" panose="020B0503020204020204" charset="-122"/>
-                <a:ea typeface="微软雅黑" panose="020B0503020204020204" charset="-122"/>
-              </a:rPr>
-              <a:t>月单月通过率</a:t>
-            </a:r>
-            <a:endParaRPr lang="zh-CN" sz="1350">
-              <a:solidFill>
-                <a:srgbClr val="1A1A1A"/>
-              </a:solidFill>
-              <a:latin typeface="微软雅黑" panose="020B0503020204020204" charset="-122"/>
-              <a:ea typeface="微软雅黑" panose="020B0503020204020204" charset="-122"/>
-            </a:endParaRPr>
-          </a:p>
-        </p:txBody>
-      </p:sp>
-      <p:sp>
-        <p:nvSpPr>
-          <p:cNvPr id="25" name="圆角矩形 24"/>
-          <p:cNvSpPr/>
-          <p:nvPr/>
-        </p:nvSpPr>
-        <p:spPr>
-          <a:xfrm>
-            <a:off x="533400" y="2857500"/>
-            <a:ext cx="11125200" cy="619125"/>
-          </a:xfrm>
-          <a:prstGeom prst="roundRect">
-            <a:avLst>
-              <a:gd name="adj" fmla="val 15385"/>
-            </a:avLst>
-          </a:prstGeom>
-          <a:solidFill>
-            <a:srgbClr val="052B7C"/>
-          </a:solidFill>
-        </p:spPr>
-        <p:txBody>
-          <a:bodyPr/>
-          <a:p/>
-        </p:txBody>
-      </p:sp>
-      <p:sp>
-        <p:nvSpPr>
-          <p:cNvPr id="26" name="文本框 25" descr="{&quot;isTemplate&quot;:true,&quot;type&quot;:&quot;text&quot;}"/>
-          <p:cNvSpPr txBox="1"/>
-          <p:nvPr/>
-        </p:nvSpPr>
-        <p:spPr>
-          <a:xfrm>
-            <a:off x="742950" y="3009900"/>
-            <a:ext cx="10706100" cy="314325"/>
-          </a:xfrm>
-          <a:prstGeom prst="rect">
-            <a:avLst/>
-          </a:prstGeom>
-        </p:spPr>
-        <p:txBody>
-          <a:bodyPr wrap="none" lIns="0" tIns="0" rIns="0" bIns="0"/>
-          <a:p>
-            <a:pPr>
-              <a:lnSpc>
-                <a:spcPct val="150000"/>
-              </a:lnSpc>
-            </a:pPr>
-            <a:r>
-              <a:rPr lang="zh-CN" sz="1350">
-                <a:solidFill>
-                  <a:srgbClr val="FFFFFF"/>
-                </a:solidFill>
-                <a:latin typeface="微软雅黑" panose="020B0503020204020204" charset="-122"/>
-                <a:ea typeface="微软雅黑" panose="020B0503020204020204" charset="-122"/>
-              </a:rPr>
-              <a:t>入职以来</a:t>
-            </a:r>
-            <a:r>
-              <a:rPr lang="en-US" sz="1350">
-                <a:solidFill>
-                  <a:srgbClr val="FFFFFF"/>
-                </a:solidFill>
-                <a:latin typeface="微软雅黑" panose="020B0503020204020204" charset="-122"/>
-                <a:ea typeface="微软雅黑" panose="020B0503020204020204" charset="-122"/>
-              </a:rPr>
-              <a:t> </a:t>
-            </a:r>
-            <a:r>
-              <a:rPr lang="en-US" sz="1350" b="1">
-                <a:solidFill>
-                  <a:srgbClr val="FFFFFF"/>
-                </a:solidFill>
-                <a:latin typeface="微软雅黑" panose="020B0503020204020204" charset="-122"/>
-                <a:ea typeface="微软雅黑" panose="020B0503020204020204" charset="-122"/>
-              </a:rPr>
-              <a:t>37 </a:t>
-            </a:r>
-            <a:r>
-              <a:rPr lang="zh-CN" sz="1350" b="1">
-                <a:solidFill>
-                  <a:srgbClr val="FFFFFF"/>
-                </a:solidFill>
-                <a:latin typeface="微软雅黑" panose="020B0503020204020204" charset="-122"/>
-                <a:ea typeface="微软雅黑" panose="020B0503020204020204" charset="-122"/>
-              </a:rPr>
-              <a:t>项验收</a:t>
-            </a:r>
-            <a:r>
-              <a:rPr lang="en-US" sz="1350" b="1">
-                <a:solidFill>
-                  <a:srgbClr val="FFFFFF"/>
-                </a:solidFill>
-                <a:latin typeface="微软雅黑" panose="020B0503020204020204" charset="-122"/>
-                <a:ea typeface="微软雅黑" panose="020B0503020204020204" charset="-122"/>
-              </a:rPr>
-              <a:t> + 19 </a:t>
-            </a:r>
-            <a:r>
-              <a:rPr lang="zh-CN" sz="1350" b="1">
-                <a:solidFill>
-                  <a:srgbClr val="FFFFFF"/>
-                </a:solidFill>
-                <a:latin typeface="微软雅黑" panose="020B0503020204020204" charset="-122"/>
-                <a:ea typeface="微软雅黑" panose="020B0503020204020204" charset="-122"/>
-              </a:rPr>
-              <a:t>项问题反馈闭环</a:t>
-            </a:r>
-            <a:r>
-              <a:rPr lang="zh-CN" sz="1350">
-                <a:solidFill>
-                  <a:srgbClr val="FFFFFF"/>
-                </a:solidFill>
-                <a:latin typeface="微软雅黑" panose="020B0503020204020204" charset="-122"/>
-                <a:ea typeface="微软雅黑" panose="020B0503020204020204" charset="-122"/>
-              </a:rPr>
-              <a:t>，</a:t>
-            </a:r>
-            <a:r>
-              <a:rPr lang="en-US" sz="1350">
-                <a:solidFill>
-                  <a:srgbClr val="FFFFFF"/>
-                </a:solidFill>
-                <a:latin typeface="微软雅黑" panose="020B0503020204020204" charset="-122"/>
-                <a:ea typeface="微软雅黑" panose="020B0503020204020204" charset="-122"/>
-              </a:rPr>
-              <a:t>6 </a:t>
-            </a:r>
-            <a:r>
-              <a:rPr lang="zh-CN" sz="1350">
-                <a:solidFill>
-                  <a:srgbClr val="FFFFFF"/>
-                </a:solidFill>
-                <a:latin typeface="微软雅黑" panose="020B0503020204020204" charset="-122"/>
-                <a:ea typeface="微软雅黑" panose="020B0503020204020204" charset="-122"/>
-              </a:rPr>
-              <a:t>月单月通过率</a:t>
-            </a:r>
-            <a:r>
-              <a:rPr lang="en-US" sz="1350">
-                <a:solidFill>
-                  <a:srgbClr val="FFFFFF"/>
-                </a:solidFill>
-                <a:latin typeface="微软雅黑" panose="020B0503020204020204" charset="-122"/>
-                <a:ea typeface="微软雅黑" panose="020B0503020204020204" charset="-122"/>
-              </a:rPr>
-              <a:t> 93.3% → </a:t>
-            </a:r>
-            <a:r>
-              <a:rPr lang="zh-CN" sz="1350">
-                <a:solidFill>
-                  <a:srgbClr val="FFFFFF"/>
-                </a:solidFill>
-                <a:latin typeface="微软雅黑" panose="020B0503020204020204" charset="-122"/>
-                <a:ea typeface="微软雅黑" panose="020B0503020204020204" charset="-122"/>
-              </a:rPr>
-              <a:t>把「供应商交付」变「可度量、可追溯、有退回机制」的质量门槛。</a:t>
-            </a:r>
-            <a:endParaRPr lang="zh-CN" sz="1350">
-              <a:solidFill>
-                <a:srgbClr val="FFFFFF"/>
-              </a:solidFill>
-              <a:latin typeface="微软雅黑" panose="020B0503020204020204" charset="-122"/>
-              <a:ea typeface="微软雅黑" panose="020B0503020204020204" charset="-122"/>
-            </a:endParaRPr>
-          </a:p>
-        </p:txBody>
-      </p:sp>
-      <p:graphicFrame>
-        <p:nvGraphicFramePr>
-          <p:cNvPr id="27" name="表格 26"/>
-          <p:cNvGraphicFramePr/>
-          <p:nvPr/>
-        </p:nvGraphicFramePr>
-        <p:xfrm>
-          <a:off x="533400" y="3810000"/>
-          <a:ext cx="11125200" cy="2190750"/>
-        </p:xfrm>
-        <a:graphic>
-          <a:graphicData uri="http://schemas.openxmlformats.org/drawingml/2006/table">
-            <a:tbl>
-              <a:tblPr/>
-              <a:tblGrid>
-                <a:gridCol w="2249357"/>
-                <a:gridCol w="3790905"/>
-                <a:gridCol w="1511151"/>
-                <a:gridCol w="3573786"/>
-              </a:tblGrid>
-              <a:tr h="438150">
-                <a:tc>
-                  <a:txBody>
-                    <a:bodyPr wrap="square">
-                      <a:spAutoFit/>
-                    </a:bodyPr>
-                    <a:p>
-                      <a:pPr marL="114300" marR="114300" algn="l">
-                        <a:lnSpc>
-                          <a:spcPct val="120000"/>
-                        </a:lnSpc>
-                      </a:pPr>
-                      <a:r>
-                        <a:rPr sz="1125" b="1">
-                          <a:solidFill>
-                            <a:srgbClr val="1A1A1A"/>
-                          </a:solidFill>
-                          <a:latin typeface="微软雅黑" panose="020B0503020204020204" charset="-122"/>
-                          <a:ea typeface="微软雅黑" panose="020B0503020204020204" charset="-122"/>
-                        </a:rPr>
-                        <a:t>周期</a:t>
-                      </a:r>
-                      <a:endParaRPr sz="1125" b="1">
-                        <a:solidFill>
-                          <a:srgbClr val="1A1A1A"/>
-                        </a:solidFill>
-                        <a:latin typeface="微软雅黑" panose="020B0503020204020204" charset="-122"/>
-                        <a:ea typeface="微软雅黑" panose="020B0503020204020204" charset="-122"/>
-                      </a:endParaRPr>
-                    </a:p>
-                  </a:txBody>
-                  <a:tcPr marL="0" marR="0" marT="0" marB="0" anchor="ctr">
-                    <a:lnL>
-                      <a:noFill/>
-                    </a:lnL>
-                    <a:lnR>
-                      <a:noFill/>
-                    </a:lnR>
-                    <a:lnT>
-                      <a:noFill/>
-                    </a:lnT>
-                    <a:lnB>
-                      <a:noFill/>
-                    </a:lnB>
-                    <a:solidFill>
-                      <a:srgbClr val="DAE3F3"/>
-                    </a:solidFill>
-                  </a:tcPr>
-                </a:tc>
-                <a:tc>
-                  <a:txBody>
-                    <a:bodyPr wrap="square">
-                      <a:spAutoFit/>
-                    </a:bodyPr>
-                    <a:p>
-                      <a:pPr marL="114300" marR="114300" algn="l">
-                        <a:lnSpc>
-                          <a:spcPct val="120000"/>
-                        </a:lnSpc>
-                      </a:pPr>
-                      <a:r>
-                        <a:rPr sz="1125" b="1">
-                          <a:solidFill>
-                            <a:srgbClr val="1A1A1A"/>
-                          </a:solidFill>
-                          <a:latin typeface="微软雅黑" panose="020B0503020204020204" charset="-122"/>
-                          <a:ea typeface="微软雅黑" panose="020B0503020204020204" charset="-122"/>
-                        </a:rPr>
-                        <a:t>验收产出</a:t>
-                      </a:r>
-                      <a:endParaRPr sz="1125" b="1">
-                        <a:solidFill>
-                          <a:srgbClr val="1A1A1A"/>
-                        </a:solidFill>
-                        <a:latin typeface="微软雅黑" panose="020B0503020204020204" charset="-122"/>
-                        <a:ea typeface="微软雅黑" panose="020B0503020204020204" charset="-122"/>
-                      </a:endParaRPr>
-                    </a:p>
-                  </a:txBody>
-                  <a:tcPr marL="0" marR="0" marT="0" marB="0" anchor="ctr">
-                    <a:lnL>
-                      <a:noFill/>
-                    </a:lnL>
-                    <a:lnR>
-                      <a:noFill/>
-                    </a:lnR>
-                    <a:lnT>
-                      <a:noFill/>
-                    </a:lnT>
-                    <a:lnB>
-                      <a:noFill/>
-                    </a:lnB>
-                    <a:solidFill>
-                      <a:srgbClr val="DAE3F3"/>
-                    </a:solidFill>
-                  </a:tcPr>
-                </a:tc>
-                <a:tc>
-                  <a:txBody>
-                    <a:bodyPr wrap="square">
-                      <a:spAutoFit/>
-                    </a:bodyPr>
-                    <a:p>
-                      <a:pPr marL="114300" marR="114300" algn="l">
-                        <a:lnSpc>
-                          <a:spcPct val="120000"/>
-                        </a:lnSpc>
-                      </a:pPr>
-                      <a:r>
-                        <a:rPr sz="1125" b="1">
-                          <a:solidFill>
-                            <a:srgbClr val="1A1A1A"/>
-                          </a:solidFill>
-                          <a:latin typeface="微软雅黑" panose="020B0503020204020204" charset="-122"/>
-                          <a:ea typeface="微软雅黑" panose="020B0503020204020204" charset="-122"/>
-                        </a:rPr>
-                        <a:t>问题反馈</a:t>
-                      </a:r>
-                      <a:endParaRPr sz="1125" b="1">
-                        <a:solidFill>
-                          <a:srgbClr val="1A1A1A"/>
-                        </a:solidFill>
-                        <a:latin typeface="微软雅黑" panose="020B0503020204020204" charset="-122"/>
-                        <a:ea typeface="微软雅黑" panose="020B0503020204020204" charset="-122"/>
-                      </a:endParaRPr>
-                    </a:p>
-                  </a:txBody>
-                  <a:tcPr marL="0" marR="0" marT="0" marB="0" anchor="ctr">
-                    <a:lnL>
-                      <a:noFill/>
-                    </a:lnL>
-                    <a:lnR>
-                      <a:noFill/>
-                    </a:lnR>
-                    <a:lnT>
-                      <a:noFill/>
-                    </a:lnT>
-                    <a:lnB>
-                      <a:noFill/>
-                    </a:lnB>
-                    <a:solidFill>
-                      <a:srgbClr val="DAE3F3"/>
-                    </a:solidFill>
-                  </a:tcPr>
-                </a:tc>
-                <a:tc>
-                  <a:txBody>
-                    <a:bodyPr wrap="square">
-                      <a:spAutoFit/>
-                    </a:bodyPr>
-                    <a:p>
-                      <a:pPr marL="114300" marR="114300" algn="l">
-                        <a:lnSpc>
-                          <a:spcPct val="120000"/>
-                        </a:lnSpc>
-                      </a:pPr>
-                      <a:r>
-                        <a:rPr sz="1125" b="1">
-                          <a:solidFill>
-                            <a:srgbClr val="1A1A1A"/>
-                          </a:solidFill>
-                          <a:latin typeface="微软雅黑" panose="020B0503020204020204" charset="-122"/>
-                          <a:ea typeface="微软雅黑" panose="020B0503020204020204" charset="-122"/>
-                        </a:rPr>
-                        <a:t>通过情况</a:t>
-                      </a:r>
-                      <a:endParaRPr sz="1125" b="1">
-                        <a:solidFill>
-                          <a:srgbClr val="1A1A1A"/>
-                        </a:solidFill>
-                        <a:latin typeface="微软雅黑" panose="020B0503020204020204" charset="-122"/>
-                        <a:ea typeface="微软雅黑" panose="020B0503020204020204" charset="-122"/>
-                      </a:endParaRPr>
-                    </a:p>
-                  </a:txBody>
-                  <a:tcPr marL="0" marR="0" marT="0" marB="0" anchor="ctr">
-                    <a:lnL>
-                      <a:noFill/>
-                    </a:lnL>
-                    <a:lnR>
-                      <a:noFill/>
-                    </a:lnR>
-                    <a:lnT>
-                      <a:noFill/>
-                    </a:lnT>
-                    <a:lnB>
-                      <a:noFill/>
-                    </a:lnB>
-                    <a:solidFill>
-                      <a:srgbClr val="DAE3F3"/>
-                    </a:solidFill>
-                  </a:tcPr>
-                </a:tc>
-              </a:tr>
-              <a:tr h="438150">
-                <a:tc>
-                  <a:txBody>
-                    <a:bodyPr wrap="square">
-                      <a:spAutoFit/>
-                    </a:bodyPr>
-                    <a:p>
-                      <a:pPr marL="114300" marR="114300" algn="l">
-                        <a:lnSpc>
-                          <a:spcPct val="120000"/>
-                        </a:lnSpc>
-                      </a:pPr>
-                      <a:r>
-                        <a:rPr sz="1125">
-                          <a:solidFill>
-                            <a:srgbClr val="1A1A1A"/>
-                          </a:solidFill>
-                          <a:latin typeface="微软雅黑" panose="020B0503020204020204" charset="-122"/>
-                          <a:ea typeface="微软雅黑" panose="020B0503020204020204" charset="-122"/>
-                        </a:rPr>
-                        <a:t>4 月</a:t>
-                      </a:r>
-                      <a:endParaRPr sz="1125">
-                        <a:solidFill>
-                          <a:srgbClr val="1A1A1A"/>
-                        </a:solidFill>
-                        <a:latin typeface="微软雅黑" panose="020B0503020204020204" charset="-122"/>
-                        <a:ea typeface="微软雅黑" panose="020B0503020204020204" charset="-122"/>
-                      </a:endParaRPr>
-                    </a:p>
-                  </a:txBody>
-                  <a:tcPr marL="0" marR="0" marT="0" marB="0" anchor="ctr">
-                    <a:lnL>
-                      <a:noFill/>
-                    </a:lnL>
-                    <a:lnR>
-                      <a:noFill/>
-                    </a:lnR>
-                    <a:lnT>
-                      <a:noFill/>
-                    </a:lnT>
-                    <a:lnB>
-                      <a:noFill/>
-                    </a:lnB>
-                  </a:tcPr>
-                </a:tc>
-                <a:tc>
-                  <a:txBody>
-                    <a:bodyPr wrap="square">
-                      <a:spAutoFit/>
-                    </a:bodyPr>
-                    <a:p>
-                      <a:pPr marL="114300" marR="114300" algn="l">
-                        <a:lnSpc>
-                          <a:spcPct val="120000"/>
-                        </a:lnSpc>
-                      </a:pPr>
-                      <a:r>
-                        <a:rPr sz="1125">
-                          <a:solidFill>
-                            <a:srgbClr val="1A1A1A"/>
-                          </a:solidFill>
-                          <a:latin typeface="微软雅黑" panose="020B0503020204020204" charset="-122"/>
-                          <a:ea typeface="微软雅黑" panose="020B0503020204020204" charset="-122"/>
-                        </a:rPr>
-                        <a:t>3 测试 + 2 验收（5 项）</a:t>
-                      </a:r>
-                      <a:endParaRPr sz="1125">
-                        <a:solidFill>
-                          <a:srgbClr val="1A1A1A"/>
-                        </a:solidFill>
-                        <a:latin typeface="微软雅黑" panose="020B0503020204020204" charset="-122"/>
-                        <a:ea typeface="微软雅黑" panose="020B0503020204020204" charset="-122"/>
-                      </a:endParaRPr>
-                    </a:p>
-                  </a:txBody>
-                  <a:tcPr marL="0" marR="0" marT="0" marB="0" anchor="ctr">
-                    <a:lnL>
-                      <a:noFill/>
-                    </a:lnL>
-                    <a:lnR>
-                      <a:noFill/>
-                    </a:lnR>
-                    <a:lnT>
-                      <a:noFill/>
-                    </a:lnT>
-                    <a:lnB>
-                      <a:noFill/>
-                    </a:lnB>
-                  </a:tcPr>
-                </a:tc>
-                <a:tc>
-                  <a:txBody>
-                    <a:bodyPr wrap="square">
-                      <a:spAutoFit/>
-                    </a:bodyPr>
-                    <a:p>
-                      <a:pPr marL="114300" marR="114300" algn="l">
-                        <a:lnSpc>
-                          <a:spcPct val="120000"/>
-                        </a:lnSpc>
-                      </a:pPr>
-                      <a:r>
-                        <a:rPr sz="1125">
-                          <a:solidFill>
-                            <a:srgbClr val="1A1A1A"/>
-                          </a:solidFill>
-                          <a:latin typeface="微软雅黑" panose="020B0503020204020204" charset="-122"/>
-                          <a:ea typeface="微软雅黑" panose="020B0503020204020204" charset="-122"/>
-                        </a:rPr>
-                        <a:t>4</a:t>
-                      </a:r>
-                      <a:endParaRPr sz="1125">
-                        <a:solidFill>
-                          <a:srgbClr val="1A1A1A"/>
-                        </a:solidFill>
-                        <a:latin typeface="微软雅黑" panose="020B0503020204020204" charset="-122"/>
-                        <a:ea typeface="微软雅黑" panose="020B0503020204020204" charset="-122"/>
-                      </a:endParaRPr>
-                    </a:p>
-                  </a:txBody>
-                  <a:tcPr marL="0" marR="0" marT="0" marB="0" anchor="ctr">
-                    <a:lnL>
-                      <a:noFill/>
-                    </a:lnL>
-                    <a:lnR>
-                      <a:noFill/>
-                    </a:lnR>
-                    <a:lnT>
-                      <a:noFill/>
-                    </a:lnT>
-                    <a:lnB>
-                      <a:noFill/>
-                    </a:lnB>
-                  </a:tcPr>
-                </a:tc>
-                <a:tc>
-                  <a:txBody>
-                    <a:bodyPr wrap="square">
-                      <a:spAutoFit/>
-                    </a:bodyPr>
-                    <a:p>
-                      <a:pPr marL="114300" marR="114300" algn="l">
-                        <a:lnSpc>
-                          <a:spcPct val="120000"/>
-                        </a:lnSpc>
-                      </a:pPr>
-                      <a:r>
-                        <a:rPr sz="1125">
-                          <a:solidFill>
-                            <a:srgbClr val="1A1A1A"/>
-                          </a:solidFill>
-                          <a:latin typeface="微软雅黑" panose="020B0503020204020204" charset="-122"/>
-                          <a:ea typeface="微软雅黑" panose="020B0503020204020204" charset="-122"/>
-                        </a:rPr>
-                        <a:t>—</a:t>
-                      </a:r>
-                      <a:endParaRPr sz="1125">
-                        <a:solidFill>
-                          <a:srgbClr val="1A1A1A"/>
-                        </a:solidFill>
-                        <a:latin typeface="微软雅黑" panose="020B0503020204020204" charset="-122"/>
-                        <a:ea typeface="微软雅黑" panose="020B0503020204020204" charset="-122"/>
-                      </a:endParaRPr>
-                    </a:p>
-                  </a:txBody>
-                  <a:tcPr marL="0" marR="0" marT="0" marB="0" anchor="ctr">
-                    <a:lnL>
-                      <a:noFill/>
-                    </a:lnL>
-                    <a:lnR>
-                      <a:noFill/>
-                    </a:lnR>
-                    <a:lnT>
-                      <a:noFill/>
-                    </a:lnT>
-                    <a:lnB>
-                      <a:noFill/>
-                    </a:lnB>
-                  </a:tcPr>
-                </a:tc>
-              </a:tr>
-              <a:tr h="438150">
-                <a:tc>
-                  <a:txBody>
-                    <a:bodyPr wrap="square">
-                      <a:spAutoFit/>
-                    </a:bodyPr>
-                    <a:p>
-                      <a:pPr marL="114300" marR="114300" algn="l">
-                        <a:lnSpc>
-                          <a:spcPct val="120000"/>
-                        </a:lnSpc>
-                      </a:pPr>
-                      <a:r>
-                        <a:rPr sz="1125">
-                          <a:solidFill>
-                            <a:srgbClr val="1A1A1A"/>
-                          </a:solidFill>
-                          <a:latin typeface="微软雅黑" panose="020B0503020204020204" charset="-122"/>
-                          <a:ea typeface="微软雅黑" panose="020B0503020204020204" charset="-122"/>
-                        </a:rPr>
-                        <a:t>5 月</a:t>
-                      </a:r>
-                      <a:endParaRPr sz="1125">
-                        <a:solidFill>
-                          <a:srgbClr val="1A1A1A"/>
-                        </a:solidFill>
-                        <a:latin typeface="微软雅黑" panose="020B0503020204020204" charset="-122"/>
-                        <a:ea typeface="微软雅黑" panose="020B0503020204020204" charset="-122"/>
-                      </a:endParaRPr>
-                    </a:p>
-                  </a:txBody>
-                  <a:tcPr marL="0" marR="0" marT="0" marB="0" anchor="ctr">
-                    <a:lnL>
-                      <a:noFill/>
-                    </a:lnL>
-                    <a:lnR>
-                      <a:noFill/>
-                    </a:lnR>
-                    <a:lnT>
-                      <a:noFill/>
-                    </a:lnT>
-                    <a:lnB>
-                      <a:noFill/>
-                    </a:lnB>
-                  </a:tcPr>
-                </a:tc>
-                <a:tc>
-                  <a:txBody>
-                    <a:bodyPr wrap="square">
-                      <a:spAutoFit/>
-                    </a:bodyPr>
-                    <a:p>
-                      <a:pPr marL="114300" marR="114300" algn="l">
-                        <a:lnSpc>
-                          <a:spcPct val="120000"/>
-                        </a:lnSpc>
-                      </a:pPr>
-                      <a:r>
-                        <a:rPr sz="1125">
-                          <a:solidFill>
-                            <a:srgbClr val="1A1A1A"/>
-                          </a:solidFill>
-                          <a:latin typeface="微软雅黑" panose="020B0503020204020204" charset="-122"/>
-                          <a:ea typeface="微软雅黑" panose="020B0503020204020204" charset="-122"/>
-                        </a:rPr>
-                        <a:t>9 项测试验收</a:t>
-                      </a:r>
-                      <a:endParaRPr sz="1125">
-                        <a:solidFill>
-                          <a:srgbClr val="1A1A1A"/>
-                        </a:solidFill>
-                        <a:latin typeface="微软雅黑" panose="020B0503020204020204" charset="-122"/>
-                        <a:ea typeface="微软雅黑" panose="020B0503020204020204" charset="-122"/>
-                      </a:endParaRPr>
-                    </a:p>
-                  </a:txBody>
-                  <a:tcPr marL="0" marR="0" marT="0" marB="0" anchor="ctr">
-                    <a:lnL>
-                      <a:noFill/>
-                    </a:lnL>
-                    <a:lnR>
-                      <a:noFill/>
-                    </a:lnR>
-                    <a:lnT>
-                      <a:noFill/>
-                    </a:lnT>
-                    <a:lnB>
-                      <a:noFill/>
-                    </a:lnB>
-                  </a:tcPr>
-                </a:tc>
-                <a:tc>
-                  <a:txBody>
-                    <a:bodyPr wrap="square">
-                      <a:spAutoFit/>
-                    </a:bodyPr>
-                    <a:p>
-                      <a:pPr marL="114300" marR="114300" algn="l">
-                        <a:lnSpc>
-                          <a:spcPct val="120000"/>
-                        </a:lnSpc>
-                      </a:pPr>
-                      <a:r>
-                        <a:rPr sz="1125">
-                          <a:solidFill>
-                            <a:srgbClr val="1A1A1A"/>
-                          </a:solidFill>
-                          <a:latin typeface="微软雅黑" panose="020B0503020204020204" charset="-122"/>
-                          <a:ea typeface="微软雅黑" panose="020B0503020204020204" charset="-122"/>
-                        </a:rPr>
-                        <a:t>3</a:t>
-                      </a:r>
-                      <a:endParaRPr sz="1125">
-                        <a:solidFill>
-                          <a:srgbClr val="1A1A1A"/>
-                        </a:solidFill>
-                        <a:latin typeface="微软雅黑" panose="020B0503020204020204" charset="-122"/>
-                        <a:ea typeface="微软雅黑" panose="020B0503020204020204" charset="-122"/>
-                      </a:endParaRPr>
-                    </a:p>
-                  </a:txBody>
-                  <a:tcPr marL="0" marR="0" marT="0" marB="0" anchor="ctr">
-                    <a:lnL>
-                      <a:noFill/>
-                    </a:lnL>
-                    <a:lnR>
-                      <a:noFill/>
-                    </a:lnR>
-                    <a:lnT>
-                      <a:noFill/>
-                    </a:lnT>
-                    <a:lnB>
-                      <a:noFill/>
-                    </a:lnB>
-                  </a:tcPr>
-                </a:tc>
-                <a:tc>
-                  <a:txBody>
-                    <a:bodyPr wrap="square">
-                      <a:spAutoFit/>
-                    </a:bodyPr>
-                    <a:p>
-                      <a:pPr marL="114300" marR="114300" algn="l">
-                        <a:lnSpc>
-                          <a:spcPct val="120000"/>
-                        </a:lnSpc>
-                      </a:pPr>
-                      <a:r>
-                        <a:rPr sz="1125">
-                          <a:solidFill>
-                            <a:srgbClr val="1A1A1A"/>
-                          </a:solidFill>
-                          <a:latin typeface="微软雅黑" panose="020B0503020204020204" charset="-122"/>
-                          <a:ea typeface="微软雅黑" panose="020B0503020204020204" charset="-122"/>
-                        </a:rPr>
-                        <a:t>—</a:t>
-                      </a:r>
-                      <a:endParaRPr sz="1125">
-                        <a:solidFill>
-                          <a:srgbClr val="1A1A1A"/>
-                        </a:solidFill>
-                        <a:latin typeface="微软雅黑" panose="020B0503020204020204" charset="-122"/>
-                        <a:ea typeface="微软雅黑" panose="020B0503020204020204" charset="-122"/>
-                      </a:endParaRPr>
-                    </a:p>
-                  </a:txBody>
-                  <a:tcPr marL="0" marR="0" marT="0" marB="0" anchor="ctr">
-                    <a:lnL>
-                      <a:noFill/>
-                    </a:lnL>
-                    <a:lnR>
-                      <a:noFill/>
-                    </a:lnR>
-                    <a:lnT>
-                      <a:noFill/>
-                    </a:lnT>
-                    <a:lnB>
-                      <a:noFill/>
-                    </a:lnB>
-                  </a:tcPr>
-                </a:tc>
-              </a:tr>
-              <a:tr h="438150">
-                <a:tc>
-                  <a:txBody>
-                    <a:bodyPr wrap="square">
-                      <a:spAutoFit/>
-                    </a:bodyPr>
-                    <a:p>
-                      <a:pPr marL="114300" marR="114300" algn="l">
-                        <a:lnSpc>
-                          <a:spcPct val="120000"/>
-                        </a:lnSpc>
-                      </a:pPr>
-                      <a:r>
-                        <a:rPr sz="1125">
-                          <a:solidFill>
-                            <a:srgbClr val="1A1A1A"/>
-                          </a:solidFill>
-                          <a:latin typeface="微软雅黑" panose="020B0503020204020204" charset="-122"/>
-                          <a:ea typeface="微软雅黑" panose="020B0503020204020204" charset="-122"/>
-                        </a:rPr>
-                        <a:t>6 月</a:t>
-                      </a:r>
-                      <a:endParaRPr sz="1125">
-                        <a:solidFill>
-                          <a:srgbClr val="1A1A1A"/>
-                        </a:solidFill>
-                        <a:latin typeface="微软雅黑" panose="020B0503020204020204" charset="-122"/>
-                        <a:ea typeface="微软雅黑" panose="020B0503020204020204" charset="-122"/>
-                      </a:endParaRPr>
-                    </a:p>
-                  </a:txBody>
-                  <a:tcPr marL="0" marR="0" marT="0" marB="0" anchor="ctr">
-                    <a:lnL>
-                      <a:noFill/>
-                    </a:lnL>
-                    <a:lnR>
-                      <a:noFill/>
-                    </a:lnR>
-                    <a:lnT>
-                      <a:noFill/>
-                    </a:lnT>
-                    <a:lnB>
-                      <a:noFill/>
-                    </a:lnB>
-                  </a:tcPr>
-                </a:tc>
-                <a:tc>
-                  <a:txBody>
-                    <a:bodyPr wrap="square">
-                      <a:spAutoFit/>
-                    </a:bodyPr>
-                    <a:p>
-                      <a:pPr marL="114300" marR="114300" algn="l">
-                        <a:lnSpc>
-                          <a:spcPct val="120000"/>
-                        </a:lnSpc>
-                      </a:pPr>
-                      <a:r>
-                        <a:rPr sz="1125">
-                          <a:solidFill>
-                            <a:srgbClr val="1A1A1A"/>
-                          </a:solidFill>
-                          <a:latin typeface="微软雅黑" panose="020B0503020204020204" charset="-122"/>
-                          <a:ea typeface="微软雅黑" panose="020B0503020204020204" charset="-122"/>
-                        </a:rPr>
-                        <a:t>15 用例（5 批次）</a:t>
-                      </a:r>
-                      <a:endParaRPr sz="1125">
-                        <a:solidFill>
-                          <a:srgbClr val="1A1A1A"/>
-                        </a:solidFill>
-                        <a:latin typeface="微软雅黑" panose="020B0503020204020204" charset="-122"/>
-                        <a:ea typeface="微软雅黑" panose="020B0503020204020204" charset="-122"/>
-                      </a:endParaRPr>
-                    </a:p>
-                  </a:txBody>
-                  <a:tcPr marL="0" marR="0" marT="0" marB="0" anchor="ctr">
-                    <a:lnL>
-                      <a:noFill/>
-                    </a:lnL>
-                    <a:lnR>
-                      <a:noFill/>
-                    </a:lnR>
-                    <a:lnT>
-                      <a:noFill/>
-                    </a:lnT>
-                    <a:lnB>
-                      <a:noFill/>
-                    </a:lnB>
-                  </a:tcPr>
-                </a:tc>
-                <a:tc>
-                  <a:txBody>
-                    <a:bodyPr wrap="square">
-                      <a:spAutoFit/>
-                    </a:bodyPr>
-                    <a:p>
-                      <a:pPr marL="114300" marR="114300" algn="l">
-                        <a:lnSpc>
-                          <a:spcPct val="120000"/>
-                        </a:lnSpc>
-                      </a:pPr>
-                      <a:r>
-                        <a:rPr sz="1125">
-                          <a:solidFill>
-                            <a:srgbClr val="1A1A1A"/>
-                          </a:solidFill>
-                          <a:latin typeface="微软雅黑" panose="020B0503020204020204" charset="-122"/>
-                          <a:ea typeface="微软雅黑" panose="020B0503020204020204" charset="-122"/>
-                        </a:rPr>
-                        <a:t>8</a:t>
-                      </a:r>
-                      <a:endParaRPr sz="1125">
-                        <a:solidFill>
-                          <a:srgbClr val="1A1A1A"/>
-                        </a:solidFill>
-                        <a:latin typeface="微软雅黑" panose="020B0503020204020204" charset="-122"/>
-                        <a:ea typeface="微软雅黑" panose="020B0503020204020204" charset="-122"/>
-                      </a:endParaRPr>
-                    </a:p>
-                  </a:txBody>
-                  <a:tcPr marL="0" marR="0" marT="0" marB="0" anchor="ctr">
-                    <a:lnL>
-                      <a:noFill/>
-                    </a:lnL>
-                    <a:lnR>
-                      <a:noFill/>
-                    </a:lnR>
-                    <a:lnT>
-                      <a:noFill/>
-                    </a:lnT>
-                    <a:lnB>
-                      <a:noFill/>
-                    </a:lnB>
-                  </a:tcPr>
-                </a:tc>
-                <a:tc>
-                  <a:txBody>
-                    <a:bodyPr wrap="square">
-                      <a:spAutoFit/>
-                    </a:bodyPr>
-                    <a:p>
-                      <a:pPr marL="114300" marR="114300" algn="l">
-                        <a:lnSpc>
-                          <a:spcPct val="120000"/>
-                        </a:lnSpc>
-                      </a:pPr>
-                      <a:r>
-                        <a:rPr sz="1125" b="1">
-                          <a:solidFill>
-                            <a:srgbClr val="4472C4"/>
-                          </a:solidFill>
-                          <a:latin typeface="微软雅黑" panose="020B0503020204020204" charset="-122"/>
-                          <a:ea typeface="微软雅黑" panose="020B0503020204020204" charset="-122"/>
-                        </a:rPr>
-                        <a:t>14/15 通过（93.3%）</a:t>
-                      </a:r>
-                      <a:endParaRPr sz="1125" b="1">
-                        <a:solidFill>
-                          <a:srgbClr val="4472C4"/>
-                        </a:solidFill>
-                        <a:latin typeface="微软雅黑" panose="020B0503020204020204" charset="-122"/>
-                        <a:ea typeface="微软雅黑" panose="020B0503020204020204" charset="-122"/>
-                      </a:endParaRPr>
-                    </a:p>
-                  </a:txBody>
-                  <a:tcPr marL="0" marR="0" marT="0" marB="0" anchor="ctr">
-                    <a:lnL>
-                      <a:noFill/>
-                    </a:lnL>
-                    <a:lnR>
-                      <a:noFill/>
-                    </a:lnR>
-                    <a:lnT>
-                      <a:noFill/>
-                    </a:lnT>
-                    <a:lnB>
-                      <a:noFill/>
-                    </a:lnB>
-                  </a:tcPr>
-                </a:tc>
-              </a:tr>
-              <a:tr h="438150">
-                <a:tc>
-                  <a:txBody>
-                    <a:bodyPr wrap="square">
-                      <a:spAutoFit/>
-                    </a:bodyPr>
-                    <a:p>
-                      <a:pPr marL="114300" marR="114300" algn="l">
-                        <a:lnSpc>
-                          <a:spcPct val="120000"/>
-                        </a:lnSpc>
-                      </a:pPr>
-                      <a:r>
-                        <a:rPr sz="1125">
-                          <a:solidFill>
-                            <a:srgbClr val="1A1A1A"/>
-                          </a:solidFill>
-                          <a:latin typeface="微软雅黑" panose="020B0503020204020204" charset="-122"/>
-                          <a:ea typeface="微软雅黑" panose="020B0503020204020204" charset="-122"/>
-                        </a:rPr>
-                        <a:t>7 月（2607）</a:t>
-                      </a:r>
-                      <a:endParaRPr sz="1125">
-                        <a:solidFill>
-                          <a:srgbClr val="1A1A1A"/>
-                        </a:solidFill>
-                        <a:latin typeface="微软雅黑" panose="020B0503020204020204" charset="-122"/>
-                        <a:ea typeface="微软雅黑" panose="020B0503020204020204" charset="-122"/>
-                      </a:endParaRPr>
-                    </a:p>
-                  </a:txBody>
-                  <a:tcPr marL="0" marR="0" marT="0" marB="0" anchor="ctr">
-                    <a:lnL>
-                      <a:noFill/>
-                    </a:lnL>
-                    <a:lnR>
-                      <a:noFill/>
-                    </a:lnR>
-                    <a:lnT>
-                      <a:noFill/>
-                    </a:lnT>
-                    <a:lnB>
-                      <a:noFill/>
-                    </a:lnB>
-                  </a:tcPr>
-                </a:tc>
-                <a:tc>
-                  <a:txBody>
-                    <a:bodyPr wrap="square">
-                      <a:spAutoFit/>
-                    </a:bodyPr>
-                    <a:p>
-                      <a:pPr marL="114300" marR="114300" algn="l">
-                        <a:lnSpc>
-                          <a:spcPct val="120000"/>
-                        </a:lnSpc>
-                      </a:pPr>
-                      <a:r>
-                        <a:rPr sz="1125">
-                          <a:solidFill>
-                            <a:srgbClr val="1A1A1A"/>
-                          </a:solidFill>
-                          <a:latin typeface="微软雅黑" panose="020B0503020204020204" charset="-122"/>
-                          <a:ea typeface="微软雅黑" panose="020B0503020204020204" charset="-122"/>
-                        </a:rPr>
-                        <a:t>5 轮验收（8 项）</a:t>
-                      </a:r>
-                      <a:endParaRPr sz="1125">
-                        <a:solidFill>
-                          <a:srgbClr val="1A1A1A"/>
-                        </a:solidFill>
-                        <a:latin typeface="微软雅黑" panose="020B0503020204020204" charset="-122"/>
-                        <a:ea typeface="微软雅黑" panose="020B0503020204020204" charset="-122"/>
-                      </a:endParaRPr>
-                    </a:p>
-                  </a:txBody>
-                  <a:tcPr marL="0" marR="0" marT="0" marB="0" anchor="ctr">
-                    <a:lnL>
-                      <a:noFill/>
-                    </a:lnL>
-                    <a:lnR>
-                      <a:noFill/>
-                    </a:lnR>
-                    <a:lnT>
-                      <a:noFill/>
-                    </a:lnT>
-                    <a:lnB>
-                      <a:noFill/>
-                    </a:lnB>
-                  </a:tcPr>
-                </a:tc>
-                <a:tc>
-                  <a:txBody>
-                    <a:bodyPr wrap="square">
-                      <a:spAutoFit/>
-                    </a:bodyPr>
-                    <a:p>
-                      <a:pPr marL="114300" marR="114300" algn="l">
-                        <a:lnSpc>
-                          <a:spcPct val="120000"/>
-                        </a:lnSpc>
-                      </a:pPr>
-                      <a:r>
-                        <a:rPr sz="1125">
-                          <a:solidFill>
-                            <a:srgbClr val="1A1A1A"/>
-                          </a:solidFill>
-                          <a:latin typeface="微软雅黑" panose="020B0503020204020204" charset="-122"/>
-                          <a:ea typeface="微软雅黑" panose="020B0503020204020204" charset="-122"/>
-                        </a:rPr>
-                        <a:t>4</a:t>
-                      </a:r>
-                      <a:endParaRPr sz="1125">
-                        <a:solidFill>
-                          <a:srgbClr val="1A1A1A"/>
-                        </a:solidFill>
-                        <a:latin typeface="微软雅黑" panose="020B0503020204020204" charset="-122"/>
-                        <a:ea typeface="微软雅黑" panose="020B0503020204020204" charset="-122"/>
-                      </a:endParaRPr>
-                    </a:p>
-                  </a:txBody>
-                  <a:tcPr marL="0" marR="0" marT="0" marB="0" anchor="ctr">
-                    <a:lnL>
-                      <a:noFill/>
-                    </a:lnL>
-                    <a:lnR>
-                      <a:noFill/>
-                    </a:lnR>
-                    <a:lnT>
-                      <a:noFill/>
-                    </a:lnT>
-                    <a:lnB>
-                      <a:noFill/>
-                    </a:lnB>
-                  </a:tcPr>
-                </a:tc>
-                <a:tc>
-                  <a:txBody>
-                    <a:bodyPr wrap="square">
-                      <a:spAutoFit/>
-                    </a:bodyPr>
-                    <a:p>
-                      <a:pPr marL="114300" marR="114300" algn="l">
-                        <a:lnSpc>
-                          <a:spcPct val="120000"/>
-                        </a:lnSpc>
-                      </a:pPr>
-                      <a:r>
-                        <a:rPr sz="1125">
-                          <a:solidFill>
-                            <a:srgbClr val="1A1A1A"/>
-                          </a:solidFill>
-                          <a:latin typeface="微软雅黑" panose="020B0503020204020204" charset="-122"/>
-                          <a:ea typeface="微软雅黑" panose="020B0503020204020204" charset="-122"/>
-                        </a:rPr>
-                        <a:t>—</a:t>
-                      </a:r>
-                      <a:endParaRPr sz="1125">
-                        <a:solidFill>
-                          <a:srgbClr val="1A1A1A"/>
-                        </a:solidFill>
-                        <a:latin typeface="微软雅黑" panose="020B0503020204020204" charset="-122"/>
-                        <a:ea typeface="微软雅黑" panose="020B0503020204020204" charset="-122"/>
-                      </a:endParaRPr>
-                    </a:p>
-                  </a:txBody>
-                  <a:tcPr marL="0" marR="0" marT="0" marB="0" anchor="ctr">
-                    <a:lnL>
-                      <a:noFill/>
-                    </a:lnL>
-                    <a:lnR>
-                      <a:noFill/>
-                    </a:lnR>
-                    <a:lnT>
-                      <a:noFill/>
-                    </a:lnT>
-                    <a:lnB>
-                      <a:noFill/>
-                    </a:lnB>
-                  </a:tcPr>
-                </a:tc>
-              </a:tr>
-            </a:tbl>
-          </a:graphicData>
-        </a:graphic>
-      </p:graphicFrame>
-      <p:sp>
-        <p:nvSpPr>
-          <p:cNvPr id="28" name="文本框 27" descr="{&quot;isTemplate&quot;:true,&quot;type&quot;:&quot;text&quot;}"/>
-          <p:cNvSpPr txBox="1"/>
-          <p:nvPr/>
-        </p:nvSpPr>
-        <p:spPr>
-          <a:xfrm>
-            <a:off x="533400" y="6362700"/>
-            <a:ext cx="1285875" cy="161925"/>
-          </a:xfrm>
-          <a:prstGeom prst="rect">
-            <a:avLst/>
-          </a:prstGeom>
-        </p:spPr>
-        <p:txBody>
-          <a:bodyPr wrap="none" lIns="0" tIns="0" rIns="0" bIns="0"/>
-          <a:p>
-            <a:pPr>
-              <a:lnSpc>
-                <a:spcPct val="100000"/>
-              </a:lnSpc>
-            </a:pPr>
-            <a:r>
-              <a:rPr lang="zh-CN" sz="1050">
-                <a:solidFill>
-                  <a:srgbClr val="888888"/>
-                </a:solidFill>
-                <a:latin typeface="微软雅黑" panose="020B0503020204020204" charset="-122"/>
-                <a:ea typeface="微软雅黑" panose="020B0503020204020204" charset="-122"/>
-              </a:rPr>
-              <a:t>入职以来</a:t>
-            </a:r>
-            <a:r>
-              <a:rPr lang="en-US" sz="1050">
-                <a:solidFill>
-                  <a:srgbClr val="888888"/>
-                </a:solidFill>
-                <a:latin typeface="微软雅黑" panose="020B0503020204020204" charset="-122"/>
-                <a:ea typeface="微软雅黑" panose="020B0503020204020204" charset="-122"/>
-              </a:rPr>
-              <a:t> AI </a:t>
-            </a:r>
-            <a:r>
-              <a:rPr lang="zh-CN" sz="1050">
-                <a:solidFill>
-                  <a:srgbClr val="888888"/>
-                </a:solidFill>
-                <a:latin typeface="微软雅黑" panose="020B0503020204020204" charset="-122"/>
-                <a:ea typeface="微软雅黑" panose="020B0503020204020204" charset="-122"/>
-              </a:rPr>
-              <a:t>工作复盘</a:t>
-            </a:r>
-            <a:endParaRPr lang="zh-CN" sz="1050">
-              <a:solidFill>
-                <a:srgbClr val="888888"/>
-              </a:solidFill>
-              <a:latin typeface="微软雅黑" panose="020B0503020204020204" charset="-122"/>
-              <a:ea typeface="微软雅黑" panose="020B0503020204020204" charset="-122"/>
-            </a:endParaRPr>
-          </a:p>
-        </p:txBody>
-      </p:sp>
-      <p:sp>
-        <p:nvSpPr>
-          <p:cNvPr id="29" name="文本框 28" descr="{&quot;isTemplate&quot;:true,&quot;type&quot;:&quot;text&quot;}"/>
-          <p:cNvSpPr txBox="1"/>
-          <p:nvPr/>
-        </p:nvSpPr>
-        <p:spPr>
-          <a:xfrm>
-            <a:off x="11229975" y="6362700"/>
-            <a:ext cx="428625" cy="161925"/>
-          </a:xfrm>
-          <a:prstGeom prst="rect">
-            <a:avLst/>
-          </a:prstGeom>
-        </p:spPr>
-        <p:txBody>
-          <a:bodyPr wrap="none" lIns="0" tIns="0" rIns="0" bIns="0"/>
-          <a:p>
-            <a:pPr>
-              <a:lnSpc>
-                <a:spcPct val="100000"/>
-              </a:lnSpc>
-            </a:pPr>
-            <a:r>
-              <a:rPr lang="en-US" sz="1050">
-                <a:solidFill>
-                  <a:srgbClr val="888888"/>
-                </a:solidFill>
-                <a:latin typeface="微软雅黑" panose="020B0503020204020204" charset="-122"/>
-                <a:ea typeface="微软雅黑" panose="020B0503020204020204" charset="-122"/>
-              </a:rPr>
-              <a:t>10 / 13</a:t>
-            </a:r>
-            <a:endParaRPr lang="en-US" sz="1050">
-              <a:solidFill>
-                <a:srgbClr val="888888"/>
-              </a:solidFill>
-              <a:latin typeface="微软雅黑" panose="020B0503020204020204" charset="-122"/>
-              <a:ea typeface="微软雅黑" panose="020B0503020204020204" charset="-122"/>
-            </a:endParaRPr>
-          </a:p>
-        </p:txBody>
-      </p:sp>
-    </p:spTree>
-  </p:cSld>
-  <p:clrMapOvr>
-    <a:masterClrMapping/>
-  </p:clrMapOvr>
-</p:sld>
-</file>
-
-<file path=ppt/slides/slide11.xml><?xml version="1.0" encoding="utf-8"?>
-<p:sld xmlns:a="http://schemas.openxmlformats.org/drawingml/2006/main" xmlns:r="http://schemas.openxmlformats.org/officeDocument/2006/relationships" xmlns:p="http://schemas.openxmlformats.org/presentationml/2006/main">
-  <p:cSld>
-    <p:spTree>
-      <p:nvGrpSpPr>
         <p:cNvPr id="30" name="" descr="&lt;Slide style={{ width:'1280px', height:'720px', position:'relative', background:'#FFFFFF', fontFamily:'微软雅黑' }}&gt;&#10;  &lt;Box style={{ position:'absolute', left:56, top:36, flexDirection:'row', alignItems:'center', gap:12 }}&gt;&#10;    &lt;Box style={{ width:8, height:34, background:'#4472C4' }} /&gt;&#10;    &lt;Text style={{ fontSize:30, fontWeight:'bold', color:'#052B7C' }}&gt;五、智能体矩阵与内容生成&lt;/Text&gt;&#10;  &lt;/Box&gt;&#10;&#10;  &lt;Box style={{ position:'absolute', left:56, top:120, right:56 }}&gt;&#10;    &lt;Table&#10;      style={{ width:'100%', height:440 }}&#10;      defaultTextStyle={{ fontSize:15, textAlign:'center', color:'#1A1A1A' }}&#10;      defaultCellStyle={{ border:{ left:{width:1,color:'#CCCCCC'}, right:{width:1,color:'#CCCCCC'}, top:{width:1,color:'#CCCCCC'}, bottom:{width:1,color:'#CCCCCC'} } }}&#10;      cells={[&#10;        [ {text:'智能体', textStyle:{bold:true,color:'#1A1A1A'}, cellStyle:{background:{color:'#DAE3F3'}}},&#10;          {text:'面向', textStyle:{bold:true,color:'#1A1A1A'}, cellStyle:{background:{color:'#DAE3F3'}}},&#10;          {text:'知识规模', textStyle:{bold:true,color:'#1A1A1A'}, cellStyle:{background:{color:'#DAE3F3'}}},&#10;          {text:'结构规模', textStyle:{bold:true,color:'#1A1A1A'}, cellStyle:{background:{color:'#DAE3F3'}}},&#10;          {text:'状态', textStyle:{bold:true,color:'#1A1A1A'}, cellStyle:{background:{color:'#DAE3F3'}}},&#10;          {text:'核心价值', textStyle:{bold:true,color:'#1A1A1A',textAlign:'left'}, cellStyle:{background:{color:'#DAE3F3'}}} ],&#10;        [ '说明书助手', '销售 / 业务', 'TDS 产品库', '6 模式 / 16 节提示词', '已上线', {text:'TDS 咨询秒级应答、选型有据不误导客户', textStyle:{textAlign:'left'}} ],&#10;        [ '销售 SOP / 全能助手', '销售', '7 份 SOP 源文件', '6 场景触发', '已上线', {text:'销售动作标准化、话术统一、新人即上手', textStyle:{textAlign:'left'}} ],&#10;        [ '业务智能助理', '营销中心 / 业务', 'SKILL.md + templates + role', '3 阶段 / 4 岗位自适应', {text:'迭代中 v5', textStyle:{color:'#C0504D',bold:true}}, {text:'客户问题全流程 AI 化 + 合规红线校验', textStyle:{textAlign:'left'}} ],&#10;        [ '应用工艺助手', '研发为主 + 业务', '工艺手册 + 研发培训', '20+ 疵病排查', '已上线', {text:'染整专业问答、客户质疑标准答案', textStyle:{textAlign:'left'}} ],&#10;      ]}&#10;    /&gt;&#10;  &lt;/Box&gt;&#10;&#10;  &lt;Box style={{ position:'absolute', left:56, top:568, right:56 }}&gt;&#10;    &lt;Text style={{ fontSize:16, color:'#1A1A1A', lineHeight:1.5 }}&gt;另有「培训助手」「视频 / 图片生成助手」等能力，构成平台智能体矩阵；06-12 提出 seedance/seedream 独立化诉求，07-14 图片 · 视频生成独立应用落地（营销 / 销售自助生产素材）。&lt;/Text&gt;&#10;  &lt;/Box&gt;&#10;&#10;  &lt;Box style={{ position:'absolute', left:56, top:668, right:56, flexDirection:'row', justifyContent:'space-between' }}&gt;&#10;    &lt;Text style={{ fontSize:14, color:'#888' }}&gt;入职以来 AI 工作复盘&lt;/Text&gt;&#10;    &lt;Text style={{ fontSize:14, color:'#888' }}&gt;11 / 13&lt;/Text&gt;&#10;  &lt;/Box&gt;&#10;&lt;/Slide&gt;"/>
         <p:cNvGrpSpPr/>
         <p:nvPr/>
@@ -4413,7 +2695,7 @@
 </p:sld>
 </file>
 
-<file path=ppt/slides/slide12.xml><?xml version="1.0" encoding="utf-8"?>
+<file path=ppt/slides/slide11.xml><?xml version="1.0" encoding="utf-8"?>
 <p:sld xmlns:a="http://schemas.openxmlformats.org/drawingml/2006/main" xmlns:r="http://schemas.openxmlformats.org/officeDocument/2006/relationships" xmlns:p="http://schemas.openxmlformats.org/presentationml/2006/main">
   <p:cSld>
     <p:spTree>
@@ -5509,7 +3791,7 @@
 </p:sld>
 </file>
 
-<file path=ppt/slides/slide13.xml><?xml version="1.0" encoding="utf-8"?>
+<file path=ppt/slides/slide12.xml><?xml version="1.0" encoding="utf-8"?>
 <p:sld xmlns:a="http://schemas.openxmlformats.org/drawingml/2006/main" xmlns:r="http://schemas.openxmlformats.org/officeDocument/2006/relationships" xmlns:p="http://schemas.openxmlformats.org/presentationml/2006/main">
   <p:cSld>
     <p:spTree>
@@ -5557,7 +3839,7 @@
         </p:nvSpPr>
         <p:spPr>
           <a:xfrm>
-            <a:off x="0" y="2857500"/>
+            <a:off x="0" y="2019300"/>
             <a:ext cx="12192000" cy="2190750"/>
           </a:xfrm>
           <a:prstGeom prst="rect">
@@ -5580,7 +3862,7 @@
         </p:nvSpPr>
         <p:spPr>
           <a:xfrm>
-            <a:off x="4762500" y="3400425"/>
+            <a:off x="4762500" y="2562225"/>
             <a:ext cx="2667000" cy="647700"/>
           </a:xfrm>
           <a:prstGeom prst="rect">
@@ -5623,7 +3905,7 @@
         </p:nvSpPr>
         <p:spPr>
           <a:xfrm>
-            <a:off x="4981575" y="4200525"/>
+            <a:off x="4981575" y="3362325"/>
             <a:ext cx="2228850" cy="304800"/>
           </a:xfrm>
           <a:prstGeom prst="rect">
@@ -5651,324 +3933,6 @@
             <a:endParaRPr lang="zh-CN" sz="1950">
               <a:solidFill>
                 <a:srgbClr val="FFFFFF"/>
-              </a:solidFill>
-              <a:latin typeface="微软雅黑" panose="020B0503020204020204" charset="-122"/>
-              <a:ea typeface="微软雅黑" panose="020B0503020204020204" charset="-122"/>
-            </a:endParaRPr>
-          </a:p>
-        </p:txBody>
-      </p:sp>
-      <p:sp>
-        <p:nvSpPr>
-          <p:cNvPr id="71" name="矩形 70"/>
-          <p:cNvSpPr/>
-          <p:nvPr/>
-        </p:nvSpPr>
-        <p:spPr>
-          <a:xfrm>
-            <a:off x="762000" y="1228725"/>
-            <a:ext cx="457200" cy="28575"/>
-          </a:xfrm>
-          <a:prstGeom prst="rect">
-            <a:avLst/>
-          </a:prstGeom>
-          <a:solidFill>
-            <a:srgbClr val="4472C4"/>
-          </a:solidFill>
-        </p:spPr>
-        <p:txBody>
-          <a:bodyPr/>
-          <a:p/>
-        </p:txBody>
-      </p:sp>
-      <p:sp>
-        <p:nvSpPr>
-          <p:cNvPr id="72" name="文本框 71" descr="{&quot;isTemplate&quot;:true,&quot;type&quot;:&quot;text&quot;}"/>
-          <p:cNvSpPr txBox="1"/>
-          <p:nvPr/>
-        </p:nvSpPr>
-        <p:spPr>
-          <a:xfrm>
-            <a:off x="1333500" y="1143000"/>
-            <a:ext cx="1524000" cy="190500"/>
-          </a:xfrm>
-          <a:prstGeom prst="rect">
-            <a:avLst/>
-          </a:prstGeom>
-        </p:spPr>
-        <p:txBody>
-          <a:bodyPr wrap="none" lIns="0" tIns="0" rIns="0" bIns="0"/>
-          <a:p>
-            <a:pPr>
-              <a:lnSpc>
-                <a:spcPct val="100000"/>
-              </a:lnSpc>
-            </a:pPr>
-            <a:r>
-              <a:rPr lang="zh-CN" sz="1200">
-                <a:solidFill>
-                  <a:srgbClr val="052B7C"/>
-                </a:solidFill>
-                <a:latin typeface="微软雅黑" panose="020B0503020204020204" charset="-122"/>
-                <a:ea typeface="微软雅黑" panose="020B0503020204020204" charset="-122"/>
-              </a:rPr>
-              <a:t>助力企业利润持续增长</a:t>
-            </a:r>
-            <a:endParaRPr lang="zh-CN" sz="1200">
-              <a:solidFill>
-                <a:srgbClr val="052B7C"/>
-              </a:solidFill>
-              <a:latin typeface="微软雅黑" panose="020B0503020204020204" charset="-122"/>
-              <a:ea typeface="微软雅黑" panose="020B0503020204020204" charset="-122"/>
-            </a:endParaRPr>
-          </a:p>
-        </p:txBody>
-      </p:sp>
-      <p:sp>
-        <p:nvSpPr>
-          <p:cNvPr id="73" name="文本框 72" descr="{&quot;isTemplate&quot;:true,&quot;type&quot;:&quot;text&quot;}"/>
-          <p:cNvSpPr txBox="1"/>
-          <p:nvPr/>
-        </p:nvSpPr>
-        <p:spPr>
-          <a:xfrm>
-            <a:off x="762000" y="5524500"/>
-            <a:ext cx="3781425" cy="209550"/>
-          </a:xfrm>
-          <a:prstGeom prst="rect">
-            <a:avLst/>
-          </a:prstGeom>
-        </p:spPr>
-        <p:txBody>
-          <a:bodyPr wrap="none" lIns="0" tIns="0" rIns="0" bIns="0"/>
-          <a:p>
-            <a:pPr>
-              <a:lnSpc>
-                <a:spcPct val="100000"/>
-              </a:lnSpc>
-            </a:pPr>
-            <a:r>
-              <a:rPr lang="zh-CN" sz="1350">
-                <a:solidFill>
-                  <a:srgbClr val="052B7C"/>
-                </a:solidFill>
-                <a:latin typeface="微软雅黑" panose="020B0503020204020204" charset="-122"/>
-                <a:ea typeface="微软雅黑" panose="020B0503020204020204" charset="-122"/>
-              </a:rPr>
-              <a:t>部　　门：</a:t>
-            </a:r>
-            <a:r>
-              <a:rPr lang="en-US" sz="1350">
-                <a:solidFill>
-                  <a:srgbClr val="052B7C"/>
-                </a:solidFill>
-                <a:latin typeface="微软雅黑" panose="020B0503020204020204" charset="-122"/>
-                <a:ea typeface="微软雅黑" panose="020B0503020204020204" charset="-122"/>
-              </a:rPr>
-              <a:t>AI </a:t>
-            </a:r>
-            <a:r>
-              <a:rPr lang="zh-CN" sz="1350">
-                <a:solidFill>
-                  <a:srgbClr val="052B7C"/>
-                </a:solidFill>
-                <a:latin typeface="微软雅黑" panose="020B0503020204020204" charset="-122"/>
-                <a:ea typeface="微软雅黑" panose="020B0503020204020204" charset="-122"/>
-              </a:rPr>
-              <a:t>技术专员（宏昊</a:t>
-            </a:r>
-            <a:r>
-              <a:rPr lang="en-US" sz="1350">
-                <a:solidFill>
-                  <a:srgbClr val="052B7C"/>
-                </a:solidFill>
-                <a:latin typeface="微软雅黑" panose="020B0503020204020204" charset="-122"/>
-                <a:ea typeface="微软雅黑" panose="020B0503020204020204" charset="-122"/>
-              </a:rPr>
-              <a:t>AI</a:t>
-            </a:r>
-            <a:r>
-              <a:rPr lang="zh-CN" sz="1350">
-                <a:solidFill>
-                  <a:srgbClr val="052B7C"/>
-                </a:solidFill>
-                <a:latin typeface="微软雅黑" panose="020B0503020204020204" charset="-122"/>
-                <a:ea typeface="微软雅黑" panose="020B0503020204020204" charset="-122"/>
-              </a:rPr>
-              <a:t>助手平台）</a:t>
-            </a:r>
-            <a:endParaRPr lang="zh-CN" sz="1350">
-              <a:solidFill>
-                <a:srgbClr val="052B7C"/>
-              </a:solidFill>
-              <a:latin typeface="微软雅黑" panose="020B0503020204020204" charset="-122"/>
-              <a:ea typeface="微软雅黑" panose="020B0503020204020204" charset="-122"/>
-            </a:endParaRPr>
-          </a:p>
-        </p:txBody>
-      </p:sp>
-      <p:sp>
-        <p:nvSpPr>
-          <p:cNvPr id="74" name="文本框 73" descr="{&quot;isTemplate&quot;:true,&quot;type&quot;:&quot;text&quot;}"/>
-          <p:cNvSpPr txBox="1"/>
-          <p:nvPr/>
-        </p:nvSpPr>
-        <p:spPr>
-          <a:xfrm>
-            <a:off x="762000" y="5829300"/>
-            <a:ext cx="3781425" cy="209550"/>
-          </a:xfrm>
-          <a:prstGeom prst="rect">
-            <a:avLst/>
-          </a:prstGeom>
-        </p:spPr>
-        <p:txBody>
-          <a:bodyPr wrap="none" lIns="0" tIns="0" rIns="0" bIns="0"/>
-          <a:p>
-            <a:pPr>
-              <a:lnSpc>
-                <a:spcPct val="100000"/>
-              </a:lnSpc>
-            </a:pPr>
-            <a:r>
-              <a:rPr lang="zh-CN" sz="1350">
-                <a:solidFill>
-                  <a:srgbClr val="052B7C"/>
-                </a:solidFill>
-                <a:latin typeface="微软雅黑" panose="020B0503020204020204" charset="-122"/>
-                <a:ea typeface="微软雅黑" panose="020B0503020204020204" charset="-122"/>
-              </a:rPr>
-              <a:t>汇报人：肖聪</a:t>
-            </a:r>
-            <a:endParaRPr lang="zh-CN" sz="1350">
-              <a:solidFill>
-                <a:srgbClr val="052B7C"/>
-              </a:solidFill>
-              <a:latin typeface="微软雅黑" panose="020B0503020204020204" charset="-122"/>
-              <a:ea typeface="微软雅黑" panose="020B0503020204020204" charset="-122"/>
-            </a:endParaRPr>
-          </a:p>
-        </p:txBody>
-      </p:sp>
-      <p:sp>
-        <p:nvSpPr>
-          <p:cNvPr id="75" name="文本框 74" descr="{&quot;isTemplate&quot;:true,&quot;type&quot;:&quot;text&quot;}"/>
-          <p:cNvSpPr txBox="1"/>
-          <p:nvPr/>
-        </p:nvSpPr>
-        <p:spPr>
-          <a:xfrm>
-            <a:off x="762000" y="6134100"/>
-            <a:ext cx="3781425" cy="209550"/>
-          </a:xfrm>
-          <a:prstGeom prst="rect">
-            <a:avLst/>
-          </a:prstGeom>
-        </p:spPr>
-        <p:txBody>
-          <a:bodyPr wrap="none" lIns="0" tIns="0" rIns="0" bIns="0"/>
-          <a:p>
-            <a:pPr>
-              <a:lnSpc>
-                <a:spcPct val="100000"/>
-              </a:lnSpc>
-            </a:pPr>
-            <a:r>
-              <a:rPr lang="zh-CN" sz="1350">
-                <a:solidFill>
-                  <a:srgbClr val="052B7C"/>
-                </a:solidFill>
-                <a:latin typeface="微软雅黑" panose="020B0503020204020204" charset="-122"/>
-                <a:ea typeface="微软雅黑" panose="020B0503020204020204" charset="-122"/>
-              </a:rPr>
-              <a:t>汇报期间：</a:t>
-            </a:r>
-            <a:r>
-              <a:rPr lang="en-US" sz="1350">
-                <a:solidFill>
-                  <a:srgbClr val="052B7C"/>
-                </a:solidFill>
-                <a:latin typeface="微软雅黑" panose="020B0503020204020204" charset="-122"/>
-                <a:ea typeface="微软雅黑" panose="020B0503020204020204" charset="-122"/>
-              </a:rPr>
-              <a:t>2026.04.15 – 2026.07.31</a:t>
-            </a:r>
-            <a:r>
-              <a:rPr lang="zh-CN" sz="1350">
-                <a:solidFill>
-                  <a:srgbClr val="052B7C"/>
-                </a:solidFill>
-                <a:latin typeface="微软雅黑" panose="020B0503020204020204" charset="-122"/>
-                <a:ea typeface="微软雅黑" panose="020B0503020204020204" charset="-122"/>
-              </a:rPr>
-              <a:t>（入职以来）</a:t>
-            </a:r>
-            <a:endParaRPr lang="zh-CN" sz="1350">
-              <a:solidFill>
-                <a:srgbClr val="052B7C"/>
-              </a:solidFill>
-              <a:latin typeface="微软雅黑" panose="020B0503020204020204" charset="-122"/>
-              <a:ea typeface="微软雅黑" panose="020B0503020204020204" charset="-122"/>
-            </a:endParaRPr>
-          </a:p>
-        </p:txBody>
-      </p:sp>
-      <p:sp>
-        <p:nvSpPr>
-          <p:cNvPr id="76" name="文本框 75" descr="{&quot;isTemplate&quot;:true,&quot;type&quot;:&quot;text&quot;}"/>
-          <p:cNvSpPr txBox="1"/>
-          <p:nvPr/>
-        </p:nvSpPr>
-        <p:spPr>
-          <a:xfrm>
-            <a:off x="10591800" y="6096000"/>
-            <a:ext cx="838200" cy="190500"/>
-          </a:xfrm>
-          <a:prstGeom prst="rect">
-            <a:avLst/>
-          </a:prstGeom>
-        </p:spPr>
-        <p:txBody>
-          <a:bodyPr wrap="none" lIns="0" tIns="0" rIns="0" bIns="0"/>
-          <a:p>
-            <a:pPr>
-              <a:lnSpc>
-                <a:spcPct val="100000"/>
-              </a:lnSpc>
-            </a:pPr>
-            <a:r>
-              <a:rPr lang="en-US" sz="1200" b="1">
-                <a:solidFill>
-                  <a:srgbClr val="052B7C"/>
-                </a:solidFill>
-                <a:latin typeface="微软雅黑" panose="020B0503020204020204" charset="-122"/>
-                <a:ea typeface="微软雅黑" panose="020B0503020204020204" charset="-122"/>
-              </a:rPr>
-              <a:t>- </a:t>
-            </a:r>
-            <a:r>
-              <a:rPr lang="zh-CN" sz="1200" b="1">
-                <a:solidFill>
-                  <a:srgbClr val="052B7C"/>
-                </a:solidFill>
-                <a:latin typeface="微软雅黑" panose="020B0503020204020204" charset="-122"/>
-                <a:ea typeface="微软雅黑" panose="020B0503020204020204" charset="-122"/>
-              </a:rPr>
-              <a:t>机密受控</a:t>
-            </a:r>
-            <a:r>
-              <a:rPr lang="en-US" sz="1200" b="1">
-                <a:solidFill>
-                  <a:srgbClr val="052B7C"/>
-                </a:solidFill>
-                <a:latin typeface="微软雅黑" panose="020B0503020204020204" charset="-122"/>
-                <a:ea typeface="微软雅黑" panose="020B0503020204020204" charset="-122"/>
-              </a:rPr>
-              <a:t> -</a:t>
-            </a:r>
-            <a:endParaRPr lang="en-US" sz="1200" b="1">
-              <a:solidFill>
-                <a:srgbClr val="052B7C"/>
               </a:solidFill>
               <a:latin typeface="微软雅黑" panose="020B0503020204020204" charset="-122"/>
               <a:ea typeface="微软雅黑" panose="020B0503020204020204" charset="-122"/>
@@ -6762,7 +4726,7 @@
                 <a:latin typeface="微软雅黑" panose="020B0503020204020204" charset="-122"/>
                 <a:ea typeface="微软雅黑" panose="020B0503020204020204" charset="-122"/>
               </a:rPr>
-              <a:t>自研应用</a:t>
+              <a:t>开发应用</a:t>
             </a:r>
             <a:r>
               <a:rPr lang="en-US" sz="1350">
@@ -7957,7 +5921,17 @@
                 <a:latin typeface="微软雅黑" panose="020B0503020204020204" charset="-122"/>
                 <a:ea typeface="微软雅黑" panose="020B0503020204020204" charset="-122"/>
               </a:rPr>
-              <a:t>二、自研应用交付总览</a:t>
+              <a:t>二、</a:t>
+            </a:r>
+            <a:r>
+              <a:rPr lang="zh-CN" sz="2250" b="1">
+                <a:solidFill>
+                  <a:srgbClr val="052B7C"/>
+                </a:solidFill>
+                <a:latin typeface="微软雅黑" panose="020B0503020204020204" charset="-122"/>
+                <a:ea typeface="微软雅黑" panose="020B0503020204020204" charset="-122"/>
+              </a:rPr>
+              <a:t>开发应用交付总览</a:t>
             </a:r>
             <a:endParaRPr lang="zh-CN" sz="2250" b="1">
               <a:solidFill>
@@ -9043,7 +7017,7 @@
                           <a:latin typeface="微软雅黑" panose="020B0503020204020204" charset="-122"/>
                           <a:ea typeface="微软雅黑" panose="020B0503020204020204" charset="-122"/>
                         </a:rPr>
-                        <a:t>纯前端 HTML</a:t>
+                        <a:t>纯前端</a:t>
                       </a:r>
                       <a:endParaRPr sz="1125">
                         <a:solidFill>
@@ -14866,7 +12840,7 @@
   <p:cSld>
     <p:spTree>
       <p:nvGrpSpPr>
-        <p:cNvPr id="221" name="" descr="&lt;Slide style={{ width:'1280px', height:'720px', position:'relative', background:'#FFFFFF', fontFamily:'微软雅黑' }}&gt;&#10;  &lt;Box style={{ position:'absolute', left:56, top:36, flexDirection:'row', alignItems:'center', gap:12 }}&gt;&#10;    &lt;Box style={{ width:8, height:34, background:'#4472C4' }} /&gt;&#10;    &lt;Text style={{ fontSize:30, fontWeight:'bold', color:'#052B7C' }}&gt;四、培训与推广&lt;/Text&gt;&#10;  &lt;/Box&gt;&#10;&#10;  &lt;Box style={{ position:'absolute', left:56, top:120, right:56 }}&gt;&#10;    &lt;Table&#10;      style={{ width:'100%', height:430 }}&#10;      defaultTextStyle={{ fontSize:15, textAlign:'center', color:'#1A1A1A' }}&#10;      defaultCellStyle={{ border:{ left:{width:1,color:'#CCCCCC'}, right:{width:1,color:'#CCCCCC'}, top:{width:1,color:'#CCCCCC'}, bottom:{width:1,color:'#CCCCCC'} } }}&#10;      cells={[&#10;        [ {text:'月份', textStyle:{bold:true,color:'#1A1A1A'}, cellStyle:{background:{color:'#DAE3F3'}}},&#10;          {text:'主导', textStyle:{bold:true,color:'#1A1A1A'}, cellStyle:{background:{color:'#DAE3F3'}}},&#10;          {text:'协助 / 参与', textStyle:{bold:true,color:'#1A1A1A'}, cellStyle:{background:{color:'#DAE3F3'}}},&#10;          {text:'主要培训主题', textStyle:{bold:true,color:'#1A1A1A',textAlign:'left'}, cellStyle:{background:{color:'#DAE3F3'}}} ],&#10;        [ '4 月', '1', '2', {text:'Claude Code + 前后端数据库组内培训(04-30)；协助研发部培训；协助采购部 OpenClaw 部署(04-24)', textStyle:{textAlign:'left'}} ],&#10;        [ '5 月', '1', '3', {text:'AI 小组软件开发流程培训 + 作业(05-08)；参与视频生成 / AI 培训助手 / PBC 培训', textStyle:{textAlign:'left'}} ],&#10;        [ '6 月', '3', '1', {text:'月度培训 ×2（AI 工具推荐 / AI 黑话扫盲）、总经办 mmxCode/codex 培训(06-05)；协助销售五部三合一(06-22)', textStyle:{textAlign:'left'}} ],&#10;        [ '7 月', '1', '0', {text:'船务部 shipping-helper 使用培训(07-24)', textStyle:{textAlign:'left'}} ],&#10;        [ {text:'合计', textStyle:{bold:true}, cellStyle:{background:{color:'#FCE4D6'}}},&#10;          {text:'6', textStyle:{bold:true}, cellStyle:{background:{color:'#FCE4D6'}}},&#10;          {text:'6', textStyle:{bold:true}, cellStyle:{background:{color:'#FCE4D6'}}},&#10;          {text:'12 场，覆盖采购 / 船务 / 销售五部 / 研发 / 总经办等多部门', textStyle:{bold:true,textAlign:'left'}, cellStyle:{background:{color:'#FCE4D6'}}} ],&#10;      ]}&#10;    /&gt;&#10;  &lt;/Box&gt;&#10;&#10;  &lt;Box style={{ position:'absolute', left:56, top:565, right:56 }}&gt;&#10;    &lt;Text style={{ fontSize:16, color:'#1A1A1A', lineHeight:1.5 }}&gt;推广与采纳驱动是交付物产生业务价值的「最后一公里」——培训不止「讲」，更含采纳驱动与内部宣推：06-22 销售五部三合一、07-24 船务部使用培训直接对应两个自研工具的上手落地；价格爬取 Skill 以「回采购培训」巩固自建能力。&lt;/Text&gt;&#10;  &lt;/Box&gt;&#10;&#10;  &lt;Box style={{ position:'absolute', left:56, top:668, right:56, flexDirection:'row', justifyContent:'space-between' }}&gt;&#10;    &lt;Text style={{ fontSize:14, color:'#888' }}&gt;入职以来 AI 工作复盘&lt;/Text&gt;&#10;    &lt;Text style={{ fontSize:14, color:'#888' }}&gt;09 / 13&lt;/Text&gt;&#10;  &lt;/Box&gt;&#10;&lt;/Slide&gt;"/>
+        <p:cNvPr id="12" name="" descr="&lt;Slide style={{ width:'1280px', height:'720px', position:'relative', background:'#FFFFFF', fontFamily:'微软雅黑' }}&gt;&#10;  &lt;Box style={{ position:'absolute', left:56, top:36, flexDirection:'row', alignItems:'center', gap:12 }}&gt;&#10;    &lt;Box style={{ width:8, height:34, background:'#4472C4' }} /&gt;&#10;    &lt;Text style={{ fontSize:30, fontWeight:'bold', color:'#052B7C' }}&gt;五、宏昊AI助手 · 验收运营&lt;/Text&gt;&#10;  &lt;/Box&gt;&#10;&#10;  &lt;Box style={{ position:'absolute', left:56, top:130, right:56, flexDirection:'row', gap:22 }}&gt;&#10;    {[['37','平台验收项'],['19','问题反馈闭环'],['93.3%','6 月单月通过率']].map((c, i) =&gt; (&#10;      &lt;Box key={i} style={{ flex:1, background:'#F4F7FC', borderRadius:10, padding:'22px 18px', alignItems:'center' }}&gt;&#10;        &lt;Text style={{ fontSize:56, fontWeight:'bold', color:'#4472C4' }}&gt;{c[0]}&lt;/Text&gt;&#10;        &lt;Text style={{ fontSize:18, color:'#1A1A1A', marginTop:6 }}&gt;{c[1]}&lt;/Text&gt;&#10;      &lt;/Box&gt;&#10;    ))}&#10;  &lt;/Box&gt;&#10;&#10;  &lt;Box style={{ position:'absolute', left:56, top:300, right:56, background:'#052B7C', borderRadius:10, padding:'16px 22px' }}&gt;&#10;    &lt;Text style={{ fontSize:18, color:'#FFFFFF', lineHeight:1.5 }}&gt;入职以来 &lt;span style={{ fontWeight:'bold' }}&gt;37 项验收 + 19 项问题反馈闭环&lt;/span&gt;，6 月单月通过率 93.3% → 把「供应商交付」变「可度量、可追溯、有退回机制」的质量门槛。&lt;/Text&gt;&#10;  &lt;/Box&gt;&#10;&#10;  &lt;Box style={{ position:'absolute', left:56, top:400, right:56 }}&gt;&#10;    &lt;Table&#10;      style={{ width:'100%', height:230 }}&#10;      defaultTextStyle={{ fontSize:15, textAlign:'center', color:'#1A1A1A' }}&#10;      defaultCellStyle={{ border:{ left:{width:1,color:'#CCCCCC'}, right:{width:1,color:'#CCCCCC'}, top:{width:1,color:'#CCCCCC'}, bottom:{width:1,color:'#CCCCCC'} } }}&#10;      cells={[&#10;        [ {text:'周期', textStyle:{bold:true,color:'#1A1A1A'}, cellStyle:{background:{color:'#DAE3F3'}}},&#10;          {text:'验收产出', textStyle:{bold:true,color:'#1A1A1A'}, cellStyle:{background:{color:'#DAE3F3'}}},&#10;          {text:'问题反馈', textStyle:{bold:true,color:'#1A1A1A'}, cellStyle:{background:{color:'#DAE3F3'}}},&#10;          {text:'通过情况', textStyle:{bold:true,color:'#1A1A1A'}, cellStyle:{background:{color:'#DAE3F3'}}} ],&#10;        [ '4 月', '3 测试 + 2 验收（5 项）', '4', '—' ],&#10;        [ '5 月', '9 项测试验收', '3', '—' ],&#10;        [ '6 月', '15 用例（5 批次）', '8', {text:'14/15 通过（93.3%）', textStyle:{bold:true,color:'#4472C4'}} ],&#10;        [ '7 月（2607）', '5 轮验收（8 项）', '4', '—' ],&#10;      ]}&#10;    /&gt;&#10;  &lt;/Box&gt;&#10;&#10;  &lt;Box style={{ position:'absolute', left:56, top:668, right:56, flexDirection:'row', justifyContent:'space-between' }}&gt;&#10;    &lt;Text style={{ fontSize:14, color:'#888' }}&gt;入职以来 AI 工作复盘&lt;/Text&gt;&#10;    &lt;Text style={{ fontSize:14, color:'#888' }}&gt;10 / 13&lt;/Text&gt;&#10;  &lt;/Box&gt;&#10;&lt;/Slide&gt;"/>
         <p:cNvGrpSpPr/>
         <p:nvPr/>
       </p:nvGrpSpPr>
@@ -14880,7 +12854,7 @@
       </p:grpSpPr>
       <p:sp>
         <p:nvSpPr>
-          <p:cNvPr id="222" name="矩形 221"/>
+          <p:cNvPr id="13" name="矩形 12"/>
           <p:cNvSpPr/>
           <p:nvPr/>
         </p:nvSpPr>
@@ -14903,7 +12877,7 @@
       </p:sp>
       <p:sp>
         <p:nvSpPr>
-          <p:cNvPr id="223" name="矩形 222"/>
+          <p:cNvPr id="14" name="矩形 13"/>
           <p:cNvSpPr/>
           <p:nvPr/>
         </p:nvSpPr>
@@ -14926,14 +12900,14 @@
       </p:sp>
       <p:sp>
         <p:nvSpPr>
-          <p:cNvPr id="224" name="文本框 223" descr="{&quot;isTemplate&quot;:true,&quot;type&quot;:&quot;text&quot;}"/>
+          <p:cNvPr id="15" name="文本框 14" descr="{&quot;isTemplate&quot;:true,&quot;type&quot;:&quot;text&quot;}"/>
           <p:cNvSpPr txBox="1"/>
           <p:nvPr/>
         </p:nvSpPr>
         <p:spPr>
           <a:xfrm>
             <a:off x="723900" y="342900"/>
-            <a:ext cx="2000250" cy="342900"/>
+            <a:ext cx="3467100" cy="342900"/>
           </a:xfrm>
           <a:prstGeom prst="rect">
             <a:avLst/>
@@ -14955,7 +12929,47 @@
                 <a:latin typeface="微软雅黑" panose="020B0503020204020204" charset="-122"/>
                 <a:ea typeface="微软雅黑" panose="020B0503020204020204" charset="-122"/>
               </a:rPr>
-              <a:t>四、培训与推广</a:t>
+              <a:t>四、宏昊</a:t>
+            </a:r>
+            <a:r>
+              <a:rPr lang="en-US" sz="2250" b="1">
+                <a:solidFill>
+                  <a:srgbClr val="052B7C"/>
+                </a:solidFill>
+                <a:latin typeface="微软雅黑" panose="020B0503020204020204" charset="-122"/>
+                <a:ea typeface="微软雅黑" panose="020B0503020204020204" charset="-122"/>
+              </a:rPr>
+              <a:t>AI</a:t>
+            </a:r>
+            <a:r>
+              <a:rPr lang="zh-CN" sz="2250" b="1">
+                <a:solidFill>
+                  <a:srgbClr val="052B7C"/>
+                </a:solidFill>
+                <a:latin typeface="微软雅黑" panose="020B0503020204020204" charset="-122"/>
+                <a:ea typeface="微软雅黑" panose="020B0503020204020204" charset="-122"/>
+              </a:rPr>
+              <a:t>助手</a:t>
+            </a:r>
+            <a:r>
+              <a:rPr lang="en-US" sz="2250" b="1">
+                <a:solidFill>
+                  <a:srgbClr val="052B7C"/>
+                </a:solidFill>
+                <a:latin typeface="微软雅黑" panose="020B0503020204020204" charset="-122"/>
+                <a:ea typeface="微软雅黑" panose="020B0503020204020204" charset="-122"/>
+              </a:rPr>
+              <a:t> · </a:t>
+            </a:r>
+            <a:r>
+              <a:rPr lang="zh-CN" sz="2250" b="1">
+                <a:solidFill>
+                  <a:srgbClr val="052B7C"/>
+                </a:solidFill>
+                <a:latin typeface="微软雅黑" panose="020B0503020204020204" charset="-122"/>
+                <a:ea typeface="微软雅黑" panose="020B0503020204020204" charset="-122"/>
+              </a:rPr>
+              <a:t>验收运营</a:t>
             </a:r>
             <a:endParaRPr lang="zh-CN" sz="2250" b="1">
               <a:solidFill>
@@ -14967,27 +12981,538 @@
           </a:p>
         </p:txBody>
       </p:sp>
+      <p:sp>
+        <p:nvSpPr>
+          <p:cNvPr id="16" name="圆角矩形 15"/>
+          <p:cNvSpPr/>
+          <p:nvPr/>
+        </p:nvSpPr>
+        <p:spPr>
+          <a:xfrm>
+            <a:off x="533400" y="1238250"/>
+            <a:ext cx="3571875" cy="1333500"/>
+          </a:xfrm>
+          <a:prstGeom prst="roundRect">
+            <a:avLst>
+              <a:gd name="adj" fmla="val 7143"/>
+            </a:avLst>
+          </a:prstGeom>
+          <a:solidFill>
+            <a:srgbClr val="F4F7FC"/>
+          </a:solidFill>
+        </p:spPr>
+        <p:txBody>
+          <a:bodyPr/>
+          <a:p/>
+        </p:txBody>
+      </p:sp>
+      <p:sp>
+        <p:nvSpPr>
+          <p:cNvPr id="17" name="文本框 16" descr="{&quot;isTemplate&quot;:true,&quot;type&quot;:&quot;text&quot;}"/>
+          <p:cNvSpPr txBox="1"/>
+          <p:nvPr/>
+        </p:nvSpPr>
+        <p:spPr>
+          <a:xfrm>
+            <a:off x="1981200" y="1447800"/>
+            <a:ext cx="685800" cy="647700"/>
+          </a:xfrm>
+          <a:prstGeom prst="rect">
+            <a:avLst/>
+          </a:prstGeom>
+        </p:spPr>
+        <p:txBody>
+          <a:bodyPr wrap="none" lIns="0" tIns="0" rIns="0" bIns="0"/>
+          <a:p>
+            <a:pPr>
+              <a:lnSpc>
+                <a:spcPct val="100000"/>
+              </a:lnSpc>
+            </a:pPr>
+            <a:r>
+              <a:rPr lang="en-US" sz="4200" b="1">
+                <a:solidFill>
+                  <a:srgbClr val="4472C4"/>
+                </a:solidFill>
+                <a:latin typeface="微软雅黑" panose="020B0503020204020204" charset="-122"/>
+                <a:ea typeface="微软雅黑" panose="020B0503020204020204" charset="-122"/>
+              </a:rPr>
+              <a:t>37</a:t>
+            </a:r>
+            <a:endParaRPr lang="en-US" sz="4200" b="1">
+              <a:solidFill>
+                <a:srgbClr val="4472C4"/>
+              </a:solidFill>
+              <a:latin typeface="微软雅黑" panose="020B0503020204020204" charset="-122"/>
+              <a:ea typeface="微软雅黑" panose="020B0503020204020204" charset="-122"/>
+            </a:endParaRPr>
+          </a:p>
+        </p:txBody>
+      </p:sp>
+      <p:sp>
+        <p:nvSpPr>
+          <p:cNvPr id="18" name="文本框 17" descr="{&quot;isTemplate&quot;:true,&quot;type&quot;:&quot;text&quot;}"/>
+          <p:cNvSpPr txBox="1"/>
+          <p:nvPr/>
+        </p:nvSpPr>
+        <p:spPr>
+          <a:xfrm>
+            <a:off x="1895475" y="2152650"/>
+            <a:ext cx="857250" cy="209550"/>
+          </a:xfrm>
+          <a:prstGeom prst="rect">
+            <a:avLst/>
+          </a:prstGeom>
+        </p:spPr>
+        <p:txBody>
+          <a:bodyPr wrap="none" lIns="0" tIns="0" rIns="0" bIns="0"/>
+          <a:p>
+            <a:pPr>
+              <a:lnSpc>
+                <a:spcPct val="100000"/>
+              </a:lnSpc>
+            </a:pPr>
+            <a:r>
+              <a:rPr lang="zh-CN" sz="1350">
+                <a:solidFill>
+                  <a:srgbClr val="1A1A1A"/>
+                </a:solidFill>
+                <a:latin typeface="微软雅黑" panose="020B0503020204020204" charset="-122"/>
+                <a:ea typeface="微软雅黑" panose="020B0503020204020204" charset="-122"/>
+              </a:rPr>
+              <a:t>平台验收项</a:t>
+            </a:r>
+            <a:endParaRPr lang="zh-CN" sz="1350">
+              <a:solidFill>
+                <a:srgbClr val="1A1A1A"/>
+              </a:solidFill>
+              <a:latin typeface="微软雅黑" panose="020B0503020204020204" charset="-122"/>
+              <a:ea typeface="微软雅黑" panose="020B0503020204020204" charset="-122"/>
+            </a:endParaRPr>
+          </a:p>
+        </p:txBody>
+      </p:sp>
+      <p:sp>
+        <p:nvSpPr>
+          <p:cNvPr id="19" name="圆角矩形 18"/>
+          <p:cNvSpPr/>
+          <p:nvPr/>
+        </p:nvSpPr>
+        <p:spPr>
+          <a:xfrm>
+            <a:off x="4314825" y="1238250"/>
+            <a:ext cx="3562350" cy="1333500"/>
+          </a:xfrm>
+          <a:prstGeom prst="roundRect">
+            <a:avLst>
+              <a:gd name="adj" fmla="val 7143"/>
+            </a:avLst>
+          </a:prstGeom>
+          <a:solidFill>
+            <a:srgbClr val="F4F7FC"/>
+          </a:solidFill>
+        </p:spPr>
+        <p:txBody>
+          <a:bodyPr/>
+          <a:p/>
+        </p:txBody>
+      </p:sp>
+      <p:sp>
+        <p:nvSpPr>
+          <p:cNvPr id="20" name="文本框 19" descr="{&quot;isTemplate&quot;:true,&quot;type&quot;:&quot;text&quot;}"/>
+          <p:cNvSpPr txBox="1"/>
+          <p:nvPr/>
+        </p:nvSpPr>
+        <p:spPr>
+          <a:xfrm>
+            <a:off x="5753100" y="1447800"/>
+            <a:ext cx="685800" cy="647700"/>
+          </a:xfrm>
+          <a:prstGeom prst="rect">
+            <a:avLst/>
+          </a:prstGeom>
+        </p:spPr>
+        <p:txBody>
+          <a:bodyPr wrap="none" lIns="0" tIns="0" rIns="0" bIns="0"/>
+          <a:p>
+            <a:pPr>
+              <a:lnSpc>
+                <a:spcPct val="100000"/>
+              </a:lnSpc>
+            </a:pPr>
+            <a:r>
+              <a:rPr lang="en-US" sz="4200" b="1">
+                <a:solidFill>
+                  <a:srgbClr val="4472C4"/>
+                </a:solidFill>
+                <a:latin typeface="微软雅黑" panose="020B0503020204020204" charset="-122"/>
+                <a:ea typeface="微软雅黑" panose="020B0503020204020204" charset="-122"/>
+              </a:rPr>
+              <a:t>19</a:t>
+            </a:r>
+            <a:endParaRPr lang="en-US" sz="4200" b="1">
+              <a:solidFill>
+                <a:srgbClr val="4472C4"/>
+              </a:solidFill>
+              <a:latin typeface="微软雅黑" panose="020B0503020204020204" charset="-122"/>
+              <a:ea typeface="微软雅黑" panose="020B0503020204020204" charset="-122"/>
+            </a:endParaRPr>
+          </a:p>
+        </p:txBody>
+      </p:sp>
+      <p:sp>
+        <p:nvSpPr>
+          <p:cNvPr id="21" name="文本框 20" descr="{&quot;isTemplate&quot;:true,&quot;type&quot;:&quot;text&quot;}"/>
+          <p:cNvSpPr txBox="1"/>
+          <p:nvPr/>
+        </p:nvSpPr>
+        <p:spPr>
+          <a:xfrm>
+            <a:off x="5581650" y="2152650"/>
+            <a:ext cx="1028700" cy="209550"/>
+          </a:xfrm>
+          <a:prstGeom prst="rect">
+            <a:avLst/>
+          </a:prstGeom>
+        </p:spPr>
+        <p:txBody>
+          <a:bodyPr wrap="none" lIns="0" tIns="0" rIns="0" bIns="0"/>
+          <a:p>
+            <a:pPr>
+              <a:lnSpc>
+                <a:spcPct val="100000"/>
+              </a:lnSpc>
+            </a:pPr>
+            <a:r>
+              <a:rPr lang="zh-CN" sz="1350">
+                <a:solidFill>
+                  <a:srgbClr val="1A1A1A"/>
+                </a:solidFill>
+                <a:latin typeface="微软雅黑" panose="020B0503020204020204" charset="-122"/>
+                <a:ea typeface="微软雅黑" panose="020B0503020204020204" charset="-122"/>
+              </a:rPr>
+              <a:t>问题反馈闭环</a:t>
+            </a:r>
+            <a:endParaRPr lang="zh-CN" sz="1350">
+              <a:solidFill>
+                <a:srgbClr val="1A1A1A"/>
+              </a:solidFill>
+              <a:latin typeface="微软雅黑" panose="020B0503020204020204" charset="-122"/>
+              <a:ea typeface="微软雅黑" panose="020B0503020204020204" charset="-122"/>
+            </a:endParaRPr>
+          </a:p>
+        </p:txBody>
+      </p:sp>
+      <p:sp>
+        <p:nvSpPr>
+          <p:cNvPr id="22" name="圆角矩形 21"/>
+          <p:cNvSpPr/>
+          <p:nvPr/>
+        </p:nvSpPr>
+        <p:spPr>
+          <a:xfrm>
+            <a:off x="8086725" y="1238250"/>
+            <a:ext cx="3571875" cy="1333500"/>
+          </a:xfrm>
+          <a:prstGeom prst="roundRect">
+            <a:avLst>
+              <a:gd name="adj" fmla="val 7143"/>
+            </a:avLst>
+          </a:prstGeom>
+          <a:solidFill>
+            <a:srgbClr val="F4F7FC"/>
+          </a:solidFill>
+        </p:spPr>
+        <p:txBody>
+          <a:bodyPr/>
+          <a:p/>
+        </p:txBody>
+      </p:sp>
+      <p:sp>
+        <p:nvSpPr>
+          <p:cNvPr id="23" name="文本框 22" descr="{&quot;isTemplate&quot;:true,&quot;type&quot;:&quot;text&quot;}"/>
+          <p:cNvSpPr txBox="1"/>
+          <p:nvPr/>
+        </p:nvSpPr>
+        <p:spPr>
+          <a:xfrm>
+            <a:off x="8963025" y="1447800"/>
+            <a:ext cx="1828800" cy="647700"/>
+          </a:xfrm>
+          <a:prstGeom prst="rect">
+            <a:avLst/>
+          </a:prstGeom>
+        </p:spPr>
+        <p:txBody>
+          <a:bodyPr wrap="none" lIns="0" tIns="0" rIns="0" bIns="0"/>
+          <a:p>
+            <a:pPr>
+              <a:lnSpc>
+                <a:spcPct val="100000"/>
+              </a:lnSpc>
+            </a:pPr>
+            <a:r>
+              <a:rPr lang="en-US" sz="4200" b="1">
+                <a:solidFill>
+                  <a:srgbClr val="4472C4"/>
+                </a:solidFill>
+                <a:latin typeface="微软雅黑" panose="020B0503020204020204" charset="-122"/>
+                <a:ea typeface="微软雅黑" panose="020B0503020204020204" charset="-122"/>
+              </a:rPr>
+              <a:t>93.3%</a:t>
+            </a:r>
+            <a:endParaRPr lang="en-US" sz="4200" b="1">
+              <a:solidFill>
+                <a:srgbClr val="4472C4"/>
+              </a:solidFill>
+              <a:latin typeface="微软雅黑" panose="020B0503020204020204" charset="-122"/>
+              <a:ea typeface="微软雅黑" panose="020B0503020204020204" charset="-122"/>
+            </a:endParaRPr>
+          </a:p>
+        </p:txBody>
+      </p:sp>
+      <p:sp>
+        <p:nvSpPr>
+          <p:cNvPr id="24" name="文本框 23" descr="{&quot;isTemplate&quot;:true,&quot;type&quot;:&quot;text&quot;}"/>
+          <p:cNvSpPr txBox="1"/>
+          <p:nvPr/>
+        </p:nvSpPr>
+        <p:spPr>
+          <a:xfrm>
+            <a:off x="9286875" y="2152650"/>
+            <a:ext cx="1181100" cy="209550"/>
+          </a:xfrm>
+          <a:prstGeom prst="rect">
+            <a:avLst/>
+          </a:prstGeom>
+        </p:spPr>
+        <p:txBody>
+          <a:bodyPr wrap="none" lIns="0" tIns="0" rIns="0" bIns="0"/>
+          <a:p>
+            <a:pPr>
+              <a:lnSpc>
+                <a:spcPct val="100000"/>
+              </a:lnSpc>
+            </a:pPr>
+            <a:r>
+              <a:rPr lang="en-US" sz="1350">
+                <a:solidFill>
+                  <a:srgbClr val="1A1A1A"/>
+                </a:solidFill>
+                <a:latin typeface="微软雅黑" panose="020B0503020204020204" charset="-122"/>
+                <a:ea typeface="微软雅黑" panose="020B0503020204020204" charset="-122"/>
+              </a:rPr>
+              <a:t>6 </a:t>
+            </a:r>
+            <a:r>
+              <a:rPr lang="zh-CN" sz="1350">
+                <a:solidFill>
+                  <a:srgbClr val="1A1A1A"/>
+                </a:solidFill>
+                <a:latin typeface="微软雅黑" panose="020B0503020204020204" charset="-122"/>
+                <a:ea typeface="微软雅黑" panose="020B0503020204020204" charset="-122"/>
+              </a:rPr>
+              <a:t>月单月通过率</a:t>
+            </a:r>
+            <a:endParaRPr lang="zh-CN" sz="1350">
+              <a:solidFill>
+                <a:srgbClr val="1A1A1A"/>
+              </a:solidFill>
+              <a:latin typeface="微软雅黑" panose="020B0503020204020204" charset="-122"/>
+              <a:ea typeface="微软雅黑" panose="020B0503020204020204" charset="-122"/>
+            </a:endParaRPr>
+          </a:p>
+        </p:txBody>
+      </p:sp>
+      <p:sp>
+        <p:nvSpPr>
+          <p:cNvPr id="25" name="圆角矩形 24"/>
+          <p:cNvSpPr/>
+          <p:nvPr/>
+        </p:nvSpPr>
+        <p:spPr>
+          <a:xfrm>
+            <a:off x="533400" y="2857500"/>
+            <a:ext cx="11125200" cy="619125"/>
+          </a:xfrm>
+          <a:prstGeom prst="roundRect">
+            <a:avLst>
+              <a:gd name="adj" fmla="val 15385"/>
+            </a:avLst>
+          </a:prstGeom>
+          <a:solidFill>
+            <a:srgbClr val="052B7C"/>
+          </a:solidFill>
+        </p:spPr>
+        <p:txBody>
+          <a:bodyPr/>
+          <a:p/>
+        </p:txBody>
+      </p:sp>
+      <p:sp>
+        <p:nvSpPr>
+          <p:cNvPr id="26" name="文本框 25" descr="{&quot;isTemplate&quot;:true,&quot;type&quot;:&quot;text&quot;}"/>
+          <p:cNvSpPr txBox="1"/>
+          <p:nvPr/>
+        </p:nvSpPr>
+        <p:spPr>
+          <a:xfrm>
+            <a:off x="742950" y="3009900"/>
+            <a:ext cx="10706100" cy="314325"/>
+          </a:xfrm>
+          <a:prstGeom prst="rect">
+            <a:avLst/>
+          </a:prstGeom>
+        </p:spPr>
+        <p:txBody>
+          <a:bodyPr wrap="none" lIns="0" tIns="0" rIns="0" bIns="0"/>
+          <a:p>
+            <a:pPr>
+              <a:lnSpc>
+                <a:spcPct val="150000"/>
+              </a:lnSpc>
+            </a:pPr>
+            <a:r>
+              <a:rPr lang="zh-CN" sz="1350">
+                <a:solidFill>
+                  <a:srgbClr val="FFFFFF"/>
+                </a:solidFill>
+                <a:latin typeface="微软雅黑" panose="020B0503020204020204" charset="-122"/>
+                <a:ea typeface="微软雅黑" panose="020B0503020204020204" charset="-122"/>
+              </a:rPr>
+              <a:t>入职以来</a:t>
+            </a:r>
+            <a:r>
+              <a:rPr lang="en-US" sz="1350">
+                <a:solidFill>
+                  <a:srgbClr val="FFFFFF"/>
+                </a:solidFill>
+                <a:latin typeface="微软雅黑" panose="020B0503020204020204" charset="-122"/>
+                <a:ea typeface="微软雅黑" panose="020B0503020204020204" charset="-122"/>
+              </a:rPr>
+              <a:t> </a:t>
+            </a:r>
+            <a:r>
+              <a:rPr lang="en-US" sz="1350" b="1">
+                <a:solidFill>
+                  <a:srgbClr val="FFFFFF"/>
+                </a:solidFill>
+                <a:latin typeface="微软雅黑" panose="020B0503020204020204" charset="-122"/>
+                <a:ea typeface="微软雅黑" panose="020B0503020204020204" charset="-122"/>
+              </a:rPr>
+              <a:t>37 </a:t>
+            </a:r>
+            <a:r>
+              <a:rPr lang="zh-CN" sz="1350" b="1">
+                <a:solidFill>
+                  <a:srgbClr val="FFFFFF"/>
+                </a:solidFill>
+                <a:latin typeface="微软雅黑" panose="020B0503020204020204" charset="-122"/>
+                <a:ea typeface="微软雅黑" panose="020B0503020204020204" charset="-122"/>
+              </a:rPr>
+              <a:t>项验收</a:t>
+            </a:r>
+            <a:r>
+              <a:rPr lang="en-US" sz="1350" b="1">
+                <a:solidFill>
+                  <a:srgbClr val="FFFFFF"/>
+                </a:solidFill>
+                <a:latin typeface="微软雅黑" panose="020B0503020204020204" charset="-122"/>
+                <a:ea typeface="微软雅黑" panose="020B0503020204020204" charset="-122"/>
+              </a:rPr>
+              <a:t> + 19 </a:t>
+            </a:r>
+            <a:r>
+              <a:rPr lang="zh-CN" sz="1350" b="1">
+                <a:solidFill>
+                  <a:srgbClr val="FFFFFF"/>
+                </a:solidFill>
+                <a:latin typeface="微软雅黑" panose="020B0503020204020204" charset="-122"/>
+                <a:ea typeface="微软雅黑" panose="020B0503020204020204" charset="-122"/>
+              </a:rPr>
+              <a:t>项问题反馈闭环</a:t>
+            </a:r>
+            <a:r>
+              <a:rPr lang="zh-CN" sz="1350">
+                <a:solidFill>
+                  <a:srgbClr val="FFFFFF"/>
+                </a:solidFill>
+                <a:latin typeface="微软雅黑" panose="020B0503020204020204" charset="-122"/>
+                <a:ea typeface="微软雅黑" panose="020B0503020204020204" charset="-122"/>
+              </a:rPr>
+              <a:t>，</a:t>
+            </a:r>
+            <a:r>
+              <a:rPr lang="en-US" sz="1350">
+                <a:solidFill>
+                  <a:srgbClr val="FFFFFF"/>
+                </a:solidFill>
+                <a:latin typeface="微软雅黑" panose="020B0503020204020204" charset="-122"/>
+                <a:ea typeface="微软雅黑" panose="020B0503020204020204" charset="-122"/>
+              </a:rPr>
+              <a:t>6 </a:t>
+            </a:r>
+            <a:r>
+              <a:rPr lang="zh-CN" sz="1350">
+                <a:solidFill>
+                  <a:srgbClr val="FFFFFF"/>
+                </a:solidFill>
+                <a:latin typeface="微软雅黑" panose="020B0503020204020204" charset="-122"/>
+                <a:ea typeface="微软雅黑" panose="020B0503020204020204" charset="-122"/>
+              </a:rPr>
+              <a:t>月单月通过率</a:t>
+            </a:r>
+            <a:r>
+              <a:rPr lang="en-US" sz="1350">
+                <a:solidFill>
+                  <a:srgbClr val="FFFFFF"/>
+                </a:solidFill>
+                <a:latin typeface="微软雅黑" panose="020B0503020204020204" charset="-122"/>
+                <a:ea typeface="微软雅黑" panose="020B0503020204020204" charset="-122"/>
+              </a:rPr>
+              <a:t> 93.3% → </a:t>
+            </a:r>
+            <a:r>
+              <a:rPr lang="zh-CN" sz="1350">
+                <a:solidFill>
+                  <a:srgbClr val="FFFFFF"/>
+                </a:solidFill>
+                <a:latin typeface="微软雅黑" panose="020B0503020204020204" charset="-122"/>
+                <a:ea typeface="微软雅黑" panose="020B0503020204020204" charset="-122"/>
+              </a:rPr>
+              <a:t>把「供应商交付」变「可度量、可追溯、有退回机制」的质量门槛。</a:t>
+            </a:r>
+            <a:endParaRPr lang="zh-CN" sz="1350">
+              <a:solidFill>
+                <a:srgbClr val="FFFFFF"/>
+              </a:solidFill>
+              <a:latin typeface="微软雅黑" panose="020B0503020204020204" charset="-122"/>
+              <a:ea typeface="微软雅黑" panose="020B0503020204020204" charset="-122"/>
+            </a:endParaRPr>
+          </a:p>
+        </p:txBody>
+      </p:sp>
       <p:graphicFrame>
         <p:nvGraphicFramePr>
-          <p:cNvPr id="225" name="表格 224"/>
+          <p:cNvPr id="27" name="表格 26"/>
           <p:cNvGraphicFramePr/>
           <p:nvPr/>
         </p:nvGraphicFramePr>
         <p:xfrm>
-          <a:off x="533400" y="1143000"/>
-          <a:ext cx="11125200" cy="4095750"/>
+          <a:off x="533400" y="3810000"/>
+          <a:ext cx="11125200" cy="2190750"/>
         </p:xfrm>
         <a:graphic>
           <a:graphicData uri="http://schemas.openxmlformats.org/drawingml/2006/table">
             <a:tbl>
               <a:tblPr/>
               <a:tblGrid>
-                <a:gridCol w="468978"/>
-                <a:gridCol w="468978"/>
-                <a:gridCol w="1025593"/>
-                <a:gridCol w="9161651"/>
+                <a:gridCol w="2249357"/>
+                <a:gridCol w="3790905"/>
+                <a:gridCol w="1511151"/>
+                <a:gridCol w="3573786"/>
               </a:tblGrid>
-              <a:tr h="682625">
+              <a:tr h="438150">
                 <a:tc>
                   <a:txBody>
                     <a:bodyPr wrap="square">
@@ -15007,7 +13532,7 @@
                           <a:latin typeface="微软雅黑" panose="020B0503020204020204" charset="-122"/>
                           <a:ea typeface="微软雅黑" panose="020B0503020204020204" charset="-122"/>
                         </a:rPr>
-                        <a:t>月份</a:t>
+                        <a:t>周期</a:t>
                       </a:r>
                       <a:endParaRPr sz="1125" b="1">
                         <a:solidFill>
@@ -15055,7 +13580,7 @@
                           <a:latin typeface="微软雅黑" panose="020B0503020204020204" charset="-122"/>
                           <a:ea typeface="微软雅黑" panose="020B0503020204020204" charset="-122"/>
                         </a:rPr>
-                        <a:t>主导</a:t>
+                        <a:t>验收产出</a:t>
                       </a:r>
                       <a:endParaRPr sz="1125" b="1">
                         <a:solidFill>
@@ -15103,7 +13628,7 @@
                           <a:latin typeface="微软雅黑" panose="020B0503020204020204" charset="-122"/>
                           <a:ea typeface="微软雅黑" panose="020B0503020204020204" charset="-122"/>
                         </a:rPr>
-                        <a:t>协助 / 参与</a:t>
+                        <a:t>问题反馈</a:t>
                       </a:r>
                       <a:endParaRPr sz="1125" b="1">
                         <a:solidFill>
@@ -15151,7 +13676,7 @@
                           <a:latin typeface="微软雅黑" panose="020B0503020204020204" charset="-122"/>
                           <a:ea typeface="微软雅黑" panose="020B0503020204020204" charset="-122"/>
                         </a:rPr>
-                        <a:t>主要培训主题</a:t>
+                        <a:t>通过情况</a:t>
                       </a:r>
                       <a:endParaRPr sz="1125" b="1">
                         <a:solidFill>
@@ -15181,7 +13706,7 @@
                   </a:tcPr>
                 </a:tc>
               </a:tr>
-              <a:tr h="682625">
+              <a:tr h="438150">
                 <a:tc>
                   <a:txBody>
                     <a:bodyPr wrap="square">
@@ -15246,7 +13771,7 @@
                           <a:latin typeface="微软雅黑" panose="020B0503020204020204" charset="-122"/>
                           <a:ea typeface="微软雅黑" panose="020B0503020204020204" charset="-122"/>
                         </a:rPr>
-                        <a:t>1</a:t>
+                        <a:t>3 测试 + 2 验收（5 项）</a:t>
                       </a:r>
                       <a:endParaRPr sz="1125">
                         <a:solidFill>
@@ -15291,7 +13816,7 @@
                           <a:latin typeface="微软雅黑" panose="020B0503020204020204" charset="-122"/>
                           <a:ea typeface="微软雅黑" panose="020B0503020204020204" charset="-122"/>
                         </a:rPr>
-                        <a:t>2</a:t>
+                        <a:t>4</a:t>
                       </a:r>
                       <a:endParaRPr sz="1125">
                         <a:solidFill>
@@ -15336,7 +13861,7 @@
                           <a:latin typeface="微软雅黑" panose="020B0503020204020204" charset="-122"/>
                           <a:ea typeface="微软雅黑" panose="020B0503020204020204" charset="-122"/>
                         </a:rPr>
-                        <a:t>Claude Code + 前后端数据库组内培训(04-30)；协助研发部培训；协助采购部 OpenClaw 部署(04-24)</a:t>
+                        <a:t>—</a:t>
                       </a:r>
                       <a:endParaRPr sz="1125">
                         <a:solidFill>
@@ -15363,7 +13888,7 @@
                   </a:tcPr>
                 </a:tc>
               </a:tr>
-              <a:tr h="682625">
+              <a:tr h="438150">
                 <a:tc>
                   <a:txBody>
                     <a:bodyPr wrap="square">
@@ -15428,7 +13953,7 @@
                           <a:latin typeface="微软雅黑" panose="020B0503020204020204" charset="-122"/>
                           <a:ea typeface="微软雅黑" panose="020B0503020204020204" charset="-122"/>
                         </a:rPr>
-                        <a:t>1</a:t>
+                        <a:t>9 项测试验收</a:t>
                       </a:r>
                       <a:endParaRPr sz="1125">
                         <a:solidFill>
@@ -15518,7 +14043,7 @@
                           <a:latin typeface="微软雅黑" panose="020B0503020204020204" charset="-122"/>
                           <a:ea typeface="微软雅黑" panose="020B0503020204020204" charset="-122"/>
                         </a:rPr>
-                        <a:t>AI 小组软件开发流程培训 + 作业(05-08)；参与视频生成 / AI 培训助手 / PBC 培训</a:t>
+                        <a:t>—</a:t>
                       </a:r>
                       <a:endParaRPr sz="1125">
                         <a:solidFill>
@@ -15545,7 +14070,7 @@
                   </a:tcPr>
                 </a:tc>
               </a:tr>
-              <a:tr h="682625">
+              <a:tr h="438150">
                 <a:tc>
                   <a:txBody>
                     <a:bodyPr wrap="square">
@@ -15610,7 +14135,7 @@
                           <a:latin typeface="微软雅黑" panose="020B0503020204020204" charset="-122"/>
                           <a:ea typeface="微软雅黑" panose="020B0503020204020204" charset="-122"/>
                         </a:rPr>
-                        <a:t>3</a:t>
+                        <a:t>15 用例（5 批次）</a:t>
                       </a:r>
                       <a:endParaRPr sz="1125">
                         <a:solidFill>
@@ -15655,7 +14180,99 @@
                           <a:latin typeface="微软雅黑" panose="020B0503020204020204" charset="-122"/>
                           <a:ea typeface="微软雅黑" panose="020B0503020204020204" charset="-122"/>
                         </a:rPr>
-                        <a:t>1</a:t>
+                        <a:t>8</a:t>
+                      </a:r>
+                      <a:endParaRPr sz="1125">
+                        <a:solidFill>
+                          <a:srgbClr val="1A1A1A"/>
+                        </a:solidFill>
+                        <a:latin typeface="微软雅黑" panose="020B0503020204020204" charset="-122"/>
+                        <a:ea typeface="微软雅黑" panose="020B0503020204020204" charset="-122"/>
+                      </a:endParaRPr>
+                    </a:p>
+                  </a:txBody>
+                  <a:tcPr marL="0" marR="0" marT="0" marB="0" anchor="ctr">
+                    <a:lnL>
+                      <a:noFill/>
+                    </a:lnL>
+                    <a:lnR>
+                      <a:noFill/>
+                    </a:lnR>
+                    <a:lnT>
+                      <a:noFill/>
+                    </a:lnT>
+                    <a:lnB>
+                      <a:noFill/>
+                    </a:lnB>
+                  </a:tcPr>
+                </a:tc>
+                <a:tc>
+                  <a:txBody>
+                    <a:bodyPr wrap="square">
+                      <a:spAutoFit/>
+                    </a:bodyPr>
+                    <a:p>
+                      <a:pPr marL="114300" marR="114300" algn="l">
+                        <a:lnSpc>
+                          <a:spcPct val="120000"/>
+                        </a:lnSpc>
+                      </a:pPr>
+                      <a:r>
+                        <a:rPr sz="1125" b="1">
+                          <a:solidFill>
+                            <a:srgbClr val="4472C4"/>
+                          </a:solidFill>
+                          <a:latin typeface="微软雅黑" panose="020B0503020204020204" charset="-122"/>
+                          <a:ea typeface="微软雅黑" panose="020B0503020204020204" charset="-122"/>
+                        </a:rPr>
+                        <a:t>14/15 通过（93.3%）</a:t>
+                      </a:r>
+                      <a:endParaRPr sz="1125" b="1">
+                        <a:solidFill>
+                          <a:srgbClr val="4472C4"/>
+                        </a:solidFill>
+                        <a:latin typeface="微软雅黑" panose="020B0503020204020204" charset="-122"/>
+                        <a:ea typeface="微软雅黑" panose="020B0503020204020204" charset="-122"/>
+                      </a:endParaRPr>
+                    </a:p>
+                  </a:txBody>
+                  <a:tcPr marL="0" marR="0" marT="0" marB="0" anchor="ctr">
+                    <a:lnL>
+                      <a:noFill/>
+                    </a:lnL>
+                    <a:lnR>
+                      <a:noFill/>
+                    </a:lnR>
+                    <a:lnT>
+                      <a:noFill/>
+                    </a:lnT>
+                    <a:lnB>
+                      <a:noFill/>
+                    </a:lnB>
+                  </a:tcPr>
+                </a:tc>
+              </a:tr>
+              <a:tr h="438150">
+                <a:tc>
+                  <a:txBody>
+                    <a:bodyPr wrap="square">
+                      <a:spAutoFit/>
+                    </a:bodyPr>
+                    <a:p>
+                      <a:pPr marL="114300" marR="114300" algn="l">
+                        <a:lnSpc>
+                          <a:spcPct val="120000"/>
+                        </a:lnSpc>
+                      </a:pPr>
+                      <a:r>
+                        <a:rPr sz="1125">
+                          <a:solidFill>
+                            <a:srgbClr val="1A1A1A"/>
+                          </a:solidFill>
+                          <a:latin typeface="微软雅黑" panose="020B0503020204020204" charset="-122"/>
+                          <a:ea typeface="微软雅黑" panose="020B0503020204020204" charset="-122"/>
+                        </a:rPr>
+                        <a:t>7 月（2607）</a:t>
                       </a:r>
                       <a:endParaRPr sz="1125">
                         <a:solidFill>
@@ -15700,54 +14317,7 @@
                           <a:latin typeface="微软雅黑" panose="020B0503020204020204" charset="-122"/>
                           <a:ea typeface="微软雅黑" panose="020B0503020204020204" charset="-122"/>
                         </a:rPr>
-                        <a:t>月度培训 ×2（AI 工具推荐 / AI 黑话扫盲）、总经办 mmxCode/codex 培训(06-05)；协助销售五部三合一(06-22)</a:t>
-                      </a:r>
-                      <a:endParaRPr sz="1125">
-                        <a:solidFill>
-                          <a:srgbClr val="1A1A1A"/>
-                        </a:solidFill>
-                        <a:latin typeface="微软雅黑" panose="020B0503020204020204" charset="-122"/>
-                        <a:ea typeface="微软雅黑" panose="020B0503020204020204" charset="-122"/>
-                      </a:endParaRPr>
-                    </a:p>
-                  </a:txBody>
-                  <a:tcPr marL="0" marR="0" marT="0" marB="0" anchor="ctr">
-                    <a:lnL>
-                      <a:noFill/>
-                    </a:lnL>
-                    <a:lnR>
-                      <a:noFill/>
-                    </a:lnR>
-                    <a:lnT>
-                      <a:noFill/>
-                    </a:lnT>
-                    <a:lnB>
-                      <a:noFill/>
-                    </a:lnB>
-                  </a:tcPr>
-                </a:tc>
-              </a:tr>
-              <a:tr h="682625">
-                <a:tc>
-                  <a:txBody>
-                    <a:bodyPr wrap="square">
-                      <a:spAutoFit/>
-                    </a:bodyPr>
-                    <a:p>
-                      <a:pPr marL="114300" marR="114300" algn="l">
-                        <a:lnSpc>
-                          <a:spcPct val="120000"/>
-                        </a:lnSpc>
-                      </a:pPr>
-                      <a:r>
-                        <a:rPr sz="1125">
-                          <a:solidFill>
-                            <a:srgbClr val="1A1A1A"/>
-                          </a:solidFill>
-                          <a:latin typeface="微软雅黑" panose="020B0503020204020204" charset="-122"/>
-                          <a:ea typeface="微软雅黑" panose="020B0503020204020204" charset="-122"/>
-                        </a:rPr>
-                        <a:t>7 月</a:t>
+                        <a:t>5 轮验收（8 项）</a:t>
                       </a:r>
                       <a:endParaRPr sz="1125">
                         <a:solidFill>
@@ -15792,7 +14362,7 @@
                           <a:latin typeface="微软雅黑" panose="020B0503020204020204" charset="-122"/>
                           <a:ea typeface="微软雅黑" panose="020B0503020204020204" charset="-122"/>
                         </a:rPr>
-                        <a:t>1</a:t>
+                        <a:t>4</a:t>
                       </a:r>
                       <a:endParaRPr sz="1125">
                         <a:solidFill>
@@ -15837,7 +14407,7 @@
                           <a:latin typeface="微软雅黑" panose="020B0503020204020204" charset="-122"/>
                           <a:ea typeface="微软雅黑" panose="020B0503020204020204" charset="-122"/>
                         </a:rPr>
-                        <a:t>0</a:t>
+                        <a:t>—</a:t>
                       </a:r>
                       <a:endParaRPr sz="1125">
                         <a:solidFill>
@@ -15863,245 +14433,6 @@
                     </a:lnB>
                   </a:tcPr>
                 </a:tc>
-                <a:tc>
-                  <a:txBody>
-                    <a:bodyPr wrap="square">
-                      <a:spAutoFit/>
-                    </a:bodyPr>
-                    <a:p>
-                      <a:pPr marL="114300" marR="114300" algn="l">
-                        <a:lnSpc>
-                          <a:spcPct val="120000"/>
-                        </a:lnSpc>
-                      </a:pPr>
-                      <a:r>
-                        <a:rPr sz="1125">
-                          <a:solidFill>
-                            <a:srgbClr val="1A1A1A"/>
-                          </a:solidFill>
-                          <a:latin typeface="微软雅黑" panose="020B0503020204020204" charset="-122"/>
-                          <a:ea typeface="微软雅黑" panose="020B0503020204020204" charset="-122"/>
-                        </a:rPr>
-                        <a:t>船务部 shipping-helper 使用培训(07-24)</a:t>
-                      </a:r>
-                      <a:endParaRPr sz="1125">
-                        <a:solidFill>
-                          <a:srgbClr val="1A1A1A"/>
-                        </a:solidFill>
-                        <a:latin typeface="微软雅黑" panose="020B0503020204020204" charset="-122"/>
-                        <a:ea typeface="微软雅黑" panose="020B0503020204020204" charset="-122"/>
-                      </a:endParaRPr>
-                    </a:p>
-                  </a:txBody>
-                  <a:tcPr marL="0" marR="0" marT="0" marB="0" anchor="ctr">
-                    <a:lnL>
-                      <a:noFill/>
-                    </a:lnL>
-                    <a:lnR>
-                      <a:noFill/>
-                    </a:lnR>
-                    <a:lnT>
-                      <a:noFill/>
-                    </a:lnT>
-                    <a:lnB>
-                      <a:noFill/>
-                    </a:lnB>
-                  </a:tcPr>
-                </a:tc>
-              </a:tr>
-              <a:tr h="682625">
-                <a:tc>
-                  <a:txBody>
-                    <a:bodyPr wrap="square">
-                      <a:spAutoFit/>
-                    </a:bodyPr>
-                    <a:p>
-                      <a:pPr marL="114300" marR="114300" algn="l">
-                        <a:lnSpc>
-                          <a:spcPct val="120000"/>
-                        </a:lnSpc>
-                      </a:pPr>
-                      <a:r>
-                        <a:rPr sz="1125" b="1">
-                          <a:solidFill>
-                            <a:srgbClr val="1A1A1A"/>
-                          </a:solidFill>
-                          <a:latin typeface="微软雅黑" panose="020B0503020204020204" charset="-122"/>
-                          <a:ea typeface="微软雅黑" panose="020B0503020204020204" charset="-122"/>
-                        </a:rPr>
-                        <a:t>合计</a:t>
-                      </a:r>
-                      <a:endParaRPr sz="1125" b="1">
-                        <a:solidFill>
-                          <a:srgbClr val="1A1A1A"/>
-                        </a:solidFill>
-                        <a:latin typeface="微软雅黑" panose="020B0503020204020204" charset="-122"/>
-                        <a:ea typeface="微软雅黑" panose="020B0503020204020204" charset="-122"/>
-                      </a:endParaRPr>
-                    </a:p>
-                  </a:txBody>
-                  <a:tcPr marL="0" marR="0" marT="0" marB="0" anchor="ctr">
-                    <a:lnL>
-                      <a:noFill/>
-                    </a:lnL>
-                    <a:lnR>
-                      <a:noFill/>
-                    </a:lnR>
-                    <a:lnT>
-                      <a:noFill/>
-                    </a:lnT>
-                    <a:lnB>
-                      <a:noFill/>
-                    </a:lnB>
-                    <a:solidFill>
-                      <a:srgbClr val="FCE4D6"/>
-                    </a:solidFill>
-                  </a:tcPr>
-                </a:tc>
-                <a:tc>
-                  <a:txBody>
-                    <a:bodyPr wrap="square">
-                      <a:spAutoFit/>
-                    </a:bodyPr>
-                    <a:p>
-                      <a:pPr marL="114300" marR="114300" algn="l">
-                        <a:lnSpc>
-                          <a:spcPct val="120000"/>
-                        </a:lnSpc>
-                      </a:pPr>
-                      <a:r>
-                        <a:rPr sz="1125" b="1">
-                          <a:solidFill>
-                            <a:srgbClr val="1A1A1A"/>
-                          </a:solidFill>
-                          <a:latin typeface="微软雅黑" panose="020B0503020204020204" charset="-122"/>
-                          <a:ea typeface="微软雅黑" panose="020B0503020204020204" charset="-122"/>
-                        </a:rPr>
-                        <a:t>6</a:t>
-                      </a:r>
-                      <a:endParaRPr sz="1125" b="1">
-                        <a:solidFill>
-                          <a:srgbClr val="1A1A1A"/>
-                        </a:solidFill>
-                        <a:latin typeface="微软雅黑" panose="020B0503020204020204" charset="-122"/>
-                        <a:ea typeface="微软雅黑" panose="020B0503020204020204" charset="-122"/>
-                      </a:endParaRPr>
-                    </a:p>
-                  </a:txBody>
-                  <a:tcPr marL="0" marR="0" marT="0" marB="0" anchor="ctr">
-                    <a:lnL>
-                      <a:noFill/>
-                    </a:lnL>
-                    <a:lnR>
-                      <a:noFill/>
-                    </a:lnR>
-                    <a:lnT>
-                      <a:noFill/>
-                    </a:lnT>
-                    <a:lnB>
-                      <a:noFill/>
-                    </a:lnB>
-                    <a:solidFill>
-                      <a:srgbClr val="FCE4D6"/>
-                    </a:solidFill>
-                  </a:tcPr>
-                </a:tc>
-                <a:tc>
-                  <a:txBody>
-                    <a:bodyPr wrap="square">
-                      <a:spAutoFit/>
-                    </a:bodyPr>
-                    <a:p>
-                      <a:pPr marL="114300" marR="114300" algn="l">
-                        <a:lnSpc>
-                          <a:spcPct val="120000"/>
-                        </a:lnSpc>
-                      </a:pPr>
-                      <a:r>
-                        <a:rPr sz="1125" b="1">
-                          <a:solidFill>
-                            <a:srgbClr val="1A1A1A"/>
-                          </a:solidFill>
-                          <a:latin typeface="微软雅黑" panose="020B0503020204020204" charset="-122"/>
-                          <a:ea typeface="微软雅黑" panose="020B0503020204020204" charset="-122"/>
-                        </a:rPr>
-                        <a:t>6</a:t>
-                      </a:r>
-                      <a:endParaRPr sz="1125" b="1">
-                        <a:solidFill>
-                          <a:srgbClr val="1A1A1A"/>
-                        </a:solidFill>
-                        <a:latin typeface="微软雅黑" panose="020B0503020204020204" charset="-122"/>
-                        <a:ea typeface="微软雅黑" panose="020B0503020204020204" charset="-122"/>
-                      </a:endParaRPr>
-                    </a:p>
-                  </a:txBody>
-                  <a:tcPr marL="0" marR="0" marT="0" marB="0" anchor="ctr">
-                    <a:lnL>
-                      <a:noFill/>
-                    </a:lnL>
-                    <a:lnR>
-                      <a:noFill/>
-                    </a:lnR>
-                    <a:lnT>
-                      <a:noFill/>
-                    </a:lnT>
-                    <a:lnB>
-                      <a:noFill/>
-                    </a:lnB>
-                    <a:solidFill>
-                      <a:srgbClr val="FCE4D6"/>
-                    </a:solidFill>
-                  </a:tcPr>
-                </a:tc>
-                <a:tc>
-                  <a:txBody>
-                    <a:bodyPr wrap="square">
-                      <a:spAutoFit/>
-                    </a:bodyPr>
-                    <a:p>
-                      <a:pPr marL="114300" marR="114300" algn="l">
-                        <a:lnSpc>
-                          <a:spcPct val="120000"/>
-                        </a:lnSpc>
-                      </a:pPr>
-                      <a:r>
-                        <a:rPr sz="1125" b="1">
-                          <a:solidFill>
-                            <a:srgbClr val="1A1A1A"/>
-                          </a:solidFill>
-                          <a:latin typeface="微软雅黑" panose="020B0503020204020204" charset="-122"/>
-                          <a:ea typeface="微软雅黑" panose="020B0503020204020204" charset="-122"/>
-                        </a:rPr>
-                        <a:t>12 场，覆盖采购 / 船务 / 销售五部 / 研发 / 总经办等多部门</a:t>
-                      </a:r>
-                      <a:endParaRPr sz="1125" b="1">
-                        <a:solidFill>
-                          <a:srgbClr val="1A1A1A"/>
-                        </a:solidFill>
-                        <a:latin typeface="微软雅黑" panose="020B0503020204020204" charset="-122"/>
-                        <a:ea typeface="微软雅黑" panose="020B0503020204020204" charset="-122"/>
-                      </a:endParaRPr>
-                    </a:p>
-                  </a:txBody>
-                  <a:tcPr marL="0" marR="0" marT="0" marB="0" anchor="ctr">
-                    <a:lnL>
-                      <a:noFill/>
-                    </a:lnL>
-                    <a:lnR>
-                      <a:noFill/>
-                    </a:lnR>
-                    <a:lnT>
-                      <a:noFill/>
-                    </a:lnT>
-                    <a:lnB>
-                      <a:noFill/>
-                    </a:lnB>
-                    <a:solidFill>
-                      <a:srgbClr val="FCE4D6"/>
-                    </a:solidFill>
-                  </a:tcPr>
-                </a:tc>
               </a:tr>
             </a:tbl>
           </a:graphicData>
@@ -16109,112 +14440,7 @@
       </p:graphicFrame>
       <p:sp>
         <p:nvSpPr>
-          <p:cNvPr id="226" name="文本框 225" descr="{&quot;isTemplate&quot;:true,&quot;type&quot;:&quot;text&quot;}"/>
-          <p:cNvSpPr txBox="1"/>
-          <p:nvPr/>
-        </p:nvSpPr>
-        <p:spPr>
-          <a:xfrm>
-            <a:off x="533400" y="5381625"/>
-            <a:ext cx="11125200" cy="552450"/>
-          </a:xfrm>
-          <a:prstGeom prst="rect">
-            <a:avLst/>
-          </a:prstGeom>
-        </p:spPr>
-        <p:txBody>
-          <a:bodyPr wrap="square" lIns="0" tIns="0" rIns="0" bIns="0">
-            <a:normAutofit/>
-          </a:bodyPr>
-          <a:p>
-            <a:pPr>
-              <a:lnSpc>
-                <a:spcPct val="150000"/>
-              </a:lnSpc>
-            </a:pPr>
-            <a:r>
-              <a:rPr lang="zh-CN" sz="1200">
-                <a:solidFill>
-                  <a:srgbClr val="1A1A1A"/>
-                </a:solidFill>
-                <a:latin typeface="微软雅黑" panose="020B0503020204020204" charset="-122"/>
-                <a:ea typeface="微软雅黑" panose="020B0503020204020204" charset="-122"/>
-              </a:rPr>
-              <a:t>推广与采纳驱动是交付物产生业务价值的「最后一公里」——培训不止「讲」，更含采纳驱动与内部宣推：</a:t>
-            </a:r>
-            <a:r>
-              <a:rPr lang="en-US" sz="1200">
-                <a:solidFill>
-                  <a:srgbClr val="1A1A1A"/>
-                </a:solidFill>
-                <a:latin typeface="微软雅黑" panose="020B0503020204020204" charset="-122"/>
-                <a:ea typeface="微软雅黑" panose="020B0503020204020204" charset="-122"/>
-              </a:rPr>
-              <a:t>06-22 </a:t>
-            </a:r>
-            <a:r>
-              <a:rPr lang="zh-CN" sz="1200">
-                <a:solidFill>
-                  <a:srgbClr val="1A1A1A"/>
-                </a:solidFill>
-                <a:latin typeface="微软雅黑" panose="020B0503020204020204" charset="-122"/>
-                <a:ea typeface="微软雅黑" panose="020B0503020204020204" charset="-122"/>
-              </a:rPr>
-              <a:t>销售五部三合一、</a:t>
-            </a:r>
-            <a:r>
-              <a:rPr lang="en-US" sz="1200">
-                <a:solidFill>
-                  <a:srgbClr val="1A1A1A"/>
-                </a:solidFill>
-                <a:latin typeface="微软雅黑" panose="020B0503020204020204" charset="-122"/>
-                <a:ea typeface="微软雅黑" panose="020B0503020204020204" charset="-122"/>
-              </a:rPr>
-              <a:t>07-24 </a:t>
-            </a:r>
-            <a:r>
-              <a:rPr lang="zh-CN" sz="1200">
-                <a:solidFill>
-                  <a:srgbClr val="1A1A1A"/>
-                </a:solidFill>
-                <a:latin typeface="微软雅黑" panose="020B0503020204020204" charset="-122"/>
-                <a:ea typeface="微软雅黑" panose="020B0503020204020204" charset="-122"/>
-              </a:rPr>
-              <a:t>船务部使用培训直接对应两个自研工具的上手落地；价格爬取</a:t>
-            </a:r>
-            <a:r>
-              <a:rPr lang="en-US" sz="1200">
-                <a:solidFill>
-                  <a:srgbClr val="1A1A1A"/>
-                </a:solidFill>
-                <a:latin typeface="微软雅黑" panose="020B0503020204020204" charset="-122"/>
-                <a:ea typeface="微软雅黑" panose="020B0503020204020204" charset="-122"/>
-              </a:rPr>
-              <a:t> Skill </a:t>
-            </a:r>
-            <a:r>
-              <a:rPr lang="zh-CN" sz="1200">
-                <a:solidFill>
-                  <a:srgbClr val="1A1A1A"/>
-                </a:solidFill>
-                <a:latin typeface="微软雅黑" panose="020B0503020204020204" charset="-122"/>
-                <a:ea typeface="微软雅黑" panose="020B0503020204020204" charset="-122"/>
-              </a:rPr>
-              <a:t>以「回采购培训」巩固自建能力。</a:t>
-            </a:r>
-            <a:endParaRPr lang="zh-CN" sz="1200">
-              <a:solidFill>
-                <a:srgbClr val="1A1A1A"/>
-              </a:solidFill>
-              <a:latin typeface="微软雅黑" panose="020B0503020204020204" charset="-122"/>
-              <a:ea typeface="微软雅黑" panose="020B0503020204020204" charset="-122"/>
-            </a:endParaRPr>
-          </a:p>
-        </p:txBody>
-      </p:sp>
-      <p:sp>
-        <p:nvSpPr>
-          <p:cNvPr id="227" name="文本框 226" descr="{&quot;isTemplate&quot;:true,&quot;type&quot;:&quot;text&quot;}"/>
+          <p:cNvPr id="28" name="文本框 27" descr="{&quot;isTemplate&quot;:true,&quot;type&quot;:&quot;text&quot;}"/>
           <p:cNvSpPr txBox="1"/>
           <p:nvPr/>
         </p:nvSpPr>
@@ -16277,7 +14503,7 @@
       </p:sp>
       <p:sp>
         <p:nvSpPr>
-          <p:cNvPr id="228" name="文本框 227" descr="{&quot;isTemplate&quot;:true,&quot;type&quot;:&quot;text&quot;}"/>
+          <p:cNvPr id="29" name="文本框 28" descr="{&quot;isTemplate&quot;:true,&quot;type&quot;:&quot;text&quot;}"/>
           <p:cNvSpPr txBox="1"/>
           <p:nvPr/>
         </p:nvSpPr>
@@ -16306,7 +14532,7 @@
                 <a:latin typeface="微软雅黑" panose="020B0503020204020204" charset="-122"/>
                 <a:ea typeface="微软雅黑" panose="020B0503020204020204" charset="-122"/>
               </a:rPr>
-              <a:t>09 / 13</a:t>
+              <a:t>10 / 13</a:t>
             </a:r>
             <a:endParaRPr lang="en-US" sz="1050">
               <a:solidFill>

--- a/PPT/入职以来AI工作复盘/入职以来AI工作复盘.pptx
+++ b/PPT/入职以来AI工作复盘/入职以来AI工作复盘.pptx
@@ -1427,6 +1427,16 @@
                         </a:lnSpc>
                       </a:pPr>
                       <a:r>
+                        <a:rPr lang="zh-CN" sz="1125">
+                          <a:solidFill>
+                            <a:srgbClr val="1A1A1A"/>
+                          </a:solidFill>
+                          <a:latin typeface="微软雅黑" panose="020B0503020204020204" charset="-122"/>
+                          <a:ea typeface="微软雅黑" panose="020B0503020204020204" charset="-122"/>
+                        </a:rPr>
+                        <a:t>目前仅</a:t>
+                      </a:r>
+                      <a:r>
                         <a:rPr sz="1125">
                           <a:solidFill>
                             <a:srgbClr val="1A1A1A"/>
@@ -1434,7 +1444,7 @@
                           <a:latin typeface="微软雅黑" panose="020B0503020204020204" charset="-122"/>
                           <a:ea typeface="微软雅黑" panose="020B0503020204020204" charset="-122"/>
                         </a:rPr>
-                        <a:t>TDS 产品库</a:t>
+                        <a:t>TDS</a:t>
                       </a:r>
                       <a:endParaRPr sz="1125">
                         <a:solidFill>
@@ -1616,7 +1626,7 @@
                           <a:latin typeface="微软雅黑" panose="020B0503020204020204" charset="-122"/>
                           <a:ea typeface="微软雅黑" panose="020B0503020204020204" charset="-122"/>
                         </a:rPr>
-                        <a:t>销售 SOP / 全能助手</a:t>
+                        <a:t>销售 SOP 助手</a:t>
                       </a:r>
                       <a:endParaRPr sz="1125">
                         <a:solidFill>
@@ -1706,7 +1716,7 @@
                           <a:latin typeface="微软雅黑" panose="020B0503020204020204" charset="-122"/>
                           <a:ea typeface="微软雅黑" panose="020B0503020204020204" charset="-122"/>
                         </a:rPr>
-                        <a:t>7 份 SOP 源文件</a:t>
+                        <a:t>SOP 源文件</a:t>
                       </a:r>
                       <a:endParaRPr sz="1125">
                         <a:solidFill>
@@ -2160,7 +2170,27 @@
                           <a:latin typeface="微软雅黑" panose="020B0503020204020204" charset="-122"/>
                           <a:ea typeface="微软雅黑" panose="020B0503020204020204" charset="-122"/>
                         </a:rPr>
-                        <a:t>应用工艺助手</a:t>
+                        <a:t>工艺</a:t>
+                      </a:r>
+                      <a:r>
+                        <a:rPr lang="zh-CN" sz="1125">
+                          <a:solidFill>
+                            <a:srgbClr val="1A1A1A"/>
+                          </a:solidFill>
+                          <a:latin typeface="微软雅黑" panose="020B0503020204020204" charset="-122"/>
+                          <a:ea typeface="微软雅黑" panose="020B0503020204020204" charset="-122"/>
+                        </a:rPr>
+                        <a:t>流程</a:t>
+                      </a:r>
+                      <a:r>
+                        <a:rPr sz="1125">
+                          <a:solidFill>
+                            <a:srgbClr val="1A1A1A"/>
+                          </a:solidFill>
+                          <a:latin typeface="微软雅黑" panose="020B0503020204020204" charset="-122"/>
+                          <a:ea typeface="微软雅黑" panose="020B0503020204020204" charset="-122"/>
+                        </a:rPr>
+                        <a:t>助手</a:t>
                       </a:r>
                       <a:endParaRPr sz="1125">
                         <a:solidFill>
@@ -13500,17 +13530,17 @@
         </p:nvGraphicFramePr>
         <p:xfrm>
           <a:off x="533400" y="3810000"/>
-          <a:ext cx="11125200" cy="2190750"/>
+          <a:ext cx="11094085" cy="2190750"/>
         </p:xfrm>
         <a:graphic>
           <a:graphicData uri="http://schemas.openxmlformats.org/drawingml/2006/table">
             <a:tbl>
               <a:tblPr/>
               <a:tblGrid>
-                <a:gridCol w="2249357"/>
-                <a:gridCol w="3790905"/>
-                <a:gridCol w="1511151"/>
-                <a:gridCol w="3573786"/>
+                <a:gridCol w="1254760"/>
+                <a:gridCol w="1995170"/>
+                <a:gridCol w="1797050"/>
+                <a:gridCol w="6047105"/>
               </a:tblGrid>
               <a:tr h="438150">
                 <a:tc>
@@ -13580,7 +13610,7 @@
                           <a:latin typeface="微软雅黑" panose="020B0503020204020204" charset="-122"/>
                           <a:ea typeface="微软雅黑" panose="020B0503020204020204" charset="-122"/>
                         </a:rPr>
-                        <a:t>验收产出</a:t>
+                        <a:t>问题反馈</a:t>
                       </a:r>
                       <a:endParaRPr sz="1125" b="1">
                         <a:solidFill>
@@ -13611,9 +13641,7 @@
                 </a:tc>
                 <a:tc>
                   <a:txBody>
-                    <a:bodyPr wrap="square">
-                      <a:spAutoFit/>
-                    </a:bodyPr>
+                    <a:bodyPr/>
                     <a:p>
                       <a:pPr marL="114300" marR="114300" algn="l">
                         <a:lnSpc>
@@ -13628,7 +13656,7 @@
                           <a:latin typeface="微软雅黑" panose="020B0503020204020204" charset="-122"/>
                           <a:ea typeface="微软雅黑" panose="020B0503020204020204" charset="-122"/>
                         </a:rPr>
-                        <a:t>问题反馈</a:t>
+                        <a:t>产出</a:t>
                       </a:r>
                       <a:endParaRPr sz="1125" b="1">
                         <a:solidFill>
@@ -13764,16 +13792,89 @@
                         </a:lnSpc>
                       </a:pPr>
                       <a:r>
-                        <a:rPr sz="1125">
+                        <a:rPr lang="en-US" sz="1125">
                           <a:solidFill>
                             <a:srgbClr val="1A1A1A"/>
                           </a:solidFill>
                           <a:latin typeface="微软雅黑" panose="020B0503020204020204" charset="-122"/>
                           <a:ea typeface="微软雅黑" panose="020B0503020204020204" charset="-122"/>
                         </a:rPr>
-                        <a:t>3 测试 + 2 验收（5 项）</a:t>
+                        <a:t>8 </a:t>
                       </a:r>
-                      <a:endParaRPr sz="1125">
+                      <a:r>
+                        <a:rPr lang="zh-CN" altLang="en-US" sz="1125">
+                          <a:solidFill>
+                            <a:srgbClr val="1A1A1A"/>
+                          </a:solidFill>
+                          <a:latin typeface="微软雅黑" panose="020B0503020204020204" charset="-122"/>
+                          <a:ea typeface="微软雅黑" panose="020B0503020204020204" charset="-122"/>
+                        </a:rPr>
+                        <a:t>主要集中在</a:t>
+                      </a:r>
+                      <a:r>
+                        <a:rPr lang="zh-CN" altLang="en-US" sz="1125">
+                          <a:solidFill>
+                            <a:srgbClr val="1A1A1A"/>
+                          </a:solidFill>
+                          <a:latin typeface="微软雅黑" panose="020B0503020204020204" charset="-122"/>
+                          <a:ea typeface="微软雅黑" panose="020B0503020204020204" charset="-122"/>
+                        </a:rPr>
+                        <a:t>培训助手</a:t>
+                      </a:r>
+                      <a:endParaRPr lang="zh-CN" altLang="en-US" sz="1125">
+                        <a:solidFill>
+                          <a:srgbClr val="1A1A1A"/>
+                        </a:solidFill>
+                        <a:latin typeface="微软雅黑" panose="020B0503020204020204" charset="-122"/>
+                        <a:ea typeface="微软雅黑" panose="020B0503020204020204" charset="-122"/>
+                      </a:endParaRPr>
+                    </a:p>
+                  </a:txBody>
+                  <a:tcPr marL="0" marR="0" marT="0" marB="0" anchor="ctr">
+                    <a:lnL>
+                      <a:noFill/>
+                    </a:lnL>
+                    <a:lnR>
+                      <a:noFill/>
+                    </a:lnR>
+                    <a:lnT>
+                      <a:noFill/>
+                    </a:lnT>
+                    <a:lnB>
+                      <a:noFill/>
+                    </a:lnB>
+                  </a:tcPr>
+                </a:tc>
+                <a:tc>
+                  <a:txBody>
+                    <a:bodyPr/>
+                    <a:p>
+                      <a:pPr marL="114300" marR="114300" algn="l">
+                        <a:lnSpc>
+                          <a:spcPct val="120000"/>
+                        </a:lnSpc>
+                      </a:pPr>
+                      <a:r>
+                        <a:rPr lang="en-US" sz="1125">
+                          <a:solidFill>
+                            <a:srgbClr val="1A1A1A"/>
+                          </a:solidFill>
+                          <a:latin typeface="微软雅黑" panose="020B0503020204020204" charset="-122"/>
+                          <a:ea typeface="微软雅黑" panose="020B0503020204020204" charset="-122"/>
+                        </a:rPr>
+                        <a:t>4 </a:t>
+                      </a:r>
+                      <a:r>
+                        <a:rPr lang="zh-CN" altLang="en-US" sz="1125">
+                          <a:solidFill>
+                            <a:srgbClr val="1A1A1A"/>
+                          </a:solidFill>
+                          <a:latin typeface="微软雅黑" panose="020B0503020204020204" charset="-122"/>
+                          <a:ea typeface="微软雅黑" panose="020B0503020204020204" charset="-122"/>
+                        </a:rPr>
+                        <a:t>份测试报告</a:t>
+                      </a:r>
+                      <a:endParaRPr lang="zh-CN" altLang="en-US" sz="1125">
                         <a:solidFill>
                           <a:srgbClr val="1A1A1A"/>
                         </a:solidFill>
@@ -13809,61 +13910,66 @@
                         </a:lnSpc>
                       </a:pPr>
                       <a:r>
-                        <a:rPr sz="1125">
+                        <a:rPr lang="zh-CN" sz="1125">
                           <a:solidFill>
                             <a:srgbClr val="1A1A1A"/>
                           </a:solidFill>
                           <a:latin typeface="微软雅黑" panose="020B0503020204020204" charset="-122"/>
                           <a:ea typeface="微软雅黑" panose="020B0503020204020204" charset="-122"/>
                         </a:rPr>
-                        <a:t>4</a:t>
+                        <a:t>共计</a:t>
                       </a:r>
-                      <a:endParaRPr sz="1125">
-                        <a:solidFill>
-                          <a:srgbClr val="1A1A1A"/>
-                        </a:solidFill>
-                        <a:latin typeface="微软雅黑" panose="020B0503020204020204" charset="-122"/>
-                        <a:ea typeface="微软雅黑" panose="020B0503020204020204" charset="-122"/>
-                      </a:endParaRPr>
-                    </a:p>
-                  </a:txBody>
-                  <a:tcPr marL="0" marR="0" marT="0" marB="0" anchor="ctr">
-                    <a:lnL>
-                      <a:noFill/>
-                    </a:lnL>
-                    <a:lnR>
-                      <a:noFill/>
-                    </a:lnR>
-                    <a:lnT>
-                      <a:noFill/>
-                    </a:lnT>
-                    <a:lnB>
-                      <a:noFill/>
-                    </a:lnB>
-                  </a:tcPr>
-                </a:tc>
-                <a:tc>
-                  <a:txBody>
-                    <a:bodyPr wrap="square">
-                      <a:spAutoFit/>
-                    </a:bodyPr>
-                    <a:p>
-                      <a:pPr marL="114300" marR="114300" algn="l">
-                        <a:lnSpc>
-                          <a:spcPct val="120000"/>
-                        </a:lnSpc>
-                      </a:pPr>
                       <a:r>
-                        <a:rPr sz="1125">
+                        <a:rPr lang="en-US" altLang="zh-CN" sz="1125">
                           <a:solidFill>
                             <a:srgbClr val="1A1A1A"/>
                           </a:solidFill>
                           <a:latin typeface="微软雅黑" panose="020B0503020204020204" charset="-122"/>
                           <a:ea typeface="微软雅黑" panose="020B0503020204020204" charset="-122"/>
                         </a:rPr>
-                        <a:t>—</a:t>
+                        <a:t> 10 </a:t>
                       </a:r>
-                      <a:endParaRPr sz="1125">
+                      <a:r>
+                        <a:rPr lang="zh-CN" altLang="en-US" sz="1125">
+                          <a:solidFill>
+                            <a:srgbClr val="1A1A1A"/>
+                          </a:solidFill>
+                          <a:latin typeface="微软雅黑" panose="020B0503020204020204" charset="-122"/>
+                          <a:ea typeface="微软雅黑" panose="020B0503020204020204" charset="-122"/>
+                        </a:rPr>
+                        <a:t>项，未通过</a:t>
+                      </a:r>
+                      <a:r>
+                        <a:rPr lang="en-US" altLang="zh-CN" sz="1125">
+                          <a:solidFill>
+                            <a:srgbClr val="1A1A1A"/>
+                          </a:solidFill>
+                          <a:latin typeface="微软雅黑" panose="020B0503020204020204" charset="-122"/>
+                          <a:ea typeface="微软雅黑" panose="020B0503020204020204" charset="-122"/>
+                        </a:rPr>
+                        <a:t> 1 </a:t>
+                      </a:r>
+                      <a:r>
+                        <a:rPr lang="zh-CN" altLang="en-US" sz="1125">
+                          <a:solidFill>
+                            <a:srgbClr val="1A1A1A"/>
+                          </a:solidFill>
+                          <a:latin typeface="微软雅黑" panose="020B0503020204020204" charset="-122"/>
+                          <a:ea typeface="微软雅黑" panose="020B0503020204020204" charset="-122"/>
+                        </a:rPr>
+                        <a:t>项（</a:t>
+                      </a:r>
+                      <a:r>
+                        <a:rPr lang="zh-CN" altLang="en-US" sz="1125">
+                          <a:solidFill>
+                            <a:srgbClr val="1A1A1A"/>
+                          </a:solidFill>
+                          <a:latin typeface="微软雅黑" panose="020B0503020204020204" charset="-122"/>
+                          <a:ea typeface="微软雅黑" panose="020B0503020204020204" charset="-122"/>
+                        </a:rPr>
+                        <a:t>视频生成）</a:t>
+                      </a:r>
+                      <a:endParaRPr lang="zh-CN" altLang="en-US" sz="1125">
                         <a:solidFill>
                           <a:srgbClr val="1A1A1A"/>
                         </a:solidFill>
@@ -13953,9 +14059,92 @@
                           <a:latin typeface="微软雅黑" panose="020B0503020204020204" charset="-122"/>
                           <a:ea typeface="微软雅黑" panose="020B0503020204020204" charset="-122"/>
                         </a:rPr>
-                        <a:t>9 项测试验收</a:t>
+                        <a:t>3</a:t>
                       </a:r>
-                      <a:endParaRPr sz="1125">
+                      <a:r>
+                        <a:rPr lang="en-US" sz="1125">
+                          <a:solidFill>
+                            <a:srgbClr val="1A1A1A"/>
+                          </a:solidFill>
+                          <a:latin typeface="微软雅黑" panose="020B0503020204020204" charset="-122"/>
+                          <a:ea typeface="微软雅黑" panose="020B0503020204020204" charset="-122"/>
+                        </a:rPr>
+                        <a:t> </a:t>
+                      </a:r>
+                      <a:r>
+                        <a:rPr lang="zh-CN" altLang="en-US" sz="1125">
+                          <a:solidFill>
+                            <a:srgbClr val="1A1A1A"/>
+                          </a:solidFill>
+                          <a:latin typeface="微软雅黑" panose="020B0503020204020204" charset="-122"/>
+                          <a:ea typeface="微软雅黑" panose="020B0503020204020204" charset="-122"/>
+                        </a:rPr>
+                        <a:t>主要集中在说明书助手</a:t>
+                      </a:r>
+                      <a:endParaRPr lang="zh-CN" altLang="en-US" sz="1125">
+                        <a:solidFill>
+                          <a:srgbClr val="1A1A1A"/>
+                        </a:solidFill>
+                        <a:latin typeface="微软雅黑" panose="020B0503020204020204" charset="-122"/>
+                        <a:ea typeface="微软雅黑" panose="020B0503020204020204" charset="-122"/>
+                      </a:endParaRPr>
+                    </a:p>
+                  </a:txBody>
+                  <a:tcPr marL="0" marR="0" marT="0" marB="0" anchor="ctr">
+                    <a:lnL>
+                      <a:noFill/>
+                    </a:lnL>
+                    <a:lnR>
+                      <a:noFill/>
+                    </a:lnR>
+                    <a:lnT>
+                      <a:noFill/>
+                    </a:lnT>
+                    <a:lnB>
+                      <a:noFill/>
+                    </a:lnB>
+                  </a:tcPr>
+                </a:tc>
+                <a:tc>
+                  <a:txBody>
+                    <a:bodyPr/>
+                    <a:p>
+                      <a:pPr marL="114300" marR="114300" algn="l">
+                        <a:lnSpc>
+                          <a:spcPct val="120000"/>
+                        </a:lnSpc>
+                      </a:pPr>
+                      <a:r>
+                        <a:rPr lang="en-US" sz="1125">
+                          <a:solidFill>
+                            <a:srgbClr val="1A1A1A"/>
+                          </a:solidFill>
+                          <a:latin typeface="微软雅黑" panose="020B0503020204020204" charset="-122"/>
+                          <a:ea typeface="微软雅黑" panose="020B0503020204020204" charset="-122"/>
+                        </a:rPr>
+                        <a:t>9 </a:t>
+                      </a:r>
+                      <a:r>
+                        <a:rPr lang="zh-CN" altLang="en-US" sz="1125">
+                          <a:solidFill>
+                            <a:srgbClr val="1A1A1A"/>
+                          </a:solidFill>
+                          <a:latin typeface="微软雅黑" panose="020B0503020204020204" charset="-122"/>
+                          <a:ea typeface="微软雅黑" panose="020B0503020204020204" charset="-122"/>
+                        </a:rPr>
+                        <a:t>份</a:t>
+                      </a:r>
+                      <a:r>
+                        <a:rPr lang="zh-CN" altLang="en-US" sz="1125">
+                          <a:solidFill>
+                            <a:srgbClr val="1A1A1A"/>
+                          </a:solidFill>
+                          <a:latin typeface="微软雅黑" panose="020B0503020204020204" charset="-122"/>
+                          <a:ea typeface="微软雅黑" panose="020B0503020204020204" charset="-122"/>
+                        </a:rPr>
+                        <a:t>测试报告</a:t>
+                      </a:r>
+                      <a:endParaRPr lang="zh-CN" altLang="en-US" sz="1125">
                         <a:solidFill>
                           <a:srgbClr val="1A1A1A"/>
                         </a:solidFill>
@@ -13991,44 +14180,157 @@
                         </a:lnSpc>
                       </a:pPr>
                       <a:r>
-                        <a:rPr sz="1125">
+                        <a:rPr lang="zh-CN" sz="1125">
                           <a:solidFill>
                             <a:srgbClr val="1A1A1A"/>
                           </a:solidFill>
                           <a:latin typeface="微软雅黑" panose="020B0503020204020204" charset="-122"/>
                           <a:ea typeface="微软雅黑" panose="020B0503020204020204" charset="-122"/>
+                          <a:sym typeface="+mn-ea"/>
                         </a:rPr>
-                        <a:t>3</a:t>
+                        <a:t>共计</a:t>
                       </a:r>
-                      <a:endParaRPr sz="1125">
+                      <a:r>
+                        <a:rPr lang="en-US" altLang="zh-CN" sz="1125">
+                          <a:solidFill>
+                            <a:srgbClr val="1A1A1A"/>
+                          </a:solidFill>
+                          <a:latin typeface="微软雅黑" panose="020B0503020204020204" charset="-122"/>
+                          <a:ea typeface="微软雅黑" panose="020B0503020204020204" charset="-122"/>
+                          <a:sym typeface="+mn-ea"/>
+                        </a:rPr>
+                        <a:t> 176 </a:t>
+                      </a:r>
+                      <a:r>
+                        <a:rPr lang="zh-CN" altLang="en-US" sz="1125">
+                          <a:solidFill>
+                            <a:srgbClr val="1A1A1A"/>
+                          </a:solidFill>
+                          <a:latin typeface="微软雅黑" panose="020B0503020204020204" charset="-122"/>
+                          <a:ea typeface="微软雅黑" panose="020B0503020204020204" charset="-122"/>
+                          <a:sym typeface="+mn-ea"/>
+                        </a:rPr>
+                        <a:t>项（</a:t>
+                      </a:r>
+                      <a:r>
+                        <a:rPr lang="en-US" altLang="zh-CN" sz="1125">
+                          <a:solidFill>
+                            <a:srgbClr val="1A1A1A"/>
+                          </a:solidFill>
+                          <a:latin typeface="微软雅黑" panose="020B0503020204020204" charset="-122"/>
+                          <a:ea typeface="微软雅黑" panose="020B0503020204020204" charset="-122"/>
+                          <a:sym typeface="+mn-ea"/>
+                        </a:rPr>
+                        <a:t> </a:t>
+                      </a:r>
+                      <a:r>
+                        <a:rPr lang="zh-CN" altLang="en-US" sz="1125">
+                          <a:solidFill>
+                            <a:srgbClr val="1A1A1A"/>
+                          </a:solidFill>
+                          <a:latin typeface="微软雅黑" panose="020B0503020204020204" charset="-122"/>
+                          <a:ea typeface="微软雅黑" panose="020B0503020204020204" charset="-122"/>
+                          <a:sym typeface="+mn-ea"/>
+                        </a:rPr>
+                        <a:t>其中：权限模块</a:t>
+                      </a:r>
+                      <a:r>
+                        <a:rPr lang="en-US" altLang="zh-CN" sz="1125">
+                          <a:solidFill>
+                            <a:srgbClr val="1A1A1A"/>
+                          </a:solidFill>
+                          <a:latin typeface="微软雅黑" panose="020B0503020204020204" charset="-122"/>
+                          <a:ea typeface="微软雅黑" panose="020B0503020204020204" charset="-122"/>
+                          <a:sym typeface="+mn-ea"/>
+                        </a:rPr>
+                        <a:t>73</a:t>
+                      </a:r>
+                      <a:r>
+                        <a:rPr lang="zh-CN" altLang="en-US" sz="1125">
+                          <a:solidFill>
+                            <a:srgbClr val="1A1A1A"/>
+                          </a:solidFill>
+                          <a:latin typeface="微软雅黑" panose="020B0503020204020204" charset="-122"/>
+                          <a:ea typeface="微软雅黑" panose="020B0503020204020204" charset="-122"/>
+                          <a:sym typeface="+mn-ea"/>
+                        </a:rPr>
+                        <a:t>项、说明书助手</a:t>
+                      </a:r>
+                      <a:r>
+                        <a:rPr lang="en-US" altLang="zh-CN" sz="1125">
+                          <a:solidFill>
+                            <a:srgbClr val="1A1A1A"/>
+                          </a:solidFill>
+                          <a:latin typeface="微软雅黑" panose="020B0503020204020204" charset="-122"/>
+                          <a:ea typeface="微软雅黑" panose="020B0503020204020204" charset="-122"/>
+                          <a:sym typeface="+mn-ea"/>
+                        </a:rPr>
+                        <a:t>62</a:t>
+                      </a:r>
+                      <a:r>
+                        <a:rPr lang="zh-CN" altLang="en-US" sz="1125">
+                          <a:solidFill>
+                            <a:srgbClr val="1A1A1A"/>
+                          </a:solidFill>
+                          <a:latin typeface="微软雅黑" panose="020B0503020204020204" charset="-122"/>
+                          <a:ea typeface="微软雅黑" panose="020B0503020204020204" charset="-122"/>
+                          <a:sym typeface="+mn-ea"/>
+                        </a:rPr>
+                        <a:t>项、视频生成</a:t>
+                      </a:r>
+                      <a:r>
+                        <a:rPr lang="en-US" altLang="zh-CN" sz="1125">
+                          <a:solidFill>
+                            <a:srgbClr val="1A1A1A"/>
+                          </a:solidFill>
+                          <a:latin typeface="微软雅黑" panose="020B0503020204020204" charset="-122"/>
+                          <a:ea typeface="微软雅黑" panose="020B0503020204020204" charset="-122"/>
+                          <a:sym typeface="+mn-ea"/>
+                        </a:rPr>
+                        <a:t>35</a:t>
+                      </a:r>
+                      <a:r>
+                        <a:rPr lang="zh-CN" altLang="en-US" sz="1125">
+                          <a:solidFill>
+                            <a:srgbClr val="1A1A1A"/>
+                          </a:solidFill>
+                          <a:latin typeface="微软雅黑" panose="020B0503020204020204" charset="-122"/>
+                          <a:ea typeface="微软雅黑" panose="020B0503020204020204" charset="-122"/>
+                          <a:sym typeface="+mn-ea"/>
+                        </a:rPr>
+                        <a:t>项</a:t>
+                      </a:r>
+                      <a:r>
+                        <a:rPr lang="en-US" altLang="zh-CN" sz="1125">
+                          <a:solidFill>
+                            <a:srgbClr val="1A1A1A"/>
+                          </a:solidFill>
+                          <a:latin typeface="微软雅黑" panose="020B0503020204020204" charset="-122"/>
+                          <a:ea typeface="微软雅黑" panose="020B0503020204020204" charset="-122"/>
+                          <a:sym typeface="+mn-ea"/>
+                        </a:rPr>
+                        <a:t> </a:t>
+                      </a:r>
+                      <a:r>
+                        <a:rPr lang="zh-CN" altLang="en-US" sz="1125">
+                          <a:solidFill>
+                            <a:srgbClr val="1A1A1A"/>
+                          </a:solidFill>
+                          <a:latin typeface="微软雅黑" panose="020B0503020204020204" charset="-122"/>
+                          <a:ea typeface="微软雅黑" panose="020B0503020204020204" charset="-122"/>
+                          <a:sym typeface="+mn-ea"/>
+                        </a:rPr>
+                        <a:t>）</a:t>
+                      </a:r>
+                      <a:endParaRPr lang="zh-CN" altLang="en-US" sz="1125">
                         <a:solidFill>
                           <a:srgbClr val="1A1A1A"/>
                         </a:solidFill>
                         <a:latin typeface="微软雅黑" panose="020B0503020204020204" charset="-122"/>
                         <a:ea typeface="微软雅黑" panose="020B0503020204020204" charset="-122"/>
+                        <a:sym typeface="+mn-ea"/>
                       </a:endParaRPr>
                     </a:p>
-                  </a:txBody>
-                  <a:tcPr marL="0" marR="0" marT="0" marB="0" anchor="ctr">
-                    <a:lnL>
-                      <a:noFill/>
-                    </a:lnL>
-                    <a:lnR>
-                      <a:noFill/>
-                    </a:lnR>
-                    <a:lnT>
-                      <a:noFill/>
-                    </a:lnT>
-                    <a:lnB>
-                      <a:noFill/>
-                    </a:lnB>
-                  </a:tcPr>
-                </a:tc>
-                <a:tc>
-                  <a:txBody>
-                    <a:bodyPr wrap="square">
-                      <a:spAutoFit/>
-                    </a:bodyPr>
                     <a:p>
                       <a:pPr marL="114300" marR="114300" algn="l">
                         <a:lnSpc>
@@ -14036,21 +14338,56 @@
                         </a:lnSpc>
                       </a:pPr>
                       <a:r>
-                        <a:rPr sz="1125">
+                        <a:rPr lang="zh-CN" altLang="en-US" sz="1125">
                           <a:solidFill>
                             <a:srgbClr val="1A1A1A"/>
                           </a:solidFill>
                           <a:latin typeface="微软雅黑" panose="020B0503020204020204" charset="-122"/>
                           <a:ea typeface="微软雅黑" panose="020B0503020204020204" charset="-122"/>
+                          <a:sym typeface="+mn-ea"/>
                         </a:rPr>
-                        <a:t>—</a:t>
+                        <a:t>未通过</a:t>
                       </a:r>
-                      <a:endParaRPr sz="1125">
+                      <a:r>
+                        <a:rPr lang="en-US" altLang="zh-CN" sz="1125">
+                          <a:solidFill>
+                            <a:srgbClr val="1A1A1A"/>
+                          </a:solidFill>
+                          <a:latin typeface="微软雅黑" panose="020B0503020204020204" charset="-122"/>
+                          <a:ea typeface="微软雅黑" panose="020B0503020204020204" charset="-122"/>
+                          <a:sym typeface="+mn-ea"/>
+                        </a:rPr>
+                        <a:t> 18 </a:t>
+                      </a:r>
+                      <a:r>
+                        <a:rPr lang="zh-CN" altLang="en-US" sz="1125">
+                          <a:solidFill>
+                            <a:srgbClr val="1A1A1A"/>
+                          </a:solidFill>
+                          <a:latin typeface="微软雅黑" panose="020B0503020204020204" charset="-122"/>
+                          <a:ea typeface="微软雅黑" panose="020B0503020204020204" charset="-122"/>
+                          <a:sym typeface="+mn-ea"/>
+                        </a:rPr>
+                        <a:t>项，集中在说明书助手（文件参数提取、产品对比问题）以及知识库权限</a:t>
+                      </a:r>
+                      <a:r>
+                        <a:rPr lang="zh-CN" altLang="en-US" sz="1125">
+                          <a:solidFill>
+                            <a:srgbClr val="1A1A1A"/>
+                          </a:solidFill>
+                          <a:latin typeface="微软雅黑" panose="020B0503020204020204" charset="-122"/>
+                          <a:ea typeface="微软雅黑" panose="020B0503020204020204" charset="-122"/>
+                          <a:sym typeface="+mn-ea"/>
+                        </a:rPr>
+                        <a:t>模块</a:t>
+                      </a:r>
+                      <a:endParaRPr lang="zh-CN" altLang="en-US" sz="1125">
                         <a:solidFill>
                           <a:srgbClr val="1A1A1A"/>
                         </a:solidFill>
                         <a:latin typeface="微软雅黑" panose="020B0503020204020204" charset="-122"/>
                         <a:ea typeface="微软雅黑" panose="020B0503020204020204" charset="-122"/>
+                        <a:sym typeface="+mn-ea"/>
                       </a:endParaRPr>
                     </a:p>
                   </a:txBody>
@@ -14135,9 +14472,52 @@
                           <a:latin typeface="微软雅黑" panose="020B0503020204020204" charset="-122"/>
                           <a:ea typeface="微软雅黑" panose="020B0503020204020204" charset="-122"/>
                         </a:rPr>
-                        <a:t>15 用例（5 批次）</a:t>
+                        <a:t>8</a:t>
                       </a:r>
                       <a:endParaRPr sz="1125">
+                        <a:solidFill>
+                          <a:srgbClr val="1A1A1A"/>
+                        </a:solidFill>
+                        <a:latin typeface="微软雅黑" panose="020B0503020204020204" charset="-122"/>
+                        <a:ea typeface="微软雅黑" panose="020B0503020204020204" charset="-122"/>
+                      </a:endParaRPr>
+                    </a:p>
+                  </a:txBody>
+                  <a:tcPr marL="0" marR="0" marT="0" marB="0" anchor="ctr">
+                    <a:lnL>
+                      <a:noFill/>
+                    </a:lnL>
+                    <a:lnR>
+                      <a:noFill/>
+                    </a:lnR>
+                    <a:lnT>
+                      <a:noFill/>
+                    </a:lnT>
+                    <a:lnB>
+                      <a:noFill/>
+                    </a:lnB>
+                  </a:tcPr>
+                </a:tc>
+                <a:tc>
+                  <a:txBody>
+                    <a:bodyPr/>
+                    <a:p>
+                      <a:pPr marL="114300" marR="114300" algn="l">
+                        <a:lnSpc>
+                          <a:spcPct val="120000"/>
+                        </a:lnSpc>
+                      </a:pPr>
+                      <a:r>
+                        <a:rPr lang="en-US" sz="1125">
+                          <a:solidFill>
+                            <a:srgbClr val="1A1A1A"/>
+                          </a:solidFill>
+                          <a:latin typeface="微软雅黑" panose="020B0503020204020204" charset="-122"/>
+                          <a:ea typeface="微软雅黑" panose="020B0503020204020204" charset="-122"/>
+                        </a:rPr>
+                        <a:t>18</a:t>
+                      </a:r>
+                      <a:endParaRPr lang="en-US" sz="1125">
                         <a:solidFill>
                           <a:srgbClr val="1A1A1A"/>
                         </a:solidFill>
@@ -14173,61 +14553,61 @@
                         </a:lnSpc>
                       </a:pPr>
                       <a:r>
-                        <a:rPr sz="1125">
+                        <a:rPr lang="zh-CN" sz="1125">
                           <a:solidFill>
                             <a:srgbClr val="1A1A1A"/>
                           </a:solidFill>
                           <a:latin typeface="微软雅黑" panose="020B0503020204020204" charset="-122"/>
                           <a:ea typeface="微软雅黑" panose="020B0503020204020204" charset="-122"/>
+                          <a:sym typeface="+mn-ea"/>
                         </a:rPr>
-                        <a:t>8</a:t>
+                        <a:t>共计</a:t>
                       </a:r>
-                      <a:endParaRPr sz="1125">
-                        <a:solidFill>
-                          <a:srgbClr val="1A1A1A"/>
-                        </a:solidFill>
-                        <a:latin typeface="微软雅黑" panose="020B0503020204020204" charset="-122"/>
-                        <a:ea typeface="微软雅黑" panose="020B0503020204020204" charset="-122"/>
-                      </a:endParaRPr>
-                    </a:p>
-                  </a:txBody>
-                  <a:tcPr marL="0" marR="0" marT="0" marB="0" anchor="ctr">
-                    <a:lnL>
-                      <a:noFill/>
-                    </a:lnL>
-                    <a:lnR>
-                      <a:noFill/>
-                    </a:lnR>
-                    <a:lnT>
-                      <a:noFill/>
-                    </a:lnT>
-                    <a:lnB>
-                      <a:noFill/>
-                    </a:lnB>
-                  </a:tcPr>
-                </a:tc>
-                <a:tc>
-                  <a:txBody>
-                    <a:bodyPr wrap="square">
-                      <a:spAutoFit/>
-                    </a:bodyPr>
-                    <a:p>
-                      <a:pPr marL="114300" marR="114300" algn="l">
-                        <a:lnSpc>
-                          <a:spcPct val="120000"/>
-                        </a:lnSpc>
-                      </a:pPr>
                       <a:r>
-                        <a:rPr sz="1125" b="1">
+                        <a:rPr lang="en-US" altLang="zh-CN" sz="1125">
                           <a:solidFill>
-                            <a:srgbClr val="4472C4"/>
+                            <a:srgbClr val="1A1A1A"/>
                           </a:solidFill>
                           <a:latin typeface="微软雅黑" panose="020B0503020204020204" charset="-122"/>
                           <a:ea typeface="微软雅黑" panose="020B0503020204020204" charset="-122"/>
+                          <a:sym typeface="+mn-ea"/>
                         </a:rPr>
-                        <a:t>14/15 通过（93.3%）</a:t>
+                        <a:t> 21</a:t>
                       </a:r>
-                      <a:endParaRPr sz="1125" b="1">
+                      <a:r>
+                        <a:rPr lang="zh-CN" altLang="en-US" sz="1125">
+                          <a:solidFill>
+                            <a:srgbClr val="1A1A1A"/>
+                          </a:solidFill>
+                          <a:latin typeface="微软雅黑" panose="020B0503020204020204" charset="-122"/>
+                          <a:ea typeface="微软雅黑" panose="020B0503020204020204" charset="-122"/>
+                          <a:sym typeface="+mn-ea"/>
+                        </a:rPr>
+                        <a:t>项，未通过</a:t>
+                      </a:r>
+                      <a:r>
+                        <a:rPr lang="en-US" altLang="zh-CN" sz="1125">
+                          <a:solidFill>
+                            <a:srgbClr val="1A1A1A"/>
+                          </a:solidFill>
+                          <a:latin typeface="微软雅黑" panose="020B0503020204020204" charset="-122"/>
+                          <a:ea typeface="微软雅黑" panose="020B0503020204020204" charset="-122"/>
+                          <a:sym typeface="+mn-ea"/>
+                        </a:rPr>
+                        <a:t> 2 </a:t>
+                      </a:r>
+                      <a:r>
+                        <a:rPr lang="zh-CN" altLang="en-US" sz="1125">
+                          <a:solidFill>
+                            <a:srgbClr val="1A1A1A"/>
+                          </a:solidFill>
+                          <a:latin typeface="微软雅黑" panose="020B0503020204020204" charset="-122"/>
+                          <a:ea typeface="微软雅黑" panose="020B0503020204020204" charset="-122"/>
+                          <a:sym typeface="+mn-ea"/>
+                        </a:rPr>
+                        <a:t>项（智能体管理）</a:t>
+                      </a:r>
+                      <a:endParaRPr lang="en-US" sz="1125" b="1">
                         <a:solidFill>
                           <a:srgbClr val="4472C4"/>
                         </a:solidFill>
@@ -14272,7 +14652,7 @@
                           <a:latin typeface="微软雅黑" panose="020B0503020204020204" charset="-122"/>
                           <a:ea typeface="微软雅黑" panose="020B0503020204020204" charset="-122"/>
                         </a:rPr>
-                        <a:t>7 月（2607）</a:t>
+                        <a:t>7 月</a:t>
                       </a:r>
                       <a:endParaRPr sz="1125">
                         <a:solidFill>
@@ -14310,16 +14690,16 @@
                         </a:lnSpc>
                       </a:pPr>
                       <a:r>
-                        <a:rPr sz="1125">
+                        <a:rPr lang="en-US" sz="1125">
                           <a:solidFill>
                             <a:srgbClr val="1A1A1A"/>
                           </a:solidFill>
                           <a:latin typeface="微软雅黑" panose="020B0503020204020204" charset="-122"/>
                           <a:ea typeface="微软雅黑" panose="020B0503020204020204" charset="-122"/>
                         </a:rPr>
-                        <a:t>5 轮验收（8 项）</a:t>
+                        <a:t>12</a:t>
                       </a:r>
-                      <a:endParaRPr sz="1125">
+                      <a:endParaRPr lang="en-US" sz="1125">
                         <a:solidFill>
                           <a:srgbClr val="1A1A1A"/>
                         </a:solidFill>
@@ -14345,9 +14725,7 @@
                 </a:tc>
                 <a:tc>
                   <a:txBody>
-                    <a:bodyPr wrap="square">
-                      <a:spAutoFit/>
-                    </a:bodyPr>
+                    <a:bodyPr/>
                     <a:p>
                       <a:pPr marL="114300" marR="114300" algn="l">
                         <a:lnSpc>
@@ -14362,7 +14740,7 @@
                           <a:latin typeface="微软雅黑" panose="020B0503020204020204" charset="-122"/>
                           <a:ea typeface="微软雅黑" panose="020B0503020204020204" charset="-122"/>
                         </a:rPr>
-                        <a:t>4</a:t>
+                        <a:t>5 轮验收（8 项）</a:t>
                       </a:r>
                       <a:endParaRPr sz="1125">
                         <a:solidFill>

--- a/PPT/入职以来AI工作复盘/入职以来AI工作复盘.pptx
+++ b/PPT/入职以来AI工作复盘/入职以来AI工作复盘.pptx
@@ -1582,7 +1582,7 @@
         </p:nvSpPr>
         <p:spPr>
           <a:xfrm>
-            <a:off x="2362200" y="1338580"/>
+            <a:off x="409575" y="1221740"/>
             <a:ext cx="3571875" cy="1333500"/>
           </a:xfrm>
           <a:prstGeom prst="roundRect">
@@ -1611,7 +1611,7 @@
         </p:nvSpPr>
         <p:spPr>
           <a:xfrm>
-            <a:off x="3981450" y="1548130"/>
+            <a:off x="2028825" y="1431290"/>
             <a:ext cx="342900" cy="647700"/>
           </a:xfrm>
           <a:prstGeom prst="rect">
@@ -1658,7 +1658,7 @@
         </p:nvSpPr>
         <p:spPr>
           <a:xfrm>
-            <a:off x="3543300" y="2252980"/>
+            <a:off x="1590675" y="2136140"/>
             <a:ext cx="1209675" cy="209550"/>
           </a:xfrm>
           <a:prstGeom prst="rect">
@@ -1725,7 +1725,7 @@
         </p:nvSpPr>
         <p:spPr>
           <a:xfrm>
-            <a:off x="6143625" y="1338580"/>
+            <a:off x="4191000" y="1221740"/>
             <a:ext cx="3562350" cy="1333500"/>
           </a:xfrm>
           <a:prstGeom prst="roundRect">
@@ -1754,7 +1754,7 @@
         </p:nvSpPr>
         <p:spPr>
           <a:xfrm>
-            <a:off x="7753350" y="1548130"/>
+            <a:off x="5800725" y="1431290"/>
             <a:ext cx="342900" cy="647700"/>
           </a:xfrm>
           <a:prstGeom prst="rect">
@@ -1801,7 +1801,7 @@
         </p:nvSpPr>
         <p:spPr>
           <a:xfrm>
-            <a:off x="7572375" y="2252980"/>
+            <a:off x="5619750" y="2136140"/>
             <a:ext cx="704850" cy="209550"/>
           </a:xfrm>
           <a:prstGeom prst="rect">
@@ -1858,7 +1858,7 @@
         </p:nvSpPr>
         <p:spPr>
           <a:xfrm>
-            <a:off x="6143625" y="2880995"/>
+            <a:off x="7962900" y="1221740"/>
             <a:ext cx="3571875" cy="1333500"/>
           </a:xfrm>
           <a:prstGeom prst="roundRect">
@@ -1887,7 +1887,7 @@
         </p:nvSpPr>
         <p:spPr>
           <a:xfrm>
-            <a:off x="7762875" y="3090545"/>
+            <a:off x="9582150" y="1431290"/>
             <a:ext cx="342900" cy="647700"/>
           </a:xfrm>
           <a:prstGeom prst="rect">
@@ -1934,7 +1934,7 @@
         </p:nvSpPr>
         <p:spPr>
           <a:xfrm>
-            <a:off x="7505700" y="3795395"/>
+            <a:off x="9324975" y="2136140"/>
             <a:ext cx="857250" cy="209550"/>
           </a:xfrm>
           <a:prstGeom prst="rect">
@@ -2010,8 +2010,8 @@
         </p:nvSpPr>
         <p:spPr>
           <a:xfrm>
-            <a:off x="3810000" y="3091180"/>
-            <a:ext cx="685800" cy="647700"/>
+            <a:off x="3543300" y="3091180"/>
+            <a:ext cx="1437640" cy="647700"/>
           </a:xfrm>
           <a:prstGeom prst="rect">
             <a:avLst/>
@@ -2033,7 +2033,7 @@
                 <a:latin typeface="微软雅黑" panose="020B0503020204020204" charset="-122"/>
                 <a:ea typeface="微软雅黑" panose="020B0503020204020204" charset="-122"/>
               </a:rPr>
-              <a:t>37</a:t>
+              <a:t>400+</a:t>
             </a:r>
             <a:endParaRPr lang="en-US" sz="4200" b="1">
               <a:solidFill>
@@ -2080,7 +2080,7 @@
                 <a:latin typeface="微软雅黑" panose="020B0503020204020204" charset="-122"/>
                 <a:ea typeface="微软雅黑" panose="020B0503020204020204" charset="-122"/>
               </a:rPr>
-              <a:t>平台验收项</a:t>
+              <a:t>平台测试项</a:t>
             </a:r>
             <a:endParaRPr lang="zh-CN" sz="1350">
               <a:solidFill>
@@ -2501,6 +2501,129 @@
             <a:endParaRPr lang="en-US" sz="1050">
               <a:solidFill>
                 <a:srgbClr val="888888"/>
+              </a:solidFill>
+              <a:latin typeface="微软雅黑" panose="020B0503020204020204" charset="-122"/>
+              <a:ea typeface="微软雅黑" panose="020B0503020204020204" charset="-122"/>
+            </a:endParaRPr>
+          </a:p>
+        </p:txBody>
+      </p:sp>
+      <p:sp>
+        <p:nvSpPr>
+          <p:cNvPr id="1" name="圆角矩形 0"/>
+          <p:cNvSpPr/>
+          <p:nvPr>
+            <p:custDataLst>
+              <p:tags r:id="rId13"/>
+            </p:custDataLst>
+          </p:nvPr>
+        </p:nvSpPr>
+        <p:spPr>
+          <a:xfrm>
+            <a:off x="6324600" y="2837180"/>
+            <a:ext cx="3571875" cy="1333500"/>
+          </a:xfrm>
+          <a:prstGeom prst="roundRect">
+            <a:avLst>
+              <a:gd name="adj" fmla="val 7143"/>
+            </a:avLst>
+          </a:prstGeom>
+          <a:solidFill>
+            <a:srgbClr val="F4F7FC"/>
+          </a:solidFill>
+        </p:spPr>
+        <p:txBody>
+          <a:bodyPr/>
+          <a:p/>
+        </p:txBody>
+      </p:sp>
+      <p:sp>
+        <p:nvSpPr>
+          <p:cNvPr id="2" name="文本框 1" descr="{&quot;isTemplate&quot;:true,&quot;type&quot;:&quot;text&quot;}"/>
+          <p:cNvSpPr txBox="1"/>
+          <p:nvPr>
+            <p:custDataLst>
+              <p:tags r:id="rId14"/>
+            </p:custDataLst>
+          </p:nvPr>
+        </p:nvSpPr>
+        <p:spPr>
+          <a:xfrm>
+            <a:off x="7391400" y="3046730"/>
+            <a:ext cx="1437640" cy="647700"/>
+          </a:xfrm>
+          <a:prstGeom prst="rect">
+            <a:avLst/>
+          </a:prstGeom>
+        </p:spPr>
+        <p:txBody>
+          <a:bodyPr wrap="none" lIns="0" tIns="0" rIns="0" bIns="0"/>
+          <a:p>
+            <a:pPr algn="ctr">
+              <a:lnSpc>
+                <a:spcPct val="100000"/>
+              </a:lnSpc>
+            </a:pPr>
+            <a:r>
+              <a:rPr lang="en-US" sz="4200" b="1">
+                <a:solidFill>
+                  <a:srgbClr val="4472C4"/>
+                </a:solidFill>
+                <a:latin typeface="微软雅黑" panose="020B0503020204020204" charset="-122"/>
+                <a:ea typeface="微软雅黑" panose="020B0503020204020204" charset="-122"/>
+              </a:rPr>
+              <a:t>50+</a:t>
+            </a:r>
+            <a:endParaRPr lang="en-US" sz="4200" b="1">
+              <a:solidFill>
+                <a:srgbClr val="4472C4"/>
+              </a:solidFill>
+              <a:latin typeface="微软雅黑" panose="020B0503020204020204" charset="-122"/>
+              <a:ea typeface="微软雅黑" panose="020B0503020204020204" charset="-122"/>
+            </a:endParaRPr>
+          </a:p>
+        </p:txBody>
+      </p:sp>
+      <p:sp>
+        <p:nvSpPr>
+          <p:cNvPr id="3" name="文本框 2" descr="{&quot;isTemplate&quot;:true,&quot;type&quot;:&quot;text&quot;}"/>
+          <p:cNvSpPr txBox="1"/>
+          <p:nvPr>
+            <p:custDataLst>
+              <p:tags r:id="rId15"/>
+            </p:custDataLst>
+          </p:nvPr>
+        </p:nvSpPr>
+        <p:spPr>
+          <a:xfrm>
+            <a:off x="7681595" y="3738880"/>
+            <a:ext cx="857250" cy="209550"/>
+          </a:xfrm>
+          <a:prstGeom prst="rect">
+            <a:avLst/>
+          </a:prstGeom>
+        </p:spPr>
+        <p:txBody>
+          <a:bodyPr wrap="none" lIns="0" tIns="0" rIns="0" bIns="0"/>
+          <a:p>
+            <a:pPr algn="ctr">
+              <a:lnSpc>
+                <a:spcPct val="100000"/>
+              </a:lnSpc>
+            </a:pPr>
+            <a:r>
+              <a:rPr lang="zh-CN" sz="1350">
+                <a:solidFill>
+                  <a:srgbClr val="1A1A1A"/>
+                </a:solidFill>
+                <a:latin typeface="微软雅黑" panose="020B0503020204020204" charset="-122"/>
+                <a:ea typeface="微软雅黑" panose="020B0503020204020204" charset="-122"/>
+              </a:rPr>
+              <a:t>验收项</a:t>
+            </a:r>
+            <a:endParaRPr lang="zh-CN" sz="1350">
+              <a:solidFill>
+                <a:srgbClr val="1A1A1A"/>
               </a:solidFill>
               <a:latin typeface="微软雅黑" panose="020B0503020204020204" charset="-122"/>
               <a:ea typeface="微软雅黑" panose="020B0503020204020204" charset="-122"/>
@@ -2639,7 +2762,7 @@
           <p:nvPr/>
         </p:nvGraphicFramePr>
         <p:xfrm>
-          <a:off x="533400" y="1143000"/>
+          <a:off x="533400" y="1435100"/>
           <a:ext cx="11125201" cy="4000500"/>
         </p:xfrm>
         <a:graphic>
@@ -2953,16 +3076,16 @@
                         </a:lnSpc>
                       </a:pPr>
                       <a:r>
-                        <a:rPr sz="1125">
-                          <a:solidFill>
-                            <a:srgbClr val="1A1A1A"/>
-                          </a:solidFill>
-                          <a:latin typeface="微软雅黑" panose="020B0503020204020204" charset="-122"/>
-                          <a:ea typeface="微软雅黑" panose="020B0503020204020204" charset="-122"/>
-                        </a:rPr>
-                        <a:t>05-29</a:t>
-                      </a:r>
-                      <a:endParaRPr sz="1125">
+                        <a:rPr lang="zh-CN" sz="1125">
+                          <a:solidFill>
+                            <a:srgbClr val="1A1A1A"/>
+                          </a:solidFill>
+                          <a:latin typeface="微软雅黑" panose="020B0503020204020204" charset="-122"/>
+                          <a:ea typeface="微软雅黑" panose="020B0503020204020204" charset="-122"/>
+                        </a:rPr>
+                        <a:t>五月下旬</a:t>
+                      </a:r>
+                      <a:endParaRPr lang="zh-CN" sz="1125">
                         <a:solidFill>
                           <a:srgbClr val="1A1A1A"/>
                         </a:solidFill>
@@ -3180,16 +3303,16 @@
                         </a:lnSpc>
                       </a:pPr>
                       <a:r>
-                        <a:rPr sz="1125">
-                          <a:solidFill>
-                            <a:srgbClr val="1A1A1A"/>
-                          </a:solidFill>
-                          <a:latin typeface="微软雅黑" panose="020B0503020204020204" charset="-122"/>
-                          <a:ea typeface="微软雅黑" panose="020B0503020204020204" charset="-122"/>
-                        </a:rPr>
-                        <a:t>06-22</a:t>
-                      </a:r>
-                      <a:endParaRPr sz="1125">
+                        <a:rPr lang="zh-CN" sz="1125">
+                          <a:solidFill>
+                            <a:srgbClr val="1A1A1A"/>
+                          </a:solidFill>
+                          <a:latin typeface="微软雅黑" panose="020B0503020204020204" charset="-122"/>
+                          <a:ea typeface="微软雅黑" panose="020B0503020204020204" charset="-122"/>
+                        </a:rPr>
+                        <a:t>六月中旬</a:t>
+                      </a:r>
+                      <a:endParaRPr lang="zh-CN" sz="1125">
                         <a:solidFill>
                           <a:srgbClr val="1A1A1A"/>
                         </a:solidFill>
@@ -3407,16 +3530,26 @@
                         </a:lnSpc>
                       </a:pPr>
                       <a:r>
-                        <a:rPr sz="1125">
-                          <a:solidFill>
-                            <a:srgbClr val="1A1A1A"/>
-                          </a:solidFill>
-                          <a:latin typeface="微软雅黑" panose="020B0503020204020204" charset="-122"/>
-                          <a:ea typeface="微软雅黑" panose="020B0503020204020204" charset="-122"/>
-                        </a:rPr>
-                        <a:t>07-28</a:t>
-                      </a:r>
-                      <a:endParaRPr sz="1125">
+                        <a:rPr lang="zh-CN" sz="1125">
+                          <a:solidFill>
+                            <a:srgbClr val="1A1A1A"/>
+                          </a:solidFill>
+                          <a:latin typeface="微软雅黑" panose="020B0503020204020204" charset="-122"/>
+                          <a:ea typeface="微软雅黑" panose="020B0503020204020204" charset="-122"/>
+                        </a:rPr>
+                        <a:t>七月</a:t>
+                      </a:r>
+                      <a:r>
+                        <a:rPr lang="zh-CN" sz="1125">
+                          <a:solidFill>
+                            <a:srgbClr val="1A1A1A"/>
+                          </a:solidFill>
+                          <a:latin typeface="微软雅黑" panose="020B0503020204020204" charset="-122"/>
+                          <a:ea typeface="微软雅黑" panose="020B0503020204020204" charset="-122"/>
+                        </a:rPr>
+                        <a:t>下旬</a:t>
+                      </a:r>
+                      <a:endParaRPr lang="zh-CN" sz="1125">
                         <a:solidFill>
                           <a:srgbClr val="1A1A1A"/>
                         </a:solidFill>
@@ -3654,16 +3787,16 @@
                         </a:lnSpc>
                       </a:pPr>
                       <a:r>
-                        <a:rPr sz="1125">
-                          <a:solidFill>
-                            <a:srgbClr val="1A1A1A"/>
-                          </a:solidFill>
-                          <a:latin typeface="微软雅黑" panose="020B0503020204020204" charset="-122"/>
-                          <a:ea typeface="微软雅黑" panose="020B0503020204020204" charset="-122"/>
-                        </a:rPr>
-                        <a:t>已交付</a:t>
-                      </a:r>
-                      <a:endParaRPr sz="1125">
+                        <a:rPr lang="zh-CN" sz="1125">
+                          <a:solidFill>
+                            <a:srgbClr val="1A1A1A"/>
+                          </a:solidFill>
+                          <a:latin typeface="微软雅黑" panose="020B0503020204020204" charset="-122"/>
+                          <a:ea typeface="微软雅黑" panose="020B0503020204020204" charset="-122"/>
+                        </a:rPr>
+                        <a:t>七月</a:t>
+                      </a:r>
+                      <a:endParaRPr lang="zh-CN" sz="1125">
                         <a:solidFill>
                           <a:srgbClr val="1A1A1A"/>
                         </a:solidFill>
@@ -3881,16 +4014,16 @@
                         </a:lnSpc>
                       </a:pPr>
                       <a:r>
-                        <a:rPr sz="1125">
-                          <a:solidFill>
-                            <a:srgbClr val="1A1A1A"/>
-                          </a:solidFill>
-                          <a:latin typeface="微软雅黑" panose="020B0503020204020204" charset="-122"/>
-                          <a:ea typeface="微软雅黑" panose="020B0503020204020204" charset="-122"/>
-                        </a:rPr>
-                        <a:t>08-01</a:t>
-                      </a:r>
-                      <a:endParaRPr sz="1125">
+                        <a:rPr lang="zh-CN" sz="1125">
+                          <a:solidFill>
+                            <a:srgbClr val="1A1A1A"/>
+                          </a:solidFill>
+                          <a:latin typeface="微软雅黑" panose="020B0503020204020204" charset="-122"/>
+                          <a:ea typeface="微软雅黑" panose="020B0503020204020204" charset="-122"/>
+                        </a:rPr>
+                        <a:t>八月初</a:t>
+                      </a:r>
+                      <a:endParaRPr lang="zh-CN" sz="1125">
                         <a:solidFill>
                           <a:srgbClr val="1A1A1A"/>
                         </a:solidFill>
@@ -4054,261 +4187,6 @@
           </a:graphicData>
         </a:graphic>
       </p:graphicFrame>
-      <p:sp>
-        <p:nvSpPr>
-          <p:cNvPr id="121" name="文本框 120" descr="{&quot;isTemplate&quot;:true,&quot;type&quot;:&quot;text&quot;}"/>
-          <p:cNvSpPr txBox="1"/>
-          <p:nvPr/>
-        </p:nvSpPr>
-        <p:spPr>
-          <a:xfrm>
-            <a:off x="533400" y="5334000"/>
-            <a:ext cx="11125200" cy="552450"/>
-          </a:xfrm>
-          <a:prstGeom prst="rect">
-            <a:avLst/>
-          </a:prstGeom>
-        </p:spPr>
-        <p:txBody>
-          <a:bodyPr wrap="square" lIns="0" tIns="0" rIns="0" bIns="0">
-            <a:normAutofit/>
-          </a:bodyPr>
-          <a:p>
-            <a:pPr>
-              <a:lnSpc>
-                <a:spcPct val="150000"/>
-              </a:lnSpc>
-            </a:pPr>
-            <a:r>
-              <a:rPr lang="zh-CN" sz="1200">
-                <a:solidFill>
-                  <a:srgbClr val="1A1A1A"/>
-                </a:solidFill>
-                <a:latin typeface="微软雅黑" panose="020B0503020204020204" charset="-122"/>
-                <a:ea typeface="微软雅黑" panose="020B0503020204020204" charset="-122"/>
-              </a:rPr>
-              <a:t>自研平均</a:t>
-            </a:r>
-            <a:r>
-              <a:rPr lang="en-US" sz="1200">
-                <a:solidFill>
-                  <a:srgbClr val="1A1A1A"/>
-                </a:solidFill>
-                <a:latin typeface="微软雅黑" panose="020B0503020204020204" charset="-122"/>
-                <a:ea typeface="微软雅黑" panose="020B0503020204020204" charset="-122"/>
-              </a:rPr>
-              <a:t> </a:t>
-            </a:r>
-            <a:r>
-              <a:rPr lang="en-US" sz="1200" b="1">
-                <a:solidFill>
-                  <a:srgbClr val="4472C4"/>
-                </a:solidFill>
-                <a:latin typeface="微软雅黑" panose="020B0503020204020204" charset="-122"/>
-                <a:ea typeface="微软雅黑" panose="020B0503020204020204" charset="-122"/>
-              </a:rPr>
-              <a:t>~25 </a:t>
-            </a:r>
-            <a:r>
-              <a:rPr lang="zh-CN" sz="1200" b="1">
-                <a:solidFill>
-                  <a:srgbClr val="4472C4"/>
-                </a:solidFill>
-                <a:latin typeface="微软雅黑" panose="020B0503020204020204" charset="-122"/>
-                <a:ea typeface="微软雅黑" panose="020B0503020204020204" charset="-122"/>
-              </a:rPr>
-              <a:t>天</a:t>
-            </a:r>
-            <a:r>
-              <a:rPr lang="en-US" sz="1200">
-                <a:solidFill>
-                  <a:srgbClr val="1A1A1A"/>
-                </a:solidFill>
-                <a:latin typeface="微软雅黑" panose="020B0503020204020204" charset="-122"/>
-                <a:ea typeface="微软雅黑" panose="020B0503020204020204" charset="-122"/>
-              </a:rPr>
-              <a:t> </a:t>
-            </a:r>
-            <a:r>
-              <a:rPr lang="zh-CN" sz="1200">
-                <a:solidFill>
-                  <a:srgbClr val="1A1A1A"/>
-                </a:solidFill>
-                <a:latin typeface="微软雅黑" panose="020B0503020204020204" charset="-122"/>
-                <a:ea typeface="微软雅黑" panose="020B0503020204020204" charset="-122"/>
-              </a:rPr>
-              <a:t>交付；含</a:t>
-            </a:r>
-            <a:r>
-              <a:rPr lang="en-US" sz="1200">
-                <a:solidFill>
-                  <a:srgbClr val="1A1A1A"/>
-                </a:solidFill>
-                <a:latin typeface="微软雅黑" panose="020B0503020204020204" charset="-122"/>
-                <a:ea typeface="微软雅黑" panose="020B0503020204020204" charset="-122"/>
-              </a:rPr>
-              <a:t> 1 </a:t>
-            </a:r>
-            <a:r>
-              <a:rPr lang="zh-CN" sz="1200">
-                <a:solidFill>
-                  <a:srgbClr val="1A1A1A"/>
-                </a:solidFill>
-                <a:latin typeface="微软雅黑" panose="020B0503020204020204" charset="-122"/>
-                <a:ea typeface="微软雅黑" panose="020B0503020204020204" charset="-122"/>
-              </a:rPr>
-              <a:t>次</a:t>
-            </a:r>
-            <a:r>
-              <a:rPr lang="en-US" sz="1200">
-                <a:solidFill>
-                  <a:srgbClr val="1A1A1A"/>
-                </a:solidFill>
-                <a:latin typeface="微软雅黑" panose="020B0503020204020204" charset="-122"/>
-                <a:ea typeface="微软雅黑" panose="020B0503020204020204" charset="-122"/>
-              </a:rPr>
-              <a:t> PyQt5→Web </a:t>
-            </a:r>
-            <a:r>
-              <a:rPr lang="zh-CN" sz="1200">
-                <a:solidFill>
-                  <a:srgbClr val="1A1A1A"/>
-                </a:solidFill>
-                <a:latin typeface="微软雅黑" panose="020B0503020204020204" charset="-122"/>
-                <a:ea typeface="微软雅黑" panose="020B0503020204020204" charset="-122"/>
-              </a:rPr>
-              <a:t>重构（</a:t>
-            </a:r>
-            <a:r>
-              <a:rPr lang="en-US" sz="1200">
-                <a:solidFill>
-                  <a:srgbClr val="1A1A1A"/>
-                </a:solidFill>
-                <a:latin typeface="微软雅黑" panose="020B0503020204020204" charset="-122"/>
-                <a:ea typeface="微软雅黑" panose="020B0503020204020204" charset="-122"/>
-              </a:rPr>
-              <a:t>05-27</a:t>
-            </a:r>
-            <a:r>
-              <a:rPr lang="zh-CN" sz="1200">
-                <a:solidFill>
-                  <a:srgbClr val="1A1A1A"/>
-                </a:solidFill>
-                <a:latin typeface="微软雅黑" panose="020B0503020204020204" charset="-122"/>
-                <a:ea typeface="微软雅黑" panose="020B0503020204020204" charset="-122"/>
-              </a:rPr>
-              <a:t>）、</a:t>
-            </a:r>
-            <a:r>
-              <a:rPr lang="en-US" sz="1200">
-                <a:solidFill>
-                  <a:srgbClr val="1A1A1A"/>
-                </a:solidFill>
-                <a:latin typeface="微软雅黑" panose="020B0503020204020204" charset="-122"/>
-                <a:ea typeface="微软雅黑" panose="020B0503020204020204" charset="-122"/>
-              </a:rPr>
-              <a:t>2 </a:t>
-            </a:r>
-            <a:r>
-              <a:rPr lang="zh-CN" sz="1200">
-                <a:solidFill>
-                  <a:srgbClr val="1A1A1A"/>
-                </a:solidFill>
-                <a:latin typeface="微软雅黑" panose="020B0503020204020204" charset="-122"/>
-                <a:ea typeface="微软雅黑" panose="020B0503020204020204" charset="-122"/>
-              </a:rPr>
-              <a:t>次架构级重构（采购</a:t>
-            </a:r>
-            <a:r>
-              <a:rPr lang="en-US" sz="1200">
-                <a:solidFill>
-                  <a:srgbClr val="1A1A1A"/>
-                </a:solidFill>
-                <a:latin typeface="微软雅黑" panose="020B0503020204020204" charset="-122"/>
-                <a:ea typeface="微软雅黑" panose="020B0503020204020204" charset="-122"/>
-              </a:rPr>
-              <a:t> 06-27</a:t>
-            </a:r>
-            <a:r>
-              <a:rPr lang="zh-CN" sz="1200">
-                <a:solidFill>
-                  <a:srgbClr val="1A1A1A"/>
-                </a:solidFill>
-                <a:latin typeface="微软雅黑" panose="020B0503020204020204" charset="-122"/>
-                <a:ea typeface="微软雅黑" panose="020B0503020204020204" charset="-122"/>
-              </a:rPr>
-              <a:t>、船务</a:t>
-            </a:r>
-            <a:r>
-              <a:rPr lang="en-US" sz="1200">
-                <a:solidFill>
-                  <a:srgbClr val="1A1A1A"/>
-                </a:solidFill>
-                <a:latin typeface="微软雅黑" panose="020B0503020204020204" charset="-122"/>
-                <a:ea typeface="微软雅黑" panose="020B0503020204020204" charset="-122"/>
-              </a:rPr>
-              <a:t> 08-01 JSON→SQLite</a:t>
-            </a:r>
-            <a:r>
-              <a:rPr lang="zh-CN" sz="1200">
-                <a:solidFill>
-                  <a:srgbClr val="1A1A1A"/>
-                </a:solidFill>
-                <a:latin typeface="微软雅黑" panose="020B0503020204020204" charset="-122"/>
-                <a:ea typeface="微软雅黑" panose="020B0503020204020204" charset="-122"/>
-              </a:rPr>
-              <a:t>）；</a:t>
-            </a:r>
-            <a:r>
-              <a:rPr lang="en-US" sz="1200">
-                <a:solidFill>
-                  <a:srgbClr val="1A1A1A"/>
-                </a:solidFill>
-                <a:latin typeface="微软雅黑" panose="020B0503020204020204" charset="-122"/>
-                <a:ea typeface="微软雅黑" panose="020B0503020204020204" charset="-122"/>
-              </a:rPr>
-              <a:t>110+ </a:t>
-            </a:r>
-            <a:r>
-              <a:rPr lang="zh-CN" sz="1200">
-                <a:solidFill>
-                  <a:srgbClr val="1A1A1A"/>
-                </a:solidFill>
-                <a:latin typeface="微软雅黑" panose="020B0503020204020204" charset="-122"/>
-                <a:ea typeface="微软雅黑" panose="020B0503020204020204" charset="-122"/>
-              </a:rPr>
-              <a:t>条代码迭代。</a:t>
-            </a:r>
-            <a:r>
-              <a:rPr lang="en-US" sz="1200">
-                <a:solidFill>
-                  <a:srgbClr val="1A1A1A"/>
-                </a:solidFill>
-                <a:latin typeface="微软雅黑" panose="020B0503020204020204" charset="-122"/>
-                <a:ea typeface="微软雅黑" panose="020B0503020204020204" charset="-122"/>
-              </a:rPr>
-              <a:t>MSDS </a:t>
-            </a:r>
-            <a:r>
-              <a:rPr lang="zh-CN" sz="1200">
-                <a:solidFill>
-                  <a:srgbClr val="1A1A1A"/>
-                </a:solidFill>
-                <a:latin typeface="微软雅黑" panose="020B0503020204020204" charset="-122"/>
-                <a:ea typeface="微软雅黑" panose="020B0503020204020204" charset="-122"/>
-              </a:rPr>
-              <a:t>中英文双语生成内嵌于船务助手，不作独立交付项。</a:t>
-            </a:r>
-            <a:endParaRPr lang="zh-CN" sz="1200">
-              <a:solidFill>
-                <a:srgbClr val="1A1A1A"/>
-              </a:solidFill>
-              <a:latin typeface="微软雅黑" panose="020B0503020204020204" charset="-122"/>
-              <a:ea typeface="微软雅黑" panose="020B0503020204020204" charset="-122"/>
-            </a:endParaRPr>
-          </a:p>
-        </p:txBody>
-      </p:sp>
       <p:sp>
         <p:nvSpPr>
           <p:cNvPr id="122" name="文本框 121" descr="{&quot;isTemplate&quot;:true,&quot;type&quot;:&quot;text&quot;}"/>
@@ -5763,7 +5641,7 @@
         </p:nvSpPr>
         <p:spPr>
           <a:xfrm>
-            <a:off x="533400" y="1238250"/>
+            <a:off x="533400" y="1104900"/>
             <a:ext cx="3571875" cy="1333500"/>
           </a:xfrm>
           <a:prstGeom prst="roundRect">
@@ -5792,8 +5670,8 @@
         </p:nvSpPr>
         <p:spPr>
           <a:xfrm>
-            <a:off x="1981200" y="1447800"/>
-            <a:ext cx="685800" cy="647700"/>
+            <a:off x="1581150" y="1353185"/>
+            <a:ext cx="1476375" cy="647700"/>
           </a:xfrm>
           <a:prstGeom prst="rect">
             <a:avLst/>
@@ -5815,7 +5693,7 @@
                 <a:latin typeface="微软雅黑" panose="020B0503020204020204" charset="-122"/>
                 <a:ea typeface="微软雅黑" panose="020B0503020204020204" charset="-122"/>
               </a:rPr>
-              <a:t>37</a:t>
+              <a:t>400+</a:t>
             </a:r>
             <a:endParaRPr lang="en-US" sz="4200" b="1">
               <a:solidFill>
@@ -5839,7 +5717,7 @@
         </p:nvSpPr>
         <p:spPr>
           <a:xfrm>
-            <a:off x="1819275" y="2152650"/>
+            <a:off x="1704975" y="2000885"/>
             <a:ext cx="857250" cy="209550"/>
           </a:xfrm>
           <a:prstGeom prst="rect">
@@ -5916,7 +5794,7 @@
         </p:nvSpPr>
         <p:spPr>
           <a:xfrm>
-            <a:off x="4314825" y="1238250"/>
+            <a:off x="4314825" y="1104900"/>
             <a:ext cx="3562350" cy="1333500"/>
           </a:xfrm>
           <a:prstGeom prst="roundRect">
@@ -5945,7 +5823,7 @@
         </p:nvSpPr>
         <p:spPr>
           <a:xfrm>
-            <a:off x="5753100" y="1447800"/>
+            <a:off x="5753100" y="1314450"/>
             <a:ext cx="685800" cy="647700"/>
           </a:xfrm>
           <a:prstGeom prst="rect">
@@ -5968,7 +5846,7 @@
                 <a:latin typeface="微软雅黑" panose="020B0503020204020204" charset="-122"/>
                 <a:ea typeface="微软雅黑" panose="020B0503020204020204" charset="-122"/>
               </a:rPr>
-              <a:t>19</a:t>
+              <a:t>44</a:t>
             </a:r>
             <a:endParaRPr lang="en-US" sz="4200" b="1">
               <a:solidFill>
@@ -5992,7 +5870,7 @@
         </p:nvSpPr>
         <p:spPr>
           <a:xfrm>
-            <a:off x="5581650" y="2152650"/>
+            <a:off x="5565775" y="2019300"/>
             <a:ext cx="1028700" cy="209550"/>
           </a:xfrm>
           <a:prstGeom prst="rect">
@@ -6016,6 +5894,16 @@
                 <a:ea typeface="微软雅黑" panose="020B0503020204020204" charset="-122"/>
               </a:rPr>
               <a:t>问题反馈闭环</a:t>
+            </a:r>
+            <a:r>
+              <a:rPr lang="zh-CN" sz="1350">
+                <a:solidFill>
+                  <a:srgbClr val="1A1A1A"/>
+                </a:solidFill>
+                <a:latin typeface="微软雅黑" panose="020B0503020204020204" charset="-122"/>
+                <a:ea typeface="微软雅黑" panose="020B0503020204020204" charset="-122"/>
+              </a:rPr>
+              <a:t>项</a:t>
             </a:r>
             <a:endParaRPr lang="zh-CN" sz="1350">
               <a:solidFill>
@@ -6039,7 +5927,7 @@
         </p:nvSpPr>
         <p:spPr>
           <a:xfrm>
-            <a:off x="8086725" y="1238250"/>
+            <a:off x="8086725" y="1104900"/>
             <a:ext cx="3571875" cy="1333500"/>
           </a:xfrm>
           <a:prstGeom prst="roundRect">
@@ -6068,7 +5956,7 @@
         </p:nvSpPr>
         <p:spPr>
           <a:xfrm>
-            <a:off x="8963025" y="1447800"/>
+            <a:off x="9134475" y="1314450"/>
             <a:ext cx="1828800" cy="647700"/>
           </a:xfrm>
           <a:prstGeom prst="rect">
@@ -6078,7 +5966,7 @@
         <p:txBody>
           <a:bodyPr wrap="none" lIns="0" tIns="0" rIns="0" bIns="0"/>
           <a:p>
-            <a:pPr>
+            <a:pPr algn="ctr">
               <a:lnSpc>
                 <a:spcPct val="100000"/>
               </a:lnSpc>
@@ -6091,7 +5979,7 @@
                 <a:latin typeface="微软雅黑" panose="020B0503020204020204" charset="-122"/>
                 <a:ea typeface="微软雅黑" panose="020B0503020204020204" charset="-122"/>
               </a:rPr>
-              <a:t>93.3%</a:t>
+              <a:t>94.1%</a:t>
             </a:r>
             <a:endParaRPr lang="en-US" sz="4200" b="1">
               <a:solidFill>
@@ -6115,7 +6003,7 @@
         </p:nvSpPr>
         <p:spPr>
           <a:xfrm>
-            <a:off x="9286875" y="2152650"/>
+            <a:off x="9458325" y="2019300"/>
             <a:ext cx="1181100" cy="209550"/>
           </a:xfrm>
           <a:prstGeom prst="rect">
@@ -6125,20 +6013,20 @@
         <p:txBody>
           <a:bodyPr wrap="none" lIns="0" tIns="0" rIns="0" bIns="0"/>
           <a:p>
-            <a:pPr>
+            <a:pPr algn="ctr">
               <a:lnSpc>
                 <a:spcPct val="100000"/>
               </a:lnSpc>
             </a:pPr>
             <a:r>
-              <a:rPr lang="en-US" sz="1350">
+              <a:rPr lang="zh-CN" altLang="en-US" sz="1350">
                 <a:solidFill>
                   <a:srgbClr val="1A1A1A"/>
                 </a:solidFill>
                 <a:latin typeface="微软雅黑" panose="020B0503020204020204" charset="-122"/>
                 <a:ea typeface="微软雅黑" panose="020B0503020204020204" charset="-122"/>
               </a:rPr>
-              <a:t>6 </a:t>
+              <a:t>总体</a:t>
             </a:r>
             <a:r>
               <a:rPr lang="zh-CN" sz="1350">
@@ -6148,7 +6036,7 @@
                 <a:latin typeface="微软雅黑" panose="020B0503020204020204" charset="-122"/>
                 <a:ea typeface="微软雅黑" panose="020B0503020204020204" charset="-122"/>
               </a:rPr>
-              <a:t>月单月通过率</a:t>
+              <a:t>通过率</a:t>
             </a:r>
             <a:endParaRPr lang="zh-CN" sz="1350">
               <a:solidFill>
@@ -6168,7 +6056,7 @@
         </p:nvSpPr>
         <p:spPr>
           <a:xfrm>
-            <a:off x="533400" y="2857500"/>
+            <a:off x="533400" y="2724150"/>
             <a:ext cx="11125200" cy="619125"/>
           </a:xfrm>
           <a:prstGeom prst="roundRect">
@@ -6193,7 +6081,7 @@
         </p:nvSpPr>
         <p:spPr>
           <a:xfrm>
-            <a:off x="742950" y="3009900"/>
+            <a:off x="742950" y="2876550"/>
             <a:ext cx="10706100" cy="314325"/>
           </a:xfrm>
           <a:prstGeom prst="rect">
@@ -6335,7 +6223,7 @@
           <p:nvPr/>
         </p:nvGraphicFramePr>
         <p:xfrm>
-          <a:off x="533400" y="3667125"/>
+          <a:off x="533400" y="3525520"/>
           <a:ext cx="11094085" cy="2593975"/>
         </p:xfrm>
         <a:graphic>
@@ -8504,7 +8392,7 @@
                           <a:latin typeface="微软雅黑" panose="020B0503020204020204" charset="-122"/>
                           <a:ea typeface="微软雅黑" panose="020B0503020204020204" charset="-122"/>
                         </a:rPr>
-                        <a:t>目前仅</a:t>
+                        <a:t>当前仅</a:t>
                       </a:r>
                       <a:r>
                         <a:rPr sz="1125">
@@ -11050,127 +10938,145 @@
 
 <file path=ppt/tags/tag1.xml><?xml version="1.0" encoding="utf-8"?>
 <p:tagLst xmlns:p="http://schemas.openxmlformats.org/presentationml/2006/main">
-  <p:tag name="KSO_WM_DIAGRAM_VIRTUALLY_FRAME" val="{&quot;height&quot;:234.4,&quot;left&quot;:42,&quot;top&quot;:97.5,&quot;width&quot;:876}"/>
+  <p:tag name="KSO_WM_DIAGRAM_VIRTUALLY_FRAME" val="{&quot;height&quot;:235.7,&quot;left&quot;:32.25,&quot;top&quot;:96.2,&quot;width&quot;:1029.75}"/>
 </p:tagLst>
 </file>
 
 <file path=ppt/tags/tag10.xml><?xml version="1.0" encoding="utf-8"?>
 <p:tagLst xmlns:p="http://schemas.openxmlformats.org/presentationml/2006/main">
-  <p:tag name="KSO_WM_DIAGRAM_VIRTUALLY_FRAME" val="{&quot;height&quot;:234.4,&quot;left&quot;:42,&quot;top&quot;:97.5,&quot;width&quot;:876}"/>
+  <p:tag name="KSO_WM_DIAGRAM_VIRTUALLY_FRAME" val="{&quot;height&quot;:235.7,&quot;left&quot;:32.25,&quot;top&quot;:96.2,&quot;width&quot;:1029.75}"/>
 </p:tagLst>
 </file>
 
 <file path=ppt/tags/tag11.xml><?xml version="1.0" encoding="utf-8"?>
 <p:tagLst xmlns:p="http://schemas.openxmlformats.org/presentationml/2006/main">
-  <p:tag name="KSO_WM_DIAGRAM_VIRTUALLY_FRAME" val="{&quot;height&quot;:234.4,&quot;left&quot;:42,&quot;top&quot;:97.5,&quot;width&quot;:876}"/>
+  <p:tag name="KSO_WM_DIAGRAM_VIRTUALLY_FRAME" val="{&quot;height&quot;:235.7,&quot;left&quot;:32.25,&quot;top&quot;:96.2,&quot;width&quot;:1029.75}"/>
 </p:tagLst>
 </file>
 
 <file path=ppt/tags/tag12.xml><?xml version="1.0" encoding="utf-8"?>
 <p:tagLst xmlns:p="http://schemas.openxmlformats.org/presentationml/2006/main">
-  <p:tag name="KSO_WM_DIAGRAM_VIRTUALLY_FRAME" val="{&quot;height&quot;:234.4,&quot;left&quot;:42,&quot;top&quot;:97.5,&quot;width&quot;:876}"/>
+  <p:tag name="KSO_WM_DIAGRAM_VIRTUALLY_FRAME" val="{&quot;height&quot;:235.7,&quot;left&quot;:32.25,&quot;top&quot;:96.2,&quot;width&quot;:1029.75}"/>
 </p:tagLst>
 </file>
 
 <file path=ppt/tags/tag13.xml><?xml version="1.0" encoding="utf-8"?>
 <p:tagLst xmlns:p="http://schemas.openxmlformats.org/presentationml/2006/main">
-  <p:tag name="KSO_WM_DIAGRAM_VIRTUALLY_FRAME" val="{&quot;height&quot;:105,&quot;left&quot;:42,&quot;top&quot;:97.5,&quot;width&quot;:876}"/>
+  <p:tag name="KSO_WM_DIAGRAM_VIRTUALLY_FRAME" val="{&quot;height&quot;:235.7,&quot;left&quot;:32.25,&quot;top&quot;:96.2,&quot;width&quot;:1029.75}"/>
 </p:tagLst>
 </file>
 
 <file path=ppt/tags/tag14.xml><?xml version="1.0" encoding="utf-8"?>
 <p:tagLst xmlns:p="http://schemas.openxmlformats.org/presentationml/2006/main">
-  <p:tag name="KSO_WM_DIAGRAM_VIRTUALLY_FRAME" val="{&quot;height&quot;:105,&quot;left&quot;:42,&quot;top&quot;:97.5,&quot;width&quot;:876}"/>
+  <p:tag name="KSO_WM_DIAGRAM_VIRTUALLY_FRAME" val="{&quot;height&quot;:235.7,&quot;left&quot;:32.25,&quot;top&quot;:96.2,&quot;width&quot;:1029.75}"/>
 </p:tagLst>
 </file>
 
 <file path=ppt/tags/tag15.xml><?xml version="1.0" encoding="utf-8"?>
 <p:tagLst xmlns:p="http://schemas.openxmlformats.org/presentationml/2006/main">
-  <p:tag name="KSO_WM_DIAGRAM_VIRTUALLY_FRAME" val="{&quot;height&quot;:105,&quot;left&quot;:42,&quot;top&quot;:97.5,&quot;width&quot;:876}"/>
+  <p:tag name="KSO_WM_DIAGRAM_VIRTUALLY_FRAME" val="{&quot;height&quot;:235.7,&quot;left&quot;:32.25,&quot;top&quot;:96.2,&quot;width&quot;:1029.75}"/>
 </p:tagLst>
 </file>
 
 <file path=ppt/tags/tag16.xml><?xml version="1.0" encoding="utf-8"?>
 <p:tagLst xmlns:p="http://schemas.openxmlformats.org/presentationml/2006/main">
-  <p:tag name="KSO_WM_DIAGRAM_VIRTUALLY_FRAME" val="{&quot;height&quot;:105,&quot;left&quot;:42,&quot;top&quot;:97.5,&quot;width&quot;:876}"/>
+  <p:tag name="KSO_WM_DIAGRAM_VIRTUALLY_FRAME" val="{&quot;height&quot;:115.5,&quot;left&quot;:42,&quot;top&quot;:87,&quot;width&quot;:876}"/>
 </p:tagLst>
 </file>
 
 <file path=ppt/tags/tag17.xml><?xml version="1.0" encoding="utf-8"?>
 <p:tagLst xmlns:p="http://schemas.openxmlformats.org/presentationml/2006/main">
-  <p:tag name="KSO_WM_DIAGRAM_VIRTUALLY_FRAME" val="{&quot;height&quot;:105,&quot;left&quot;:42,&quot;top&quot;:97.5,&quot;width&quot;:876}"/>
+  <p:tag name="KSO_WM_DIAGRAM_VIRTUALLY_FRAME" val="{&quot;height&quot;:115.5,&quot;left&quot;:42,&quot;top&quot;:87,&quot;width&quot;:876}"/>
 </p:tagLst>
 </file>
 
 <file path=ppt/tags/tag18.xml><?xml version="1.0" encoding="utf-8"?>
 <p:tagLst xmlns:p="http://schemas.openxmlformats.org/presentationml/2006/main">
-  <p:tag name="KSO_WM_DIAGRAM_VIRTUALLY_FRAME" val="{&quot;height&quot;:105,&quot;left&quot;:42,&quot;top&quot;:97.5,&quot;width&quot;:876}"/>
+  <p:tag name="KSO_WM_DIAGRAM_VIRTUALLY_FRAME" val="{&quot;height&quot;:115.5,&quot;left&quot;:42,&quot;top&quot;:87,&quot;width&quot;:876}"/>
 </p:tagLst>
 </file>
 
 <file path=ppt/tags/tag19.xml><?xml version="1.0" encoding="utf-8"?>
 <p:tagLst xmlns:p="http://schemas.openxmlformats.org/presentationml/2006/main">
-  <p:tag name="KSO_WM_DIAGRAM_VIRTUALLY_FRAME" val="{&quot;height&quot;:105,&quot;left&quot;:42,&quot;top&quot;:97.5,&quot;width&quot;:876}"/>
+  <p:tag name="KSO_WM_DIAGRAM_VIRTUALLY_FRAME" val="{&quot;height&quot;:115.5,&quot;left&quot;:42,&quot;top&quot;:87,&quot;width&quot;:876}"/>
 </p:tagLst>
 </file>
 
 <file path=ppt/tags/tag2.xml><?xml version="1.0" encoding="utf-8"?>
 <p:tagLst xmlns:p="http://schemas.openxmlformats.org/presentationml/2006/main">
-  <p:tag name="KSO_WM_DIAGRAM_VIRTUALLY_FRAME" val="{&quot;height&quot;:234.4,&quot;left&quot;:42,&quot;top&quot;:97.5,&quot;width&quot;:876}"/>
+  <p:tag name="KSO_WM_DIAGRAM_VIRTUALLY_FRAME" val="{&quot;height&quot;:235.7,&quot;left&quot;:32.25,&quot;top&quot;:96.2,&quot;width&quot;:1029.75}"/>
 </p:tagLst>
 </file>
 
 <file path=ppt/tags/tag20.xml><?xml version="1.0" encoding="utf-8"?>
 <p:tagLst xmlns:p="http://schemas.openxmlformats.org/presentationml/2006/main">
-  <p:tag name="KSO_WM_DIAGRAM_VIRTUALLY_FRAME" val="{&quot;height&quot;:105,&quot;left&quot;:42,&quot;top&quot;:97.5,&quot;width&quot;:876}"/>
+  <p:tag name="KSO_WM_DIAGRAM_VIRTUALLY_FRAME" val="{&quot;height&quot;:115.5,&quot;left&quot;:42,&quot;top&quot;:87,&quot;width&quot;:876}"/>
 </p:tagLst>
 </file>
 
 <file path=ppt/tags/tag21.xml><?xml version="1.0" encoding="utf-8"?>
 <p:tagLst xmlns:p="http://schemas.openxmlformats.org/presentationml/2006/main">
-  <p:tag name="KSO_WM_DIAGRAM_VIRTUALLY_FRAME" val="{&quot;height&quot;:105,&quot;left&quot;:42,&quot;top&quot;:97.5,&quot;width&quot;:876}"/>
+  <p:tag name="KSO_WM_DIAGRAM_VIRTUALLY_FRAME" val="{&quot;height&quot;:115.5,&quot;left&quot;:42,&quot;top&quot;:87,&quot;width&quot;:876}"/>
+</p:tagLst>
+</file>
+
+<file path=ppt/tags/tag22.xml><?xml version="1.0" encoding="utf-8"?>
+<p:tagLst xmlns:p="http://schemas.openxmlformats.org/presentationml/2006/main">
+  <p:tag name="KSO_WM_DIAGRAM_VIRTUALLY_FRAME" val="{&quot;height&quot;:115.5,&quot;left&quot;:42,&quot;top&quot;:87,&quot;width&quot;:876}"/>
+</p:tagLst>
+</file>
+
+<file path=ppt/tags/tag23.xml><?xml version="1.0" encoding="utf-8"?>
+<p:tagLst xmlns:p="http://schemas.openxmlformats.org/presentationml/2006/main">
+  <p:tag name="KSO_WM_DIAGRAM_VIRTUALLY_FRAME" val="{&quot;height&quot;:115.5,&quot;left&quot;:42,&quot;top&quot;:87,&quot;width&quot;:876}"/>
+</p:tagLst>
+</file>
+
+<file path=ppt/tags/tag24.xml><?xml version="1.0" encoding="utf-8"?>
+<p:tagLst xmlns:p="http://schemas.openxmlformats.org/presentationml/2006/main">
+  <p:tag name="KSO_WM_DIAGRAM_VIRTUALLY_FRAME" val="{&quot;height&quot;:115.5,&quot;left&quot;:42,&quot;top&quot;:87,&quot;width&quot;:876}"/>
 </p:tagLst>
 </file>
 
 <file path=ppt/tags/tag3.xml><?xml version="1.0" encoding="utf-8"?>
 <p:tagLst xmlns:p="http://schemas.openxmlformats.org/presentationml/2006/main">
-  <p:tag name="KSO_WM_DIAGRAM_VIRTUALLY_FRAME" val="{&quot;height&quot;:234.4,&quot;left&quot;:42,&quot;top&quot;:97.5,&quot;width&quot;:876}"/>
+  <p:tag name="KSO_WM_DIAGRAM_VIRTUALLY_FRAME" val="{&quot;height&quot;:235.7,&quot;left&quot;:32.25,&quot;top&quot;:96.2,&quot;width&quot;:1029.75}"/>
 </p:tagLst>
 </file>
 
 <file path=ppt/tags/tag4.xml><?xml version="1.0" encoding="utf-8"?>
 <p:tagLst xmlns:p="http://schemas.openxmlformats.org/presentationml/2006/main">
-  <p:tag name="KSO_WM_DIAGRAM_VIRTUALLY_FRAME" val="{&quot;height&quot;:234.4,&quot;left&quot;:42,&quot;top&quot;:97.5,&quot;width&quot;:876}"/>
+  <p:tag name="KSO_WM_DIAGRAM_VIRTUALLY_FRAME" val="{&quot;height&quot;:235.7,&quot;left&quot;:32.25,&quot;top&quot;:96.2,&quot;width&quot;:1029.75}"/>
 </p:tagLst>
 </file>
 
 <file path=ppt/tags/tag5.xml><?xml version="1.0" encoding="utf-8"?>
 <p:tagLst xmlns:p="http://schemas.openxmlformats.org/presentationml/2006/main">
-  <p:tag name="KSO_WM_DIAGRAM_VIRTUALLY_FRAME" val="{&quot;height&quot;:234.4,&quot;left&quot;:42,&quot;top&quot;:97.5,&quot;width&quot;:876}"/>
+  <p:tag name="KSO_WM_DIAGRAM_VIRTUALLY_FRAME" val="{&quot;height&quot;:235.7,&quot;left&quot;:32.25,&quot;top&quot;:96.2,&quot;width&quot;:1029.75}"/>
 </p:tagLst>
 </file>
 
 <file path=ppt/tags/tag6.xml><?xml version="1.0" encoding="utf-8"?>
 <p:tagLst xmlns:p="http://schemas.openxmlformats.org/presentationml/2006/main">
-  <p:tag name="KSO_WM_DIAGRAM_VIRTUALLY_FRAME" val="{&quot;height&quot;:234.4,&quot;left&quot;:42,&quot;top&quot;:97.5,&quot;width&quot;:876}"/>
+  <p:tag name="KSO_WM_DIAGRAM_VIRTUALLY_FRAME" val="{&quot;height&quot;:235.7,&quot;left&quot;:32.25,&quot;top&quot;:96.2,&quot;width&quot;:1029.75}"/>
 </p:tagLst>
 </file>
 
 <file path=ppt/tags/tag7.xml><?xml version="1.0" encoding="utf-8"?>
 <p:tagLst xmlns:p="http://schemas.openxmlformats.org/presentationml/2006/main">
-  <p:tag name="KSO_WM_DIAGRAM_VIRTUALLY_FRAME" val="{&quot;height&quot;:234.4,&quot;left&quot;:42,&quot;top&quot;:97.5,&quot;width&quot;:876}"/>
+  <p:tag name="KSO_WM_DIAGRAM_VIRTUALLY_FRAME" val="{&quot;height&quot;:235.7,&quot;left&quot;:32.25,&quot;top&quot;:96.2,&quot;width&quot;:1029.75}"/>
 </p:tagLst>
 </file>
 
 <file path=ppt/tags/tag8.xml><?xml version="1.0" encoding="utf-8"?>
 <p:tagLst xmlns:p="http://schemas.openxmlformats.org/presentationml/2006/main">
-  <p:tag name="KSO_WM_DIAGRAM_VIRTUALLY_FRAME" val="{&quot;height&quot;:234.4,&quot;left&quot;:42,&quot;top&quot;:97.5,&quot;width&quot;:876}"/>
+  <p:tag name="KSO_WM_DIAGRAM_VIRTUALLY_FRAME" val="{&quot;height&quot;:235.7,&quot;left&quot;:32.25,&quot;top&quot;:96.2,&quot;width&quot;:1029.75}"/>
 </p:tagLst>
 </file>
 
 <file path=ppt/tags/tag9.xml><?xml version="1.0" encoding="utf-8"?>
 <p:tagLst xmlns:p="http://schemas.openxmlformats.org/presentationml/2006/main">
-  <p:tag name="KSO_WM_DIAGRAM_VIRTUALLY_FRAME" val="{&quot;height&quot;:234.4,&quot;left&quot;:42,&quot;top&quot;:97.5,&quot;width&quot;:876}"/>
+  <p:tag name="KSO_WM_DIAGRAM_VIRTUALLY_FRAME" val="{&quot;height&quot;:235.7,&quot;left&quot;:32.25,&quot;top&quot;:96.2,&quot;width&quot;:1029.75}"/>
 </p:tagLst>
 </file>
 

--- a/PPT/入职以来AI工作复盘/入职以来AI工作复盘.pptx
+++ b/PPT/入职以来AI工作复盘/入职以来AI工作复盘.pptx
@@ -5,18 +5,17 @@
     <p:sldMasterId id="2147483648" r:id="rId1"/>
   </p:sldMasterIdLst>
   <p:notesMasterIdLst>
-    <p:notesMasterId r:id="rId12"/>
+    <p:notesMasterId r:id="rId11"/>
   </p:notesMasterIdLst>
   <p:sldIdLst>
     <p:sldId id="256" r:id="rId3"/>
     <p:sldId id="257" r:id="rId4"/>
     <p:sldId id="258" r:id="rId5"/>
     <p:sldId id="259" r:id="rId6"/>
-    <p:sldId id="263" r:id="rId7"/>
-    <p:sldId id="265" r:id="rId8"/>
-    <p:sldId id="266" r:id="rId9"/>
-    <p:sldId id="267" r:id="rId10"/>
-    <p:sldId id="268" r:id="rId11"/>
+    <p:sldId id="265" r:id="rId7"/>
+    <p:sldId id="266" r:id="rId8"/>
+    <p:sldId id="267" r:id="rId9"/>
+    <p:sldId id="268" r:id="rId10"/>
   </p:sldIdLst>
   <p:sldSz cx="12192000" cy="6858000"/>
   <p:notesSz cx="6858000" cy="12192000"/>
@@ -1060,7 +1059,7 @@
         </p:nvSpPr>
         <p:spPr>
           <a:xfrm>
-            <a:off x="4324350" y="1933575"/>
+            <a:off x="4324350" y="2238375"/>
             <a:ext cx="7334250" cy="276225"/>
           </a:xfrm>
           <a:prstGeom prst="rect">
@@ -1103,7 +1102,7 @@
         </p:nvSpPr>
         <p:spPr>
           <a:xfrm>
-            <a:off x="4324350" y="2400300"/>
+            <a:off x="4324350" y="2705100"/>
             <a:ext cx="7334250" cy="276225"/>
           </a:xfrm>
           <a:prstGeom prst="rect">
@@ -1126,7 +1125,7 @@
                 <a:latin typeface="微软雅黑" panose="020B0503020204020204" charset="-122"/>
                 <a:ea typeface="微软雅黑" panose="020B0503020204020204" charset="-122"/>
               </a:rPr>
-              <a:t>二、内部工作：自研应用交付</a:t>
+              <a:t>二、开发应用交付</a:t>
             </a:r>
             <a:endParaRPr lang="zh-CN" sz="1800" b="1">
               <a:solidFill>
@@ -1146,7 +1145,7 @@
         </p:nvSpPr>
         <p:spPr>
           <a:xfrm>
-            <a:off x="4324350" y="2867025"/>
+            <a:off x="4324350" y="3171825"/>
             <a:ext cx="7334250" cy="276225"/>
           </a:xfrm>
           <a:prstGeom prst="rect">
@@ -1156,7 +1155,7 @@
         <p:txBody>
           <a:bodyPr wrap="none" lIns="0" tIns="0" rIns="0" bIns="0"/>
           <a:p>
-            <a:pPr>
+            <a:pPr algn="l">
               <a:lnSpc>
                 <a:spcPct val="100000"/>
               </a:lnSpc>
@@ -1169,131 +1168,38 @@
                 <a:latin typeface="微软雅黑" panose="020B0503020204020204" charset="-122"/>
                 <a:ea typeface="微软雅黑" panose="020B0503020204020204" charset="-122"/>
               </a:rPr>
-              <a:t>三、内部工作：</a:t>
-            </a:r>
-            <a:r>
-              <a:rPr lang="en-US" sz="1800" b="1">
+              <a:t>三、</a:t>
+            </a:r>
+            <a:r>
+              <a:rPr lang="zh-CN" b="1">
                 <a:solidFill>
                   <a:srgbClr val="1A1A1A"/>
                 </a:solidFill>
                 <a:latin typeface="微软雅黑" panose="020B0503020204020204" charset="-122"/>
                 <a:ea typeface="微软雅黑" panose="020B0503020204020204" charset="-122"/>
-              </a:rPr>
-              <a:t>Skill </a:t>
-            </a:r>
-            <a:r>
-              <a:rPr lang="zh-CN" sz="1800" b="1">
+                <a:sym typeface="+mn-ea"/>
+              </a:rPr>
+              <a:t>宏昊</a:t>
+            </a:r>
+            <a:r>
+              <a:rPr lang="en-US" b="1">
                 <a:solidFill>
                   <a:srgbClr val="1A1A1A"/>
                 </a:solidFill>
                 <a:latin typeface="微软雅黑" panose="020B0503020204020204" charset="-122"/>
                 <a:ea typeface="微软雅黑" panose="020B0503020204020204" charset="-122"/>
-              </a:rPr>
-              <a:t>抽象与复用</a:t>
-            </a:r>
-            <a:endParaRPr lang="zh-CN" sz="1800" b="1">
-              <a:solidFill>
-                <a:srgbClr val="1A1A1A"/>
-              </a:solidFill>
-              <a:latin typeface="微软雅黑" panose="020B0503020204020204" charset="-122"/>
-              <a:ea typeface="微软雅黑" panose="020B0503020204020204" charset="-122"/>
-            </a:endParaRPr>
-          </a:p>
-        </p:txBody>
-      </p:sp>
-      <p:sp>
-        <p:nvSpPr>
-          <p:cNvPr id="85" name="文本框 84" descr="{&quot;isTemplate&quot;:true,&quot;type&quot;:&quot;text&quot;}"/>
-          <p:cNvSpPr txBox="1"/>
-          <p:nvPr/>
-        </p:nvSpPr>
-        <p:spPr>
-          <a:xfrm>
-            <a:off x="4324350" y="3333750"/>
-            <a:ext cx="7334250" cy="276225"/>
-          </a:xfrm>
-          <a:prstGeom prst="rect">
-            <a:avLst/>
-          </a:prstGeom>
-        </p:spPr>
-        <p:txBody>
-          <a:bodyPr wrap="none" lIns="0" tIns="0" rIns="0" bIns="0"/>
-          <a:p>
-            <a:pPr>
-              <a:lnSpc>
-                <a:spcPct val="100000"/>
-              </a:lnSpc>
-            </a:pPr>
-            <a:r>
-              <a:rPr lang="zh-CN" sz="1800" b="1">
+                <a:sym typeface="+mn-ea"/>
+              </a:rPr>
+              <a:t>AI</a:t>
+            </a:r>
+            <a:r>
+              <a:rPr lang="zh-CN" b="1">
                 <a:solidFill>
                   <a:srgbClr val="1A1A1A"/>
                 </a:solidFill>
                 <a:latin typeface="微软雅黑" panose="020B0503020204020204" charset="-122"/>
                 <a:ea typeface="微软雅黑" panose="020B0503020204020204" charset="-122"/>
-              </a:rPr>
-              <a:t>四、内部工作：培训与推广</a:t>
-            </a:r>
-            <a:endParaRPr lang="zh-CN" sz="1800" b="1">
-              <a:solidFill>
-                <a:srgbClr val="1A1A1A"/>
-              </a:solidFill>
-              <a:latin typeface="微软雅黑" panose="020B0503020204020204" charset="-122"/>
-              <a:ea typeface="微软雅黑" panose="020B0503020204020204" charset="-122"/>
-            </a:endParaRPr>
-          </a:p>
-        </p:txBody>
-      </p:sp>
-      <p:sp>
-        <p:nvSpPr>
-          <p:cNvPr id="86" name="文本框 85" descr="{&quot;isTemplate&quot;:true,&quot;type&quot;:&quot;text&quot;}"/>
-          <p:cNvSpPr txBox="1"/>
-          <p:nvPr/>
-        </p:nvSpPr>
-        <p:spPr>
-          <a:xfrm>
-            <a:off x="4324350" y="3800475"/>
-            <a:ext cx="7334250" cy="276225"/>
-          </a:xfrm>
-          <a:prstGeom prst="rect">
-            <a:avLst/>
-          </a:prstGeom>
-        </p:spPr>
-        <p:txBody>
-          <a:bodyPr wrap="none" lIns="0" tIns="0" rIns="0" bIns="0"/>
-          <a:p>
-            <a:pPr>
-              <a:lnSpc>
-                <a:spcPct val="100000"/>
-              </a:lnSpc>
-            </a:pPr>
-            <a:r>
-              <a:rPr lang="zh-CN" sz="1800" b="1">
-                <a:solidFill>
-                  <a:srgbClr val="1A1A1A"/>
-                </a:solidFill>
-                <a:latin typeface="微软雅黑" panose="020B0503020204020204" charset="-122"/>
-                <a:ea typeface="微软雅黑" panose="020B0503020204020204" charset="-122"/>
-              </a:rPr>
-              <a:t>五、外部工作：宏昊</a:t>
-            </a:r>
-            <a:r>
-              <a:rPr lang="en-US" sz="1800" b="1">
-                <a:solidFill>
-                  <a:srgbClr val="1A1A1A"/>
-                </a:solidFill>
-                <a:latin typeface="微软雅黑" panose="020B0503020204020204" charset="-122"/>
-                <a:ea typeface="微软雅黑" panose="020B0503020204020204" charset="-122"/>
-              </a:rPr>
-              <a:t>AI</a:t>
-            </a:r>
-            <a:r>
-              <a:rPr lang="zh-CN" sz="1800" b="1">
-                <a:solidFill>
-                  <a:srgbClr val="1A1A1A"/>
-                </a:solidFill>
-                <a:latin typeface="微软雅黑" panose="020B0503020204020204" charset="-122"/>
-                <a:ea typeface="微软雅黑" panose="020B0503020204020204" charset="-122"/>
+                <a:sym typeface="+mn-ea"/>
               </a:rPr>
               <a:t>助手平台</a:t>
             </a:r>
@@ -1315,7 +1221,7 @@
         </p:nvSpPr>
         <p:spPr>
           <a:xfrm>
-            <a:off x="4324350" y="4267200"/>
+            <a:off x="4324350" y="3638550"/>
             <a:ext cx="7334250" cy="276225"/>
           </a:xfrm>
           <a:prstGeom prst="rect">
@@ -1338,7 +1244,7 @@
                 <a:latin typeface="微软雅黑" panose="020B0503020204020204" charset="-122"/>
                 <a:ea typeface="微软雅黑" panose="020B0503020204020204" charset="-122"/>
               </a:rPr>
-              <a:t>六、下阶段计划与需支持事项</a:t>
+              <a:t>四、下阶段计划与需支持事项</a:t>
             </a:r>
             <a:endParaRPr lang="zh-CN" sz="1800" b="1">
               <a:solidFill>
@@ -4306,1188 +4212,6 @@
   <p:cSld>
     <p:spTree>
       <p:nvGrpSpPr>
-        <p:cNvPr id="199" name="" descr="&lt;Slide style={{ width:'1280px', height:'720px', position:'relative', background:'#FFFFFF', fontFamily:'微软雅黑' }}&gt;&#10;  &lt;Box style={{ position:'absolute', left:56, top:36, flexDirection:'row', alignItems:'center', gap:12 }}&gt;&#10;    &lt;Box style={{ width:8, height:34, background:'#4472C4' }} /&gt;&#10;    &lt;Text style={{ fontSize:30, fontWeight:'bold', color:'#052B7C' }}&gt;三、Skill 抽象与复用&lt;/Text&gt;&#10;  &lt;/Box&gt;&#10;&#10;  &lt;Box style={{ position:'absolute', left:56, top:118, right:56, background:'#052B7C', borderRadius:10, padding:'14px 22px' }}&gt;&#10;    &lt;Text style={{ fontSize:17, color:'#FFFFFF', lineHeight:1.5 }}&gt;与「建应用」并列的内部第二条交付路径：复现工作场景 → 抽象输入输出 → 复用 / 赋能业务自建。&lt;/Text&gt;&#10;  &lt;/Box&gt;&#10;&#10;  &lt;Box style={{ position:'absolute', left:56, top:200, right:56, flexDirection:'row', gap:28 }}&gt;&#10;    &lt;Box style={{ flex:1, background:'#F4F7FC', borderRadius:12, padding:24, flexDirection:'column', gap:12 }}&gt;&#10;      &lt;Text style={{ fontSize:22, fontWeight:'bold', color:'#4472C4' }}&gt;tax-refund-audit（退税审单 Skill）&lt;/Text&gt;&#10;      &lt;Text style={{ fontSize:17, color:'#1A1A1A', lineHeight:1.7 }}&gt;· 抽象退税审单工作流为可复用 Skill，交付财务部&lt;/Text&gt;&#10;      &lt;Text style={{ fontSize:17, color:'#1A1A1A', lineHeight:1.7 }}&gt;· 与 Tax_check 应用互补：应用做 OCR + 条款矩阵「体检」，Skill 做审单流程复用与下沉&lt;/Text&gt;&#10;      &lt;Text style={{ fontSize:17, color:'#1A1A1A', lineHeight:1.7 }}&gt;· 降低对专人 / 专工具的依赖&lt;/Text&gt;&#10;      &lt;Box style={{ marginTop:4, background:'#DAE3F3', borderRadius:6, padding:'6px 12px', alignSelf:'flex-start' }}&gt;&lt;Text style={{ fontSize:15, fontWeight:'bold', color:'#052B7C' }}&gt;状态：已交付财务使用&lt;/Text&gt;&lt;/Box&gt;&#10;    &lt;/Box&gt;&#10;    &lt;Box style={{ flex:1, background:'#F4F7FC', borderRadius:12, padding:24, flexDirection:'column', gap:12 }}&gt;&#10;      &lt;Text style={{ fontSize:22, fontWeight:'bold', color:'#4472C4' }}&gt;daily-commodity-price-scraper（价格爬取 Skill）&lt;/Text&gt;&#10;      &lt;Text style={{ fontSize:17, color:'#1A1A1A', lineHeight:1.7 }}&gt;· 作为「钩子」培养采购部门自主制作 Skill 的能力&lt;/Text&gt;&#10;      &lt;Text style={{ fontSize:17, color:'#1A1A1A', lineHeight:1.7 }}&gt;· 后续仍回采购部门培训，巩固「自建 Skill」能力&lt;/Text&gt;&#10;      &lt;Text style={{ fontSize:17, color:'#1A1A1A', lineHeight:1.7 }}&gt;· 体现理念：赋能业务自建，AI 小组退后为把关角色&lt;/Text&gt;&#10;      &lt;Box style={{ marginTop:4, background:'#DAE3F3', borderRadius:6, padding:'6px 12px', alignSelf:'flex-start' }}&gt;&lt;Text style={{ fontSize:15, fontWeight:'bold', color:'#052B7C' }}&gt;状态：赋能中（回培训）&lt;/Text&gt;&lt;/Box&gt;&#10;    &lt;/Box&gt;&#10;  &lt;/Box&gt;&#10;&#10;  &lt;Box style={{ position:'absolute', left:56, top:668, right:56, flexDirection:'row', justifyContent:'space-between' }}&gt;&#10;    &lt;Text style={{ fontSize:14, color:'#888' }}&gt;入职以来 AI 工作复盘&lt;/Text&gt;&#10;    &lt;Text style={{ fontSize:14, color:'#888' }}&gt;08 / 13&lt;/Text&gt;&#10;  &lt;/Box&gt;&#10;&lt;/Slide&gt;"/>
-        <p:cNvGrpSpPr/>
-        <p:nvPr/>
-      </p:nvGrpSpPr>
-      <p:grpSpPr>
-        <a:xfrm>
-          <a:off x="0" y="0"/>
-          <a:ext cx="0" cy="0"/>
-          <a:chOff x="0" y="0"/>
-          <a:chExt cx="0" cy="0"/>
-        </a:xfrm>
-      </p:grpSpPr>
-      <p:sp>
-        <p:nvSpPr>
-          <p:cNvPr id="200" name="矩形 199"/>
-          <p:cNvSpPr/>
-          <p:nvPr/>
-        </p:nvSpPr>
-        <p:spPr>
-          <a:xfrm>
-            <a:off x="0" y="0"/>
-            <a:ext cx="12192000" cy="6858000"/>
-          </a:xfrm>
-          <a:prstGeom prst="rect">
-            <a:avLst/>
-          </a:prstGeom>
-          <a:solidFill>
-            <a:srgbClr val="FFFFFF"/>
-          </a:solidFill>
-        </p:spPr>
-        <p:txBody>
-          <a:bodyPr/>
-          <a:p/>
-        </p:txBody>
-      </p:sp>
-      <p:sp>
-        <p:nvSpPr>
-          <p:cNvPr id="201" name="矩形 200"/>
-          <p:cNvSpPr/>
-          <p:nvPr/>
-        </p:nvSpPr>
-        <p:spPr>
-          <a:xfrm>
-            <a:off x="533400" y="352425"/>
-            <a:ext cx="76200" cy="323850"/>
-          </a:xfrm>
-          <a:prstGeom prst="rect">
-            <a:avLst/>
-          </a:prstGeom>
-          <a:solidFill>
-            <a:srgbClr val="4472C4"/>
-          </a:solidFill>
-        </p:spPr>
-        <p:txBody>
-          <a:bodyPr/>
-          <a:p/>
-        </p:txBody>
-      </p:sp>
-      <p:sp>
-        <p:nvSpPr>
-          <p:cNvPr id="202" name="文本框 201" descr="{&quot;isTemplate&quot;:true,&quot;type&quot;:&quot;text&quot;}"/>
-          <p:cNvSpPr txBox="1"/>
-          <p:nvPr/>
-        </p:nvSpPr>
-        <p:spPr>
-          <a:xfrm>
-            <a:off x="723900" y="342900"/>
-            <a:ext cx="2705100" cy="342900"/>
-          </a:xfrm>
-          <a:prstGeom prst="rect">
-            <a:avLst/>
-          </a:prstGeom>
-        </p:spPr>
-        <p:txBody>
-          <a:bodyPr wrap="none" lIns="0" tIns="0" rIns="0" bIns="0"/>
-          <a:p>
-            <a:pPr>
-              <a:lnSpc>
-                <a:spcPct val="100000"/>
-              </a:lnSpc>
-            </a:pPr>
-            <a:r>
-              <a:rPr lang="zh-CN" sz="2250" b="1">
-                <a:solidFill>
-                  <a:srgbClr val="052B7C"/>
-                </a:solidFill>
-                <a:latin typeface="微软雅黑" panose="020B0503020204020204" charset="-122"/>
-                <a:ea typeface="微软雅黑" panose="020B0503020204020204" charset="-122"/>
-              </a:rPr>
-              <a:t>三、</a:t>
-            </a:r>
-            <a:r>
-              <a:rPr lang="en-US" sz="2250" b="1">
-                <a:solidFill>
-                  <a:srgbClr val="052B7C"/>
-                </a:solidFill>
-                <a:latin typeface="微软雅黑" panose="020B0503020204020204" charset="-122"/>
-                <a:ea typeface="微软雅黑" panose="020B0503020204020204" charset="-122"/>
-              </a:rPr>
-              <a:t>Skill </a:t>
-            </a:r>
-            <a:r>
-              <a:rPr lang="zh-CN" sz="2250" b="1">
-                <a:solidFill>
-                  <a:srgbClr val="052B7C"/>
-                </a:solidFill>
-                <a:latin typeface="微软雅黑" panose="020B0503020204020204" charset="-122"/>
-                <a:ea typeface="微软雅黑" panose="020B0503020204020204" charset="-122"/>
-              </a:rPr>
-              <a:t>抽象与复用</a:t>
-            </a:r>
-            <a:endParaRPr lang="zh-CN" sz="2250" b="1">
-              <a:solidFill>
-                <a:srgbClr val="052B7C"/>
-              </a:solidFill>
-              <a:latin typeface="微软雅黑" panose="020B0503020204020204" charset="-122"/>
-              <a:ea typeface="微软雅黑" panose="020B0503020204020204" charset="-122"/>
-            </a:endParaRPr>
-          </a:p>
-        </p:txBody>
-      </p:sp>
-      <p:sp>
-        <p:nvSpPr>
-          <p:cNvPr id="203" name="圆角矩形 202"/>
-          <p:cNvSpPr/>
-          <p:nvPr/>
-        </p:nvSpPr>
-        <p:spPr>
-          <a:xfrm>
-            <a:off x="533400" y="1123950"/>
-            <a:ext cx="11125200" cy="561975"/>
-          </a:xfrm>
-          <a:prstGeom prst="roundRect">
-            <a:avLst>
-              <a:gd name="adj" fmla="val 16949"/>
-            </a:avLst>
-          </a:prstGeom>
-          <a:solidFill>
-            <a:srgbClr val="052B7C"/>
-          </a:solidFill>
-        </p:spPr>
-        <p:txBody>
-          <a:bodyPr/>
-          <a:p/>
-        </p:txBody>
-      </p:sp>
-      <p:sp>
-        <p:nvSpPr>
-          <p:cNvPr id="204" name="文本框 203" descr="{&quot;isTemplate&quot;:true,&quot;type&quot;:&quot;text&quot;}"/>
-          <p:cNvSpPr txBox="1"/>
-          <p:nvPr/>
-        </p:nvSpPr>
-        <p:spPr>
-          <a:xfrm>
-            <a:off x="742950" y="1257300"/>
-            <a:ext cx="10706100" cy="295275"/>
-          </a:xfrm>
-          <a:prstGeom prst="rect">
-            <a:avLst/>
-          </a:prstGeom>
-        </p:spPr>
-        <p:txBody>
-          <a:bodyPr wrap="none" lIns="0" tIns="0" rIns="0" bIns="0"/>
-          <a:p>
-            <a:pPr>
-              <a:lnSpc>
-                <a:spcPct val="150000"/>
-              </a:lnSpc>
-            </a:pPr>
-            <a:r>
-              <a:rPr lang="zh-CN" sz="1275">
-                <a:solidFill>
-                  <a:srgbClr val="FFFFFF"/>
-                </a:solidFill>
-                <a:latin typeface="微软雅黑" panose="020B0503020204020204" charset="-122"/>
-                <a:ea typeface="微软雅黑" panose="020B0503020204020204" charset="-122"/>
-              </a:rPr>
-              <a:t>与「建应用」并列的内部第二条交付路径：复现工作场景</a:t>
-            </a:r>
-            <a:r>
-              <a:rPr lang="en-US" sz="1275">
-                <a:solidFill>
-                  <a:srgbClr val="FFFFFF"/>
-                </a:solidFill>
-                <a:latin typeface="微软雅黑" panose="020B0503020204020204" charset="-122"/>
-                <a:ea typeface="微软雅黑" panose="020B0503020204020204" charset="-122"/>
-              </a:rPr>
-              <a:t> → </a:t>
-            </a:r>
-            <a:r>
-              <a:rPr lang="zh-CN" sz="1275">
-                <a:solidFill>
-                  <a:srgbClr val="FFFFFF"/>
-                </a:solidFill>
-                <a:latin typeface="微软雅黑" panose="020B0503020204020204" charset="-122"/>
-                <a:ea typeface="微软雅黑" panose="020B0503020204020204" charset="-122"/>
-              </a:rPr>
-              <a:t>抽象输入输出</a:t>
-            </a:r>
-            <a:r>
-              <a:rPr lang="en-US" sz="1275">
-                <a:solidFill>
-                  <a:srgbClr val="FFFFFF"/>
-                </a:solidFill>
-                <a:latin typeface="微软雅黑" panose="020B0503020204020204" charset="-122"/>
-                <a:ea typeface="微软雅黑" panose="020B0503020204020204" charset="-122"/>
-              </a:rPr>
-              <a:t> → </a:t>
-            </a:r>
-            <a:r>
-              <a:rPr lang="zh-CN" sz="1275">
-                <a:solidFill>
-                  <a:srgbClr val="FFFFFF"/>
-                </a:solidFill>
-                <a:latin typeface="微软雅黑" panose="020B0503020204020204" charset="-122"/>
-                <a:ea typeface="微软雅黑" panose="020B0503020204020204" charset="-122"/>
-              </a:rPr>
-              <a:t>复用</a:t>
-            </a:r>
-            <a:r>
-              <a:rPr lang="en-US" sz="1275">
-                <a:solidFill>
-                  <a:srgbClr val="FFFFFF"/>
-                </a:solidFill>
-                <a:latin typeface="微软雅黑" panose="020B0503020204020204" charset="-122"/>
-                <a:ea typeface="微软雅黑" panose="020B0503020204020204" charset="-122"/>
-              </a:rPr>
-              <a:t> / </a:t>
-            </a:r>
-            <a:r>
-              <a:rPr lang="zh-CN" sz="1275">
-                <a:solidFill>
-                  <a:srgbClr val="FFFFFF"/>
-                </a:solidFill>
-                <a:latin typeface="微软雅黑" panose="020B0503020204020204" charset="-122"/>
-                <a:ea typeface="微软雅黑" panose="020B0503020204020204" charset="-122"/>
-              </a:rPr>
-              <a:t>赋能业务自建。</a:t>
-            </a:r>
-            <a:endParaRPr lang="zh-CN" sz="1275">
-              <a:solidFill>
-                <a:srgbClr val="FFFFFF"/>
-              </a:solidFill>
-              <a:latin typeface="微软雅黑" panose="020B0503020204020204" charset="-122"/>
-              <a:ea typeface="微软雅黑" panose="020B0503020204020204" charset="-122"/>
-            </a:endParaRPr>
-          </a:p>
-        </p:txBody>
-      </p:sp>
-      <p:sp>
-        <p:nvSpPr>
-          <p:cNvPr id="205" name="圆角矩形 204"/>
-          <p:cNvSpPr/>
-          <p:nvPr/>
-        </p:nvSpPr>
-        <p:spPr>
-          <a:xfrm>
-            <a:off x="533400" y="1905000"/>
-            <a:ext cx="5429250" cy="2828925"/>
-          </a:xfrm>
-          <a:prstGeom prst="roundRect">
-            <a:avLst>
-              <a:gd name="adj" fmla="val 4040"/>
-            </a:avLst>
-          </a:prstGeom>
-          <a:solidFill>
-            <a:srgbClr val="F4F7FC"/>
-          </a:solidFill>
-        </p:spPr>
-        <p:txBody>
-          <a:bodyPr/>
-          <a:p/>
-        </p:txBody>
-      </p:sp>
-      <p:sp>
-        <p:nvSpPr>
-          <p:cNvPr id="206" name="文本框 205" descr="{&quot;isTemplate&quot;:true,&quot;type&quot;:&quot;text&quot;}"/>
-          <p:cNvSpPr txBox="1"/>
-          <p:nvPr/>
-        </p:nvSpPr>
-        <p:spPr>
-          <a:xfrm>
-            <a:off x="762000" y="2133600"/>
-            <a:ext cx="4972050" cy="257175"/>
-          </a:xfrm>
-          <a:prstGeom prst="rect">
-            <a:avLst/>
-          </a:prstGeom>
-        </p:spPr>
-        <p:txBody>
-          <a:bodyPr wrap="none" lIns="0" tIns="0" rIns="0" bIns="0"/>
-          <a:p>
-            <a:pPr>
-              <a:lnSpc>
-                <a:spcPct val="100000"/>
-              </a:lnSpc>
-            </a:pPr>
-            <a:r>
-              <a:rPr lang="en-US" sz="1650" b="1">
-                <a:solidFill>
-                  <a:srgbClr val="4472C4"/>
-                </a:solidFill>
-                <a:latin typeface="微软雅黑" panose="020B0503020204020204" charset="-122"/>
-                <a:ea typeface="微软雅黑" panose="020B0503020204020204" charset="-122"/>
-              </a:rPr>
-              <a:t>tax-refund-audit</a:t>
-            </a:r>
-            <a:r>
-              <a:rPr lang="zh-CN" sz="1650" b="1">
-                <a:solidFill>
-                  <a:srgbClr val="4472C4"/>
-                </a:solidFill>
-                <a:latin typeface="微软雅黑" panose="020B0503020204020204" charset="-122"/>
-                <a:ea typeface="微软雅黑" panose="020B0503020204020204" charset="-122"/>
-              </a:rPr>
-              <a:t>（退税审单</a:t>
-            </a:r>
-            <a:r>
-              <a:rPr lang="en-US" sz="1650" b="1">
-                <a:solidFill>
-                  <a:srgbClr val="4472C4"/>
-                </a:solidFill>
-                <a:latin typeface="微软雅黑" panose="020B0503020204020204" charset="-122"/>
-                <a:ea typeface="微软雅黑" panose="020B0503020204020204" charset="-122"/>
-              </a:rPr>
-              <a:t> Skill</a:t>
-            </a:r>
-            <a:r>
-              <a:rPr lang="zh-CN" sz="1650" b="1">
-                <a:solidFill>
-                  <a:srgbClr val="4472C4"/>
-                </a:solidFill>
-                <a:latin typeface="微软雅黑" panose="020B0503020204020204" charset="-122"/>
-                <a:ea typeface="微软雅黑" panose="020B0503020204020204" charset="-122"/>
-              </a:rPr>
-              <a:t>）</a:t>
-            </a:r>
-            <a:endParaRPr lang="zh-CN" sz="1650" b="1">
-              <a:solidFill>
-                <a:srgbClr val="4472C4"/>
-              </a:solidFill>
-              <a:latin typeface="微软雅黑" panose="020B0503020204020204" charset="-122"/>
-              <a:ea typeface="微软雅黑" panose="020B0503020204020204" charset="-122"/>
-            </a:endParaRPr>
-          </a:p>
-        </p:txBody>
-      </p:sp>
-      <p:sp>
-        <p:nvSpPr>
-          <p:cNvPr id="207" name="文本框 206" descr="{&quot;isTemplate&quot;:true,&quot;type&quot;:&quot;text&quot;}"/>
-          <p:cNvSpPr txBox="1"/>
-          <p:nvPr/>
-        </p:nvSpPr>
-        <p:spPr>
-          <a:xfrm>
-            <a:off x="762000" y="2505075"/>
-            <a:ext cx="4972050" cy="333375"/>
-          </a:xfrm>
-          <a:prstGeom prst="rect">
-            <a:avLst/>
-          </a:prstGeom>
-        </p:spPr>
-        <p:txBody>
-          <a:bodyPr wrap="none" lIns="0" tIns="0" rIns="0" bIns="0"/>
-          <a:p>
-            <a:pPr>
-              <a:lnSpc>
-                <a:spcPct val="170000"/>
-              </a:lnSpc>
-            </a:pPr>
-            <a:r>
-              <a:rPr lang="en-US" sz="1275">
-                <a:solidFill>
-                  <a:srgbClr val="1A1A1A"/>
-                </a:solidFill>
-                <a:latin typeface="微软雅黑" panose="020B0503020204020204" charset="-122"/>
-                <a:ea typeface="微软雅黑" panose="020B0503020204020204" charset="-122"/>
-              </a:rPr>
-              <a:t>· </a:t>
-            </a:r>
-            <a:r>
-              <a:rPr lang="zh-CN" sz="1275">
-                <a:solidFill>
-                  <a:srgbClr val="1A1A1A"/>
-                </a:solidFill>
-                <a:latin typeface="微软雅黑" panose="020B0503020204020204" charset="-122"/>
-                <a:ea typeface="微软雅黑" panose="020B0503020204020204" charset="-122"/>
-              </a:rPr>
-              <a:t>抽象退税审单工作流为可复用</a:t>
-            </a:r>
-            <a:r>
-              <a:rPr lang="en-US" sz="1275">
-                <a:solidFill>
-                  <a:srgbClr val="1A1A1A"/>
-                </a:solidFill>
-                <a:latin typeface="微软雅黑" panose="020B0503020204020204" charset="-122"/>
-                <a:ea typeface="微软雅黑" panose="020B0503020204020204" charset="-122"/>
-              </a:rPr>
-              <a:t> Skill</a:t>
-            </a:r>
-            <a:r>
-              <a:rPr lang="zh-CN" sz="1275">
-                <a:solidFill>
-                  <a:srgbClr val="1A1A1A"/>
-                </a:solidFill>
-                <a:latin typeface="微软雅黑" panose="020B0503020204020204" charset="-122"/>
-                <a:ea typeface="微软雅黑" panose="020B0503020204020204" charset="-122"/>
-              </a:rPr>
-              <a:t>，交付财务部</a:t>
-            </a:r>
-            <a:endParaRPr lang="zh-CN" sz="1275">
-              <a:solidFill>
-                <a:srgbClr val="1A1A1A"/>
-              </a:solidFill>
-              <a:latin typeface="微软雅黑" panose="020B0503020204020204" charset="-122"/>
-              <a:ea typeface="微软雅黑" panose="020B0503020204020204" charset="-122"/>
-            </a:endParaRPr>
-          </a:p>
-        </p:txBody>
-      </p:sp>
-      <p:sp>
-        <p:nvSpPr>
-          <p:cNvPr id="208" name="文本框 207" descr="{&quot;isTemplate&quot;:true,&quot;type&quot;:&quot;text&quot;}"/>
-          <p:cNvSpPr txBox="1"/>
-          <p:nvPr/>
-        </p:nvSpPr>
-        <p:spPr>
-          <a:xfrm>
-            <a:off x="762000" y="2952750"/>
-            <a:ext cx="4972050" cy="666750"/>
-          </a:xfrm>
-          <a:prstGeom prst="rect">
-            <a:avLst/>
-          </a:prstGeom>
-        </p:spPr>
-        <p:txBody>
-          <a:bodyPr wrap="square" lIns="0" tIns="0" rIns="0" bIns="0">
-            <a:normAutofit/>
-          </a:bodyPr>
-          <a:p>
-            <a:pPr>
-              <a:lnSpc>
-                <a:spcPct val="170000"/>
-              </a:lnSpc>
-            </a:pPr>
-            <a:r>
-              <a:rPr lang="en-US" sz="1275">
-                <a:solidFill>
-                  <a:srgbClr val="1A1A1A"/>
-                </a:solidFill>
-                <a:latin typeface="微软雅黑" panose="020B0503020204020204" charset="-122"/>
-                <a:ea typeface="微软雅黑" panose="020B0503020204020204" charset="-122"/>
-              </a:rPr>
-              <a:t>· </a:t>
-            </a:r>
-            <a:r>
-              <a:rPr lang="zh-CN" sz="1275">
-                <a:solidFill>
-                  <a:srgbClr val="1A1A1A"/>
-                </a:solidFill>
-                <a:latin typeface="微软雅黑" panose="020B0503020204020204" charset="-122"/>
-                <a:ea typeface="微软雅黑" panose="020B0503020204020204" charset="-122"/>
-              </a:rPr>
-              <a:t>与</a:t>
-            </a:r>
-            <a:r>
-              <a:rPr lang="en-US" sz="1275">
-                <a:solidFill>
-                  <a:srgbClr val="1A1A1A"/>
-                </a:solidFill>
-                <a:latin typeface="微软雅黑" panose="020B0503020204020204" charset="-122"/>
-                <a:ea typeface="微软雅黑" panose="020B0503020204020204" charset="-122"/>
-              </a:rPr>
-              <a:t> Tax_check </a:t>
-            </a:r>
-            <a:r>
-              <a:rPr lang="zh-CN" sz="1275">
-                <a:solidFill>
-                  <a:srgbClr val="1A1A1A"/>
-                </a:solidFill>
-                <a:latin typeface="微软雅黑" panose="020B0503020204020204" charset="-122"/>
-                <a:ea typeface="微软雅黑" panose="020B0503020204020204" charset="-122"/>
-              </a:rPr>
-              <a:t>应用互补：应用做</a:t>
-            </a:r>
-            <a:r>
-              <a:rPr lang="en-US" sz="1275">
-                <a:solidFill>
-                  <a:srgbClr val="1A1A1A"/>
-                </a:solidFill>
-                <a:latin typeface="微软雅黑" panose="020B0503020204020204" charset="-122"/>
-                <a:ea typeface="微软雅黑" panose="020B0503020204020204" charset="-122"/>
-              </a:rPr>
-              <a:t> OCR + </a:t>
-            </a:r>
-            <a:r>
-              <a:rPr lang="zh-CN" sz="1275">
-                <a:solidFill>
-                  <a:srgbClr val="1A1A1A"/>
-                </a:solidFill>
-                <a:latin typeface="微软雅黑" panose="020B0503020204020204" charset="-122"/>
-                <a:ea typeface="微软雅黑" panose="020B0503020204020204" charset="-122"/>
-              </a:rPr>
-              <a:t>条款矩阵「体检」，</a:t>
-            </a:r>
-            <a:r>
-              <a:rPr lang="en-US" sz="1275">
-                <a:solidFill>
-                  <a:srgbClr val="1A1A1A"/>
-                </a:solidFill>
-                <a:latin typeface="微软雅黑" panose="020B0503020204020204" charset="-122"/>
-                <a:ea typeface="微软雅黑" panose="020B0503020204020204" charset="-122"/>
-              </a:rPr>
-              <a:t>Skill </a:t>
-            </a:r>
-            <a:r>
-              <a:rPr lang="zh-CN" sz="1275">
-                <a:solidFill>
-                  <a:srgbClr val="1A1A1A"/>
-                </a:solidFill>
-                <a:latin typeface="微软雅黑" panose="020B0503020204020204" charset="-122"/>
-                <a:ea typeface="微软雅黑" panose="020B0503020204020204" charset="-122"/>
-              </a:rPr>
-              <a:t>做审单流程复用与下沉</a:t>
-            </a:r>
-            <a:endParaRPr lang="zh-CN" sz="1275">
-              <a:solidFill>
-                <a:srgbClr val="1A1A1A"/>
-              </a:solidFill>
-              <a:latin typeface="微软雅黑" panose="020B0503020204020204" charset="-122"/>
-              <a:ea typeface="微软雅黑" panose="020B0503020204020204" charset="-122"/>
-            </a:endParaRPr>
-          </a:p>
-        </p:txBody>
-      </p:sp>
-      <p:sp>
-        <p:nvSpPr>
-          <p:cNvPr id="209" name="文本框 208" descr="{&quot;isTemplate&quot;:true,&quot;type&quot;:&quot;text&quot;}"/>
-          <p:cNvSpPr txBox="1"/>
-          <p:nvPr/>
-        </p:nvSpPr>
-        <p:spPr>
-          <a:xfrm>
-            <a:off x="762000" y="3733800"/>
-            <a:ext cx="4972050" cy="333375"/>
-          </a:xfrm>
-          <a:prstGeom prst="rect">
-            <a:avLst/>
-          </a:prstGeom>
-        </p:spPr>
-        <p:txBody>
-          <a:bodyPr wrap="none" lIns="0" tIns="0" rIns="0" bIns="0"/>
-          <a:p>
-            <a:pPr>
-              <a:lnSpc>
-                <a:spcPct val="170000"/>
-              </a:lnSpc>
-            </a:pPr>
-            <a:r>
-              <a:rPr lang="en-US" sz="1275">
-                <a:solidFill>
-                  <a:srgbClr val="1A1A1A"/>
-                </a:solidFill>
-                <a:latin typeface="微软雅黑" panose="020B0503020204020204" charset="-122"/>
-                <a:ea typeface="微软雅黑" panose="020B0503020204020204" charset="-122"/>
-              </a:rPr>
-              <a:t>· </a:t>
-            </a:r>
-            <a:r>
-              <a:rPr lang="zh-CN" sz="1275">
-                <a:solidFill>
-                  <a:srgbClr val="1A1A1A"/>
-                </a:solidFill>
-                <a:latin typeface="微软雅黑" panose="020B0503020204020204" charset="-122"/>
-                <a:ea typeface="微软雅黑" panose="020B0503020204020204" charset="-122"/>
-              </a:rPr>
-              <a:t>降低对专人</a:t>
-            </a:r>
-            <a:r>
-              <a:rPr lang="en-US" sz="1275">
-                <a:solidFill>
-                  <a:srgbClr val="1A1A1A"/>
-                </a:solidFill>
-                <a:latin typeface="微软雅黑" panose="020B0503020204020204" charset="-122"/>
-                <a:ea typeface="微软雅黑" panose="020B0503020204020204" charset="-122"/>
-              </a:rPr>
-              <a:t> / </a:t>
-            </a:r>
-            <a:r>
-              <a:rPr lang="zh-CN" sz="1275">
-                <a:solidFill>
-                  <a:srgbClr val="1A1A1A"/>
-                </a:solidFill>
-                <a:latin typeface="微软雅黑" panose="020B0503020204020204" charset="-122"/>
-                <a:ea typeface="微软雅黑" panose="020B0503020204020204" charset="-122"/>
-              </a:rPr>
-              <a:t>专工具的依赖</a:t>
-            </a:r>
-            <a:endParaRPr lang="zh-CN" sz="1275">
-              <a:solidFill>
-                <a:srgbClr val="1A1A1A"/>
-              </a:solidFill>
-              <a:latin typeface="微软雅黑" panose="020B0503020204020204" charset="-122"/>
-              <a:ea typeface="微软雅黑" panose="020B0503020204020204" charset="-122"/>
-            </a:endParaRPr>
-          </a:p>
-        </p:txBody>
-      </p:sp>
-      <p:sp>
-        <p:nvSpPr>
-          <p:cNvPr id="210" name="圆角矩形 209"/>
-          <p:cNvSpPr/>
-          <p:nvPr/>
-        </p:nvSpPr>
-        <p:spPr>
-          <a:xfrm>
-            <a:off x="762000" y="4219575"/>
-            <a:ext cx="1657350" cy="285750"/>
-          </a:xfrm>
-          <a:prstGeom prst="roundRect">
-            <a:avLst>
-              <a:gd name="adj" fmla="val 20000"/>
-            </a:avLst>
-          </a:prstGeom>
-          <a:solidFill>
-            <a:srgbClr val="DAE3F3"/>
-          </a:solidFill>
-        </p:spPr>
-        <p:txBody>
-          <a:bodyPr/>
-          <a:p/>
-        </p:txBody>
-      </p:sp>
-      <p:sp>
-        <p:nvSpPr>
-          <p:cNvPr id="211" name="文本框 210" descr="{&quot;isTemplate&quot;:true,&quot;type&quot;:&quot;text&quot;}"/>
-          <p:cNvSpPr txBox="1"/>
-          <p:nvPr/>
-        </p:nvSpPr>
-        <p:spPr>
-          <a:xfrm>
-            <a:off x="876300" y="4276725"/>
-            <a:ext cx="1428750" cy="171450"/>
-          </a:xfrm>
-          <a:prstGeom prst="rect">
-            <a:avLst/>
-          </a:prstGeom>
-        </p:spPr>
-        <p:txBody>
-          <a:bodyPr wrap="none" lIns="0" tIns="0" rIns="0" bIns="0"/>
-          <a:p>
-            <a:pPr>
-              <a:lnSpc>
-                <a:spcPct val="100000"/>
-              </a:lnSpc>
-            </a:pPr>
-            <a:r>
-              <a:rPr lang="zh-CN" sz="1125" b="1">
-                <a:solidFill>
-                  <a:srgbClr val="052B7C"/>
-                </a:solidFill>
-                <a:latin typeface="微软雅黑" panose="020B0503020204020204" charset="-122"/>
-                <a:ea typeface="微软雅黑" panose="020B0503020204020204" charset="-122"/>
-              </a:rPr>
-              <a:t>状态：已交付财务使用</a:t>
-            </a:r>
-            <a:endParaRPr lang="zh-CN" sz="1125" b="1">
-              <a:solidFill>
-                <a:srgbClr val="052B7C"/>
-              </a:solidFill>
-              <a:latin typeface="微软雅黑" panose="020B0503020204020204" charset="-122"/>
-              <a:ea typeface="微软雅黑" panose="020B0503020204020204" charset="-122"/>
-            </a:endParaRPr>
-          </a:p>
-        </p:txBody>
-      </p:sp>
-      <p:sp>
-        <p:nvSpPr>
-          <p:cNvPr id="212" name="圆角矩形 211"/>
-          <p:cNvSpPr/>
-          <p:nvPr/>
-        </p:nvSpPr>
-        <p:spPr>
-          <a:xfrm>
-            <a:off x="6229350" y="1905000"/>
-            <a:ext cx="5429250" cy="2828925"/>
-          </a:xfrm>
-          <a:prstGeom prst="roundRect">
-            <a:avLst>
-              <a:gd name="adj" fmla="val 4040"/>
-            </a:avLst>
-          </a:prstGeom>
-          <a:solidFill>
-            <a:srgbClr val="F4F7FC"/>
-          </a:solidFill>
-        </p:spPr>
-        <p:txBody>
-          <a:bodyPr/>
-          <a:p/>
-        </p:txBody>
-      </p:sp>
-      <p:sp>
-        <p:nvSpPr>
-          <p:cNvPr id="213" name="文本框 212" descr="{&quot;isTemplate&quot;:true,&quot;type&quot;:&quot;text&quot;}"/>
-          <p:cNvSpPr txBox="1"/>
-          <p:nvPr/>
-        </p:nvSpPr>
-        <p:spPr>
-          <a:xfrm>
-            <a:off x="6457950" y="2133600"/>
-            <a:ext cx="4972050" cy="504825"/>
-          </a:xfrm>
-          <a:prstGeom prst="rect">
-            <a:avLst/>
-          </a:prstGeom>
-        </p:spPr>
-        <p:txBody>
-          <a:bodyPr wrap="square" lIns="0" tIns="0" rIns="0" bIns="0">
-            <a:normAutofit/>
-          </a:bodyPr>
-          <a:p>
-            <a:pPr>
-              <a:lnSpc>
-                <a:spcPct val="100000"/>
-              </a:lnSpc>
-            </a:pPr>
-            <a:r>
-              <a:rPr lang="en-US" sz="1650" b="1">
-                <a:solidFill>
-                  <a:srgbClr val="4472C4"/>
-                </a:solidFill>
-                <a:latin typeface="微软雅黑" panose="020B0503020204020204" charset="-122"/>
-                <a:ea typeface="微软雅黑" panose="020B0503020204020204" charset="-122"/>
-              </a:rPr>
-              <a:t>daily-commodity-price-scraper</a:t>
-            </a:r>
-            <a:r>
-              <a:rPr lang="zh-CN" sz="1650" b="1">
-                <a:solidFill>
-                  <a:srgbClr val="4472C4"/>
-                </a:solidFill>
-                <a:latin typeface="微软雅黑" panose="020B0503020204020204" charset="-122"/>
-                <a:ea typeface="微软雅黑" panose="020B0503020204020204" charset="-122"/>
-              </a:rPr>
-              <a:t>（价格爬取</a:t>
-            </a:r>
-            <a:r>
-              <a:rPr lang="en-US" sz="1650" b="1">
-                <a:solidFill>
-                  <a:srgbClr val="4472C4"/>
-                </a:solidFill>
-                <a:latin typeface="微软雅黑" panose="020B0503020204020204" charset="-122"/>
-                <a:ea typeface="微软雅黑" panose="020B0503020204020204" charset="-122"/>
-              </a:rPr>
-              <a:t> Skill</a:t>
-            </a:r>
-            <a:r>
-              <a:rPr lang="zh-CN" sz="1650" b="1">
-                <a:solidFill>
-                  <a:srgbClr val="4472C4"/>
-                </a:solidFill>
-                <a:latin typeface="微软雅黑" panose="020B0503020204020204" charset="-122"/>
-                <a:ea typeface="微软雅黑" panose="020B0503020204020204" charset="-122"/>
-              </a:rPr>
-              <a:t>）</a:t>
-            </a:r>
-            <a:endParaRPr lang="zh-CN" sz="1650" b="1">
-              <a:solidFill>
-                <a:srgbClr val="4472C4"/>
-              </a:solidFill>
-              <a:latin typeface="微软雅黑" panose="020B0503020204020204" charset="-122"/>
-              <a:ea typeface="微软雅黑" panose="020B0503020204020204" charset="-122"/>
-            </a:endParaRPr>
-          </a:p>
-        </p:txBody>
-      </p:sp>
-      <p:sp>
-        <p:nvSpPr>
-          <p:cNvPr id="214" name="文本框 213" descr="{&quot;isTemplate&quot;:true,&quot;type&quot;:&quot;text&quot;}"/>
-          <p:cNvSpPr txBox="1"/>
-          <p:nvPr/>
-        </p:nvSpPr>
-        <p:spPr>
-          <a:xfrm>
-            <a:off x="6457950" y="2752725"/>
-            <a:ext cx="4972050" cy="333375"/>
-          </a:xfrm>
-          <a:prstGeom prst="rect">
-            <a:avLst/>
-          </a:prstGeom>
-        </p:spPr>
-        <p:txBody>
-          <a:bodyPr wrap="none" lIns="0" tIns="0" rIns="0" bIns="0"/>
-          <a:p>
-            <a:pPr>
-              <a:lnSpc>
-                <a:spcPct val="170000"/>
-              </a:lnSpc>
-            </a:pPr>
-            <a:r>
-              <a:rPr lang="en-US" sz="1275">
-                <a:solidFill>
-                  <a:srgbClr val="1A1A1A"/>
-                </a:solidFill>
-                <a:latin typeface="微软雅黑" panose="020B0503020204020204" charset="-122"/>
-                <a:ea typeface="微软雅黑" panose="020B0503020204020204" charset="-122"/>
-              </a:rPr>
-              <a:t>· </a:t>
-            </a:r>
-            <a:r>
-              <a:rPr lang="zh-CN" sz="1275">
-                <a:solidFill>
-                  <a:srgbClr val="1A1A1A"/>
-                </a:solidFill>
-                <a:latin typeface="微软雅黑" panose="020B0503020204020204" charset="-122"/>
-                <a:ea typeface="微软雅黑" panose="020B0503020204020204" charset="-122"/>
-              </a:rPr>
-              <a:t>作为「钩子」培养采购部门自主制作</a:t>
-            </a:r>
-            <a:r>
-              <a:rPr lang="en-US" sz="1275">
-                <a:solidFill>
-                  <a:srgbClr val="1A1A1A"/>
-                </a:solidFill>
-                <a:latin typeface="微软雅黑" panose="020B0503020204020204" charset="-122"/>
-                <a:ea typeface="微软雅黑" panose="020B0503020204020204" charset="-122"/>
-              </a:rPr>
-              <a:t> Skill </a:t>
-            </a:r>
-            <a:r>
-              <a:rPr lang="zh-CN" sz="1275">
-                <a:solidFill>
-                  <a:srgbClr val="1A1A1A"/>
-                </a:solidFill>
-                <a:latin typeface="微软雅黑" panose="020B0503020204020204" charset="-122"/>
-                <a:ea typeface="微软雅黑" panose="020B0503020204020204" charset="-122"/>
-              </a:rPr>
-              <a:t>的能力</a:t>
-            </a:r>
-            <a:endParaRPr lang="zh-CN" sz="1275">
-              <a:solidFill>
-                <a:srgbClr val="1A1A1A"/>
-              </a:solidFill>
-              <a:latin typeface="微软雅黑" panose="020B0503020204020204" charset="-122"/>
-              <a:ea typeface="微软雅黑" panose="020B0503020204020204" charset="-122"/>
-            </a:endParaRPr>
-          </a:p>
-        </p:txBody>
-      </p:sp>
-      <p:sp>
-        <p:nvSpPr>
-          <p:cNvPr id="215" name="文本框 214" descr="{&quot;isTemplate&quot;:true,&quot;type&quot;:&quot;text&quot;}"/>
-          <p:cNvSpPr txBox="1"/>
-          <p:nvPr/>
-        </p:nvSpPr>
-        <p:spPr>
-          <a:xfrm>
-            <a:off x="6457950" y="3200400"/>
-            <a:ext cx="4972050" cy="333375"/>
-          </a:xfrm>
-          <a:prstGeom prst="rect">
-            <a:avLst/>
-          </a:prstGeom>
-        </p:spPr>
-        <p:txBody>
-          <a:bodyPr wrap="none" lIns="0" tIns="0" rIns="0" bIns="0"/>
-          <a:p>
-            <a:pPr>
-              <a:lnSpc>
-                <a:spcPct val="170000"/>
-              </a:lnSpc>
-            </a:pPr>
-            <a:r>
-              <a:rPr lang="en-US" sz="1275">
-                <a:solidFill>
-                  <a:srgbClr val="1A1A1A"/>
-                </a:solidFill>
-                <a:latin typeface="微软雅黑" panose="020B0503020204020204" charset="-122"/>
-                <a:ea typeface="微软雅黑" panose="020B0503020204020204" charset="-122"/>
-              </a:rPr>
-              <a:t>· </a:t>
-            </a:r>
-            <a:r>
-              <a:rPr lang="zh-CN" sz="1275">
-                <a:solidFill>
-                  <a:srgbClr val="1A1A1A"/>
-                </a:solidFill>
-                <a:latin typeface="微软雅黑" panose="020B0503020204020204" charset="-122"/>
-                <a:ea typeface="微软雅黑" panose="020B0503020204020204" charset="-122"/>
-              </a:rPr>
-              <a:t>后续仍回采购部门培训，巩固「自建</a:t>
-            </a:r>
-            <a:r>
-              <a:rPr lang="en-US" sz="1275">
-                <a:solidFill>
-                  <a:srgbClr val="1A1A1A"/>
-                </a:solidFill>
-                <a:latin typeface="微软雅黑" panose="020B0503020204020204" charset="-122"/>
-                <a:ea typeface="微软雅黑" panose="020B0503020204020204" charset="-122"/>
-              </a:rPr>
-              <a:t> Skill</a:t>
-            </a:r>
-            <a:r>
-              <a:rPr lang="zh-CN" sz="1275">
-                <a:solidFill>
-                  <a:srgbClr val="1A1A1A"/>
-                </a:solidFill>
-                <a:latin typeface="微软雅黑" panose="020B0503020204020204" charset="-122"/>
-                <a:ea typeface="微软雅黑" panose="020B0503020204020204" charset="-122"/>
-              </a:rPr>
-              <a:t>」能力</a:t>
-            </a:r>
-            <a:endParaRPr lang="zh-CN" sz="1275">
-              <a:solidFill>
-                <a:srgbClr val="1A1A1A"/>
-              </a:solidFill>
-              <a:latin typeface="微软雅黑" panose="020B0503020204020204" charset="-122"/>
-              <a:ea typeface="微软雅黑" panose="020B0503020204020204" charset="-122"/>
-            </a:endParaRPr>
-          </a:p>
-        </p:txBody>
-      </p:sp>
-      <p:sp>
-        <p:nvSpPr>
-          <p:cNvPr id="216" name="文本框 215" descr="{&quot;isTemplate&quot;:true,&quot;type&quot;:&quot;text&quot;}"/>
-          <p:cNvSpPr txBox="1"/>
-          <p:nvPr/>
-        </p:nvSpPr>
-        <p:spPr>
-          <a:xfrm>
-            <a:off x="6457950" y="3648075"/>
-            <a:ext cx="4972050" cy="333375"/>
-          </a:xfrm>
-          <a:prstGeom prst="rect">
-            <a:avLst/>
-          </a:prstGeom>
-        </p:spPr>
-        <p:txBody>
-          <a:bodyPr wrap="none" lIns="0" tIns="0" rIns="0" bIns="0"/>
-          <a:p>
-            <a:pPr>
-              <a:lnSpc>
-                <a:spcPct val="170000"/>
-              </a:lnSpc>
-            </a:pPr>
-            <a:r>
-              <a:rPr lang="en-US" sz="1275">
-                <a:solidFill>
-                  <a:srgbClr val="1A1A1A"/>
-                </a:solidFill>
-                <a:latin typeface="微软雅黑" panose="020B0503020204020204" charset="-122"/>
-                <a:ea typeface="微软雅黑" panose="020B0503020204020204" charset="-122"/>
-              </a:rPr>
-              <a:t>· </a:t>
-            </a:r>
-            <a:r>
-              <a:rPr lang="zh-CN" sz="1275">
-                <a:solidFill>
-                  <a:srgbClr val="1A1A1A"/>
-                </a:solidFill>
-                <a:latin typeface="微软雅黑" panose="020B0503020204020204" charset="-122"/>
-                <a:ea typeface="微软雅黑" panose="020B0503020204020204" charset="-122"/>
-              </a:rPr>
-              <a:t>体现理念：赋能业务自建，</a:t>
-            </a:r>
-            <a:r>
-              <a:rPr lang="en-US" sz="1275">
-                <a:solidFill>
-                  <a:srgbClr val="1A1A1A"/>
-                </a:solidFill>
-                <a:latin typeface="微软雅黑" panose="020B0503020204020204" charset="-122"/>
-                <a:ea typeface="微软雅黑" panose="020B0503020204020204" charset="-122"/>
-              </a:rPr>
-              <a:t>AI </a:t>
-            </a:r>
-            <a:r>
-              <a:rPr lang="zh-CN" sz="1275">
-                <a:solidFill>
-                  <a:srgbClr val="1A1A1A"/>
-                </a:solidFill>
-                <a:latin typeface="微软雅黑" panose="020B0503020204020204" charset="-122"/>
-                <a:ea typeface="微软雅黑" panose="020B0503020204020204" charset="-122"/>
-              </a:rPr>
-              <a:t>小组退后为把关角色</a:t>
-            </a:r>
-            <a:endParaRPr lang="zh-CN" sz="1275">
-              <a:solidFill>
-                <a:srgbClr val="1A1A1A"/>
-              </a:solidFill>
-              <a:latin typeface="微软雅黑" panose="020B0503020204020204" charset="-122"/>
-              <a:ea typeface="微软雅黑" panose="020B0503020204020204" charset="-122"/>
-            </a:endParaRPr>
-          </a:p>
-        </p:txBody>
-      </p:sp>
-      <p:sp>
-        <p:nvSpPr>
-          <p:cNvPr id="217" name="圆角矩形 216"/>
-          <p:cNvSpPr/>
-          <p:nvPr/>
-        </p:nvSpPr>
-        <p:spPr>
-          <a:xfrm>
-            <a:off x="6457950" y="4133850"/>
-            <a:ext cx="1800225" cy="285750"/>
-          </a:xfrm>
-          <a:prstGeom prst="roundRect">
-            <a:avLst>
-              <a:gd name="adj" fmla="val 20000"/>
-            </a:avLst>
-          </a:prstGeom>
-          <a:solidFill>
-            <a:srgbClr val="DAE3F3"/>
-          </a:solidFill>
-        </p:spPr>
-        <p:txBody>
-          <a:bodyPr/>
-          <a:p/>
-        </p:txBody>
-      </p:sp>
-      <p:sp>
-        <p:nvSpPr>
-          <p:cNvPr id="218" name="文本框 217" descr="{&quot;isTemplate&quot;:true,&quot;type&quot;:&quot;text&quot;}"/>
-          <p:cNvSpPr txBox="1"/>
-          <p:nvPr/>
-        </p:nvSpPr>
-        <p:spPr>
-          <a:xfrm>
-            <a:off x="6572250" y="4191000"/>
-            <a:ext cx="1571625" cy="171450"/>
-          </a:xfrm>
-          <a:prstGeom prst="rect">
-            <a:avLst/>
-          </a:prstGeom>
-        </p:spPr>
-        <p:txBody>
-          <a:bodyPr wrap="none" lIns="0" tIns="0" rIns="0" bIns="0"/>
-          <a:p>
-            <a:pPr>
-              <a:lnSpc>
-                <a:spcPct val="100000"/>
-              </a:lnSpc>
-            </a:pPr>
-            <a:r>
-              <a:rPr lang="zh-CN" sz="1125" b="1">
-                <a:solidFill>
-                  <a:srgbClr val="052B7C"/>
-                </a:solidFill>
-                <a:latin typeface="微软雅黑" panose="020B0503020204020204" charset="-122"/>
-                <a:ea typeface="微软雅黑" panose="020B0503020204020204" charset="-122"/>
-              </a:rPr>
-              <a:t>状态：赋能中（回培训）</a:t>
-            </a:r>
-            <a:endParaRPr lang="zh-CN" sz="1125" b="1">
-              <a:solidFill>
-                <a:srgbClr val="052B7C"/>
-              </a:solidFill>
-              <a:latin typeface="微软雅黑" panose="020B0503020204020204" charset="-122"/>
-              <a:ea typeface="微软雅黑" panose="020B0503020204020204" charset="-122"/>
-            </a:endParaRPr>
-          </a:p>
-        </p:txBody>
-      </p:sp>
-      <p:sp>
-        <p:nvSpPr>
-          <p:cNvPr id="219" name="文本框 218" descr="{&quot;isTemplate&quot;:true,&quot;type&quot;:&quot;text&quot;}"/>
-          <p:cNvSpPr txBox="1"/>
-          <p:nvPr/>
-        </p:nvSpPr>
-        <p:spPr>
-          <a:xfrm>
-            <a:off x="533400" y="6362700"/>
-            <a:ext cx="1285875" cy="161925"/>
-          </a:xfrm>
-          <a:prstGeom prst="rect">
-            <a:avLst/>
-          </a:prstGeom>
-        </p:spPr>
-        <p:txBody>
-          <a:bodyPr wrap="none" lIns="0" tIns="0" rIns="0" bIns="0"/>
-          <a:p>
-            <a:pPr>
-              <a:lnSpc>
-                <a:spcPct val="100000"/>
-              </a:lnSpc>
-            </a:pPr>
-            <a:r>
-              <a:rPr lang="zh-CN" sz="1050">
-                <a:solidFill>
-                  <a:srgbClr val="888888"/>
-                </a:solidFill>
-                <a:latin typeface="微软雅黑" panose="020B0503020204020204" charset="-122"/>
-                <a:ea typeface="微软雅黑" panose="020B0503020204020204" charset="-122"/>
-              </a:rPr>
-              <a:t>入职以来</a:t>
-            </a:r>
-            <a:r>
-              <a:rPr lang="en-US" sz="1050">
-                <a:solidFill>
-                  <a:srgbClr val="888888"/>
-                </a:solidFill>
-                <a:latin typeface="微软雅黑" panose="020B0503020204020204" charset="-122"/>
-                <a:ea typeface="微软雅黑" panose="020B0503020204020204" charset="-122"/>
-              </a:rPr>
-              <a:t> AI </a:t>
-            </a:r>
-            <a:r>
-              <a:rPr lang="zh-CN" sz="1050">
-                <a:solidFill>
-                  <a:srgbClr val="888888"/>
-                </a:solidFill>
-                <a:latin typeface="微软雅黑" panose="020B0503020204020204" charset="-122"/>
-                <a:ea typeface="微软雅黑" panose="020B0503020204020204" charset="-122"/>
-              </a:rPr>
-              <a:t>工作复盘</a:t>
-            </a:r>
-            <a:endParaRPr lang="zh-CN" sz="1050">
-              <a:solidFill>
-                <a:srgbClr val="888888"/>
-              </a:solidFill>
-              <a:latin typeface="微软雅黑" panose="020B0503020204020204" charset="-122"/>
-              <a:ea typeface="微软雅黑" panose="020B0503020204020204" charset="-122"/>
-            </a:endParaRPr>
-          </a:p>
-        </p:txBody>
-      </p:sp>
-      <p:sp>
-        <p:nvSpPr>
-          <p:cNvPr id="220" name="文本框 219" descr="{&quot;isTemplate&quot;:true,&quot;type&quot;:&quot;text&quot;}"/>
-          <p:cNvSpPr txBox="1"/>
-          <p:nvPr/>
-        </p:nvSpPr>
-        <p:spPr>
-          <a:xfrm>
-            <a:off x="11229975" y="6362700"/>
-            <a:ext cx="428625" cy="161925"/>
-          </a:xfrm>
-          <a:prstGeom prst="rect">
-            <a:avLst/>
-          </a:prstGeom>
-        </p:spPr>
-        <p:txBody>
-          <a:bodyPr wrap="none" lIns="0" tIns="0" rIns="0" bIns="0"/>
-          <a:p>
-            <a:pPr>
-              <a:lnSpc>
-                <a:spcPct val="100000"/>
-              </a:lnSpc>
-            </a:pPr>
-            <a:r>
-              <a:rPr lang="en-US" sz="1050">
-                <a:solidFill>
-                  <a:srgbClr val="888888"/>
-                </a:solidFill>
-                <a:latin typeface="微软雅黑" panose="020B0503020204020204" charset="-122"/>
-                <a:ea typeface="微软雅黑" panose="020B0503020204020204" charset="-122"/>
-              </a:rPr>
-              <a:t>08 / 13</a:t>
-            </a:r>
-            <a:endParaRPr lang="en-US" sz="1050">
-              <a:solidFill>
-                <a:srgbClr val="888888"/>
-              </a:solidFill>
-              <a:latin typeface="微软雅黑" panose="020B0503020204020204" charset="-122"/>
-              <a:ea typeface="微软雅黑" panose="020B0503020204020204" charset="-122"/>
-            </a:endParaRPr>
-          </a:p>
-        </p:txBody>
-      </p:sp>
-    </p:spTree>
-  </p:cSld>
-  <p:clrMapOvr>
-    <a:masterClrMapping/>
-  </p:clrMapOvr>
-</p:sld>
-</file>
-
-<file path=ppt/slides/slide6.xml><?xml version="1.0" encoding="utf-8"?>
-<p:sld xmlns:a="http://schemas.openxmlformats.org/drawingml/2006/main" xmlns:r="http://schemas.openxmlformats.org/officeDocument/2006/relationships" xmlns:p="http://schemas.openxmlformats.org/presentationml/2006/main">
-  <p:cSld>
-    <p:spTree>
-      <p:nvGrpSpPr>
         <p:cNvPr id="12" name="" descr="&lt;Slide style={{ width:'1280px', height:'720px', position:'relative', background:'#FFFFFF', fontFamily:'微软雅黑' }}&gt;&#10;  &lt;Box style={{ position:'absolute', left:56, top:36, flexDirection:'row', alignItems:'center', gap:12 }}&gt;&#10;    &lt;Box style={{ width:8, height:34, background:'#4472C4' }} /&gt;&#10;    &lt;Text style={{ fontSize:30, fontWeight:'bold', color:'#052B7C' }}&gt;五、宏昊AI助手 · 验收运营&lt;/Text&gt;&#10;  &lt;/Box&gt;&#10;&#10;  &lt;Box style={{ position:'absolute', left:56, top:130, right:56, flexDirection:'row', gap:22 }}&gt;&#10;    {[['37','平台验收项'],['19','问题反馈闭环'],['93.3%','6 月单月通过率']].map((c, i) =&gt; (&#10;      &lt;Box key={i} style={{ flex:1, background:'#F4F7FC', borderRadius:10, padding:'22px 18px', alignItems:'center' }}&gt;&#10;        &lt;Text style={{ fontSize:56, fontWeight:'bold', color:'#4472C4' }}&gt;{c[0]}&lt;/Text&gt;&#10;        &lt;Text style={{ fontSize:18, color:'#1A1A1A', marginTop:6 }}&gt;{c[1]}&lt;/Text&gt;&#10;      &lt;/Box&gt;&#10;    ))}&#10;  &lt;/Box&gt;&#10;&#10;  &lt;Box style={{ position:'absolute', left:56, top:300, right:56, background:'#052B7C', borderRadius:10, padding:'16px 22px' }}&gt;&#10;    &lt;Text style={{ fontSize:18, color:'#FFFFFF', lineHeight:1.5 }}&gt;入职以来 &lt;span style={{ fontWeight:'bold' }}&gt;37 项验收 + 19 项问题反馈闭环&lt;/span&gt;，6 月单月通过率 93.3% → 把「供应商交付」变「可度量、可追溯、有退回机制」的质量门槛。&lt;/Text&gt;&#10;  &lt;/Box&gt;&#10;&#10;  &lt;Box style={{ position:'absolute', left:56, top:400, right:56 }}&gt;&#10;    &lt;Table&#10;      style={{ width:'100%', height:230 }}&#10;      defaultTextStyle={{ fontSize:15, textAlign:'center', color:'#1A1A1A' }}&#10;      defaultCellStyle={{ border:{ left:{width:1,color:'#CCCCCC'}, right:{width:1,color:'#CCCCCC'}, top:{width:1,color:'#CCCCCC'}, bottom:{width:1,color:'#CCCCCC'} } }}&#10;      cells={[&#10;        [ {text:'周期', textStyle:{bold:true,color:'#1A1A1A'}, cellStyle:{background:{color:'#DAE3F3'}}},&#10;          {text:'验收产出', textStyle:{bold:true,color:'#1A1A1A'}, cellStyle:{background:{color:'#DAE3F3'}}},&#10;          {text:'问题反馈', textStyle:{bold:true,color:'#1A1A1A'}, cellStyle:{background:{color:'#DAE3F3'}}},&#10;          {text:'通过情况', textStyle:{bold:true,color:'#1A1A1A'}, cellStyle:{background:{color:'#DAE3F3'}}} ],&#10;        [ '4 月', '3 测试 + 2 验收（5 项）', '4', '—' ],&#10;        [ '5 月', '9 项测试验收', '3', '—' ],&#10;        [ '6 月', '15 用例（5 批次）', '8', {text:'14/15 通过（93.3%）', textStyle:{bold:true,color:'#4472C4'}} ],&#10;        [ '7 月（2607）', '5 轮验收（8 项）', '4', '—' ],&#10;      ]}&#10;    /&gt;&#10;  &lt;/Box&gt;&#10;&#10;  &lt;Box style={{ position:'absolute', left:56, top:668, right:56, flexDirection:'row', justifyContent:'space-between' }}&gt;&#10;    &lt;Text style={{ fontSize:14, color:'#888' }}&gt;入职以来 AI 工作复盘&lt;/Text&gt;&#10;    &lt;Text style={{ fontSize:14, color:'#888' }}&gt;10 / 13&lt;/Text&gt;&#10;  &lt;/Box&gt;&#10;&lt;/Slide&gt;"/>
         <p:cNvGrpSpPr/>
         <p:nvPr/>
@@ -5577,7 +4301,7 @@
                 <a:latin typeface="微软雅黑" panose="020B0503020204020204" charset="-122"/>
                 <a:ea typeface="微软雅黑" panose="020B0503020204020204" charset="-122"/>
               </a:rPr>
-              <a:t>四、宏昊</a:t>
+              <a:t>三、宏昊</a:t>
             </a:r>
             <a:r>
               <a:rPr lang="en-US" sz="2250" b="1">
@@ -7864,7 +6588,7 @@
 </p:sld>
 </file>
 
-<file path=ppt/slides/slide7.xml><?xml version="1.0" encoding="utf-8"?>
+<file path=ppt/slides/slide6.xml><?xml version="1.0" encoding="utf-8"?>
 <p:sld xmlns:a="http://schemas.openxmlformats.org/drawingml/2006/main" xmlns:r="http://schemas.openxmlformats.org/officeDocument/2006/relationships" xmlns:p="http://schemas.openxmlformats.org/presentationml/2006/main">
   <p:cSld>
     <p:spTree>
@@ -7958,7 +6682,7 @@
                 <a:latin typeface="微软雅黑" panose="020B0503020204020204" charset="-122"/>
                 <a:ea typeface="微软雅黑" panose="020B0503020204020204" charset="-122"/>
               </a:rPr>
-              <a:t>五、智能体矩阵与内容生成</a:t>
+              <a:t>三、智能体矩阵与内容生成</a:t>
             </a:r>
             <a:endParaRPr lang="zh-CN" sz="2250" b="1">
               <a:solidFill>
@@ -7977,7 +6701,7 @@
           <p:nvPr/>
         </p:nvGraphicFramePr>
         <p:xfrm>
-          <a:off x="533400" y="1143000"/>
+          <a:off x="533400" y="1308100"/>
           <a:ext cx="11125200" cy="4191000"/>
         </p:xfrm>
         <a:graphic>
@@ -8537,7 +7261,7 @@
                           <a:latin typeface="微软雅黑" panose="020B0503020204020204" charset="-122"/>
                           <a:ea typeface="微软雅黑" panose="020B0503020204020204" charset="-122"/>
                         </a:rPr>
-                        <a:t>TDS 咨询秒级应答、选型有据不误导客户</a:t>
+                        <a:t>TDS 咨询应答、选型有据不误导客户</a:t>
                       </a:r>
                       <a:endParaRPr sz="1125">
                         <a:solidFill>
@@ -8809,7 +7533,7 @@
                           <a:latin typeface="微软雅黑" panose="020B0503020204020204" charset="-122"/>
                           <a:ea typeface="微软雅黑" panose="020B0503020204020204" charset="-122"/>
                         </a:rPr>
-                        <a:t>销售动作标准化、话术统一、新人即上手</a:t>
+                        <a:t>销售动作标准、话术统一、新人即上手</a:t>
                       </a:r>
                       <a:endParaRPr sz="1125">
                         <a:solidFill>
@@ -8901,7 +7625,7 @@
                           <a:latin typeface="微软雅黑" panose="020B0503020204020204" charset="-122"/>
                           <a:ea typeface="微软雅黑" panose="020B0503020204020204" charset="-122"/>
                         </a:rPr>
-                        <a:t>营销中心 / 业务</a:t>
+                        <a:t>营销中心</a:t>
                       </a:r>
                       <a:endParaRPr sz="1125">
                         <a:solidFill>
@@ -8939,16 +7663,26 @@
                         </a:lnSpc>
                       </a:pPr>
                       <a:r>
-                        <a:rPr sz="1125">
-                          <a:solidFill>
-                            <a:srgbClr val="1A1A1A"/>
-                          </a:solidFill>
-                          <a:latin typeface="微软雅黑" panose="020B0503020204020204" charset="-122"/>
-                          <a:ea typeface="微软雅黑" panose="020B0503020204020204" charset="-122"/>
-                        </a:rPr>
-                        <a:t>SKILL.md + templates + role</a:t>
-                      </a:r>
-                      <a:endParaRPr sz="1125">
+                        <a:rPr lang="en-US" altLang="zh-CN" sz="1125">
+                          <a:solidFill>
+                            <a:srgbClr val="1A1A1A"/>
+                          </a:solidFill>
+                          <a:latin typeface="微软雅黑" panose="020B0503020204020204" charset="-122"/>
+                          <a:ea typeface="微软雅黑" panose="020B0503020204020204" charset="-122"/>
+                        </a:rPr>
+                        <a:t>TDS + SOP </a:t>
+                      </a:r>
+                      <a:r>
+                        <a:rPr lang="zh-CN" altLang="en-US" sz="1125">
+                          <a:solidFill>
+                            <a:srgbClr val="1A1A1A"/>
+                          </a:solidFill>
+                          <a:latin typeface="微软雅黑" panose="020B0503020204020204" charset="-122"/>
+                          <a:ea typeface="微软雅黑" panose="020B0503020204020204" charset="-122"/>
+                        </a:rPr>
+                        <a:t>源文件</a:t>
+                      </a:r>
+                      <a:endParaRPr lang="en-US" altLang="zh-CN" sz="1125">
                         <a:solidFill>
                           <a:srgbClr val="1A1A1A"/>
                         </a:solidFill>
@@ -9027,20 +7761,23 @@
                         <a:lnSpc>
                           <a:spcPct val="120000"/>
                         </a:lnSpc>
+                        <a:buClrTx/>
+                        <a:buSzTx/>
+                        <a:buFontTx/>
                       </a:pPr>
                       <a:r>
-                        <a:rPr sz="1125" b="1">
-                          <a:solidFill>
-                            <a:srgbClr val="C0504D"/>
-                          </a:solidFill>
-                          <a:latin typeface="微软雅黑" panose="020B0503020204020204" charset="-122"/>
-                          <a:ea typeface="微软雅黑" panose="020B0503020204020204" charset="-122"/>
-                        </a:rPr>
-                        <a:t>迭代中 v5</a:t>
-                      </a:r>
-                      <a:endParaRPr sz="1125" b="1">
+                        <a:rPr sz="1125">
+                          <a:solidFill>
+                            <a:srgbClr val="1A1A1A"/>
+                          </a:solidFill>
+                          <a:latin typeface="微软雅黑" panose="020B0503020204020204" charset="-122"/>
+                          <a:ea typeface="微软雅黑" panose="020B0503020204020204" charset="-122"/>
+                        </a:rPr>
+                        <a:t>已上线</a:t>
+                      </a:r>
+                      <a:endParaRPr sz="1125">
                         <a:solidFill>
-                          <a:srgbClr val="C0504D"/>
+                          <a:srgbClr val="1A1A1A"/>
                         </a:solidFill>
                         <a:latin typeface="微软雅黑" panose="020B0503020204020204" charset="-122"/>
                         <a:ea typeface="微软雅黑" panose="020B0503020204020204" charset="-122"/>
@@ -9081,7 +7818,7 @@
                           <a:latin typeface="微软雅黑" panose="020B0503020204020204" charset="-122"/>
                           <a:ea typeface="微软雅黑" panose="020B0503020204020204" charset="-122"/>
                         </a:rPr>
-                        <a:t>客户问题全流程 AI 化 + 合规红线校验</a:t>
+                        <a:t>客户问题 + 合规红线校验</a:t>
                       </a:r>
                       <a:endParaRPr sz="1125">
                         <a:solidFill>
@@ -9404,171 +8141,6 @@
           </a:graphicData>
         </a:graphic>
       </p:graphicFrame>
-      <p:sp>
-        <p:nvSpPr>
-          <p:cNvPr id="35" name="文本框 34" descr="{&quot;isTemplate&quot;:true,&quot;type&quot;:&quot;text&quot;}"/>
-          <p:cNvSpPr txBox="1"/>
-          <p:nvPr/>
-        </p:nvSpPr>
-        <p:spPr>
-          <a:xfrm>
-            <a:off x="533400" y="5410200"/>
-            <a:ext cx="11125200" cy="552450"/>
-          </a:xfrm>
-          <a:prstGeom prst="rect">
-            <a:avLst/>
-          </a:prstGeom>
-        </p:spPr>
-        <p:txBody>
-          <a:bodyPr wrap="square" lIns="0" tIns="0" rIns="0" bIns="0">
-            <a:normAutofit/>
-          </a:bodyPr>
-          <a:p>
-            <a:pPr>
-              <a:lnSpc>
-                <a:spcPct val="150000"/>
-              </a:lnSpc>
-            </a:pPr>
-            <a:r>
-              <a:rPr lang="zh-CN" sz="1200">
-                <a:solidFill>
-                  <a:srgbClr val="1A1A1A"/>
-                </a:solidFill>
-                <a:latin typeface="微软雅黑" panose="020B0503020204020204" charset="-122"/>
-                <a:ea typeface="微软雅黑" panose="020B0503020204020204" charset="-122"/>
-              </a:rPr>
-              <a:t>另有「培训助手」「视频</a:t>
-            </a:r>
-            <a:r>
-              <a:rPr lang="en-US" sz="1200">
-                <a:solidFill>
-                  <a:srgbClr val="1A1A1A"/>
-                </a:solidFill>
-                <a:latin typeface="微软雅黑" panose="020B0503020204020204" charset="-122"/>
-                <a:ea typeface="微软雅黑" panose="020B0503020204020204" charset="-122"/>
-              </a:rPr>
-              <a:t> / </a:t>
-            </a:r>
-            <a:r>
-              <a:rPr lang="zh-CN" sz="1200">
-                <a:solidFill>
-                  <a:srgbClr val="1A1A1A"/>
-                </a:solidFill>
-                <a:latin typeface="微软雅黑" panose="020B0503020204020204" charset="-122"/>
-                <a:ea typeface="微软雅黑" panose="020B0503020204020204" charset="-122"/>
-              </a:rPr>
-              <a:t>图片生成助手」等能力，构成平台智能体矩阵；</a:t>
-            </a:r>
-            <a:r>
-              <a:rPr lang="en-US" sz="1200">
-                <a:solidFill>
-                  <a:srgbClr val="1A1A1A"/>
-                </a:solidFill>
-                <a:latin typeface="微软雅黑" panose="020B0503020204020204" charset="-122"/>
-                <a:ea typeface="微软雅黑" panose="020B0503020204020204" charset="-122"/>
-              </a:rPr>
-              <a:t>06-12 </a:t>
-            </a:r>
-            <a:r>
-              <a:rPr lang="zh-CN" sz="1200">
-                <a:solidFill>
-                  <a:srgbClr val="1A1A1A"/>
-                </a:solidFill>
-                <a:latin typeface="微软雅黑" panose="020B0503020204020204" charset="-122"/>
-                <a:ea typeface="微软雅黑" panose="020B0503020204020204" charset="-122"/>
-              </a:rPr>
-              <a:t>提出</a:t>
-            </a:r>
-            <a:r>
-              <a:rPr lang="en-US" sz="1200">
-                <a:solidFill>
-                  <a:srgbClr val="1A1A1A"/>
-                </a:solidFill>
-                <a:latin typeface="微软雅黑" panose="020B0503020204020204" charset="-122"/>
-                <a:ea typeface="微软雅黑" panose="020B0503020204020204" charset="-122"/>
-              </a:rPr>
-              <a:t> seedance/seedream </a:t>
-            </a:r>
-            <a:r>
-              <a:rPr lang="zh-CN" sz="1200">
-                <a:solidFill>
-                  <a:srgbClr val="1A1A1A"/>
-                </a:solidFill>
-                <a:latin typeface="微软雅黑" panose="020B0503020204020204" charset="-122"/>
-                <a:ea typeface="微软雅黑" panose="020B0503020204020204" charset="-122"/>
-              </a:rPr>
-              <a:t>独立化诉求，</a:t>
-            </a:r>
-            <a:r>
-              <a:rPr lang="en-US" sz="1200">
-                <a:solidFill>
-                  <a:srgbClr val="1A1A1A"/>
-                </a:solidFill>
-                <a:latin typeface="微软雅黑" panose="020B0503020204020204" charset="-122"/>
-                <a:ea typeface="微软雅黑" panose="020B0503020204020204" charset="-122"/>
-              </a:rPr>
-              <a:t>07-14 </a:t>
-            </a:r>
-            <a:r>
-              <a:rPr lang="zh-CN" sz="1200">
-                <a:solidFill>
-                  <a:srgbClr val="1A1A1A"/>
-                </a:solidFill>
-                <a:latin typeface="微软雅黑" panose="020B0503020204020204" charset="-122"/>
-                <a:ea typeface="微软雅黑" panose="020B0503020204020204" charset="-122"/>
-              </a:rPr>
-              <a:t>图片</a:t>
-            </a:r>
-            <a:r>
-              <a:rPr lang="en-US" sz="1200">
-                <a:solidFill>
-                  <a:srgbClr val="1A1A1A"/>
-                </a:solidFill>
-                <a:latin typeface="微软雅黑" panose="020B0503020204020204" charset="-122"/>
-                <a:ea typeface="微软雅黑" panose="020B0503020204020204" charset="-122"/>
-              </a:rPr>
-              <a:t> · </a:t>
-            </a:r>
-            <a:r>
-              <a:rPr lang="zh-CN" sz="1200">
-                <a:solidFill>
-                  <a:srgbClr val="1A1A1A"/>
-                </a:solidFill>
-                <a:latin typeface="微软雅黑" panose="020B0503020204020204" charset="-122"/>
-                <a:ea typeface="微软雅黑" panose="020B0503020204020204" charset="-122"/>
-              </a:rPr>
-              <a:t>视频生成独立应用落地（营销</a:t>
-            </a:r>
-            <a:r>
-              <a:rPr lang="en-US" sz="1200">
-                <a:solidFill>
-                  <a:srgbClr val="1A1A1A"/>
-                </a:solidFill>
-                <a:latin typeface="微软雅黑" panose="020B0503020204020204" charset="-122"/>
-                <a:ea typeface="微软雅黑" panose="020B0503020204020204" charset="-122"/>
-              </a:rPr>
-              <a:t> / </a:t>
-            </a:r>
-            <a:r>
-              <a:rPr lang="zh-CN" sz="1200">
-                <a:solidFill>
-                  <a:srgbClr val="1A1A1A"/>
-                </a:solidFill>
-                <a:latin typeface="微软雅黑" panose="020B0503020204020204" charset="-122"/>
-                <a:ea typeface="微软雅黑" panose="020B0503020204020204" charset="-122"/>
-              </a:rPr>
-              <a:t>销售自助生产素材）。</a:t>
-            </a:r>
-            <a:endParaRPr lang="zh-CN" sz="1200">
-              <a:solidFill>
-                <a:srgbClr val="1A1A1A"/>
-              </a:solidFill>
-              <a:latin typeface="微软雅黑" panose="020B0503020204020204" charset="-122"/>
-              <a:ea typeface="微软雅黑" panose="020B0503020204020204" charset="-122"/>
-            </a:endParaRPr>
-          </a:p>
-        </p:txBody>
-      </p:sp>
       <p:sp>
         <p:nvSpPr>
           <p:cNvPr id="36" name="文本框 35" descr="{&quot;isTemplate&quot;:true,&quot;type&quot;:&quot;text&quot;}"/>
@@ -9683,7 +8255,7 @@
 </p:sld>
 </file>
 
-<file path=ppt/slides/slide8.xml><?xml version="1.0" encoding="utf-8"?>
+<file path=ppt/slides/slide7.xml><?xml version="1.0" encoding="utf-8"?>
 <p:sld xmlns:a="http://schemas.openxmlformats.org/drawingml/2006/main" xmlns:r="http://schemas.openxmlformats.org/officeDocument/2006/relationships" xmlns:p="http://schemas.openxmlformats.org/presentationml/2006/main">
   <p:cSld>
     <p:spTree>
@@ -9777,7 +8349,7 @@
                 <a:latin typeface="微软雅黑" panose="020B0503020204020204" charset="-122"/>
                 <a:ea typeface="微软雅黑" panose="020B0503020204020204" charset="-122"/>
               </a:rPr>
-              <a:t>六、下阶段计划与需支持事项</a:t>
+              <a:t>五、下阶段计划与需支持事项</a:t>
             </a:r>
             <a:endParaRPr lang="zh-CN" sz="2250" b="1">
               <a:solidFill>
@@ -9797,7 +8369,7 @@
         </p:nvSpPr>
         <p:spPr>
           <a:xfrm>
-            <a:off x="533400" y="1238250"/>
+            <a:off x="533400" y="1678940"/>
             <a:ext cx="6286500" cy="228600"/>
           </a:xfrm>
           <a:prstGeom prst="rect">
@@ -9813,7 +8385,7 @@
               </a:lnSpc>
             </a:pPr>
             <a:r>
-              <a:rPr lang="zh-CN" sz="1500" b="1">
+              <a:rPr lang="zh-CN" sz="1600" b="1">
                 <a:solidFill>
                   <a:srgbClr val="052B7C"/>
                 </a:solidFill>
@@ -9822,77 +8394,9 @@
               </a:rPr>
               <a:t>下阶段计划</a:t>
             </a:r>
-            <a:endParaRPr lang="zh-CN" sz="1500" b="1">
+            <a:endParaRPr lang="zh-CN" sz="1600" b="1">
               <a:solidFill>
                 <a:srgbClr val="052B7C"/>
-              </a:solidFill>
-              <a:latin typeface="微软雅黑" panose="020B0503020204020204" charset="-122"/>
-              <a:ea typeface="微软雅黑" panose="020B0503020204020204" charset="-122"/>
-            </a:endParaRPr>
-          </a:p>
-        </p:txBody>
-      </p:sp>
-      <p:sp>
-        <p:nvSpPr>
-          <p:cNvPr id="43" name="圆角矩形 42"/>
-          <p:cNvSpPr/>
-          <p:nvPr/>
-        </p:nvSpPr>
-        <p:spPr>
-          <a:xfrm>
-            <a:off x="533400" y="1676400"/>
-            <a:ext cx="76200" cy="76200"/>
-          </a:xfrm>
-          <a:prstGeom prst="roundRect">
-            <a:avLst>
-              <a:gd name="adj" fmla="val 25000"/>
-            </a:avLst>
-          </a:prstGeom>
-          <a:solidFill>
-            <a:srgbClr val="4472C4"/>
-          </a:solidFill>
-        </p:spPr>
-        <p:txBody>
-          <a:bodyPr/>
-          <a:p/>
-        </p:txBody>
-      </p:sp>
-      <p:sp>
-        <p:nvSpPr>
-          <p:cNvPr id="44" name="文本框 43" descr="{&quot;isTemplate&quot;:true,&quot;type&quot;:&quot;text&quot;}"/>
-          <p:cNvSpPr txBox="1"/>
-          <p:nvPr/>
-        </p:nvSpPr>
-        <p:spPr>
-          <a:xfrm>
-            <a:off x="723900" y="1600200"/>
-            <a:ext cx="4724400" cy="276225"/>
-          </a:xfrm>
-          <a:prstGeom prst="rect">
-            <a:avLst/>
-          </a:prstGeom>
-        </p:spPr>
-        <p:txBody>
-          <a:bodyPr wrap="none" lIns="0" tIns="0" rIns="0" bIns="0"/>
-          <a:p>
-            <a:pPr>
-              <a:lnSpc>
-                <a:spcPct val="150000"/>
-              </a:lnSpc>
-            </a:pPr>
-            <a:r>
-              <a:rPr lang="zh-CN" sz="1200">
-                <a:solidFill>
-                  <a:srgbClr val="1A1A1A"/>
-                </a:solidFill>
-                <a:latin typeface="微软雅黑" panose="020B0503020204020204" charset="-122"/>
-                <a:ea typeface="微软雅黑" panose="020B0503020204020204" charset="-122"/>
-              </a:rPr>
-              <a:t>业务智能助理上线前完成检索稳定性测试，沉淀为营销中心标准智能体</a:t>
-            </a:r>
-            <a:endParaRPr lang="zh-CN" sz="1200">
-              <a:solidFill>
-                <a:srgbClr val="1A1A1A"/>
               </a:solidFill>
               <a:latin typeface="微软雅黑" panose="020B0503020204020204" charset="-122"/>
               <a:ea typeface="微软雅黑" panose="020B0503020204020204" charset="-122"/>
@@ -9908,7 +8412,7 @@
         </p:nvSpPr>
         <p:spPr>
           <a:xfrm>
-            <a:off x="533400" y="2085975"/>
+            <a:off x="533400" y="2117090"/>
             <a:ext cx="76200" cy="76200"/>
           </a:xfrm>
           <a:prstGeom prst="roundRect">
@@ -9922,7 +8426,9 @@
         </p:spPr>
         <p:txBody>
           <a:bodyPr/>
-          <a:p/>
+          <a:p>
+            <a:endParaRPr sz="2000" b="1"/>
+          </a:p>
         </p:txBody>
       </p:sp>
       <p:sp>
@@ -9933,7 +8439,7 @@
         </p:nvSpPr>
         <p:spPr>
           <a:xfrm>
-            <a:off x="723900" y="2009775"/>
+            <a:off x="723900" y="2040890"/>
             <a:ext cx="3810000" cy="276225"/>
           </a:xfrm>
           <a:prstGeom prst="rect">
@@ -9949,7 +8455,7 @@
               </a:lnSpc>
             </a:pPr>
             <a:r>
-              <a:rPr lang="zh-CN" sz="1200">
+              <a:rPr lang="zh-CN" sz="1400" b="1">
                 <a:solidFill>
                   <a:srgbClr val="1A1A1A"/>
                 </a:solidFill>
@@ -9958,369 +8464,7 @@
               </a:rPr>
               <a:t>推动供应商修复待解项（图片变视频范围、竖屏不支持）</a:t>
             </a:r>
-            <a:endParaRPr lang="zh-CN" sz="1200">
-              <a:solidFill>
-                <a:srgbClr val="1A1A1A"/>
-              </a:solidFill>
-              <a:latin typeface="微软雅黑" panose="020B0503020204020204" charset="-122"/>
-              <a:ea typeface="微软雅黑" panose="020B0503020204020204" charset="-122"/>
-            </a:endParaRPr>
-          </a:p>
-        </p:txBody>
-      </p:sp>
-      <p:sp>
-        <p:nvSpPr>
-          <p:cNvPr id="47" name="圆角矩形 46"/>
-          <p:cNvSpPr/>
-          <p:nvPr/>
-        </p:nvSpPr>
-        <p:spPr>
-          <a:xfrm>
-            <a:off x="533400" y="2495550"/>
-            <a:ext cx="76200" cy="76200"/>
-          </a:xfrm>
-          <a:prstGeom prst="roundRect">
-            <a:avLst>
-              <a:gd name="adj" fmla="val 25000"/>
-            </a:avLst>
-          </a:prstGeom>
-          <a:solidFill>
-            <a:srgbClr val="4472C4"/>
-          </a:solidFill>
-        </p:spPr>
-        <p:txBody>
-          <a:bodyPr/>
-          <a:p/>
-        </p:txBody>
-      </p:sp>
-      <p:sp>
-        <p:nvSpPr>
-          <p:cNvPr id="48" name="文本框 47" descr="{&quot;isTemplate&quot;:true,&quot;type&quot;:&quot;text&quot;}"/>
-          <p:cNvSpPr txBox="1"/>
-          <p:nvPr/>
-        </p:nvSpPr>
-        <p:spPr>
-          <a:xfrm>
-            <a:off x="723900" y="2419350"/>
-            <a:ext cx="2295525" cy="276225"/>
-          </a:xfrm>
-          <a:prstGeom prst="rect">
-            <a:avLst/>
-          </a:prstGeom>
-        </p:spPr>
-        <p:txBody>
-          <a:bodyPr wrap="none" lIns="0" tIns="0" rIns="0" bIns="0"/>
-          <a:p>
-            <a:pPr>
-              <a:lnSpc>
-                <a:spcPct val="150000"/>
-              </a:lnSpc>
-            </a:pPr>
-            <a:r>
-              <a:rPr lang="zh-CN" sz="1200">
-                <a:solidFill>
-                  <a:srgbClr val="1A1A1A"/>
-                </a:solidFill>
-                <a:latin typeface="微软雅黑" panose="020B0503020204020204" charset="-122"/>
-                <a:ea typeface="微软雅黑" panose="020B0503020204020204" charset="-122"/>
-              </a:rPr>
-              <a:t>建立工具活跃度</a:t>
-            </a:r>
-            <a:r>
-              <a:rPr lang="en-US" sz="1200">
-                <a:solidFill>
-                  <a:srgbClr val="1A1A1A"/>
-                </a:solidFill>
-                <a:latin typeface="微软雅黑" panose="020B0503020204020204" charset="-122"/>
-                <a:ea typeface="微软雅黑" panose="020B0503020204020204" charset="-122"/>
-              </a:rPr>
-              <a:t> / </a:t>
-            </a:r>
-            <a:r>
-              <a:rPr lang="zh-CN" sz="1200">
-                <a:solidFill>
-                  <a:srgbClr val="1A1A1A"/>
-                </a:solidFill>
-                <a:latin typeface="微软雅黑" panose="020B0503020204020204" charset="-122"/>
-                <a:ea typeface="微软雅黑" panose="020B0503020204020204" charset="-122"/>
-              </a:rPr>
-              <a:t>采纳率轻量看板</a:t>
-            </a:r>
-            <a:endParaRPr lang="zh-CN" sz="1200">
-              <a:solidFill>
-                <a:srgbClr val="1A1A1A"/>
-              </a:solidFill>
-              <a:latin typeface="微软雅黑" panose="020B0503020204020204" charset="-122"/>
-              <a:ea typeface="微软雅黑" panose="020B0503020204020204" charset="-122"/>
-            </a:endParaRPr>
-          </a:p>
-        </p:txBody>
-      </p:sp>
-      <p:sp>
-        <p:nvSpPr>
-          <p:cNvPr id="49" name="圆角矩形 48"/>
-          <p:cNvSpPr/>
-          <p:nvPr/>
-        </p:nvSpPr>
-        <p:spPr>
-          <a:xfrm>
-            <a:off x="533400" y="2905125"/>
-            <a:ext cx="76200" cy="76200"/>
-          </a:xfrm>
-          <a:prstGeom prst="roundRect">
-            <a:avLst>
-              <a:gd name="adj" fmla="val 25000"/>
-            </a:avLst>
-          </a:prstGeom>
-          <a:solidFill>
-            <a:srgbClr val="4472C4"/>
-          </a:solidFill>
-        </p:spPr>
-        <p:txBody>
-          <a:bodyPr/>
-          <a:p/>
-        </p:txBody>
-      </p:sp>
-      <p:sp>
-        <p:nvSpPr>
-          <p:cNvPr id="50" name="文本框 49" descr="{&quot;isTemplate&quot;:true,&quot;type&quot;:&quot;text&quot;}"/>
-          <p:cNvSpPr txBox="1"/>
-          <p:nvPr/>
-        </p:nvSpPr>
-        <p:spPr>
-          <a:xfrm>
-            <a:off x="723900" y="2828925"/>
-            <a:ext cx="3667125" cy="276225"/>
-          </a:xfrm>
-          <a:prstGeom prst="rect">
-            <a:avLst/>
-          </a:prstGeom>
-        </p:spPr>
-        <p:txBody>
-          <a:bodyPr wrap="none" lIns="0" tIns="0" rIns="0" bIns="0"/>
-          <a:p>
-            <a:pPr>
-              <a:lnSpc>
-                <a:spcPct val="150000"/>
-              </a:lnSpc>
-            </a:pPr>
-            <a:r>
-              <a:rPr lang="zh-CN" sz="1200">
-                <a:solidFill>
-                  <a:srgbClr val="1A1A1A"/>
-                </a:solidFill>
-                <a:latin typeface="微软雅黑" panose="020B0503020204020204" charset="-122"/>
-                <a:ea typeface="微软雅黑" panose="020B0503020204020204" charset="-122"/>
-              </a:rPr>
-              <a:t>补采采购</a:t>
-            </a:r>
-            <a:r>
-              <a:rPr lang="en-US" sz="1200">
-                <a:solidFill>
-                  <a:srgbClr val="1A1A1A"/>
-                </a:solidFill>
-                <a:latin typeface="微软雅黑" panose="020B0503020204020204" charset="-122"/>
-                <a:ea typeface="微软雅黑" panose="020B0503020204020204" charset="-122"/>
-              </a:rPr>
-              <a:t> / </a:t>
-            </a:r>
-            <a:r>
-              <a:rPr lang="zh-CN" sz="1200">
-                <a:solidFill>
-                  <a:srgbClr val="1A1A1A"/>
-                </a:solidFill>
-                <a:latin typeface="微软雅黑" panose="020B0503020204020204" charset="-122"/>
-                <a:ea typeface="微软雅黑" panose="020B0503020204020204" charset="-122"/>
-              </a:rPr>
-              <a:t>船务「节省工时」量化，用于增量价值申报</a:t>
-            </a:r>
-            <a:endParaRPr lang="zh-CN" sz="1200">
-              <a:solidFill>
-                <a:srgbClr val="1A1A1A"/>
-              </a:solidFill>
-              <a:latin typeface="微软雅黑" panose="020B0503020204020204" charset="-122"/>
-              <a:ea typeface="微软雅黑" panose="020B0503020204020204" charset="-122"/>
-            </a:endParaRPr>
-          </a:p>
-        </p:txBody>
-      </p:sp>
-      <p:sp>
-        <p:nvSpPr>
-          <p:cNvPr id="51" name="圆角矩形 50"/>
-          <p:cNvSpPr/>
-          <p:nvPr/>
-        </p:nvSpPr>
-        <p:spPr>
-          <a:xfrm>
-            <a:off x="533400" y="3314700"/>
-            <a:ext cx="76200" cy="76200"/>
-          </a:xfrm>
-          <a:prstGeom prst="roundRect">
-            <a:avLst>
-              <a:gd name="adj" fmla="val 25000"/>
-            </a:avLst>
-          </a:prstGeom>
-          <a:solidFill>
-            <a:srgbClr val="4472C4"/>
-          </a:solidFill>
-        </p:spPr>
-        <p:txBody>
-          <a:bodyPr/>
-          <a:p/>
-        </p:txBody>
-      </p:sp>
-      <p:sp>
-        <p:nvSpPr>
-          <p:cNvPr id="52" name="文本框 51" descr="{&quot;isTemplate&quot;:true,&quot;type&quot;:&quot;text&quot;}"/>
-          <p:cNvSpPr txBox="1"/>
-          <p:nvPr/>
-        </p:nvSpPr>
-        <p:spPr>
-          <a:xfrm>
-            <a:off x="723900" y="3238500"/>
-            <a:ext cx="2762250" cy="276225"/>
-          </a:xfrm>
-          <a:prstGeom prst="rect">
-            <a:avLst/>
-          </a:prstGeom>
-        </p:spPr>
-        <p:txBody>
-          <a:bodyPr wrap="none" lIns="0" tIns="0" rIns="0" bIns="0"/>
-          <a:p>
-            <a:pPr>
-              <a:lnSpc>
-                <a:spcPct val="150000"/>
-              </a:lnSpc>
-            </a:pPr>
-            <a:r>
-              <a:rPr lang="en-US" sz="1200">
-                <a:solidFill>
-                  <a:srgbClr val="1A1A1A"/>
-                </a:solidFill>
-                <a:latin typeface="微软雅黑" panose="020B0503020204020204" charset="-122"/>
-                <a:ea typeface="微软雅黑" panose="020B0503020204020204" charset="-122"/>
-              </a:rPr>
-              <a:t>Tax_check / Data_masking </a:t>
-            </a:r>
-            <a:r>
-              <a:rPr lang="zh-CN" sz="1200">
-                <a:solidFill>
-                  <a:srgbClr val="1A1A1A"/>
-                </a:solidFill>
-                <a:latin typeface="微软雅黑" panose="020B0503020204020204" charset="-122"/>
-                <a:ea typeface="微软雅黑" panose="020B0503020204020204" charset="-122"/>
-              </a:rPr>
-              <a:t>持续运营深化</a:t>
-            </a:r>
-            <a:endParaRPr lang="zh-CN" sz="1200">
-              <a:solidFill>
-                <a:srgbClr val="1A1A1A"/>
-              </a:solidFill>
-              <a:latin typeface="微软雅黑" panose="020B0503020204020204" charset="-122"/>
-              <a:ea typeface="微软雅黑" panose="020B0503020204020204" charset="-122"/>
-            </a:endParaRPr>
-          </a:p>
-        </p:txBody>
-      </p:sp>
-      <p:sp>
-        <p:nvSpPr>
-          <p:cNvPr id="53" name="圆角矩形 52"/>
-          <p:cNvSpPr/>
-          <p:nvPr/>
-        </p:nvSpPr>
-        <p:spPr>
-          <a:xfrm>
-            <a:off x="533400" y="3724275"/>
-            <a:ext cx="76200" cy="76200"/>
-          </a:xfrm>
-          <a:prstGeom prst="roundRect">
-            <a:avLst>
-              <a:gd name="adj" fmla="val 25000"/>
-            </a:avLst>
-          </a:prstGeom>
-          <a:solidFill>
-            <a:srgbClr val="4472C4"/>
-          </a:solidFill>
-        </p:spPr>
-        <p:txBody>
-          <a:bodyPr/>
-          <a:p/>
-        </p:txBody>
-      </p:sp>
-      <p:sp>
-        <p:nvSpPr>
-          <p:cNvPr id="54" name="文本框 53" descr="{&quot;isTemplate&quot;:true,&quot;type&quot;:&quot;text&quot;}"/>
-          <p:cNvSpPr txBox="1"/>
-          <p:nvPr/>
-        </p:nvSpPr>
-        <p:spPr>
-          <a:xfrm>
-            <a:off x="723900" y="3648075"/>
-            <a:ext cx="3419475" cy="276225"/>
-          </a:xfrm>
-          <a:prstGeom prst="rect">
-            <a:avLst/>
-          </a:prstGeom>
-        </p:spPr>
-        <p:txBody>
-          <a:bodyPr wrap="none" lIns="0" tIns="0" rIns="0" bIns="0"/>
-          <a:p>
-            <a:pPr>
-              <a:lnSpc>
-                <a:spcPct val="150000"/>
-              </a:lnSpc>
-            </a:pPr>
-            <a:r>
-              <a:rPr lang="zh-CN" sz="1200">
-                <a:solidFill>
-                  <a:srgbClr val="1A1A1A"/>
-                </a:solidFill>
-                <a:latin typeface="微软雅黑" panose="020B0503020204020204" charset="-122"/>
-                <a:ea typeface="微软雅黑" panose="020B0503020204020204" charset="-122"/>
-              </a:rPr>
-              <a:t>价格爬取</a:t>
-            </a:r>
-            <a:r>
-              <a:rPr lang="en-US" sz="1200">
-                <a:solidFill>
-                  <a:srgbClr val="1A1A1A"/>
-                </a:solidFill>
-                <a:latin typeface="微软雅黑" panose="020B0503020204020204" charset="-122"/>
-                <a:ea typeface="微软雅黑" panose="020B0503020204020204" charset="-122"/>
-              </a:rPr>
-              <a:t> Skill </a:t>
-            </a:r>
-            <a:r>
-              <a:rPr lang="zh-CN" sz="1200">
-                <a:solidFill>
-                  <a:srgbClr val="1A1A1A"/>
-                </a:solidFill>
-                <a:latin typeface="微软雅黑" panose="020B0503020204020204" charset="-122"/>
-                <a:ea typeface="微软雅黑" panose="020B0503020204020204" charset="-122"/>
-              </a:rPr>
-              <a:t>回采购培训，巩固「自建</a:t>
-            </a:r>
-            <a:r>
-              <a:rPr lang="en-US" sz="1200">
-                <a:solidFill>
-                  <a:srgbClr val="1A1A1A"/>
-                </a:solidFill>
-                <a:latin typeface="微软雅黑" panose="020B0503020204020204" charset="-122"/>
-                <a:ea typeface="微软雅黑" panose="020B0503020204020204" charset="-122"/>
-              </a:rPr>
-              <a:t> Skill</a:t>
-            </a:r>
-            <a:r>
-              <a:rPr lang="zh-CN" sz="1200">
-                <a:solidFill>
-                  <a:srgbClr val="1A1A1A"/>
-                </a:solidFill>
-                <a:latin typeface="微软雅黑" panose="020B0503020204020204" charset="-122"/>
-                <a:ea typeface="微软雅黑" panose="020B0503020204020204" charset="-122"/>
-              </a:rPr>
-              <a:t>」能力</a:t>
-            </a:r>
-            <a:endParaRPr lang="zh-CN" sz="1200">
+            <a:endParaRPr lang="zh-CN" sz="1400" b="1">
               <a:solidFill>
                 <a:srgbClr val="1A1A1A"/>
               </a:solidFill>
@@ -10338,7 +8482,7 @@
         </p:nvSpPr>
         <p:spPr>
           <a:xfrm>
-            <a:off x="7162800" y="1238250"/>
+            <a:off x="6734175" y="1678940"/>
             <a:ext cx="4495800" cy="228600"/>
           </a:xfrm>
           <a:prstGeom prst="rect">
@@ -10354,7 +8498,7 @@
               </a:lnSpc>
             </a:pPr>
             <a:r>
-              <a:rPr lang="zh-CN" sz="1500" b="1">
+              <a:rPr lang="zh-CN" sz="1600" b="1">
                 <a:solidFill>
                   <a:srgbClr val="C0504D"/>
                 </a:solidFill>
@@ -10363,7 +8507,7 @@
               </a:rPr>
               <a:t>需支持事项</a:t>
             </a:r>
-            <a:endParaRPr lang="zh-CN" sz="1500" b="1">
+            <a:endParaRPr lang="zh-CN" sz="1600" b="1">
               <a:solidFill>
                 <a:srgbClr val="C0504D"/>
               </a:solidFill>
@@ -10381,7 +8525,7 @@
         </p:nvSpPr>
         <p:spPr>
           <a:xfrm>
-            <a:off x="7162800" y="1676400"/>
+            <a:off x="6734175" y="2117090"/>
             <a:ext cx="76200" cy="76200"/>
           </a:xfrm>
           <a:prstGeom prst="roundRect">
@@ -10395,7 +8539,9 @@
         </p:spPr>
         <p:txBody>
           <a:bodyPr/>
-          <a:p/>
+          <a:p>
+            <a:endParaRPr sz="2000" b="1"/>
+          </a:p>
         </p:txBody>
       </p:sp>
       <p:sp>
@@ -10406,7 +8552,7 @@
         </p:nvSpPr>
         <p:spPr>
           <a:xfrm>
-            <a:off x="7353300" y="1600200"/>
+            <a:off x="6924675" y="2040890"/>
             <a:ext cx="3810000" cy="276225"/>
           </a:xfrm>
           <a:prstGeom prst="rect">
@@ -10422,7 +8568,7 @@
               </a:lnSpc>
             </a:pPr>
             <a:r>
-              <a:rPr lang="zh-CN" sz="1200">
+              <a:rPr lang="zh-CN" sz="1400" b="1">
                 <a:solidFill>
                   <a:srgbClr val="1A1A1A"/>
                 </a:solidFill>
@@ -10431,7 +8577,7 @@
               </a:rPr>
               <a:t>业务智能助理检索测试需营销中心提供真实客户问题样本</a:t>
             </a:r>
-            <a:endParaRPr lang="zh-CN" sz="1200">
+            <a:endParaRPr lang="zh-CN" sz="1400" b="1">
               <a:solidFill>
                 <a:srgbClr val="1A1A1A"/>
               </a:solidFill>
@@ -10449,7 +8595,7 @@
         </p:nvSpPr>
         <p:spPr>
           <a:xfrm>
-            <a:off x="7162800" y="2085975"/>
+            <a:off x="6734175" y="2526665"/>
             <a:ext cx="76200" cy="76200"/>
           </a:xfrm>
           <a:prstGeom prst="roundRect">
@@ -10463,7 +8609,9 @@
         </p:spPr>
         <p:txBody>
           <a:bodyPr/>
-          <a:p/>
+          <a:p>
+            <a:endParaRPr sz="2000" b="1"/>
+          </a:p>
         </p:txBody>
       </p:sp>
       <p:sp>
@@ -10474,7 +8622,7 @@
         </p:nvSpPr>
         <p:spPr>
           <a:xfrm>
-            <a:off x="7353300" y="2009775"/>
+            <a:off x="6924675" y="2450465"/>
             <a:ext cx="3200400" cy="276225"/>
           </a:xfrm>
           <a:prstGeom prst="rect">
@@ -10490,7 +8638,7 @@
               </a:lnSpc>
             </a:pPr>
             <a:r>
-              <a:rPr lang="zh-CN" sz="1200">
+              <a:rPr lang="zh-CN" sz="1400" b="1">
                 <a:solidFill>
                   <a:srgbClr val="1A1A1A"/>
                 </a:solidFill>
@@ -10499,7 +8647,7 @@
               </a:rPr>
               <a:t>待解项修复依赖供应商排期，需领导推动优先级</a:t>
             </a:r>
-            <a:endParaRPr lang="zh-CN" sz="1200">
+            <a:endParaRPr lang="zh-CN" sz="1400" b="1">
               <a:solidFill>
                 <a:srgbClr val="1A1A1A"/>
               </a:solidFill>
@@ -10517,7 +8665,7 @@
         </p:nvSpPr>
         <p:spPr>
           <a:xfrm>
-            <a:off x="7162800" y="2495550"/>
+            <a:off x="6734175" y="2936240"/>
             <a:ext cx="76200" cy="76200"/>
           </a:xfrm>
           <a:prstGeom prst="roundRect">
@@ -10531,7 +8679,9 @@
         </p:spPr>
         <p:txBody>
           <a:bodyPr/>
-          <a:p/>
+          <a:p>
+            <a:endParaRPr sz="2000" b="1"/>
+          </a:p>
         </p:txBody>
       </p:sp>
       <p:sp>
@@ -10542,7 +8692,7 @@
         </p:nvSpPr>
         <p:spPr>
           <a:xfrm>
-            <a:off x="7353300" y="2419350"/>
+            <a:off x="6924675" y="2860040"/>
             <a:ext cx="2743200" cy="276225"/>
           </a:xfrm>
           <a:prstGeom prst="rect">
@@ -10558,7 +8708,7 @@
               </a:lnSpc>
             </a:pPr>
             <a:r>
-              <a:rPr lang="zh-CN" sz="1200">
+              <a:rPr lang="zh-CN" sz="1400" b="1">
                 <a:solidFill>
                   <a:srgbClr val="1A1A1A"/>
                 </a:solidFill>
@@ -10567,7 +8717,7 @@
               </a:rPr>
               <a:t>工时量化需业务方配合记录使用前后耗时</a:t>
             </a:r>
-            <a:endParaRPr lang="zh-CN" sz="1200">
+            <a:endParaRPr lang="zh-CN" sz="1400" b="1">
               <a:solidFill>
                 <a:srgbClr val="1A1A1A"/>
               </a:solidFill>
@@ -10585,7 +8735,7 @@
         </p:nvSpPr>
         <p:spPr>
           <a:xfrm>
-            <a:off x="7162800" y="2905125"/>
+            <a:off x="6734175" y="3345815"/>
             <a:ext cx="76200" cy="76200"/>
           </a:xfrm>
           <a:prstGeom prst="roundRect">
@@ -10599,7 +8749,9 @@
         </p:spPr>
         <p:txBody>
           <a:bodyPr/>
-          <a:p/>
+          <a:p>
+            <a:endParaRPr sz="2000" b="1"/>
+          </a:p>
         </p:txBody>
       </p:sp>
       <p:sp>
@@ -10610,7 +8762,7 @@
         </p:nvSpPr>
         <p:spPr>
           <a:xfrm>
-            <a:off x="7353300" y="2828925"/>
+            <a:off x="6924675" y="3269615"/>
             <a:ext cx="2333625" cy="276225"/>
           </a:xfrm>
           <a:prstGeom prst="rect">
@@ -10626,7 +8778,7 @@
               </a:lnSpc>
             </a:pPr>
             <a:r>
-              <a:rPr lang="zh-CN" sz="1200">
+              <a:rPr lang="zh-CN" sz="1400" b="1">
                 <a:solidFill>
                   <a:srgbClr val="1A1A1A"/>
                 </a:solidFill>
@@ -10636,7 +8788,7 @@
               <a:t>采纳率看板需</a:t>
             </a:r>
             <a:r>
-              <a:rPr lang="en-US" sz="1200">
+              <a:rPr lang="en-US" sz="1400" b="1">
                 <a:solidFill>
                   <a:srgbClr val="1A1A1A"/>
                 </a:solidFill>
@@ -10646,7 +8798,7 @@
               <a:t> IT / </a:t>
             </a:r>
             <a:r>
-              <a:rPr lang="zh-CN" sz="1200">
+              <a:rPr lang="zh-CN" sz="1400" b="1">
                 <a:solidFill>
                   <a:srgbClr val="1A1A1A"/>
                 </a:solidFill>
@@ -10655,7 +8807,7 @@
               </a:rPr>
               <a:t>数据侧轻量支持</a:t>
             </a:r>
-            <a:endParaRPr lang="zh-CN" sz="1200">
+            <a:endParaRPr lang="zh-CN" sz="1400" b="1">
               <a:solidFill>
                 <a:srgbClr val="1A1A1A"/>
               </a:solidFill>
@@ -10771,6 +8923,166 @@
           </a:p>
         </p:txBody>
       </p:sp>
+      <p:sp>
+        <p:nvSpPr>
+          <p:cNvPr id="1" name="圆角矩形 0"/>
+          <p:cNvSpPr/>
+          <p:nvPr/>
+        </p:nvSpPr>
+        <p:spPr>
+          <a:xfrm>
+            <a:off x="533400" y="2536190"/>
+            <a:ext cx="76200" cy="76200"/>
+          </a:xfrm>
+          <a:prstGeom prst="roundRect">
+            <a:avLst>
+              <a:gd name="adj" fmla="val 25000"/>
+            </a:avLst>
+          </a:prstGeom>
+          <a:solidFill>
+            <a:srgbClr val="4472C4"/>
+          </a:solidFill>
+        </p:spPr>
+        <p:txBody>
+          <a:bodyPr/>
+          <a:p>
+            <a:endParaRPr sz="2000" b="1"/>
+          </a:p>
+        </p:txBody>
+      </p:sp>
+      <p:sp>
+        <p:nvSpPr>
+          <p:cNvPr id="2" name="文本框 1" descr="{&quot;isTemplate&quot;:true,&quot;type&quot;:&quot;text&quot;}"/>
+          <p:cNvSpPr txBox="1"/>
+          <p:nvPr/>
+        </p:nvSpPr>
+        <p:spPr>
+          <a:xfrm>
+            <a:off x="723900" y="2459990"/>
+            <a:ext cx="2295525" cy="276225"/>
+          </a:xfrm>
+          <a:prstGeom prst="rect">
+            <a:avLst/>
+          </a:prstGeom>
+        </p:spPr>
+        <p:txBody>
+          <a:bodyPr wrap="none" lIns="0" tIns="0" rIns="0" bIns="0"/>
+          <a:p>
+            <a:pPr>
+              <a:lnSpc>
+                <a:spcPct val="150000"/>
+              </a:lnSpc>
+            </a:pPr>
+            <a:r>
+              <a:rPr lang="zh-CN" sz="1400" b="1">
+                <a:solidFill>
+                  <a:srgbClr val="1A1A1A"/>
+                </a:solidFill>
+                <a:latin typeface="微软雅黑" panose="020B0503020204020204" charset="-122"/>
+                <a:ea typeface="微软雅黑" panose="020B0503020204020204" charset="-122"/>
+              </a:rPr>
+              <a:t>培训助手迁移方案落地进度</a:t>
+            </a:r>
+            <a:r>
+              <a:rPr lang="zh-CN" sz="1400" b="1">
+                <a:solidFill>
+                  <a:srgbClr val="1A1A1A"/>
+                </a:solidFill>
+                <a:latin typeface="微软雅黑" panose="020B0503020204020204" charset="-122"/>
+                <a:ea typeface="微软雅黑" panose="020B0503020204020204" charset="-122"/>
+              </a:rPr>
+              <a:t>跟进</a:t>
+            </a:r>
+            <a:endParaRPr lang="zh-CN" sz="1400" b="1">
+              <a:solidFill>
+                <a:srgbClr val="1A1A1A"/>
+              </a:solidFill>
+              <a:latin typeface="微软雅黑" panose="020B0503020204020204" charset="-122"/>
+              <a:ea typeface="微软雅黑" panose="020B0503020204020204" charset="-122"/>
+            </a:endParaRPr>
+          </a:p>
+        </p:txBody>
+      </p:sp>
+      <p:sp>
+        <p:nvSpPr>
+          <p:cNvPr id="3" name="圆角矩形 2"/>
+          <p:cNvSpPr/>
+          <p:nvPr/>
+        </p:nvSpPr>
+        <p:spPr>
+          <a:xfrm>
+            <a:off x="533400" y="2945765"/>
+            <a:ext cx="76200" cy="76200"/>
+          </a:xfrm>
+          <a:prstGeom prst="roundRect">
+            <a:avLst>
+              <a:gd name="adj" fmla="val 25000"/>
+            </a:avLst>
+          </a:prstGeom>
+          <a:solidFill>
+            <a:srgbClr val="4472C4"/>
+          </a:solidFill>
+        </p:spPr>
+        <p:txBody>
+          <a:bodyPr/>
+          <a:p>
+            <a:endParaRPr sz="2000" b="1"/>
+          </a:p>
+        </p:txBody>
+      </p:sp>
+      <p:sp>
+        <p:nvSpPr>
+          <p:cNvPr id="4" name="文本框 3" descr="{&quot;isTemplate&quot;:true,&quot;type&quot;:&quot;text&quot;}"/>
+          <p:cNvSpPr txBox="1"/>
+          <p:nvPr/>
+        </p:nvSpPr>
+        <p:spPr>
+          <a:xfrm>
+            <a:off x="723900" y="2869565"/>
+            <a:ext cx="2295525" cy="276225"/>
+          </a:xfrm>
+          <a:prstGeom prst="rect">
+            <a:avLst/>
+          </a:prstGeom>
+        </p:spPr>
+        <p:txBody>
+          <a:bodyPr wrap="none" lIns="0" tIns="0" rIns="0" bIns="0"/>
+          <a:p>
+            <a:pPr>
+              <a:lnSpc>
+                <a:spcPct val="150000"/>
+              </a:lnSpc>
+            </a:pPr>
+            <a:r>
+              <a:rPr lang="zh-CN" sz="1400" b="1">
+                <a:solidFill>
+                  <a:srgbClr val="1A1A1A"/>
+                </a:solidFill>
+                <a:latin typeface="微软雅黑" panose="020B0503020204020204" charset="-122"/>
+                <a:ea typeface="微软雅黑" panose="020B0503020204020204" charset="-122"/>
+              </a:rPr>
+              <a:t>深入分析需求池内容，输出路径少、高价值的</a:t>
+            </a:r>
+            <a:r>
+              <a:rPr lang="en-US" altLang="zh-CN" sz="1400" b="1">
+                <a:solidFill>
+                  <a:srgbClr val="1A1A1A"/>
+                </a:solidFill>
+                <a:latin typeface="微软雅黑" panose="020B0503020204020204" charset="-122"/>
+                <a:ea typeface="微软雅黑" panose="020B0503020204020204" charset="-122"/>
+              </a:rPr>
+              <a:t>skill</a:t>
+            </a:r>
+            <a:endParaRPr lang="en-US" altLang="zh-CN" sz="1400" b="1">
+              <a:solidFill>
+                <a:srgbClr val="1A1A1A"/>
+              </a:solidFill>
+              <a:latin typeface="微软雅黑" panose="020B0503020204020204" charset="-122"/>
+              <a:ea typeface="微软雅黑" panose="020B0503020204020204" charset="-122"/>
+            </a:endParaRPr>
+          </a:p>
+        </p:txBody>
+      </p:sp>
     </p:spTree>
   </p:cSld>
   <p:clrMapOvr>
@@ -10779,7 +9091,7 @@
 </p:sld>
 </file>
 
-<file path=ppt/slides/slide9.xml><?xml version="1.0" encoding="utf-8"?>
+<file path=ppt/slides/slide8.xml><?xml version="1.0" encoding="utf-8"?>
 <p:sld xmlns:a="http://schemas.openxmlformats.org/drawingml/2006/main" xmlns:r="http://schemas.openxmlformats.org/officeDocument/2006/relationships" xmlns:p="http://schemas.openxmlformats.org/presentationml/2006/main">
   <p:cSld>
     <p:spTree>
